--- a/plano_seguranca/Apresentacao_Estrategica_Correias_INPASA.pptx
+++ b/plano_seguranca/Apresentacao_Estrategica_Correias_INPASA.pptx
@@ -3355,7 +3355,7 @@
                 </a:solidFill>
                 <a:latin typeface="Inter"/>
               </a:rPr>
-              <a:t>Gestão de Manutenção Industrial  |  Data de referência: 02/07/2026</a:t>
+              <a:t>Base: levantamento FLEXLAB (jun/2026) + plano de execução  |  Data de referência: 02/07/2026</a:t>
             </a:r>
           </a:p>
         </p:txBody>
@@ -3656,7 +3656,7 @@
                 </a:solidFill>
                 <a:latin typeface="Inter"/>
               </a:rPr>
-              <a:t>Programa 100% regularizado até  10/10/2026   |   43 correias no plano  •  2 já substituídas  •  10 urgentes (≤30 dias)  •  ⚠ 1 vencida</a:t>
+              <a:t>Programa concluído em  30/12/2026    |    46 correias  •  3 já concluídas  •  7 urgentes (&lt;=30 dias)  •  0 vencidas</a:t>
             </a:r>
           </a:p>
         </p:txBody>
@@ -3849,7 +3849,7 @@
                 </a:solidFill>
                 <a:latin typeface="Inter"/>
               </a:rPr>
-              <a:t>REGULARIZADA EM</a:t>
+              <a:t>CONCLUÍDA EM</a:t>
             </a:r>
           </a:p>
         </p:txBody>
@@ -3884,7 +3884,7 @@
                 </a:solidFill>
                 <a:latin typeface="Inter"/>
               </a:rPr>
-              <a:t>10/10/2026</a:t>
+              <a:t>22/10/2026</a:t>
             </a:r>
           </a:p>
         </p:txBody>
@@ -3923,49 +3923,14 @@
                 </a:solidFill>
                 <a:latin typeface="Inter"/>
               </a:rPr>
-              <a:t>São 15 esteiras no plano. A última será concluída em 10/10/2026 — data de regularização da unidade.</a:t>
-            </a:r>
-          </a:p>
-        </p:txBody>
-      </p:sp>
-      <p:sp>
-        <p:nvSpPr>
-          <p:cNvPr id="16" name="TextBox 15"/>
-          <p:cNvSpPr txBox="1"/>
-          <p:nvPr/>
-        </p:nvSpPr>
-        <p:spPr>
-          <a:xfrm>
-            <a:off x="685800" y="4873752"/>
-            <a:ext cx="2331720" cy="274320"/>
-          </a:xfrm>
-          <a:prstGeom prst="rect">
-            <a:avLst/>
-          </a:prstGeom>
-          <a:noFill/>
-        </p:spPr>
-        <p:txBody>
-          <a:bodyPr wrap="square" anchor="t" lIns="25400" rIns="25400">
-            <a:spAutoFit/>
-          </a:bodyPr>
-          <a:lstStyle/>
-          <a:p>
-            <a:pPr algn="l"/>
-            <a:r>
-              <a:rPr sz="1000" b="1">
-                <a:solidFill>
-                  <a:srgbClr val="EF4444"/>
-                </a:solidFill>
-                <a:latin typeface="Inter"/>
-              </a:rPr>
-              <a:t>⚠ 1 vencida (atrasada)</a:t>
-            </a:r>
-          </a:p>
-        </p:txBody>
-      </p:sp>
-      <p:sp>
-        <p:nvSpPr>
-          <p:cNvPr id="17" name="Rounded Rectangle 16"/>
+              <a:t>16 correias no plano; 1 já concluída. Última substituição em 22/10/2026.</a:t>
+            </a:r>
+          </a:p>
+        </p:txBody>
+      </p:sp>
+      <p:sp>
+        <p:nvSpPr>
+          <p:cNvPr id="16" name="Rounded Rectangle 15"/>
           <p:cNvSpPr/>
           <p:nvPr/>
         </p:nvSpPr>
@@ -4009,7 +3974,7 @@
       </p:sp>
       <p:sp>
         <p:nvSpPr>
-          <p:cNvPr id="18" name="Rectangle 17"/>
+          <p:cNvPr id="17" name="Rectangle 16"/>
           <p:cNvSpPr/>
           <p:nvPr/>
         </p:nvSpPr>
@@ -4053,7 +4018,7 @@
       </p:sp>
       <p:sp>
         <p:nvSpPr>
-          <p:cNvPr id="19" name="TextBox 18"/>
+          <p:cNvPr id="18" name="TextBox 17"/>
           <p:cNvSpPr txBox="1"/>
           <p:nvPr/>
         </p:nvSpPr>
@@ -4088,7 +4053,7 @@
       </p:sp>
       <p:sp>
         <p:nvSpPr>
-          <p:cNvPr id="20" name="TextBox 19"/>
+          <p:cNvPr id="19" name="TextBox 18"/>
           <p:cNvSpPr txBox="1"/>
           <p:nvPr/>
         </p:nvSpPr>
@@ -4123,7 +4088,7 @@
       </p:sp>
       <p:sp>
         <p:nvSpPr>
-          <p:cNvPr id="21" name="TextBox 20"/>
+          <p:cNvPr id="20" name="TextBox 19"/>
           <p:cNvSpPr txBox="1"/>
           <p:nvPr/>
         </p:nvSpPr>
@@ -4151,14 +4116,14 @@
                 </a:solidFill>
                 <a:latin typeface="Inter"/>
               </a:rPr>
-              <a:t>REGULARIZADA EM</a:t>
-            </a:r>
-          </a:p>
-        </p:txBody>
-      </p:sp>
-      <p:sp>
-        <p:nvSpPr>
-          <p:cNvPr id="22" name="TextBox 21"/>
+              <a:t>CONCLUÍDA EM</a:t>
+            </a:r>
+          </a:p>
+        </p:txBody>
+      </p:sp>
+      <p:sp>
+        <p:nvSpPr>
+          <p:cNvPr id="21" name="TextBox 20"/>
           <p:cNvSpPr txBox="1"/>
           <p:nvPr/>
         </p:nvSpPr>
@@ -4186,14 +4151,14 @@
                 </a:solidFill>
                 <a:latin typeface="Inter"/>
               </a:rPr>
-              <a:t>30/09/2026</a:t>
-            </a:r>
-          </a:p>
-        </p:txBody>
-      </p:sp>
-      <p:sp>
-        <p:nvSpPr>
-          <p:cNvPr id="23" name="TextBox 22"/>
+              <a:t>30/12/2026</a:t>
+            </a:r>
+          </a:p>
+        </p:txBody>
+      </p:sp>
+      <p:sp>
+        <p:nvSpPr>
+          <p:cNvPr id="22" name="TextBox 21"/>
           <p:cNvSpPr txBox="1"/>
           <p:nvPr/>
         </p:nvSpPr>
@@ -4225,14 +4190,14 @@
                 </a:solidFill>
                 <a:latin typeface="Inter"/>
               </a:rPr>
-              <a:t>São 21 esteiras no plano; 1 já substituída. A última será concluída em 30/09/2026.</a:t>
-            </a:r>
-          </a:p>
-        </p:txBody>
-      </p:sp>
-      <p:sp>
-        <p:nvSpPr>
-          <p:cNvPr id="24" name="Rounded Rectangle 23"/>
+              <a:t>23 correias no plano; 1 já concluída. Última em 30/12/2026 (esteiras de cavacos).</a:t>
+            </a:r>
+          </a:p>
+        </p:txBody>
+      </p:sp>
+      <p:sp>
+        <p:nvSpPr>
+          <p:cNvPr id="23" name="Rounded Rectangle 22"/>
           <p:cNvSpPr/>
           <p:nvPr/>
         </p:nvSpPr>
@@ -4276,7 +4241,7 @@
       </p:sp>
       <p:sp>
         <p:nvSpPr>
-          <p:cNvPr id="25" name="Rectangle 24"/>
+          <p:cNvPr id="24" name="Rectangle 23"/>
           <p:cNvSpPr/>
           <p:nvPr/>
         </p:nvSpPr>
@@ -4320,7 +4285,7 @@
       </p:sp>
       <p:sp>
         <p:nvSpPr>
-          <p:cNvPr id="26" name="TextBox 25"/>
+          <p:cNvPr id="25" name="TextBox 24"/>
           <p:cNvSpPr txBox="1"/>
           <p:nvPr/>
         </p:nvSpPr>
@@ -4355,7 +4320,7 @@
       </p:sp>
       <p:sp>
         <p:nvSpPr>
-          <p:cNvPr id="27" name="TextBox 26"/>
+          <p:cNvPr id="26" name="TextBox 25"/>
           <p:cNvSpPr txBox="1"/>
           <p:nvPr/>
         </p:nvSpPr>
@@ -4390,7 +4355,7 @@
       </p:sp>
       <p:sp>
         <p:nvSpPr>
-          <p:cNvPr id="28" name="TextBox 27"/>
+          <p:cNvPr id="27" name="TextBox 26"/>
           <p:cNvSpPr txBox="1"/>
           <p:nvPr/>
         </p:nvSpPr>
@@ -4418,14 +4383,14 @@
                 </a:solidFill>
                 <a:latin typeface="Inter"/>
               </a:rPr>
-              <a:t>REGULARIZADA EM</a:t>
-            </a:r>
-          </a:p>
-        </p:txBody>
-      </p:sp>
-      <p:sp>
-        <p:nvSpPr>
-          <p:cNvPr id="29" name="TextBox 28"/>
+              <a:t>CONCLUÍDA EM</a:t>
+            </a:r>
+          </a:p>
+        </p:txBody>
+      </p:sp>
+      <p:sp>
+        <p:nvSpPr>
+          <p:cNvPr id="28" name="TextBox 27"/>
           <p:cNvSpPr txBox="1"/>
           <p:nvPr/>
         </p:nvSpPr>
@@ -4460,7 +4425,7 @@
       </p:sp>
       <p:sp>
         <p:nvSpPr>
-          <p:cNvPr id="30" name="TextBox 29"/>
+          <p:cNvPr id="29" name="TextBox 28"/>
           <p:cNvSpPr txBox="1"/>
           <p:nvPr/>
         </p:nvSpPr>
@@ -4492,14 +4457,14 @@
                 </a:solidFill>
                 <a:latin typeface="Inter"/>
               </a:rPr>
-              <a:t>São 2 esteiras no plano. Ambas concluídas até 30/09/2026 — unidade regularizada nessa data.</a:t>
-            </a:r>
-          </a:p>
-        </p:txBody>
-      </p:sp>
-      <p:sp>
-        <p:nvSpPr>
-          <p:cNvPr id="31" name="Rounded Rectangle 30"/>
+              <a:t>2 correias no plano. Ambas concluídas até 30/09/2026.</a:t>
+            </a:r>
+          </a:p>
+        </p:txBody>
+      </p:sp>
+      <p:sp>
+        <p:nvSpPr>
+          <p:cNvPr id="30" name="Rounded Rectangle 29"/>
           <p:cNvSpPr/>
           <p:nvPr/>
         </p:nvSpPr>
@@ -4543,7 +4508,7 @@
       </p:sp>
       <p:sp>
         <p:nvSpPr>
-          <p:cNvPr id="32" name="Rectangle 31"/>
+          <p:cNvPr id="31" name="Rectangle 30"/>
           <p:cNvSpPr/>
           <p:nvPr/>
         </p:nvSpPr>
@@ -4587,7 +4552,7 @@
       </p:sp>
       <p:sp>
         <p:nvSpPr>
-          <p:cNvPr id="33" name="TextBox 32"/>
+          <p:cNvPr id="32" name="TextBox 31"/>
           <p:cNvSpPr txBox="1"/>
           <p:nvPr/>
         </p:nvSpPr>
@@ -4622,7 +4587,7 @@
       </p:sp>
       <p:sp>
         <p:nvSpPr>
-          <p:cNvPr id="34" name="TextBox 33"/>
+          <p:cNvPr id="33" name="TextBox 32"/>
           <p:cNvSpPr txBox="1"/>
           <p:nvPr/>
         </p:nvSpPr>
@@ -4657,7 +4622,7 @@
       </p:sp>
       <p:sp>
         <p:nvSpPr>
-          <p:cNvPr id="35" name="TextBox 34"/>
+          <p:cNvPr id="34" name="TextBox 33"/>
           <p:cNvSpPr txBox="1"/>
           <p:nvPr/>
         </p:nvSpPr>
@@ -4685,14 +4650,14 @@
                 </a:solidFill>
                 <a:latin typeface="Inter"/>
               </a:rPr>
-              <a:t>REGULARIZADA EM</a:t>
-            </a:r>
-          </a:p>
-        </p:txBody>
-      </p:sp>
-      <p:sp>
-        <p:nvSpPr>
-          <p:cNvPr id="36" name="TextBox 35"/>
+              <a:t>CONCLUÍDA EM</a:t>
+            </a:r>
+          </a:p>
+        </p:txBody>
+      </p:sp>
+      <p:sp>
+        <p:nvSpPr>
+          <p:cNvPr id="35" name="TextBox 34"/>
           <p:cNvSpPr txBox="1"/>
           <p:nvPr/>
         </p:nvSpPr>
@@ -4720,14 +4685,14 @@
                 </a:solidFill>
                 <a:latin typeface="Inter"/>
               </a:rPr>
-              <a:t>30/09/2026</a:t>
-            </a:r>
-          </a:p>
-        </p:txBody>
-      </p:sp>
-      <p:sp>
-        <p:nvSpPr>
-          <p:cNvPr id="37" name="TextBox 36"/>
+              <a:t>24/07/2026</a:t>
+            </a:r>
+          </a:p>
+        </p:txBody>
+      </p:sp>
+      <p:sp>
+        <p:nvSpPr>
+          <p:cNvPr id="36" name="TextBox 35"/>
           <p:cNvSpPr txBox="1"/>
           <p:nvPr/>
         </p:nvSpPr>
@@ -4759,14 +4724,14 @@
                 </a:solidFill>
                 <a:latin typeface="Inter"/>
               </a:rPr>
-              <a:t>São 4 esteiras + 1 sobressalente em estoque; 1 já substituída. Última em 30/09/2026.</a:t>
-            </a:r>
-          </a:p>
-        </p:txBody>
-      </p:sp>
-      <p:sp>
-        <p:nvSpPr>
-          <p:cNvPr id="38" name="TextBox 37"/>
+              <a:t>4 esteiras + 1 sobressalente; 1 concluída. Esteiras concluídas até 24/07/2026.</a:t>
+            </a:r>
+          </a:p>
+        </p:txBody>
+      </p:sp>
+      <p:sp>
+        <p:nvSpPr>
+          <p:cNvPr id="37" name="TextBox 36"/>
           <p:cNvSpPr txBox="1"/>
           <p:nvPr/>
         </p:nvSpPr>
@@ -4794,14 +4759,14 @@
                 </a:solidFill>
                 <a:latin typeface="Inter"/>
               </a:rPr>
-              <a:t>INPASA  •  Plano de Substituição de Correias Transportadoras  •  2026</a:t>
-            </a:r>
-          </a:p>
-        </p:txBody>
-      </p:sp>
-      <p:sp>
-        <p:nvSpPr>
-          <p:cNvPr id="39" name="TextBox 38"/>
+              <a:t>INPASA  •  Plano de Substituição de Correias Transportadoras  •  ref. 02/07/2026</a:t>
+            </a:r>
+          </a:p>
+        </p:txBody>
+      </p:sp>
+      <p:sp>
+        <p:nvSpPr>
+          <p:cNvPr id="38" name="TextBox 37"/>
           <p:cNvSpPr txBox="1"/>
           <p:nvPr/>
         </p:nvSpPr>
@@ -5049,7 +5014,7 @@
                 </a:solidFill>
                 <a:latin typeface="Inter"/>
               </a:rPr>
-              <a:t>Marcos de regularização (jul → out/2026)</a:t>
+              <a:t>Marcos de conclusão (jul → dez/2026)</a:t>
             </a:r>
           </a:p>
         </p:txBody>
@@ -5107,7 +5072,7 @@
         <p:spPr>
           <a:xfrm>
             <a:off x="2377440" y="1581912"/>
-            <a:ext cx="1645920" cy="274320"/>
+            <a:ext cx="1280160" cy="274320"/>
           </a:xfrm>
           <a:prstGeom prst="rect">
             <a:avLst/>
@@ -5128,7 +5093,7 @@
                 </a:solidFill>
                 <a:latin typeface="Inter"/>
               </a:rPr>
-              <a:t>Julho</a:t>
+              <a:t>Jul</a:t>
             </a:r>
           </a:p>
         </p:txBody>
@@ -5141,7 +5106,7 @@
         </p:nvSpPr>
         <p:spPr>
           <a:xfrm>
-            <a:off x="4677680" y="1600200"/>
+            <a:off x="3910933" y="1600200"/>
             <a:ext cx="12700" cy="4023360"/>
           </a:xfrm>
           <a:prstGeom prst="rect">
@@ -5185,8 +5150,8 @@
         </p:nvSpPr>
         <p:spPr>
           <a:xfrm>
-            <a:off x="4677680" y="1581912"/>
-            <a:ext cx="1645920" cy="274320"/>
+            <a:off x="3910933" y="1581912"/>
+            <a:ext cx="1280160" cy="274320"/>
           </a:xfrm>
           <a:prstGeom prst="rect">
             <a:avLst/>
@@ -5207,7 +5172,7 @@
                 </a:solidFill>
                 <a:latin typeface="Inter"/>
               </a:rPr>
-              <a:t>Agosto</a:t>
+              <a:t>Ago</a:t>
             </a:r>
           </a:p>
         </p:txBody>
@@ -5220,7 +5185,7 @@
         </p:nvSpPr>
         <p:spPr>
           <a:xfrm>
-            <a:off x="6977921" y="1600200"/>
+            <a:off x="5444427" y="1600200"/>
             <a:ext cx="12700" cy="4023360"/>
           </a:xfrm>
           <a:prstGeom prst="rect">
@@ -5264,8 +5229,8 @@
         </p:nvSpPr>
         <p:spPr>
           <a:xfrm>
-            <a:off x="6977921" y="1581912"/>
-            <a:ext cx="1645920" cy="274320"/>
+            <a:off x="5444427" y="1581912"/>
+            <a:ext cx="1280160" cy="274320"/>
           </a:xfrm>
           <a:prstGeom prst="rect">
             <a:avLst/>
@@ -5286,7 +5251,7 @@
                 </a:solidFill>
                 <a:latin typeface="Inter"/>
               </a:rPr>
-              <a:t>Setembro</a:t>
+              <a:t>Set</a:t>
             </a:r>
           </a:p>
         </p:txBody>
@@ -5299,7 +5264,7 @@
         </p:nvSpPr>
         <p:spPr>
           <a:xfrm>
-            <a:off x="9203960" y="1600200"/>
+            <a:off x="6928453" y="1600200"/>
             <a:ext cx="12700" cy="4023360"/>
           </a:xfrm>
           <a:prstGeom prst="rect">
@@ -5343,8 +5308,8 @@
         </p:nvSpPr>
         <p:spPr>
           <a:xfrm>
-            <a:off x="9203960" y="1581912"/>
-            <a:ext cx="1645920" cy="274320"/>
+            <a:off x="6928453" y="1581912"/>
+            <a:ext cx="1280160" cy="274320"/>
           </a:xfrm>
           <a:prstGeom prst="rect">
             <a:avLst/>
@@ -5365,7 +5330,7 @@
                 </a:solidFill>
                 <a:latin typeface="Inter"/>
               </a:rPr>
-              <a:t>Outubro</a:t>
+              <a:t>Out</a:t>
             </a:r>
           </a:p>
         </p:txBody>
@@ -5378,7 +5343,165 @@
         </p:nvSpPr>
         <p:spPr>
           <a:xfrm>
-            <a:off x="2451641" y="1874520"/>
+            <a:off x="8461947" y="1600200"/>
+            <a:ext cx="12700" cy="4023360"/>
+          </a:xfrm>
+          <a:prstGeom prst="rect">
+            <a:avLst/>
+          </a:prstGeom>
+          <a:solidFill>
+            <a:srgbClr val="2A2A40"/>
+          </a:solidFill>
+          <a:ln>
+            <a:noFill/>
+          </a:ln>
+          <a:effectLst/>
+        </p:spPr>
+        <p:style>
+          <a:lnRef idx="1">
+            <a:schemeClr val="accent1"/>
+          </a:lnRef>
+          <a:fillRef idx="3">
+            <a:schemeClr val="accent1"/>
+          </a:fillRef>
+          <a:effectRef idx="2">
+            <a:schemeClr val="accent1"/>
+          </a:effectRef>
+          <a:fontRef idx="minor">
+            <a:schemeClr val="lt1"/>
+          </a:fontRef>
+        </p:style>
+        <p:txBody>
+          <a:bodyPr rtlCol="0" anchor="ctr"/>
+          <a:lstStyle/>
+          <a:p>
+            <a:pPr algn="ctr"/>
+          </a:p>
+        </p:txBody>
+      </p:sp>
+      <p:sp>
+        <p:nvSpPr>
+          <p:cNvPr id="16" name="TextBox 15"/>
+          <p:cNvSpPr txBox="1"/>
+          <p:nvPr/>
+        </p:nvSpPr>
+        <p:spPr>
+          <a:xfrm>
+            <a:off x="8461947" y="1581912"/>
+            <a:ext cx="1280160" cy="274320"/>
+          </a:xfrm>
+          <a:prstGeom prst="rect">
+            <a:avLst/>
+          </a:prstGeom>
+          <a:noFill/>
+        </p:spPr>
+        <p:txBody>
+          <a:bodyPr wrap="square" anchor="t" lIns="25400" rIns="25400">
+            <a:spAutoFit/>
+          </a:bodyPr>
+          <a:lstStyle/>
+          <a:p>
+            <a:pPr algn="l"/>
+            <a:r>
+              <a:rPr sz="1200" b="1">
+                <a:solidFill>
+                  <a:srgbClr val="F97316"/>
+                </a:solidFill>
+                <a:latin typeface="Inter"/>
+              </a:rPr>
+              <a:t>Nov</a:t>
+            </a:r>
+          </a:p>
+        </p:txBody>
+      </p:sp>
+      <p:sp>
+        <p:nvSpPr>
+          <p:cNvPr id="17" name="Rectangle 16"/>
+          <p:cNvSpPr/>
+          <p:nvPr/>
+        </p:nvSpPr>
+        <p:spPr>
+          <a:xfrm>
+            <a:off x="9945973" y="1600200"/>
+            <a:ext cx="12700" cy="4023360"/>
+          </a:xfrm>
+          <a:prstGeom prst="rect">
+            <a:avLst/>
+          </a:prstGeom>
+          <a:solidFill>
+            <a:srgbClr val="2A2A40"/>
+          </a:solidFill>
+          <a:ln>
+            <a:noFill/>
+          </a:ln>
+          <a:effectLst/>
+        </p:spPr>
+        <p:style>
+          <a:lnRef idx="1">
+            <a:schemeClr val="accent1"/>
+          </a:lnRef>
+          <a:fillRef idx="3">
+            <a:schemeClr val="accent1"/>
+          </a:fillRef>
+          <a:effectRef idx="2">
+            <a:schemeClr val="accent1"/>
+          </a:effectRef>
+          <a:fontRef idx="minor">
+            <a:schemeClr val="lt1"/>
+          </a:fontRef>
+        </p:style>
+        <p:txBody>
+          <a:bodyPr rtlCol="0" anchor="ctr"/>
+          <a:lstStyle/>
+          <a:p>
+            <a:pPr algn="ctr"/>
+          </a:p>
+        </p:txBody>
+      </p:sp>
+      <p:sp>
+        <p:nvSpPr>
+          <p:cNvPr id="18" name="TextBox 17"/>
+          <p:cNvSpPr txBox="1"/>
+          <p:nvPr/>
+        </p:nvSpPr>
+        <p:spPr>
+          <a:xfrm>
+            <a:off x="9945973" y="1581912"/>
+            <a:ext cx="1280160" cy="274320"/>
+          </a:xfrm>
+          <a:prstGeom prst="rect">
+            <a:avLst/>
+          </a:prstGeom>
+          <a:noFill/>
+        </p:spPr>
+        <p:txBody>
+          <a:bodyPr wrap="square" anchor="t" lIns="25400" rIns="25400">
+            <a:spAutoFit/>
+          </a:bodyPr>
+          <a:lstStyle/>
+          <a:p>
+            <a:pPr algn="l"/>
+            <a:r>
+              <a:rPr sz="1200" b="1">
+                <a:solidFill>
+                  <a:srgbClr val="F97316"/>
+                </a:solidFill>
+                <a:latin typeface="Inter"/>
+              </a:rPr>
+              <a:t>Dez</a:t>
+            </a:r>
+          </a:p>
+        </p:txBody>
+      </p:sp>
+      <p:sp>
+        <p:nvSpPr>
+          <p:cNvPr id="19" name="Rectangle 18"/>
+          <p:cNvSpPr/>
+          <p:nvPr/>
+        </p:nvSpPr>
+        <p:spPr>
+          <a:xfrm>
+            <a:off x="2426907" y="1874520"/>
             <a:ext cx="25400" cy="3703320"/>
           </a:xfrm>
           <a:prstGeom prst="rect">
@@ -5416,13 +5539,13 @@
       </p:sp>
       <p:sp>
         <p:nvSpPr>
-          <p:cNvPr id="16" name="TextBox 15"/>
+          <p:cNvPr id="20" name="TextBox 19"/>
           <p:cNvSpPr txBox="1"/>
           <p:nvPr/>
         </p:nvSpPr>
         <p:spPr>
           <a:xfrm>
-            <a:off x="2131601" y="1618488"/>
+            <a:off x="2152587" y="1618488"/>
             <a:ext cx="1097280" cy="256032"/>
           </a:xfrm>
           <a:prstGeom prst="rect">
@@ -5451,7 +5574,7 @@
       </p:sp>
       <p:sp>
         <p:nvSpPr>
-          <p:cNvPr id="17" name="TextBox 16"/>
+          <p:cNvPr id="21" name="TextBox 20"/>
           <p:cNvSpPr txBox="1"/>
           <p:nvPr/>
         </p:nvSpPr>
@@ -5473,39 +5596,39 @@
           <a:p>
             <a:pPr algn="l"/>
             <a:r>
-              <a:rPr sz="1200" b="1">
+              <a:rPr sz="1100" b="1">
                 <a:solidFill>
                   <a:srgbClr val="3B82F6"/>
                 </a:solidFill>
                 <a:latin typeface="Inter"/>
               </a:rPr>
-              <a:t>NVM</a:t>
+              <a:t>NVM · Nova Mutum</a:t>
             </a:r>
           </a:p>
           <a:p>
             <a:pPr algn="l"/>
             <a:r>
-              <a:rPr sz="1200" b="1">
+              <a:rPr sz="1100" b="1">
                 <a:solidFill>
                   <a:srgbClr val="3B82F6"/>
                 </a:solidFill>
                 <a:latin typeface="Inter"/>
               </a:rPr>
-              <a:t>15 correias</a:t>
-            </a:r>
-          </a:p>
-        </p:txBody>
-      </p:sp>
-      <p:sp>
-        <p:nvSpPr>
-          <p:cNvPr id="18" name="Rounded Rectangle 17"/>
+              <a:t>16 correias</a:t>
+            </a:r>
+          </a:p>
+        </p:txBody>
+      </p:sp>
+      <p:sp>
+        <p:nvSpPr>
+          <p:cNvPr id="22" name="Rounded Rectangle 21"/>
           <p:cNvSpPr/>
           <p:nvPr/>
         </p:nvSpPr>
         <p:spPr>
           <a:xfrm>
             <a:off x="2377440" y="2304288"/>
-            <a:ext cx="7494332" cy="384048"/>
+            <a:ext cx="5589832" cy="384048"/>
           </a:xfrm>
           <a:prstGeom prst="roundRect">
             <a:avLst/>
@@ -5542,13 +5665,13 @@
       </p:sp>
       <p:sp>
         <p:nvSpPr>
-          <p:cNvPr id="19" name="TextBox 18"/>
+          <p:cNvPr id="23" name="TextBox 22"/>
           <p:cNvSpPr txBox="1"/>
           <p:nvPr/>
         </p:nvSpPr>
         <p:spPr>
           <a:xfrm>
-            <a:off x="9963212" y="2286000"/>
+            <a:off x="8058712" y="2286000"/>
             <a:ext cx="1645920" cy="411480"/>
           </a:xfrm>
           <a:prstGeom prst="rect">
@@ -5570,14 +5693,14 @@
                 </a:solidFill>
                 <a:latin typeface="Inter"/>
               </a:rPr>
-              <a:t>10/10/2026</a:t>
-            </a:r>
-          </a:p>
-        </p:txBody>
-      </p:sp>
-      <p:sp>
-        <p:nvSpPr>
-          <p:cNvPr id="20" name="TextBox 19"/>
+              <a:t>22/10/2026</a:t>
+            </a:r>
+          </a:p>
+        </p:txBody>
+      </p:sp>
+      <p:sp>
+        <p:nvSpPr>
+          <p:cNvPr id="24" name="TextBox 23"/>
           <p:cNvSpPr txBox="1"/>
           <p:nvPr/>
         </p:nvSpPr>
@@ -5599,39 +5722,39 @@
           <a:p>
             <a:pPr algn="l"/>
             <a:r>
-              <a:rPr sz="1200" b="1">
+              <a:rPr sz="1100" b="1">
                 <a:solidFill>
                   <a:srgbClr val="F97316"/>
                 </a:solidFill>
                 <a:latin typeface="Inter"/>
               </a:rPr>
-              <a:t>SNP</a:t>
+              <a:t>SNP · Sinop</a:t>
             </a:r>
           </a:p>
           <a:p>
             <a:pPr algn="l"/>
             <a:r>
-              <a:rPr sz="1200" b="1">
+              <a:rPr sz="1100" b="1">
                 <a:solidFill>
                   <a:srgbClr val="F97316"/>
                 </a:solidFill>
                 <a:latin typeface="Inter"/>
               </a:rPr>
-              <a:t>21 correias</a:t>
-            </a:r>
-          </a:p>
-        </p:txBody>
-      </p:sp>
-      <p:sp>
-        <p:nvSpPr>
-          <p:cNvPr id="21" name="Rounded Rectangle 20"/>
+              <a:t>23 correias</a:t>
+            </a:r>
+          </a:p>
+        </p:txBody>
+      </p:sp>
+      <p:sp>
+        <p:nvSpPr>
+          <p:cNvPr id="25" name="Rounded Rectangle 24"/>
           <p:cNvSpPr/>
           <p:nvPr/>
         </p:nvSpPr>
         <p:spPr>
           <a:xfrm>
             <a:off x="2377440" y="3172968"/>
-            <a:ext cx="6752319" cy="384048"/>
+            <a:ext cx="9003092" cy="384048"/>
           </a:xfrm>
           <a:prstGeom prst="roundRect">
             <a:avLst/>
@@ -5668,13 +5791,13 @@
       </p:sp>
       <p:sp>
         <p:nvSpPr>
-          <p:cNvPr id="22" name="TextBox 21"/>
+          <p:cNvPr id="26" name="TextBox 25"/>
           <p:cNvSpPr txBox="1"/>
           <p:nvPr/>
         </p:nvSpPr>
         <p:spPr>
           <a:xfrm>
-            <a:off x="9221199" y="3154680"/>
+            <a:off x="11471972" y="3154680"/>
             <a:ext cx="1645920" cy="411480"/>
           </a:xfrm>
           <a:prstGeom prst="rect">
@@ -5696,14 +5819,14 @@
                 </a:solidFill>
                 <a:latin typeface="Inter"/>
               </a:rPr>
-              <a:t>30/09/2026</a:t>
-            </a:r>
-          </a:p>
-        </p:txBody>
-      </p:sp>
-      <p:sp>
-        <p:nvSpPr>
-          <p:cNvPr id="23" name="TextBox 22"/>
+              <a:t>30/12/2026</a:t>
+            </a:r>
+          </a:p>
+        </p:txBody>
+      </p:sp>
+      <p:sp>
+        <p:nvSpPr>
+          <p:cNvPr id="27" name="TextBox 26"/>
           <p:cNvSpPr txBox="1"/>
           <p:nvPr/>
         </p:nvSpPr>
@@ -5725,19 +5848,19 @@
           <a:p>
             <a:pPr algn="l"/>
             <a:r>
-              <a:rPr sz="1200" b="1">
+              <a:rPr sz="1100" b="1">
                 <a:solidFill>
                   <a:srgbClr val="22C55E"/>
                 </a:solidFill>
                 <a:latin typeface="Inter"/>
               </a:rPr>
-              <a:t>SDL</a:t>
+              <a:t>SDL · Sidrolândia</a:t>
             </a:r>
           </a:p>
           <a:p>
             <a:pPr algn="l"/>
             <a:r>
-              <a:rPr sz="1200" b="1">
+              <a:rPr sz="1100" b="1">
                 <a:solidFill>
                   <a:srgbClr val="22C55E"/>
                 </a:solidFill>
@@ -5750,14 +5873,14 @@
       </p:sp>
       <p:sp>
         <p:nvSpPr>
-          <p:cNvPr id="24" name="Rounded Rectangle 23"/>
+          <p:cNvPr id="28" name="Rounded Rectangle 27"/>
           <p:cNvSpPr/>
           <p:nvPr/>
         </p:nvSpPr>
         <p:spPr>
           <a:xfrm>
             <a:off x="2377440" y="4041648"/>
-            <a:ext cx="6752319" cy="384048"/>
+            <a:ext cx="4501546" cy="384048"/>
           </a:xfrm>
           <a:prstGeom prst="roundRect">
             <a:avLst/>
@@ -5794,13 +5917,13 @@
       </p:sp>
       <p:sp>
         <p:nvSpPr>
-          <p:cNvPr id="25" name="TextBox 24"/>
+          <p:cNvPr id="29" name="TextBox 28"/>
           <p:cNvSpPr txBox="1"/>
           <p:nvPr/>
         </p:nvSpPr>
         <p:spPr>
           <a:xfrm>
-            <a:off x="9221199" y="4023360"/>
+            <a:off x="6970426" y="4023360"/>
             <a:ext cx="1645920" cy="411480"/>
           </a:xfrm>
           <a:prstGeom prst="rect">
@@ -5829,7 +5952,7 @@
       </p:sp>
       <p:sp>
         <p:nvSpPr>
-          <p:cNvPr id="26" name="TextBox 25"/>
+          <p:cNvPr id="30" name="TextBox 29"/>
           <p:cNvSpPr txBox="1"/>
           <p:nvPr/>
         </p:nvSpPr>
@@ -5851,19 +5974,19 @@
           <a:p>
             <a:pPr algn="l"/>
             <a:r>
-              <a:rPr sz="1200" b="1">
+              <a:rPr sz="1100" b="1">
                 <a:solidFill>
                   <a:srgbClr val="A855F7"/>
                 </a:solidFill>
                 <a:latin typeface="Inter"/>
               </a:rPr>
-              <a:t>BLS</a:t>
+              <a:t>BLS · Balsas</a:t>
             </a:r>
           </a:p>
           <a:p>
             <a:pPr algn="l"/>
             <a:r>
-              <a:rPr sz="1200" b="1">
+              <a:rPr sz="1100" b="1">
                 <a:solidFill>
                   <a:srgbClr val="A855F7"/>
                 </a:solidFill>
@@ -5876,14 +5999,14 @@
       </p:sp>
       <p:sp>
         <p:nvSpPr>
-          <p:cNvPr id="27" name="Rounded Rectangle 26"/>
+          <p:cNvPr id="31" name="Rounded Rectangle 30"/>
           <p:cNvSpPr/>
           <p:nvPr/>
         </p:nvSpPr>
         <p:spPr>
           <a:xfrm>
             <a:off x="2377440" y="4910328"/>
-            <a:ext cx="6752319" cy="384048"/>
+            <a:ext cx="1137753" cy="384048"/>
           </a:xfrm>
           <a:prstGeom prst="roundRect">
             <a:avLst/>
@@ -5920,13 +6043,13 @@
       </p:sp>
       <p:sp>
         <p:nvSpPr>
-          <p:cNvPr id="28" name="TextBox 27"/>
+          <p:cNvPr id="32" name="TextBox 31"/>
           <p:cNvSpPr txBox="1"/>
           <p:nvPr/>
         </p:nvSpPr>
         <p:spPr>
           <a:xfrm>
-            <a:off x="9221199" y="4892040"/>
+            <a:off x="3606633" y="4892040"/>
             <a:ext cx="1645920" cy="411480"/>
           </a:xfrm>
           <a:prstGeom prst="rect">
@@ -5948,14 +6071,14 @@
                 </a:solidFill>
                 <a:latin typeface="Inter"/>
               </a:rPr>
-              <a:t>30/09/2026</a:t>
-            </a:r>
-          </a:p>
-        </p:txBody>
-      </p:sp>
-      <p:sp>
-        <p:nvSpPr>
-          <p:cNvPr id="29" name="TextBox 28"/>
+              <a:t>24/07/2026</a:t>
+            </a:r>
+          </a:p>
+        </p:txBody>
+      </p:sp>
+      <p:sp>
+        <p:nvSpPr>
+          <p:cNvPr id="33" name="TextBox 32"/>
           <p:cNvSpPr txBox="1"/>
           <p:nvPr/>
         </p:nvSpPr>
@@ -5983,14 +6106,14 @@
                 </a:solidFill>
                 <a:latin typeface="Inter"/>
               </a:rPr>
-              <a:t>Conclusão do programa: 10/10/2026 (última correia — Nova Mutum / DDGS).</a:t>
-            </a:r>
-          </a:p>
-        </p:txBody>
-      </p:sp>
-      <p:sp>
-        <p:nvSpPr>
-          <p:cNvPr id="30" name="TextBox 29"/>
+              <a:t>Conclusão de todo o programa: 30/12/2026 (última — Sinop, esteiras de cavacos da biomassa).</a:t>
+            </a:r>
+          </a:p>
+        </p:txBody>
+      </p:sp>
+      <p:sp>
+        <p:nvSpPr>
+          <p:cNvPr id="34" name="TextBox 33"/>
           <p:cNvSpPr txBox="1"/>
           <p:nvPr/>
         </p:nvSpPr>
@@ -6018,14 +6141,14 @@
                 </a:solidFill>
                 <a:latin typeface="Inter"/>
               </a:rPr>
-              <a:t>INPASA  •  Plano de Substituição de Correias Transportadoras  •  2026</a:t>
-            </a:r>
-          </a:p>
-        </p:txBody>
-      </p:sp>
-      <p:sp>
-        <p:nvSpPr>
-          <p:cNvPr id="31" name="TextBox 30"/>
+              <a:t>INPASA  •  Plano de Substituição de Correias Transportadoras  •  ref. 02/07/2026</a:t>
+            </a:r>
+          </a:p>
+        </p:txBody>
+      </p:sp>
+      <p:sp>
+        <p:nvSpPr>
+          <p:cNvPr id="35" name="TextBox 34"/>
           <p:cNvSpPr txBox="1"/>
           <p:nvPr/>
         </p:nvSpPr>
@@ -6238,7 +6361,7 @@
                 </a:solidFill>
                 <a:latin typeface="Inter"/>
               </a:rPr>
-              <a:t>VISÃO CONSOLIDADA</a:t>
+              <a:t>CONSISTÊNCIA DOS NÚMEROS</a:t>
             </a:r>
           </a:p>
         </p:txBody>
@@ -6273,636 +6396,23 @@
                 </a:solidFill>
                 <a:latin typeface="Inter"/>
               </a:rPr>
-              <a:t>Resumo executivo por unidade</a:t>
-            </a:r>
-          </a:p>
-        </p:txBody>
-      </p:sp>
-      <p:sp>
-        <p:nvSpPr>
-          <p:cNvPr id="7" name="Rectangle 6"/>
+              <a:t>Reconciliação: levantamento × execução</a:t>
+            </a:r>
+          </a:p>
+        </p:txBody>
+      </p:sp>
+      <p:sp>
+        <p:nvSpPr>
+          <p:cNvPr id="7" name="Rounded Rectangle 6"/>
           <p:cNvSpPr/>
           <p:nvPr/>
         </p:nvSpPr>
         <p:spPr>
           <a:xfrm>
             <a:off x="502920" y="1417320"/>
-            <a:ext cx="2240280" cy="640080"/>
-          </a:xfrm>
-          <a:prstGeom prst="rect">
-            <a:avLst/>
-          </a:prstGeom>
-          <a:solidFill>
-            <a:srgbClr val="252538"/>
-          </a:solidFill>
-          <a:ln>
-            <a:noFill/>
-          </a:ln>
-          <a:effectLst/>
-        </p:spPr>
-        <p:style>
-          <a:lnRef idx="1">
-            <a:schemeClr val="accent1"/>
-          </a:lnRef>
-          <a:fillRef idx="3">
-            <a:schemeClr val="accent1"/>
-          </a:fillRef>
-          <a:effectRef idx="2">
-            <a:schemeClr val="accent1"/>
-          </a:effectRef>
-          <a:fontRef idx="minor">
-            <a:schemeClr val="lt1"/>
-          </a:fontRef>
-        </p:style>
-        <p:txBody>
-          <a:bodyPr rtlCol="0" anchor="ctr"/>
-          <a:lstStyle/>
-          <a:p>
-            <a:pPr algn="ctr"/>
-          </a:p>
-        </p:txBody>
-      </p:sp>
-      <p:sp>
-        <p:nvSpPr>
-          <p:cNvPr id="8" name="TextBox 7"/>
-          <p:cNvSpPr txBox="1"/>
-          <p:nvPr/>
-        </p:nvSpPr>
-        <p:spPr>
-          <a:xfrm>
-            <a:off x="502920" y="1417320"/>
-            <a:ext cx="2240280" cy="640080"/>
-          </a:xfrm>
-          <a:prstGeom prst="rect">
-            <a:avLst/>
-          </a:prstGeom>
-          <a:noFill/>
-        </p:spPr>
-        <p:txBody>
-          <a:bodyPr wrap="square" anchor="ctr" lIns="25400" rIns="25400">
-            <a:spAutoFit/>
-          </a:bodyPr>
-          <a:lstStyle/>
-          <a:p>
-            <a:pPr algn="ctr"/>
-            <a:r>
-              <a:rPr sz="1100" b="1">
-                <a:solidFill>
-                  <a:srgbClr val="F97316"/>
-                </a:solidFill>
-                <a:latin typeface="Inter"/>
-              </a:rPr>
-              <a:t>Unidade</a:t>
-            </a:r>
-          </a:p>
-        </p:txBody>
-      </p:sp>
-      <p:sp>
-        <p:nvSpPr>
-          <p:cNvPr id="9" name="Rectangle 8"/>
-          <p:cNvSpPr/>
-          <p:nvPr/>
-        </p:nvSpPr>
-        <p:spPr>
-          <a:xfrm>
-            <a:off x="2743200" y="1417320"/>
-            <a:ext cx="1344168" cy="640080"/>
-          </a:xfrm>
-          <a:prstGeom prst="rect">
-            <a:avLst/>
-          </a:prstGeom>
-          <a:solidFill>
-            <a:srgbClr val="252538"/>
-          </a:solidFill>
-          <a:ln>
-            <a:noFill/>
-          </a:ln>
-          <a:effectLst/>
-        </p:spPr>
-        <p:style>
-          <a:lnRef idx="1">
-            <a:schemeClr val="accent1"/>
-          </a:lnRef>
-          <a:fillRef idx="3">
-            <a:schemeClr val="accent1"/>
-          </a:fillRef>
-          <a:effectRef idx="2">
-            <a:schemeClr val="accent1"/>
-          </a:effectRef>
-          <a:fontRef idx="minor">
-            <a:schemeClr val="lt1"/>
-          </a:fontRef>
-        </p:style>
-        <p:txBody>
-          <a:bodyPr rtlCol="0" anchor="ctr"/>
-          <a:lstStyle/>
-          <a:p>
-            <a:pPr algn="ctr"/>
-          </a:p>
-        </p:txBody>
-      </p:sp>
-      <p:sp>
-        <p:nvSpPr>
-          <p:cNvPr id="10" name="TextBox 9"/>
-          <p:cNvSpPr txBox="1"/>
-          <p:nvPr/>
-        </p:nvSpPr>
-        <p:spPr>
-          <a:xfrm>
-            <a:off x="2743200" y="1417320"/>
-            <a:ext cx="1344168" cy="640080"/>
-          </a:xfrm>
-          <a:prstGeom prst="rect">
-            <a:avLst/>
-          </a:prstGeom>
-          <a:noFill/>
-        </p:spPr>
-        <p:txBody>
-          <a:bodyPr wrap="square" anchor="ctr" lIns="25400" rIns="25400">
-            <a:spAutoFit/>
-          </a:bodyPr>
-          <a:lstStyle/>
-          <a:p>
-            <a:pPr algn="ctr"/>
-            <a:r>
-              <a:rPr sz="1100" b="1">
-                <a:solidFill>
-                  <a:srgbClr val="F97316"/>
-                </a:solidFill>
-                <a:latin typeface="Inter"/>
-              </a:rPr>
-              <a:t>Correias</a:t>
-            </a:r>
-          </a:p>
-          <a:p>
-            <a:pPr algn="ctr"/>
-            <a:r>
-              <a:rPr sz="1100" b="1">
-                <a:solidFill>
-                  <a:srgbClr val="F97316"/>
-                </a:solidFill>
-                <a:latin typeface="Inter"/>
-              </a:rPr>
-              <a:t>no plano</a:t>
-            </a:r>
-          </a:p>
-        </p:txBody>
-      </p:sp>
-      <p:sp>
-        <p:nvSpPr>
-          <p:cNvPr id="11" name="Rectangle 10"/>
-          <p:cNvSpPr/>
-          <p:nvPr/>
-        </p:nvSpPr>
-        <p:spPr>
-          <a:xfrm>
-            <a:off x="4087368" y="1417320"/>
-            <a:ext cx="1344168" cy="640080"/>
-          </a:xfrm>
-          <a:prstGeom prst="rect">
-            <a:avLst/>
-          </a:prstGeom>
-          <a:solidFill>
-            <a:srgbClr val="252538"/>
-          </a:solidFill>
-          <a:ln>
-            <a:noFill/>
-          </a:ln>
-          <a:effectLst/>
-        </p:spPr>
-        <p:style>
-          <a:lnRef idx="1">
-            <a:schemeClr val="accent1"/>
-          </a:lnRef>
-          <a:fillRef idx="3">
-            <a:schemeClr val="accent1"/>
-          </a:fillRef>
-          <a:effectRef idx="2">
-            <a:schemeClr val="accent1"/>
-          </a:effectRef>
-          <a:fontRef idx="minor">
-            <a:schemeClr val="lt1"/>
-          </a:fontRef>
-        </p:style>
-        <p:txBody>
-          <a:bodyPr rtlCol="0" anchor="ctr"/>
-          <a:lstStyle/>
-          <a:p>
-            <a:pPr algn="ctr"/>
-          </a:p>
-        </p:txBody>
-      </p:sp>
-      <p:sp>
-        <p:nvSpPr>
-          <p:cNvPr id="12" name="TextBox 11"/>
-          <p:cNvSpPr txBox="1"/>
-          <p:nvPr/>
-        </p:nvSpPr>
-        <p:spPr>
-          <a:xfrm>
-            <a:off x="4087368" y="1417320"/>
-            <a:ext cx="1344168" cy="640080"/>
-          </a:xfrm>
-          <a:prstGeom prst="rect">
-            <a:avLst/>
-          </a:prstGeom>
-          <a:noFill/>
-        </p:spPr>
-        <p:txBody>
-          <a:bodyPr wrap="square" anchor="ctr" lIns="25400" rIns="25400">
-            <a:spAutoFit/>
-          </a:bodyPr>
-          <a:lstStyle/>
-          <a:p>
-            <a:pPr algn="ctr"/>
-            <a:r>
-              <a:rPr sz="1100" b="1">
-                <a:solidFill>
-                  <a:srgbClr val="F97316"/>
-                </a:solidFill>
-                <a:latin typeface="Inter"/>
-              </a:rPr>
-              <a:t>Já</a:t>
-            </a:r>
-          </a:p>
-          <a:p>
-            <a:pPr algn="ctr"/>
-            <a:r>
-              <a:rPr sz="1100" b="1">
-                <a:solidFill>
-                  <a:srgbClr val="F97316"/>
-                </a:solidFill>
-                <a:latin typeface="Inter"/>
-              </a:rPr>
-              <a:t>substituídas</a:t>
-            </a:r>
-          </a:p>
-        </p:txBody>
-      </p:sp>
-      <p:sp>
-        <p:nvSpPr>
-          <p:cNvPr id="13" name="Rectangle 12"/>
-          <p:cNvSpPr/>
-          <p:nvPr/>
-        </p:nvSpPr>
-        <p:spPr>
-          <a:xfrm>
-            <a:off x="5431536" y="1417320"/>
-            <a:ext cx="1232154" cy="640080"/>
-          </a:xfrm>
-          <a:prstGeom prst="rect">
-            <a:avLst/>
-          </a:prstGeom>
-          <a:solidFill>
-            <a:srgbClr val="252538"/>
-          </a:solidFill>
-          <a:ln>
-            <a:noFill/>
-          </a:ln>
-          <a:effectLst/>
-        </p:spPr>
-        <p:style>
-          <a:lnRef idx="1">
-            <a:schemeClr val="accent1"/>
-          </a:lnRef>
-          <a:fillRef idx="3">
-            <a:schemeClr val="accent1"/>
-          </a:fillRef>
-          <a:effectRef idx="2">
-            <a:schemeClr val="accent1"/>
-          </a:effectRef>
-          <a:fontRef idx="minor">
-            <a:schemeClr val="lt1"/>
-          </a:fontRef>
-        </p:style>
-        <p:txBody>
-          <a:bodyPr rtlCol="0" anchor="ctr"/>
-          <a:lstStyle/>
-          <a:p>
-            <a:pPr algn="ctr"/>
-          </a:p>
-        </p:txBody>
-      </p:sp>
-      <p:sp>
-        <p:nvSpPr>
-          <p:cNvPr id="14" name="TextBox 13"/>
-          <p:cNvSpPr txBox="1"/>
-          <p:nvPr/>
-        </p:nvSpPr>
-        <p:spPr>
-          <a:xfrm>
-            <a:off x="5431536" y="1417320"/>
-            <a:ext cx="1232154" cy="640080"/>
-          </a:xfrm>
-          <a:prstGeom prst="rect">
-            <a:avLst/>
-          </a:prstGeom>
-          <a:noFill/>
-        </p:spPr>
-        <p:txBody>
-          <a:bodyPr wrap="square" anchor="ctr" lIns="25400" rIns="25400">
-            <a:spAutoFit/>
-          </a:bodyPr>
-          <a:lstStyle/>
-          <a:p>
-            <a:pPr algn="ctr"/>
-            <a:r>
-              <a:rPr sz="1100" b="1">
-                <a:solidFill>
-                  <a:srgbClr val="F97316"/>
-                </a:solidFill>
-                <a:latin typeface="Inter"/>
-              </a:rPr>
-              <a:t>Em</a:t>
-            </a:r>
-          </a:p>
-          <a:p>
-            <a:pPr algn="ctr"/>
-            <a:r>
-              <a:rPr sz="1100" b="1">
-                <a:solidFill>
-                  <a:srgbClr val="F97316"/>
-                </a:solidFill>
-                <a:latin typeface="Inter"/>
-              </a:rPr>
-              <a:t>execução</a:t>
-            </a:r>
-          </a:p>
-        </p:txBody>
-      </p:sp>
-      <p:sp>
-        <p:nvSpPr>
-          <p:cNvPr id="15" name="Rectangle 14"/>
-          <p:cNvSpPr/>
-          <p:nvPr/>
-        </p:nvSpPr>
-        <p:spPr>
-          <a:xfrm>
-            <a:off x="6663690" y="1417320"/>
-            <a:ext cx="1680210" cy="640080"/>
-          </a:xfrm>
-          <a:prstGeom prst="rect">
-            <a:avLst/>
-          </a:prstGeom>
-          <a:solidFill>
-            <a:srgbClr val="252538"/>
-          </a:solidFill>
-          <a:ln>
-            <a:noFill/>
-          </a:ln>
-          <a:effectLst/>
-        </p:spPr>
-        <p:style>
-          <a:lnRef idx="1">
-            <a:schemeClr val="accent1"/>
-          </a:lnRef>
-          <a:fillRef idx="3">
-            <a:schemeClr val="accent1"/>
-          </a:fillRef>
-          <a:effectRef idx="2">
-            <a:schemeClr val="accent1"/>
-          </a:effectRef>
-          <a:fontRef idx="minor">
-            <a:schemeClr val="lt1"/>
-          </a:fontRef>
-        </p:style>
-        <p:txBody>
-          <a:bodyPr rtlCol="0" anchor="ctr"/>
-          <a:lstStyle/>
-          <a:p>
-            <a:pPr algn="ctr"/>
-          </a:p>
-        </p:txBody>
-      </p:sp>
-      <p:sp>
-        <p:nvSpPr>
-          <p:cNvPr id="16" name="TextBox 15"/>
-          <p:cNvSpPr txBox="1"/>
-          <p:nvPr/>
-        </p:nvSpPr>
-        <p:spPr>
-          <a:xfrm>
-            <a:off x="6663690" y="1417320"/>
-            <a:ext cx="1680210" cy="640080"/>
-          </a:xfrm>
-          <a:prstGeom prst="rect">
-            <a:avLst/>
-          </a:prstGeom>
-          <a:noFill/>
-        </p:spPr>
-        <p:txBody>
-          <a:bodyPr wrap="square" anchor="ctr" lIns="25400" rIns="25400">
-            <a:spAutoFit/>
-          </a:bodyPr>
-          <a:lstStyle/>
-          <a:p>
-            <a:pPr algn="ctr"/>
-            <a:r>
-              <a:rPr sz="1100" b="1">
-                <a:solidFill>
-                  <a:srgbClr val="F97316"/>
-                </a:solidFill>
-                <a:latin typeface="Inter"/>
-              </a:rPr>
-              <a:t>Próxima</a:t>
-            </a:r>
-          </a:p>
-          <a:p>
-            <a:pPr algn="ctr"/>
-            <a:r>
-              <a:rPr sz="1100" b="1">
-                <a:solidFill>
-                  <a:srgbClr val="F97316"/>
-                </a:solidFill>
-                <a:latin typeface="Inter"/>
-              </a:rPr>
-              <a:t>substituição</a:t>
-            </a:r>
-          </a:p>
-        </p:txBody>
-      </p:sp>
-      <p:sp>
-        <p:nvSpPr>
-          <p:cNvPr id="17" name="Rectangle 16"/>
-          <p:cNvSpPr/>
-          <p:nvPr/>
-        </p:nvSpPr>
-        <p:spPr>
-          <a:xfrm>
-            <a:off x="8343900" y="1417320"/>
-            <a:ext cx="1680210" cy="640080"/>
-          </a:xfrm>
-          <a:prstGeom prst="rect">
-            <a:avLst/>
-          </a:prstGeom>
-          <a:solidFill>
-            <a:srgbClr val="252538"/>
-          </a:solidFill>
-          <a:ln>
-            <a:noFill/>
-          </a:ln>
-          <a:effectLst/>
-        </p:spPr>
-        <p:style>
-          <a:lnRef idx="1">
-            <a:schemeClr val="accent1"/>
-          </a:lnRef>
-          <a:fillRef idx="3">
-            <a:schemeClr val="accent1"/>
-          </a:fillRef>
-          <a:effectRef idx="2">
-            <a:schemeClr val="accent1"/>
-          </a:effectRef>
-          <a:fontRef idx="minor">
-            <a:schemeClr val="lt1"/>
-          </a:fontRef>
-        </p:style>
-        <p:txBody>
-          <a:bodyPr rtlCol="0" anchor="ctr"/>
-          <a:lstStyle/>
-          <a:p>
-            <a:pPr algn="ctr"/>
-          </a:p>
-        </p:txBody>
-      </p:sp>
-      <p:sp>
-        <p:nvSpPr>
-          <p:cNvPr id="18" name="TextBox 17"/>
-          <p:cNvSpPr txBox="1"/>
-          <p:nvPr/>
-        </p:nvSpPr>
-        <p:spPr>
-          <a:xfrm>
-            <a:off x="8343900" y="1417320"/>
-            <a:ext cx="1680210" cy="640080"/>
-          </a:xfrm>
-          <a:prstGeom prst="rect">
-            <a:avLst/>
-          </a:prstGeom>
-          <a:noFill/>
-        </p:spPr>
-        <p:txBody>
-          <a:bodyPr wrap="square" anchor="ctr" lIns="25400" rIns="25400">
-            <a:spAutoFit/>
-          </a:bodyPr>
-          <a:lstStyle/>
-          <a:p>
-            <a:pPr algn="ctr"/>
-            <a:r>
-              <a:rPr sz="1100" b="1">
-                <a:solidFill>
-                  <a:srgbClr val="F97316"/>
-                </a:solidFill>
-                <a:latin typeface="Inter"/>
-              </a:rPr>
-              <a:t>Regularização</a:t>
-            </a:r>
-          </a:p>
-          <a:p>
-            <a:pPr algn="ctr"/>
-            <a:r>
-              <a:rPr sz="1100" b="1">
-                <a:solidFill>
-                  <a:srgbClr val="F97316"/>
-                </a:solidFill>
-                <a:latin typeface="Inter"/>
-              </a:rPr>
-              <a:t>(última)</a:t>
-            </a:r>
-          </a:p>
-        </p:txBody>
-      </p:sp>
-      <p:sp>
-        <p:nvSpPr>
-          <p:cNvPr id="19" name="Rectangle 18"/>
-          <p:cNvSpPr/>
-          <p:nvPr/>
-        </p:nvSpPr>
-        <p:spPr>
-          <a:xfrm>
-            <a:off x="10024110" y="1417320"/>
-            <a:ext cx="1680210" cy="640080"/>
-          </a:xfrm>
-          <a:prstGeom prst="rect">
-            <a:avLst/>
-          </a:prstGeom>
-          <a:solidFill>
-            <a:srgbClr val="252538"/>
-          </a:solidFill>
-          <a:ln>
-            <a:noFill/>
-          </a:ln>
-          <a:effectLst/>
-        </p:spPr>
-        <p:style>
-          <a:lnRef idx="1">
-            <a:schemeClr val="accent1"/>
-          </a:lnRef>
-          <a:fillRef idx="3">
-            <a:schemeClr val="accent1"/>
-          </a:fillRef>
-          <a:effectRef idx="2">
-            <a:schemeClr val="accent1"/>
-          </a:effectRef>
-          <a:fontRef idx="minor">
-            <a:schemeClr val="lt1"/>
-          </a:fontRef>
-        </p:style>
-        <p:txBody>
-          <a:bodyPr rtlCol="0" anchor="ctr"/>
-          <a:lstStyle/>
-          <a:p>
-            <a:pPr algn="ctr"/>
-          </a:p>
-        </p:txBody>
-      </p:sp>
-      <p:sp>
-        <p:nvSpPr>
-          <p:cNvPr id="20" name="TextBox 19"/>
-          <p:cNvSpPr txBox="1"/>
-          <p:nvPr/>
-        </p:nvSpPr>
-        <p:spPr>
-          <a:xfrm>
-            <a:off x="10024110" y="1417320"/>
-            <a:ext cx="1680210" cy="640080"/>
-          </a:xfrm>
-          <a:prstGeom prst="rect">
-            <a:avLst/>
-          </a:prstGeom>
-          <a:noFill/>
-        </p:spPr>
-        <p:txBody>
-          <a:bodyPr wrap="square" anchor="ctr" lIns="25400" rIns="25400">
-            <a:spAutoFit/>
-          </a:bodyPr>
-          <a:lstStyle/>
-          <a:p>
-            <a:pPr algn="ctr"/>
-            <a:r>
-              <a:rPr sz="1100" b="1">
-                <a:solidFill>
-                  <a:srgbClr val="F97316"/>
-                </a:solidFill>
-                <a:latin typeface="Inter"/>
-              </a:rPr>
-              <a:t>Alerta</a:t>
-            </a:r>
-          </a:p>
-        </p:txBody>
-      </p:sp>
-      <p:sp>
-        <p:nvSpPr>
-          <p:cNvPr id="21" name="Rectangle 20"/>
-          <p:cNvSpPr/>
-          <p:nvPr/>
-        </p:nvSpPr>
-        <p:spPr>
-          <a:xfrm>
-            <a:off x="502920" y="2057400"/>
-            <a:ext cx="2240280" cy="502920"/>
-          </a:xfrm>
-          <a:prstGeom prst="rect">
+            <a:ext cx="5486400" cy="4480560"/>
+          </a:xfrm>
+          <a:prstGeom prst="roundRect">
             <a:avLst/>
           </a:prstGeom>
           <a:solidFill>
@@ -6937,14 +6447,14 @@
       </p:sp>
       <p:sp>
         <p:nvSpPr>
-          <p:cNvPr id="22" name="TextBox 21"/>
+          <p:cNvPr id="8" name="TextBox 7"/>
           <p:cNvSpPr txBox="1"/>
           <p:nvPr/>
         </p:nvSpPr>
         <p:spPr>
           <a:xfrm>
-            <a:off x="502920" y="2057400"/>
-            <a:ext cx="2240280" cy="502920"/>
+            <a:off x="731520" y="1600200"/>
+            <a:ext cx="5029200" cy="365760"/>
           </a:xfrm>
           <a:prstGeom prst="rect">
             <a:avLst/>
@@ -6952,36 +6462,211 @@
           <a:noFill/>
         </p:spPr>
         <p:txBody>
-          <a:bodyPr wrap="square" anchor="ctr" lIns="25400" rIns="25400">
+          <a:bodyPr wrap="square" anchor="t" lIns="25400" rIns="25400">
             <a:spAutoFit/>
           </a:bodyPr>
           <a:lstStyle/>
           <a:p>
             <a:pPr algn="l"/>
             <a:r>
-              <a:rPr sz="1100" b="1">
-                <a:solidFill>
-                  <a:srgbClr val="3B82F6"/>
-                </a:solidFill>
-                <a:latin typeface="Inter"/>
-              </a:rPr>
-              <a:t>Nova Mutum (NVM)</a:t>
-            </a:r>
-          </a:p>
-        </p:txBody>
-      </p:sp>
-      <p:sp>
-        <p:nvSpPr>
-          <p:cNvPr id="23" name="Rectangle 22"/>
+              <a:rPr sz="1500" b="1">
+                <a:solidFill>
+                  <a:srgbClr val="F97316"/>
+                </a:solidFill>
+                <a:latin typeface="Inter"/>
+              </a:rPr>
+              <a:t>Levantamento FLEXLAB (jun/2026)</a:t>
+            </a:r>
+          </a:p>
+        </p:txBody>
+      </p:sp>
+      <p:sp>
+        <p:nvSpPr>
+          <p:cNvPr id="9" name="TextBox 8"/>
+          <p:cNvSpPr txBox="1"/>
+          <p:nvPr/>
+        </p:nvSpPr>
+        <p:spPr>
+          <a:xfrm>
+            <a:off x="777240" y="2148840"/>
+            <a:ext cx="5029200" cy="640080"/>
+          </a:xfrm>
+          <a:prstGeom prst="rect">
+            <a:avLst/>
+          </a:prstGeom>
+          <a:noFill/>
+        </p:spPr>
+        <p:txBody>
+          <a:bodyPr wrap="square" anchor="t" lIns="25400" rIns="25400">
+            <a:spAutoFit/>
+          </a:bodyPr>
+          <a:lstStyle/>
+          <a:p>
+            <a:pPr algn="l"/>
+            <a:r>
+              <a:rPr sz="1300" b="0">
+                <a:solidFill>
+                  <a:srgbClr val="FFFFFF"/>
+                </a:solidFill>
+                <a:latin typeface="Inter"/>
+              </a:rPr>
+              <a:t>•  148 correias auditadas no grupo</a:t>
+            </a:r>
+          </a:p>
+        </p:txBody>
+      </p:sp>
+      <p:sp>
+        <p:nvSpPr>
+          <p:cNvPr id="10" name="TextBox 9"/>
+          <p:cNvSpPr txBox="1"/>
+          <p:nvPr/>
+        </p:nvSpPr>
+        <p:spPr>
+          <a:xfrm>
+            <a:off x="777240" y="2807208"/>
+            <a:ext cx="5029200" cy="640080"/>
+          </a:xfrm>
+          <a:prstGeom prst="rect">
+            <a:avLst/>
+          </a:prstGeom>
+          <a:noFill/>
+        </p:spPr>
+        <p:txBody>
+          <a:bodyPr wrap="square" anchor="t" lIns="25400" rIns="25400">
+            <a:spAutoFit/>
+          </a:bodyPr>
+          <a:lstStyle/>
+          <a:p>
+            <a:pPr algn="l"/>
+            <a:r>
+              <a:rPr sz="1300" b="0">
+                <a:solidFill>
+                  <a:srgbClr val="9CA3AF"/>
+                </a:solidFill>
+                <a:latin typeface="Inter"/>
+              </a:rPr>
+              <a:t>102 mantidas em operação (conforme norma / 2ª linha)</a:t>
+            </a:r>
+          </a:p>
+        </p:txBody>
+      </p:sp>
+      <p:sp>
+        <p:nvSpPr>
+          <p:cNvPr id="11" name="TextBox 10"/>
+          <p:cNvSpPr txBox="1"/>
+          <p:nvPr/>
+        </p:nvSpPr>
+        <p:spPr>
+          <a:xfrm>
+            <a:off x="777240" y="3465576"/>
+            <a:ext cx="5029200" cy="640080"/>
+          </a:xfrm>
+          <a:prstGeom prst="rect">
+            <a:avLst/>
+          </a:prstGeom>
+          <a:noFill/>
+        </p:spPr>
+        <p:txBody>
+          <a:bodyPr wrap="square" anchor="t" lIns="25400" rIns="25400">
+            <a:spAutoFit/>
+          </a:bodyPr>
+          <a:lstStyle/>
+          <a:p>
+            <a:pPr algn="l"/>
+            <a:r>
+              <a:rPr sz="1300" b="1">
+                <a:solidFill>
+                  <a:srgbClr val="FFFFFF"/>
+                </a:solidFill>
+                <a:latin typeface="Inter"/>
+              </a:rPr>
+              <a:t>•  46 a substituir  →  R$ 6,15 mi</a:t>
+            </a:r>
+          </a:p>
+        </p:txBody>
+      </p:sp>
+      <p:sp>
+        <p:nvSpPr>
+          <p:cNvPr id="12" name="TextBox 11"/>
+          <p:cNvSpPr txBox="1"/>
+          <p:nvPr/>
+        </p:nvSpPr>
+        <p:spPr>
+          <a:xfrm>
+            <a:off x="777240" y="4123944"/>
+            <a:ext cx="5029200" cy="640080"/>
+          </a:xfrm>
+          <a:prstGeom prst="rect">
+            <a:avLst/>
+          </a:prstGeom>
+          <a:noFill/>
+        </p:spPr>
+        <p:txBody>
+          <a:bodyPr wrap="square" anchor="t" lIns="25400" rIns="25400">
+            <a:spAutoFit/>
+          </a:bodyPr>
+          <a:lstStyle/>
+          <a:p>
+            <a:pPr algn="l"/>
+            <a:r>
+              <a:rPr sz="1300" b="0">
+                <a:solidFill>
+                  <a:srgbClr val="9CA3AF"/>
+                </a:solidFill>
+                <a:latin typeface="Inter"/>
+              </a:rPr>
+              <a:t>   • 41 reprovadas no ensaio ISO 340 (imediata)</a:t>
+            </a:r>
+          </a:p>
+        </p:txBody>
+      </p:sp>
+      <p:sp>
+        <p:nvSpPr>
+          <p:cNvPr id="13" name="TextBox 12"/>
+          <p:cNvSpPr txBox="1"/>
+          <p:nvPr/>
+        </p:nvSpPr>
+        <p:spPr>
+          <a:xfrm>
+            <a:off x="777240" y="4782312"/>
+            <a:ext cx="5029200" cy="640080"/>
+          </a:xfrm>
+          <a:prstGeom prst="rect">
+            <a:avLst/>
+          </a:prstGeom>
+          <a:noFill/>
+        </p:spPr>
+        <p:txBody>
+          <a:bodyPr wrap="square" anchor="t" lIns="25400" rIns="25400">
+            <a:spAutoFit/>
+          </a:bodyPr>
+          <a:lstStyle/>
+          <a:p>
+            <a:pPr algn="l"/>
+            <a:r>
+              <a:rPr sz="1300" b="0">
+                <a:solidFill>
+                  <a:srgbClr val="9CA3AF"/>
+                </a:solidFill>
+                <a:latin typeface="Inter"/>
+              </a:rPr>
+              <a:t>   • 5 por degradação física (programada)</a:t>
+            </a:r>
+          </a:p>
+        </p:txBody>
+      </p:sp>
+      <p:sp>
+        <p:nvSpPr>
+          <p:cNvPr id="14" name="Rounded Rectangle 13"/>
           <p:cNvSpPr/>
           <p:nvPr/>
         </p:nvSpPr>
         <p:spPr>
           <a:xfrm>
-            <a:off x="2743200" y="2057400"/>
-            <a:ext cx="1344168" cy="502920"/>
-          </a:xfrm>
-          <a:prstGeom prst="rect">
+            <a:off x="6217920" y="1417320"/>
+            <a:ext cx="5486400" cy="4480560"/>
+          </a:xfrm>
+          <a:prstGeom prst="roundRect">
             <a:avLst/>
           </a:prstGeom>
           <a:solidFill>
@@ -7016,2656 +6701,14 @@
       </p:sp>
       <p:sp>
         <p:nvSpPr>
-          <p:cNvPr id="24" name="TextBox 23"/>
+          <p:cNvPr id="15" name="TextBox 14"/>
           <p:cNvSpPr txBox="1"/>
           <p:nvPr/>
         </p:nvSpPr>
         <p:spPr>
           <a:xfrm>
-            <a:off x="2743200" y="2057400"/>
-            <a:ext cx="1344168" cy="502920"/>
-          </a:xfrm>
-          <a:prstGeom prst="rect">
-            <a:avLst/>
-          </a:prstGeom>
-          <a:noFill/>
-        </p:spPr>
-        <p:txBody>
-          <a:bodyPr wrap="square" anchor="ctr" lIns="25400" rIns="25400">
-            <a:spAutoFit/>
-          </a:bodyPr>
-          <a:lstStyle/>
-          <a:p>
-            <a:pPr algn="ctr"/>
-            <a:r>
-              <a:rPr sz="1100" b="0">
-                <a:solidFill>
-                  <a:srgbClr val="E0E0E0"/>
-                </a:solidFill>
-                <a:latin typeface="Inter"/>
-              </a:rPr>
-              <a:t>15</a:t>
-            </a:r>
-          </a:p>
-        </p:txBody>
-      </p:sp>
-      <p:sp>
-        <p:nvSpPr>
-          <p:cNvPr id="25" name="Rectangle 24"/>
-          <p:cNvSpPr/>
-          <p:nvPr/>
-        </p:nvSpPr>
-        <p:spPr>
-          <a:xfrm>
-            <a:off x="4087368" y="2057400"/>
-            <a:ext cx="1344168" cy="502920"/>
-          </a:xfrm>
-          <a:prstGeom prst="rect">
-            <a:avLst/>
-          </a:prstGeom>
-          <a:solidFill>
-            <a:srgbClr val="1E1E30"/>
-          </a:solidFill>
-          <a:ln>
-            <a:noFill/>
-          </a:ln>
-          <a:effectLst/>
-        </p:spPr>
-        <p:style>
-          <a:lnRef idx="1">
-            <a:schemeClr val="accent1"/>
-          </a:lnRef>
-          <a:fillRef idx="3">
-            <a:schemeClr val="accent1"/>
-          </a:fillRef>
-          <a:effectRef idx="2">
-            <a:schemeClr val="accent1"/>
-          </a:effectRef>
-          <a:fontRef idx="minor">
-            <a:schemeClr val="lt1"/>
-          </a:fontRef>
-        </p:style>
-        <p:txBody>
-          <a:bodyPr rtlCol="0" anchor="ctr"/>
-          <a:lstStyle/>
-          <a:p>
-            <a:pPr algn="ctr"/>
-          </a:p>
-        </p:txBody>
-      </p:sp>
-      <p:sp>
-        <p:nvSpPr>
-          <p:cNvPr id="26" name="TextBox 25"/>
-          <p:cNvSpPr txBox="1"/>
-          <p:nvPr/>
-        </p:nvSpPr>
-        <p:spPr>
-          <a:xfrm>
-            <a:off x="4087368" y="2057400"/>
-            <a:ext cx="1344168" cy="502920"/>
-          </a:xfrm>
-          <a:prstGeom prst="rect">
-            <a:avLst/>
-          </a:prstGeom>
-          <a:noFill/>
-        </p:spPr>
-        <p:txBody>
-          <a:bodyPr wrap="square" anchor="ctr" lIns="25400" rIns="25400">
-            <a:spAutoFit/>
-          </a:bodyPr>
-          <a:lstStyle/>
-          <a:p>
-            <a:pPr algn="ctr"/>
-            <a:r>
-              <a:rPr sz="1100" b="0">
-                <a:solidFill>
-                  <a:srgbClr val="E0E0E0"/>
-                </a:solidFill>
-                <a:latin typeface="Inter"/>
-              </a:rPr>
-              <a:t>0</a:t>
-            </a:r>
-          </a:p>
-        </p:txBody>
-      </p:sp>
-      <p:sp>
-        <p:nvSpPr>
-          <p:cNvPr id="27" name="Rectangle 26"/>
-          <p:cNvSpPr/>
-          <p:nvPr/>
-        </p:nvSpPr>
-        <p:spPr>
-          <a:xfrm>
-            <a:off x="5431536" y="2057400"/>
-            <a:ext cx="1232154" cy="502920"/>
-          </a:xfrm>
-          <a:prstGeom prst="rect">
-            <a:avLst/>
-          </a:prstGeom>
-          <a:solidFill>
-            <a:srgbClr val="1E1E30"/>
-          </a:solidFill>
-          <a:ln>
-            <a:noFill/>
-          </a:ln>
-          <a:effectLst/>
-        </p:spPr>
-        <p:style>
-          <a:lnRef idx="1">
-            <a:schemeClr val="accent1"/>
-          </a:lnRef>
-          <a:fillRef idx="3">
-            <a:schemeClr val="accent1"/>
-          </a:fillRef>
-          <a:effectRef idx="2">
-            <a:schemeClr val="accent1"/>
-          </a:effectRef>
-          <a:fontRef idx="minor">
-            <a:schemeClr val="lt1"/>
-          </a:fontRef>
-        </p:style>
-        <p:txBody>
-          <a:bodyPr rtlCol="0" anchor="ctr"/>
-          <a:lstStyle/>
-          <a:p>
-            <a:pPr algn="ctr"/>
-          </a:p>
-        </p:txBody>
-      </p:sp>
-      <p:sp>
-        <p:nvSpPr>
-          <p:cNvPr id="28" name="TextBox 27"/>
-          <p:cNvSpPr txBox="1"/>
-          <p:nvPr/>
-        </p:nvSpPr>
-        <p:spPr>
-          <a:xfrm>
-            <a:off x="5431536" y="2057400"/>
-            <a:ext cx="1232154" cy="502920"/>
-          </a:xfrm>
-          <a:prstGeom prst="rect">
-            <a:avLst/>
-          </a:prstGeom>
-          <a:noFill/>
-        </p:spPr>
-        <p:txBody>
-          <a:bodyPr wrap="square" anchor="ctr" lIns="25400" rIns="25400">
-            <a:spAutoFit/>
-          </a:bodyPr>
-          <a:lstStyle/>
-          <a:p>
-            <a:pPr algn="ctr"/>
-            <a:r>
-              <a:rPr sz="1100" b="0">
-                <a:solidFill>
-                  <a:srgbClr val="E0E0E0"/>
-                </a:solidFill>
-                <a:latin typeface="Inter"/>
-              </a:rPr>
-              <a:t>15</a:t>
-            </a:r>
-          </a:p>
-        </p:txBody>
-      </p:sp>
-      <p:sp>
-        <p:nvSpPr>
-          <p:cNvPr id="29" name="Rectangle 28"/>
-          <p:cNvSpPr/>
-          <p:nvPr/>
-        </p:nvSpPr>
-        <p:spPr>
-          <a:xfrm>
-            <a:off x="6663690" y="2057400"/>
-            <a:ext cx="1680210" cy="502920"/>
-          </a:xfrm>
-          <a:prstGeom prst="rect">
-            <a:avLst/>
-          </a:prstGeom>
-          <a:solidFill>
-            <a:srgbClr val="1E1E30"/>
-          </a:solidFill>
-          <a:ln>
-            <a:noFill/>
-          </a:ln>
-          <a:effectLst/>
-        </p:spPr>
-        <p:style>
-          <a:lnRef idx="1">
-            <a:schemeClr val="accent1"/>
-          </a:lnRef>
-          <a:fillRef idx="3">
-            <a:schemeClr val="accent1"/>
-          </a:fillRef>
-          <a:effectRef idx="2">
-            <a:schemeClr val="accent1"/>
-          </a:effectRef>
-          <a:fontRef idx="minor">
-            <a:schemeClr val="lt1"/>
-          </a:fontRef>
-        </p:style>
-        <p:txBody>
-          <a:bodyPr rtlCol="0" anchor="ctr"/>
-          <a:lstStyle/>
-          <a:p>
-            <a:pPr algn="ctr"/>
-          </a:p>
-        </p:txBody>
-      </p:sp>
-      <p:sp>
-        <p:nvSpPr>
-          <p:cNvPr id="30" name="TextBox 29"/>
-          <p:cNvSpPr txBox="1"/>
-          <p:nvPr/>
-        </p:nvSpPr>
-        <p:spPr>
-          <a:xfrm>
-            <a:off x="6663690" y="2057400"/>
-            <a:ext cx="1680210" cy="502920"/>
-          </a:xfrm>
-          <a:prstGeom prst="rect">
-            <a:avLst/>
-          </a:prstGeom>
-          <a:noFill/>
-        </p:spPr>
-        <p:txBody>
-          <a:bodyPr wrap="square" anchor="ctr" lIns="25400" rIns="25400">
-            <a:spAutoFit/>
-          </a:bodyPr>
-          <a:lstStyle/>
-          <a:p>
-            <a:pPr algn="ctr"/>
-            <a:r>
-              <a:rPr sz="1100" b="0">
-                <a:solidFill>
-                  <a:srgbClr val="E0E0E0"/>
-                </a:solidFill>
-                <a:latin typeface="Inter"/>
-              </a:rPr>
-              <a:t>09/05/2026</a:t>
-            </a:r>
-          </a:p>
-        </p:txBody>
-      </p:sp>
-      <p:sp>
-        <p:nvSpPr>
-          <p:cNvPr id="31" name="Rectangle 30"/>
-          <p:cNvSpPr/>
-          <p:nvPr/>
-        </p:nvSpPr>
-        <p:spPr>
-          <a:xfrm>
-            <a:off x="8343900" y="2057400"/>
-            <a:ext cx="1680210" cy="502920"/>
-          </a:xfrm>
-          <a:prstGeom prst="rect">
-            <a:avLst/>
-          </a:prstGeom>
-          <a:solidFill>
-            <a:srgbClr val="1E1E30"/>
-          </a:solidFill>
-          <a:ln>
-            <a:noFill/>
-          </a:ln>
-          <a:effectLst/>
-        </p:spPr>
-        <p:style>
-          <a:lnRef idx="1">
-            <a:schemeClr val="accent1"/>
-          </a:lnRef>
-          <a:fillRef idx="3">
-            <a:schemeClr val="accent1"/>
-          </a:fillRef>
-          <a:effectRef idx="2">
-            <a:schemeClr val="accent1"/>
-          </a:effectRef>
-          <a:fontRef idx="minor">
-            <a:schemeClr val="lt1"/>
-          </a:fontRef>
-        </p:style>
-        <p:txBody>
-          <a:bodyPr rtlCol="0" anchor="ctr"/>
-          <a:lstStyle/>
-          <a:p>
-            <a:pPr algn="ctr"/>
-          </a:p>
-        </p:txBody>
-      </p:sp>
-      <p:sp>
-        <p:nvSpPr>
-          <p:cNvPr id="32" name="TextBox 31"/>
-          <p:cNvSpPr txBox="1"/>
-          <p:nvPr/>
-        </p:nvSpPr>
-        <p:spPr>
-          <a:xfrm>
-            <a:off x="8343900" y="2057400"/>
-            <a:ext cx="1680210" cy="502920"/>
-          </a:xfrm>
-          <a:prstGeom prst="rect">
-            <a:avLst/>
-          </a:prstGeom>
-          <a:noFill/>
-        </p:spPr>
-        <p:txBody>
-          <a:bodyPr wrap="square" anchor="ctr" lIns="25400" rIns="25400">
-            <a:spAutoFit/>
-          </a:bodyPr>
-          <a:lstStyle/>
-          <a:p>
-            <a:pPr algn="ctr"/>
-            <a:r>
-              <a:rPr sz="1100" b="1">
-                <a:solidFill>
-                  <a:srgbClr val="E0E0E0"/>
-                </a:solidFill>
-                <a:latin typeface="Inter"/>
-              </a:rPr>
-              <a:t>10/10/2026</a:t>
-            </a:r>
-          </a:p>
-        </p:txBody>
-      </p:sp>
-      <p:sp>
-        <p:nvSpPr>
-          <p:cNvPr id="33" name="Rectangle 32"/>
-          <p:cNvSpPr/>
-          <p:nvPr/>
-        </p:nvSpPr>
-        <p:spPr>
-          <a:xfrm>
-            <a:off x="10024110" y="2057400"/>
-            <a:ext cx="1680210" cy="502920"/>
-          </a:xfrm>
-          <a:prstGeom prst="rect">
-            <a:avLst/>
-          </a:prstGeom>
-          <a:solidFill>
-            <a:srgbClr val="1E1E30"/>
-          </a:solidFill>
-          <a:ln>
-            <a:noFill/>
-          </a:ln>
-          <a:effectLst/>
-        </p:spPr>
-        <p:style>
-          <a:lnRef idx="1">
-            <a:schemeClr val="accent1"/>
-          </a:lnRef>
-          <a:fillRef idx="3">
-            <a:schemeClr val="accent1"/>
-          </a:fillRef>
-          <a:effectRef idx="2">
-            <a:schemeClr val="accent1"/>
-          </a:effectRef>
-          <a:fontRef idx="minor">
-            <a:schemeClr val="lt1"/>
-          </a:fontRef>
-        </p:style>
-        <p:txBody>
-          <a:bodyPr rtlCol="0" anchor="ctr"/>
-          <a:lstStyle/>
-          <a:p>
-            <a:pPr algn="ctr"/>
-          </a:p>
-        </p:txBody>
-      </p:sp>
-      <p:sp>
-        <p:nvSpPr>
-          <p:cNvPr id="34" name="TextBox 33"/>
-          <p:cNvSpPr txBox="1"/>
-          <p:nvPr/>
-        </p:nvSpPr>
-        <p:spPr>
-          <a:xfrm>
-            <a:off x="10024110" y="2057400"/>
-            <a:ext cx="1680210" cy="502920"/>
-          </a:xfrm>
-          <a:prstGeom prst="rect">
-            <a:avLst/>
-          </a:prstGeom>
-          <a:noFill/>
-        </p:spPr>
-        <p:txBody>
-          <a:bodyPr wrap="square" anchor="ctr" lIns="25400" rIns="25400">
-            <a:spAutoFit/>
-          </a:bodyPr>
-          <a:lstStyle/>
-          <a:p>
-            <a:pPr algn="ctr"/>
-            <a:r>
-              <a:rPr sz="1100" b="1">
-                <a:solidFill>
-                  <a:srgbClr val="EF4444"/>
-                </a:solidFill>
-                <a:latin typeface="Inter"/>
-              </a:rPr>
-              <a:t>1 vencida</a:t>
-            </a:r>
-          </a:p>
-        </p:txBody>
-      </p:sp>
-      <p:sp>
-        <p:nvSpPr>
-          <p:cNvPr id="35" name="Rectangle 34"/>
-          <p:cNvSpPr/>
-          <p:nvPr/>
-        </p:nvSpPr>
-        <p:spPr>
-          <a:xfrm>
-            <a:off x="502920" y="2560320"/>
-            <a:ext cx="2240280" cy="502920"/>
-          </a:xfrm>
-          <a:prstGeom prst="rect">
-            <a:avLst/>
-          </a:prstGeom>
-          <a:solidFill>
-            <a:srgbClr val="0F0F1A"/>
-          </a:solidFill>
-          <a:ln>
-            <a:noFill/>
-          </a:ln>
-          <a:effectLst/>
-        </p:spPr>
-        <p:style>
-          <a:lnRef idx="1">
-            <a:schemeClr val="accent1"/>
-          </a:lnRef>
-          <a:fillRef idx="3">
-            <a:schemeClr val="accent1"/>
-          </a:fillRef>
-          <a:effectRef idx="2">
-            <a:schemeClr val="accent1"/>
-          </a:effectRef>
-          <a:fontRef idx="minor">
-            <a:schemeClr val="lt1"/>
-          </a:fontRef>
-        </p:style>
-        <p:txBody>
-          <a:bodyPr rtlCol="0" anchor="ctr"/>
-          <a:lstStyle/>
-          <a:p>
-            <a:pPr algn="ctr"/>
-          </a:p>
-        </p:txBody>
-      </p:sp>
-      <p:sp>
-        <p:nvSpPr>
-          <p:cNvPr id="36" name="TextBox 35"/>
-          <p:cNvSpPr txBox="1"/>
-          <p:nvPr/>
-        </p:nvSpPr>
-        <p:spPr>
-          <a:xfrm>
-            <a:off x="502920" y="2560320"/>
-            <a:ext cx="2240280" cy="502920"/>
-          </a:xfrm>
-          <a:prstGeom prst="rect">
-            <a:avLst/>
-          </a:prstGeom>
-          <a:noFill/>
-        </p:spPr>
-        <p:txBody>
-          <a:bodyPr wrap="square" anchor="ctr" lIns="25400" rIns="25400">
-            <a:spAutoFit/>
-          </a:bodyPr>
-          <a:lstStyle/>
-          <a:p>
-            <a:pPr algn="l"/>
-            <a:r>
-              <a:rPr sz="1100" b="1">
-                <a:solidFill>
-                  <a:srgbClr val="F97316"/>
-                </a:solidFill>
-                <a:latin typeface="Inter"/>
-              </a:rPr>
-              <a:t>Sinop (SNP)</a:t>
-            </a:r>
-          </a:p>
-        </p:txBody>
-      </p:sp>
-      <p:sp>
-        <p:nvSpPr>
-          <p:cNvPr id="37" name="Rectangle 36"/>
-          <p:cNvSpPr/>
-          <p:nvPr/>
-        </p:nvSpPr>
-        <p:spPr>
-          <a:xfrm>
-            <a:off x="2743200" y="2560320"/>
-            <a:ext cx="1344168" cy="502920"/>
-          </a:xfrm>
-          <a:prstGeom prst="rect">
-            <a:avLst/>
-          </a:prstGeom>
-          <a:solidFill>
-            <a:srgbClr val="0F0F1A"/>
-          </a:solidFill>
-          <a:ln>
-            <a:noFill/>
-          </a:ln>
-          <a:effectLst/>
-        </p:spPr>
-        <p:style>
-          <a:lnRef idx="1">
-            <a:schemeClr val="accent1"/>
-          </a:lnRef>
-          <a:fillRef idx="3">
-            <a:schemeClr val="accent1"/>
-          </a:fillRef>
-          <a:effectRef idx="2">
-            <a:schemeClr val="accent1"/>
-          </a:effectRef>
-          <a:fontRef idx="minor">
-            <a:schemeClr val="lt1"/>
-          </a:fontRef>
-        </p:style>
-        <p:txBody>
-          <a:bodyPr rtlCol="0" anchor="ctr"/>
-          <a:lstStyle/>
-          <a:p>
-            <a:pPr algn="ctr"/>
-          </a:p>
-        </p:txBody>
-      </p:sp>
-      <p:sp>
-        <p:nvSpPr>
-          <p:cNvPr id="38" name="TextBox 37"/>
-          <p:cNvSpPr txBox="1"/>
-          <p:nvPr/>
-        </p:nvSpPr>
-        <p:spPr>
-          <a:xfrm>
-            <a:off x="2743200" y="2560320"/>
-            <a:ext cx="1344168" cy="502920"/>
-          </a:xfrm>
-          <a:prstGeom prst="rect">
-            <a:avLst/>
-          </a:prstGeom>
-          <a:noFill/>
-        </p:spPr>
-        <p:txBody>
-          <a:bodyPr wrap="square" anchor="ctr" lIns="25400" rIns="25400">
-            <a:spAutoFit/>
-          </a:bodyPr>
-          <a:lstStyle/>
-          <a:p>
-            <a:pPr algn="ctr"/>
-            <a:r>
-              <a:rPr sz="1100" b="0">
-                <a:solidFill>
-                  <a:srgbClr val="E0E0E0"/>
-                </a:solidFill>
-                <a:latin typeface="Inter"/>
-              </a:rPr>
-              <a:t>21</a:t>
-            </a:r>
-          </a:p>
-        </p:txBody>
-      </p:sp>
-      <p:sp>
-        <p:nvSpPr>
-          <p:cNvPr id="39" name="Rectangle 38"/>
-          <p:cNvSpPr/>
-          <p:nvPr/>
-        </p:nvSpPr>
-        <p:spPr>
-          <a:xfrm>
-            <a:off x="4087368" y="2560320"/>
-            <a:ext cx="1344168" cy="502920"/>
-          </a:xfrm>
-          <a:prstGeom prst="rect">
-            <a:avLst/>
-          </a:prstGeom>
-          <a:solidFill>
-            <a:srgbClr val="0F0F1A"/>
-          </a:solidFill>
-          <a:ln>
-            <a:noFill/>
-          </a:ln>
-          <a:effectLst/>
-        </p:spPr>
-        <p:style>
-          <a:lnRef idx="1">
-            <a:schemeClr val="accent1"/>
-          </a:lnRef>
-          <a:fillRef idx="3">
-            <a:schemeClr val="accent1"/>
-          </a:fillRef>
-          <a:effectRef idx="2">
-            <a:schemeClr val="accent1"/>
-          </a:effectRef>
-          <a:fontRef idx="minor">
-            <a:schemeClr val="lt1"/>
-          </a:fontRef>
-        </p:style>
-        <p:txBody>
-          <a:bodyPr rtlCol="0" anchor="ctr"/>
-          <a:lstStyle/>
-          <a:p>
-            <a:pPr algn="ctr"/>
-          </a:p>
-        </p:txBody>
-      </p:sp>
-      <p:sp>
-        <p:nvSpPr>
-          <p:cNvPr id="40" name="TextBox 39"/>
-          <p:cNvSpPr txBox="1"/>
-          <p:nvPr/>
-        </p:nvSpPr>
-        <p:spPr>
-          <a:xfrm>
-            <a:off x="4087368" y="2560320"/>
-            <a:ext cx="1344168" cy="502920"/>
-          </a:xfrm>
-          <a:prstGeom prst="rect">
-            <a:avLst/>
-          </a:prstGeom>
-          <a:noFill/>
-        </p:spPr>
-        <p:txBody>
-          <a:bodyPr wrap="square" anchor="ctr" lIns="25400" rIns="25400">
-            <a:spAutoFit/>
-          </a:bodyPr>
-          <a:lstStyle/>
-          <a:p>
-            <a:pPr algn="ctr"/>
-            <a:r>
-              <a:rPr sz="1100" b="0">
-                <a:solidFill>
-                  <a:srgbClr val="E0E0E0"/>
-                </a:solidFill>
-                <a:latin typeface="Inter"/>
-              </a:rPr>
-              <a:t>1</a:t>
-            </a:r>
-          </a:p>
-        </p:txBody>
-      </p:sp>
-      <p:sp>
-        <p:nvSpPr>
-          <p:cNvPr id="41" name="Rectangle 40"/>
-          <p:cNvSpPr/>
-          <p:nvPr/>
-        </p:nvSpPr>
-        <p:spPr>
-          <a:xfrm>
-            <a:off x="5431536" y="2560320"/>
-            <a:ext cx="1232154" cy="502920"/>
-          </a:xfrm>
-          <a:prstGeom prst="rect">
-            <a:avLst/>
-          </a:prstGeom>
-          <a:solidFill>
-            <a:srgbClr val="0F0F1A"/>
-          </a:solidFill>
-          <a:ln>
-            <a:noFill/>
-          </a:ln>
-          <a:effectLst/>
-        </p:spPr>
-        <p:style>
-          <a:lnRef idx="1">
-            <a:schemeClr val="accent1"/>
-          </a:lnRef>
-          <a:fillRef idx="3">
-            <a:schemeClr val="accent1"/>
-          </a:fillRef>
-          <a:effectRef idx="2">
-            <a:schemeClr val="accent1"/>
-          </a:effectRef>
-          <a:fontRef idx="minor">
-            <a:schemeClr val="lt1"/>
-          </a:fontRef>
-        </p:style>
-        <p:txBody>
-          <a:bodyPr rtlCol="0" anchor="ctr"/>
-          <a:lstStyle/>
-          <a:p>
-            <a:pPr algn="ctr"/>
-          </a:p>
-        </p:txBody>
-      </p:sp>
-      <p:sp>
-        <p:nvSpPr>
-          <p:cNvPr id="42" name="TextBox 41"/>
-          <p:cNvSpPr txBox="1"/>
-          <p:nvPr/>
-        </p:nvSpPr>
-        <p:spPr>
-          <a:xfrm>
-            <a:off x="5431536" y="2560320"/>
-            <a:ext cx="1232154" cy="502920"/>
-          </a:xfrm>
-          <a:prstGeom prst="rect">
-            <a:avLst/>
-          </a:prstGeom>
-          <a:noFill/>
-        </p:spPr>
-        <p:txBody>
-          <a:bodyPr wrap="square" anchor="ctr" lIns="25400" rIns="25400">
-            <a:spAutoFit/>
-          </a:bodyPr>
-          <a:lstStyle/>
-          <a:p>
-            <a:pPr algn="ctr"/>
-            <a:r>
-              <a:rPr sz="1100" b="0">
-                <a:solidFill>
-                  <a:srgbClr val="E0E0E0"/>
-                </a:solidFill>
-                <a:latin typeface="Inter"/>
-              </a:rPr>
-              <a:t>20</a:t>
-            </a:r>
-          </a:p>
-        </p:txBody>
-      </p:sp>
-      <p:sp>
-        <p:nvSpPr>
-          <p:cNvPr id="43" name="Rectangle 42"/>
-          <p:cNvSpPr/>
-          <p:nvPr/>
-        </p:nvSpPr>
-        <p:spPr>
-          <a:xfrm>
-            <a:off x="6663690" y="2560320"/>
-            <a:ext cx="1680210" cy="502920"/>
-          </a:xfrm>
-          <a:prstGeom prst="rect">
-            <a:avLst/>
-          </a:prstGeom>
-          <a:solidFill>
-            <a:srgbClr val="0F0F1A"/>
-          </a:solidFill>
-          <a:ln>
-            <a:noFill/>
-          </a:ln>
-          <a:effectLst/>
-        </p:spPr>
-        <p:style>
-          <a:lnRef idx="1">
-            <a:schemeClr val="accent1"/>
-          </a:lnRef>
-          <a:fillRef idx="3">
-            <a:schemeClr val="accent1"/>
-          </a:fillRef>
-          <a:effectRef idx="2">
-            <a:schemeClr val="accent1"/>
-          </a:effectRef>
-          <a:fontRef idx="minor">
-            <a:schemeClr val="lt1"/>
-          </a:fontRef>
-        </p:style>
-        <p:txBody>
-          <a:bodyPr rtlCol="0" anchor="ctr"/>
-          <a:lstStyle/>
-          <a:p>
-            <a:pPr algn="ctr"/>
-          </a:p>
-        </p:txBody>
-      </p:sp>
-      <p:sp>
-        <p:nvSpPr>
-          <p:cNvPr id="44" name="TextBox 43"/>
-          <p:cNvSpPr txBox="1"/>
-          <p:nvPr/>
-        </p:nvSpPr>
-        <p:spPr>
-          <a:xfrm>
-            <a:off x="6663690" y="2560320"/>
-            <a:ext cx="1680210" cy="502920"/>
-          </a:xfrm>
-          <a:prstGeom prst="rect">
-            <a:avLst/>
-          </a:prstGeom>
-          <a:noFill/>
-        </p:spPr>
-        <p:txBody>
-          <a:bodyPr wrap="square" anchor="ctr" lIns="25400" rIns="25400">
-            <a:spAutoFit/>
-          </a:bodyPr>
-          <a:lstStyle/>
-          <a:p>
-            <a:pPr algn="ctr"/>
-            <a:r>
-              <a:rPr sz="1100" b="0">
-                <a:solidFill>
-                  <a:srgbClr val="E0E0E0"/>
-                </a:solidFill>
-                <a:latin typeface="Inter"/>
-              </a:rPr>
-              <a:t>17/07/2026</a:t>
-            </a:r>
-          </a:p>
-        </p:txBody>
-      </p:sp>
-      <p:sp>
-        <p:nvSpPr>
-          <p:cNvPr id="45" name="Rectangle 44"/>
-          <p:cNvSpPr/>
-          <p:nvPr/>
-        </p:nvSpPr>
-        <p:spPr>
-          <a:xfrm>
-            <a:off x="8343900" y="2560320"/>
-            <a:ext cx="1680210" cy="502920"/>
-          </a:xfrm>
-          <a:prstGeom prst="rect">
-            <a:avLst/>
-          </a:prstGeom>
-          <a:solidFill>
-            <a:srgbClr val="0F0F1A"/>
-          </a:solidFill>
-          <a:ln>
-            <a:noFill/>
-          </a:ln>
-          <a:effectLst/>
-        </p:spPr>
-        <p:style>
-          <a:lnRef idx="1">
-            <a:schemeClr val="accent1"/>
-          </a:lnRef>
-          <a:fillRef idx="3">
-            <a:schemeClr val="accent1"/>
-          </a:fillRef>
-          <a:effectRef idx="2">
-            <a:schemeClr val="accent1"/>
-          </a:effectRef>
-          <a:fontRef idx="minor">
-            <a:schemeClr val="lt1"/>
-          </a:fontRef>
-        </p:style>
-        <p:txBody>
-          <a:bodyPr rtlCol="0" anchor="ctr"/>
-          <a:lstStyle/>
-          <a:p>
-            <a:pPr algn="ctr"/>
-          </a:p>
-        </p:txBody>
-      </p:sp>
-      <p:sp>
-        <p:nvSpPr>
-          <p:cNvPr id="46" name="TextBox 45"/>
-          <p:cNvSpPr txBox="1"/>
-          <p:nvPr/>
-        </p:nvSpPr>
-        <p:spPr>
-          <a:xfrm>
-            <a:off x="8343900" y="2560320"/>
-            <a:ext cx="1680210" cy="502920"/>
-          </a:xfrm>
-          <a:prstGeom prst="rect">
-            <a:avLst/>
-          </a:prstGeom>
-          <a:noFill/>
-        </p:spPr>
-        <p:txBody>
-          <a:bodyPr wrap="square" anchor="ctr" lIns="25400" rIns="25400">
-            <a:spAutoFit/>
-          </a:bodyPr>
-          <a:lstStyle/>
-          <a:p>
-            <a:pPr algn="ctr"/>
-            <a:r>
-              <a:rPr sz="1100" b="1">
-                <a:solidFill>
-                  <a:srgbClr val="E0E0E0"/>
-                </a:solidFill>
-                <a:latin typeface="Inter"/>
-              </a:rPr>
-              <a:t>30/09/2026</a:t>
-            </a:r>
-          </a:p>
-        </p:txBody>
-      </p:sp>
-      <p:sp>
-        <p:nvSpPr>
-          <p:cNvPr id="47" name="Rectangle 46"/>
-          <p:cNvSpPr/>
-          <p:nvPr/>
-        </p:nvSpPr>
-        <p:spPr>
-          <a:xfrm>
-            <a:off x="10024110" y="2560320"/>
-            <a:ext cx="1680210" cy="502920"/>
-          </a:xfrm>
-          <a:prstGeom prst="rect">
-            <a:avLst/>
-          </a:prstGeom>
-          <a:solidFill>
-            <a:srgbClr val="0F0F1A"/>
-          </a:solidFill>
-          <a:ln>
-            <a:noFill/>
-          </a:ln>
-          <a:effectLst/>
-        </p:spPr>
-        <p:style>
-          <a:lnRef idx="1">
-            <a:schemeClr val="accent1"/>
-          </a:lnRef>
-          <a:fillRef idx="3">
-            <a:schemeClr val="accent1"/>
-          </a:fillRef>
-          <a:effectRef idx="2">
-            <a:schemeClr val="accent1"/>
-          </a:effectRef>
-          <a:fontRef idx="minor">
-            <a:schemeClr val="lt1"/>
-          </a:fontRef>
-        </p:style>
-        <p:txBody>
-          <a:bodyPr rtlCol="0" anchor="ctr"/>
-          <a:lstStyle/>
-          <a:p>
-            <a:pPr algn="ctr"/>
-          </a:p>
-        </p:txBody>
-      </p:sp>
-      <p:sp>
-        <p:nvSpPr>
-          <p:cNvPr id="48" name="TextBox 47"/>
-          <p:cNvSpPr txBox="1"/>
-          <p:nvPr/>
-        </p:nvSpPr>
-        <p:spPr>
-          <a:xfrm>
-            <a:off x="10024110" y="2560320"/>
-            <a:ext cx="1680210" cy="502920"/>
-          </a:xfrm>
-          <a:prstGeom prst="rect">
-            <a:avLst/>
-          </a:prstGeom>
-          <a:noFill/>
-        </p:spPr>
-        <p:txBody>
-          <a:bodyPr wrap="square" anchor="ctr" lIns="25400" rIns="25400">
-            <a:spAutoFit/>
-          </a:bodyPr>
-          <a:lstStyle/>
-          <a:p>
-            <a:pPr algn="ctr"/>
-            <a:r>
-              <a:rPr sz="1100" b="1">
-                <a:solidFill>
-                  <a:srgbClr val="EAB308"/>
-                </a:solidFill>
-                <a:latin typeface="Inter"/>
-              </a:rPr>
-              <a:t>5 urgentes</a:t>
-            </a:r>
-          </a:p>
-        </p:txBody>
-      </p:sp>
-      <p:sp>
-        <p:nvSpPr>
-          <p:cNvPr id="49" name="Rectangle 48"/>
-          <p:cNvSpPr/>
-          <p:nvPr/>
-        </p:nvSpPr>
-        <p:spPr>
-          <a:xfrm>
-            <a:off x="502920" y="3063240"/>
-            <a:ext cx="2240280" cy="502920"/>
-          </a:xfrm>
-          <a:prstGeom prst="rect">
-            <a:avLst/>
-          </a:prstGeom>
-          <a:solidFill>
-            <a:srgbClr val="1E1E30"/>
-          </a:solidFill>
-          <a:ln>
-            <a:noFill/>
-          </a:ln>
-          <a:effectLst/>
-        </p:spPr>
-        <p:style>
-          <a:lnRef idx="1">
-            <a:schemeClr val="accent1"/>
-          </a:lnRef>
-          <a:fillRef idx="3">
-            <a:schemeClr val="accent1"/>
-          </a:fillRef>
-          <a:effectRef idx="2">
-            <a:schemeClr val="accent1"/>
-          </a:effectRef>
-          <a:fontRef idx="minor">
-            <a:schemeClr val="lt1"/>
-          </a:fontRef>
-        </p:style>
-        <p:txBody>
-          <a:bodyPr rtlCol="0" anchor="ctr"/>
-          <a:lstStyle/>
-          <a:p>
-            <a:pPr algn="ctr"/>
-          </a:p>
-        </p:txBody>
-      </p:sp>
-      <p:sp>
-        <p:nvSpPr>
-          <p:cNvPr id="50" name="TextBox 49"/>
-          <p:cNvSpPr txBox="1"/>
-          <p:nvPr/>
-        </p:nvSpPr>
-        <p:spPr>
-          <a:xfrm>
-            <a:off x="502920" y="3063240"/>
-            <a:ext cx="2240280" cy="502920"/>
-          </a:xfrm>
-          <a:prstGeom prst="rect">
-            <a:avLst/>
-          </a:prstGeom>
-          <a:noFill/>
-        </p:spPr>
-        <p:txBody>
-          <a:bodyPr wrap="square" anchor="ctr" lIns="25400" rIns="25400">
-            <a:spAutoFit/>
-          </a:bodyPr>
-          <a:lstStyle/>
-          <a:p>
-            <a:pPr algn="l"/>
-            <a:r>
-              <a:rPr sz="1100" b="1">
-                <a:solidFill>
-                  <a:srgbClr val="22C55E"/>
-                </a:solidFill>
-                <a:latin typeface="Inter"/>
-              </a:rPr>
-              <a:t>Sidrolândia (SDL)</a:t>
-            </a:r>
-          </a:p>
-        </p:txBody>
-      </p:sp>
-      <p:sp>
-        <p:nvSpPr>
-          <p:cNvPr id="51" name="Rectangle 50"/>
-          <p:cNvSpPr/>
-          <p:nvPr/>
-        </p:nvSpPr>
-        <p:spPr>
-          <a:xfrm>
-            <a:off x="2743200" y="3063240"/>
-            <a:ext cx="1344168" cy="502920"/>
-          </a:xfrm>
-          <a:prstGeom prst="rect">
-            <a:avLst/>
-          </a:prstGeom>
-          <a:solidFill>
-            <a:srgbClr val="1E1E30"/>
-          </a:solidFill>
-          <a:ln>
-            <a:noFill/>
-          </a:ln>
-          <a:effectLst/>
-        </p:spPr>
-        <p:style>
-          <a:lnRef idx="1">
-            <a:schemeClr val="accent1"/>
-          </a:lnRef>
-          <a:fillRef idx="3">
-            <a:schemeClr val="accent1"/>
-          </a:fillRef>
-          <a:effectRef idx="2">
-            <a:schemeClr val="accent1"/>
-          </a:effectRef>
-          <a:fontRef idx="minor">
-            <a:schemeClr val="lt1"/>
-          </a:fontRef>
-        </p:style>
-        <p:txBody>
-          <a:bodyPr rtlCol="0" anchor="ctr"/>
-          <a:lstStyle/>
-          <a:p>
-            <a:pPr algn="ctr"/>
-          </a:p>
-        </p:txBody>
-      </p:sp>
-      <p:sp>
-        <p:nvSpPr>
-          <p:cNvPr id="52" name="TextBox 51"/>
-          <p:cNvSpPr txBox="1"/>
-          <p:nvPr/>
-        </p:nvSpPr>
-        <p:spPr>
-          <a:xfrm>
-            <a:off x="2743200" y="3063240"/>
-            <a:ext cx="1344168" cy="502920"/>
-          </a:xfrm>
-          <a:prstGeom prst="rect">
-            <a:avLst/>
-          </a:prstGeom>
-          <a:noFill/>
-        </p:spPr>
-        <p:txBody>
-          <a:bodyPr wrap="square" anchor="ctr" lIns="25400" rIns="25400">
-            <a:spAutoFit/>
-          </a:bodyPr>
-          <a:lstStyle/>
-          <a:p>
-            <a:pPr algn="ctr"/>
-            <a:r>
-              <a:rPr sz="1100" b="0">
-                <a:solidFill>
-                  <a:srgbClr val="E0E0E0"/>
-                </a:solidFill>
-                <a:latin typeface="Inter"/>
-              </a:rPr>
-              <a:t>2</a:t>
-            </a:r>
-          </a:p>
-        </p:txBody>
-      </p:sp>
-      <p:sp>
-        <p:nvSpPr>
-          <p:cNvPr id="53" name="Rectangle 52"/>
-          <p:cNvSpPr/>
-          <p:nvPr/>
-        </p:nvSpPr>
-        <p:spPr>
-          <a:xfrm>
-            <a:off x="4087368" y="3063240"/>
-            <a:ext cx="1344168" cy="502920"/>
-          </a:xfrm>
-          <a:prstGeom prst="rect">
-            <a:avLst/>
-          </a:prstGeom>
-          <a:solidFill>
-            <a:srgbClr val="1E1E30"/>
-          </a:solidFill>
-          <a:ln>
-            <a:noFill/>
-          </a:ln>
-          <a:effectLst/>
-        </p:spPr>
-        <p:style>
-          <a:lnRef idx="1">
-            <a:schemeClr val="accent1"/>
-          </a:lnRef>
-          <a:fillRef idx="3">
-            <a:schemeClr val="accent1"/>
-          </a:fillRef>
-          <a:effectRef idx="2">
-            <a:schemeClr val="accent1"/>
-          </a:effectRef>
-          <a:fontRef idx="minor">
-            <a:schemeClr val="lt1"/>
-          </a:fontRef>
-        </p:style>
-        <p:txBody>
-          <a:bodyPr rtlCol="0" anchor="ctr"/>
-          <a:lstStyle/>
-          <a:p>
-            <a:pPr algn="ctr"/>
-          </a:p>
-        </p:txBody>
-      </p:sp>
-      <p:sp>
-        <p:nvSpPr>
-          <p:cNvPr id="54" name="TextBox 53"/>
-          <p:cNvSpPr txBox="1"/>
-          <p:nvPr/>
-        </p:nvSpPr>
-        <p:spPr>
-          <a:xfrm>
-            <a:off x="4087368" y="3063240"/>
-            <a:ext cx="1344168" cy="502920"/>
-          </a:xfrm>
-          <a:prstGeom prst="rect">
-            <a:avLst/>
-          </a:prstGeom>
-          <a:noFill/>
-        </p:spPr>
-        <p:txBody>
-          <a:bodyPr wrap="square" anchor="ctr" lIns="25400" rIns="25400">
-            <a:spAutoFit/>
-          </a:bodyPr>
-          <a:lstStyle/>
-          <a:p>
-            <a:pPr algn="ctr"/>
-            <a:r>
-              <a:rPr sz="1100" b="0">
-                <a:solidFill>
-                  <a:srgbClr val="E0E0E0"/>
-                </a:solidFill>
-                <a:latin typeface="Inter"/>
-              </a:rPr>
-              <a:t>0</a:t>
-            </a:r>
-          </a:p>
-        </p:txBody>
-      </p:sp>
-      <p:sp>
-        <p:nvSpPr>
-          <p:cNvPr id="55" name="Rectangle 54"/>
-          <p:cNvSpPr/>
-          <p:nvPr/>
-        </p:nvSpPr>
-        <p:spPr>
-          <a:xfrm>
-            <a:off x="5431536" y="3063240"/>
-            <a:ext cx="1232154" cy="502920"/>
-          </a:xfrm>
-          <a:prstGeom prst="rect">
-            <a:avLst/>
-          </a:prstGeom>
-          <a:solidFill>
-            <a:srgbClr val="1E1E30"/>
-          </a:solidFill>
-          <a:ln>
-            <a:noFill/>
-          </a:ln>
-          <a:effectLst/>
-        </p:spPr>
-        <p:style>
-          <a:lnRef idx="1">
-            <a:schemeClr val="accent1"/>
-          </a:lnRef>
-          <a:fillRef idx="3">
-            <a:schemeClr val="accent1"/>
-          </a:fillRef>
-          <a:effectRef idx="2">
-            <a:schemeClr val="accent1"/>
-          </a:effectRef>
-          <a:fontRef idx="minor">
-            <a:schemeClr val="lt1"/>
-          </a:fontRef>
-        </p:style>
-        <p:txBody>
-          <a:bodyPr rtlCol="0" anchor="ctr"/>
-          <a:lstStyle/>
-          <a:p>
-            <a:pPr algn="ctr"/>
-          </a:p>
-        </p:txBody>
-      </p:sp>
-      <p:sp>
-        <p:nvSpPr>
-          <p:cNvPr id="56" name="TextBox 55"/>
-          <p:cNvSpPr txBox="1"/>
-          <p:nvPr/>
-        </p:nvSpPr>
-        <p:spPr>
-          <a:xfrm>
-            <a:off x="5431536" y="3063240"/>
-            <a:ext cx="1232154" cy="502920"/>
-          </a:xfrm>
-          <a:prstGeom prst="rect">
-            <a:avLst/>
-          </a:prstGeom>
-          <a:noFill/>
-        </p:spPr>
-        <p:txBody>
-          <a:bodyPr wrap="square" anchor="ctr" lIns="25400" rIns="25400">
-            <a:spAutoFit/>
-          </a:bodyPr>
-          <a:lstStyle/>
-          <a:p>
-            <a:pPr algn="ctr"/>
-            <a:r>
-              <a:rPr sz="1100" b="0">
-                <a:solidFill>
-                  <a:srgbClr val="E0E0E0"/>
-                </a:solidFill>
-                <a:latin typeface="Inter"/>
-              </a:rPr>
-              <a:t>2</a:t>
-            </a:r>
-          </a:p>
-        </p:txBody>
-      </p:sp>
-      <p:sp>
-        <p:nvSpPr>
-          <p:cNvPr id="57" name="Rectangle 56"/>
-          <p:cNvSpPr/>
-          <p:nvPr/>
-        </p:nvSpPr>
-        <p:spPr>
-          <a:xfrm>
-            <a:off x="6663690" y="3063240"/>
-            <a:ext cx="1680210" cy="502920"/>
-          </a:xfrm>
-          <a:prstGeom prst="rect">
-            <a:avLst/>
-          </a:prstGeom>
-          <a:solidFill>
-            <a:srgbClr val="1E1E30"/>
-          </a:solidFill>
-          <a:ln>
-            <a:noFill/>
-          </a:ln>
-          <a:effectLst/>
-        </p:spPr>
-        <p:style>
-          <a:lnRef idx="1">
-            <a:schemeClr val="accent1"/>
-          </a:lnRef>
-          <a:fillRef idx="3">
-            <a:schemeClr val="accent1"/>
-          </a:fillRef>
-          <a:effectRef idx="2">
-            <a:schemeClr val="accent1"/>
-          </a:effectRef>
-          <a:fontRef idx="minor">
-            <a:schemeClr val="lt1"/>
-          </a:fontRef>
-        </p:style>
-        <p:txBody>
-          <a:bodyPr rtlCol="0" anchor="ctr"/>
-          <a:lstStyle/>
-          <a:p>
-            <a:pPr algn="ctr"/>
-          </a:p>
-        </p:txBody>
-      </p:sp>
-      <p:sp>
-        <p:nvSpPr>
-          <p:cNvPr id="58" name="TextBox 57"/>
-          <p:cNvSpPr txBox="1"/>
-          <p:nvPr/>
-        </p:nvSpPr>
-        <p:spPr>
-          <a:xfrm>
-            <a:off x="6663690" y="3063240"/>
-            <a:ext cx="1680210" cy="502920"/>
-          </a:xfrm>
-          <a:prstGeom prst="rect">
-            <a:avLst/>
-          </a:prstGeom>
-          <a:noFill/>
-        </p:spPr>
-        <p:txBody>
-          <a:bodyPr wrap="square" anchor="ctr" lIns="25400" rIns="25400">
-            <a:spAutoFit/>
-          </a:bodyPr>
-          <a:lstStyle/>
-          <a:p>
-            <a:pPr algn="ctr"/>
-            <a:r>
-              <a:rPr sz="1100" b="0">
-                <a:solidFill>
-                  <a:srgbClr val="E0E0E0"/>
-                </a:solidFill>
-                <a:latin typeface="Inter"/>
-              </a:rPr>
-              <a:t>17/07/2026</a:t>
-            </a:r>
-          </a:p>
-        </p:txBody>
-      </p:sp>
-      <p:sp>
-        <p:nvSpPr>
-          <p:cNvPr id="59" name="Rectangle 58"/>
-          <p:cNvSpPr/>
-          <p:nvPr/>
-        </p:nvSpPr>
-        <p:spPr>
-          <a:xfrm>
-            <a:off x="8343900" y="3063240"/>
-            <a:ext cx="1680210" cy="502920"/>
-          </a:xfrm>
-          <a:prstGeom prst="rect">
-            <a:avLst/>
-          </a:prstGeom>
-          <a:solidFill>
-            <a:srgbClr val="1E1E30"/>
-          </a:solidFill>
-          <a:ln>
-            <a:noFill/>
-          </a:ln>
-          <a:effectLst/>
-        </p:spPr>
-        <p:style>
-          <a:lnRef idx="1">
-            <a:schemeClr val="accent1"/>
-          </a:lnRef>
-          <a:fillRef idx="3">
-            <a:schemeClr val="accent1"/>
-          </a:fillRef>
-          <a:effectRef idx="2">
-            <a:schemeClr val="accent1"/>
-          </a:effectRef>
-          <a:fontRef idx="minor">
-            <a:schemeClr val="lt1"/>
-          </a:fontRef>
-        </p:style>
-        <p:txBody>
-          <a:bodyPr rtlCol="0" anchor="ctr"/>
-          <a:lstStyle/>
-          <a:p>
-            <a:pPr algn="ctr"/>
-          </a:p>
-        </p:txBody>
-      </p:sp>
-      <p:sp>
-        <p:nvSpPr>
-          <p:cNvPr id="60" name="TextBox 59"/>
-          <p:cNvSpPr txBox="1"/>
-          <p:nvPr/>
-        </p:nvSpPr>
-        <p:spPr>
-          <a:xfrm>
-            <a:off x="8343900" y="3063240"/>
-            <a:ext cx="1680210" cy="502920"/>
-          </a:xfrm>
-          <a:prstGeom prst="rect">
-            <a:avLst/>
-          </a:prstGeom>
-          <a:noFill/>
-        </p:spPr>
-        <p:txBody>
-          <a:bodyPr wrap="square" anchor="ctr" lIns="25400" rIns="25400">
-            <a:spAutoFit/>
-          </a:bodyPr>
-          <a:lstStyle/>
-          <a:p>
-            <a:pPr algn="ctr"/>
-            <a:r>
-              <a:rPr sz="1100" b="1">
-                <a:solidFill>
-                  <a:srgbClr val="E0E0E0"/>
-                </a:solidFill>
-                <a:latin typeface="Inter"/>
-              </a:rPr>
-              <a:t>30/09/2026</a:t>
-            </a:r>
-          </a:p>
-        </p:txBody>
-      </p:sp>
-      <p:sp>
-        <p:nvSpPr>
-          <p:cNvPr id="61" name="Rectangle 60"/>
-          <p:cNvSpPr/>
-          <p:nvPr/>
-        </p:nvSpPr>
-        <p:spPr>
-          <a:xfrm>
-            <a:off x="10024110" y="3063240"/>
-            <a:ext cx="1680210" cy="502920"/>
-          </a:xfrm>
-          <a:prstGeom prst="rect">
-            <a:avLst/>
-          </a:prstGeom>
-          <a:solidFill>
-            <a:srgbClr val="1E1E30"/>
-          </a:solidFill>
-          <a:ln>
-            <a:noFill/>
-          </a:ln>
-          <a:effectLst/>
-        </p:spPr>
-        <p:style>
-          <a:lnRef idx="1">
-            <a:schemeClr val="accent1"/>
-          </a:lnRef>
-          <a:fillRef idx="3">
-            <a:schemeClr val="accent1"/>
-          </a:fillRef>
-          <a:effectRef idx="2">
-            <a:schemeClr val="accent1"/>
-          </a:effectRef>
-          <a:fontRef idx="minor">
-            <a:schemeClr val="lt1"/>
-          </a:fontRef>
-        </p:style>
-        <p:txBody>
-          <a:bodyPr rtlCol="0" anchor="ctr"/>
-          <a:lstStyle/>
-          <a:p>
-            <a:pPr algn="ctr"/>
-          </a:p>
-        </p:txBody>
-      </p:sp>
-      <p:sp>
-        <p:nvSpPr>
-          <p:cNvPr id="62" name="TextBox 61"/>
-          <p:cNvSpPr txBox="1"/>
-          <p:nvPr/>
-        </p:nvSpPr>
-        <p:spPr>
-          <a:xfrm>
-            <a:off x="10024110" y="3063240"/>
-            <a:ext cx="1680210" cy="502920"/>
-          </a:xfrm>
-          <a:prstGeom prst="rect">
-            <a:avLst/>
-          </a:prstGeom>
-          <a:noFill/>
-        </p:spPr>
-        <p:txBody>
-          <a:bodyPr wrap="square" anchor="ctr" lIns="25400" rIns="25400">
-            <a:spAutoFit/>
-          </a:bodyPr>
-          <a:lstStyle/>
-          <a:p>
-            <a:pPr algn="ctr"/>
-            <a:r>
-              <a:rPr sz="1100" b="1">
-                <a:solidFill>
-                  <a:srgbClr val="EAB308"/>
-                </a:solidFill>
-                <a:latin typeface="Inter"/>
-              </a:rPr>
-              <a:t>1 urgentes</a:t>
-            </a:r>
-          </a:p>
-        </p:txBody>
-      </p:sp>
-      <p:sp>
-        <p:nvSpPr>
-          <p:cNvPr id="63" name="Rectangle 62"/>
-          <p:cNvSpPr/>
-          <p:nvPr/>
-        </p:nvSpPr>
-        <p:spPr>
-          <a:xfrm>
-            <a:off x="502920" y="3566160"/>
-            <a:ext cx="2240280" cy="502920"/>
-          </a:xfrm>
-          <a:prstGeom prst="rect">
-            <a:avLst/>
-          </a:prstGeom>
-          <a:solidFill>
-            <a:srgbClr val="0F0F1A"/>
-          </a:solidFill>
-          <a:ln>
-            <a:noFill/>
-          </a:ln>
-          <a:effectLst/>
-        </p:spPr>
-        <p:style>
-          <a:lnRef idx="1">
-            <a:schemeClr val="accent1"/>
-          </a:lnRef>
-          <a:fillRef idx="3">
-            <a:schemeClr val="accent1"/>
-          </a:fillRef>
-          <a:effectRef idx="2">
-            <a:schemeClr val="accent1"/>
-          </a:effectRef>
-          <a:fontRef idx="minor">
-            <a:schemeClr val="lt1"/>
-          </a:fontRef>
-        </p:style>
-        <p:txBody>
-          <a:bodyPr rtlCol="0" anchor="ctr"/>
-          <a:lstStyle/>
-          <a:p>
-            <a:pPr algn="ctr"/>
-          </a:p>
-        </p:txBody>
-      </p:sp>
-      <p:sp>
-        <p:nvSpPr>
-          <p:cNvPr id="64" name="TextBox 63"/>
-          <p:cNvSpPr txBox="1"/>
-          <p:nvPr/>
-        </p:nvSpPr>
-        <p:spPr>
-          <a:xfrm>
-            <a:off x="502920" y="3566160"/>
-            <a:ext cx="2240280" cy="502920"/>
-          </a:xfrm>
-          <a:prstGeom prst="rect">
-            <a:avLst/>
-          </a:prstGeom>
-          <a:noFill/>
-        </p:spPr>
-        <p:txBody>
-          <a:bodyPr wrap="square" anchor="ctr" lIns="25400" rIns="25400">
-            <a:spAutoFit/>
-          </a:bodyPr>
-          <a:lstStyle/>
-          <a:p>
-            <a:pPr algn="l"/>
-            <a:r>
-              <a:rPr sz="1100" b="1">
-                <a:solidFill>
-                  <a:srgbClr val="A855F7"/>
-                </a:solidFill>
-                <a:latin typeface="Inter"/>
-              </a:rPr>
-              <a:t>Balsas (BLS)</a:t>
-            </a:r>
-          </a:p>
-        </p:txBody>
-      </p:sp>
-      <p:sp>
-        <p:nvSpPr>
-          <p:cNvPr id="65" name="Rectangle 64"/>
-          <p:cNvSpPr/>
-          <p:nvPr/>
-        </p:nvSpPr>
-        <p:spPr>
-          <a:xfrm>
-            <a:off x="2743200" y="3566160"/>
-            <a:ext cx="1344168" cy="502920"/>
-          </a:xfrm>
-          <a:prstGeom prst="rect">
-            <a:avLst/>
-          </a:prstGeom>
-          <a:solidFill>
-            <a:srgbClr val="0F0F1A"/>
-          </a:solidFill>
-          <a:ln>
-            <a:noFill/>
-          </a:ln>
-          <a:effectLst/>
-        </p:spPr>
-        <p:style>
-          <a:lnRef idx="1">
-            <a:schemeClr val="accent1"/>
-          </a:lnRef>
-          <a:fillRef idx="3">
-            <a:schemeClr val="accent1"/>
-          </a:fillRef>
-          <a:effectRef idx="2">
-            <a:schemeClr val="accent1"/>
-          </a:effectRef>
-          <a:fontRef idx="minor">
-            <a:schemeClr val="lt1"/>
-          </a:fontRef>
-        </p:style>
-        <p:txBody>
-          <a:bodyPr rtlCol="0" anchor="ctr"/>
-          <a:lstStyle/>
-          <a:p>
-            <a:pPr algn="ctr"/>
-          </a:p>
-        </p:txBody>
-      </p:sp>
-      <p:sp>
-        <p:nvSpPr>
-          <p:cNvPr id="66" name="TextBox 65"/>
-          <p:cNvSpPr txBox="1"/>
-          <p:nvPr/>
-        </p:nvSpPr>
-        <p:spPr>
-          <a:xfrm>
-            <a:off x="2743200" y="3566160"/>
-            <a:ext cx="1344168" cy="502920"/>
-          </a:xfrm>
-          <a:prstGeom prst="rect">
-            <a:avLst/>
-          </a:prstGeom>
-          <a:noFill/>
-        </p:spPr>
-        <p:txBody>
-          <a:bodyPr wrap="square" anchor="ctr" lIns="25400" rIns="25400">
-            <a:spAutoFit/>
-          </a:bodyPr>
-          <a:lstStyle/>
-          <a:p>
-            <a:pPr algn="ctr"/>
-            <a:r>
-              <a:rPr sz="1100" b="0">
-                <a:solidFill>
-                  <a:srgbClr val="E0E0E0"/>
-                </a:solidFill>
-                <a:latin typeface="Inter"/>
-              </a:rPr>
-              <a:t>5</a:t>
-            </a:r>
-          </a:p>
-        </p:txBody>
-      </p:sp>
-      <p:sp>
-        <p:nvSpPr>
-          <p:cNvPr id="67" name="Rectangle 66"/>
-          <p:cNvSpPr/>
-          <p:nvPr/>
-        </p:nvSpPr>
-        <p:spPr>
-          <a:xfrm>
-            <a:off x="4087368" y="3566160"/>
-            <a:ext cx="1344168" cy="502920"/>
-          </a:xfrm>
-          <a:prstGeom prst="rect">
-            <a:avLst/>
-          </a:prstGeom>
-          <a:solidFill>
-            <a:srgbClr val="0F0F1A"/>
-          </a:solidFill>
-          <a:ln>
-            <a:noFill/>
-          </a:ln>
-          <a:effectLst/>
-        </p:spPr>
-        <p:style>
-          <a:lnRef idx="1">
-            <a:schemeClr val="accent1"/>
-          </a:lnRef>
-          <a:fillRef idx="3">
-            <a:schemeClr val="accent1"/>
-          </a:fillRef>
-          <a:effectRef idx="2">
-            <a:schemeClr val="accent1"/>
-          </a:effectRef>
-          <a:fontRef idx="minor">
-            <a:schemeClr val="lt1"/>
-          </a:fontRef>
-        </p:style>
-        <p:txBody>
-          <a:bodyPr rtlCol="0" anchor="ctr"/>
-          <a:lstStyle/>
-          <a:p>
-            <a:pPr algn="ctr"/>
-          </a:p>
-        </p:txBody>
-      </p:sp>
-      <p:sp>
-        <p:nvSpPr>
-          <p:cNvPr id="68" name="TextBox 67"/>
-          <p:cNvSpPr txBox="1"/>
-          <p:nvPr/>
-        </p:nvSpPr>
-        <p:spPr>
-          <a:xfrm>
-            <a:off x="4087368" y="3566160"/>
-            <a:ext cx="1344168" cy="502920"/>
-          </a:xfrm>
-          <a:prstGeom prst="rect">
-            <a:avLst/>
-          </a:prstGeom>
-          <a:noFill/>
-        </p:spPr>
-        <p:txBody>
-          <a:bodyPr wrap="square" anchor="ctr" lIns="25400" rIns="25400">
-            <a:spAutoFit/>
-          </a:bodyPr>
-          <a:lstStyle/>
-          <a:p>
-            <a:pPr algn="ctr"/>
-            <a:r>
-              <a:rPr sz="1100" b="0">
-                <a:solidFill>
-                  <a:srgbClr val="E0E0E0"/>
-                </a:solidFill>
-                <a:latin typeface="Inter"/>
-              </a:rPr>
-              <a:t>1</a:t>
-            </a:r>
-          </a:p>
-        </p:txBody>
-      </p:sp>
-      <p:sp>
-        <p:nvSpPr>
-          <p:cNvPr id="69" name="Rectangle 68"/>
-          <p:cNvSpPr/>
-          <p:nvPr/>
-        </p:nvSpPr>
-        <p:spPr>
-          <a:xfrm>
-            <a:off x="5431536" y="3566160"/>
-            <a:ext cx="1232154" cy="502920"/>
-          </a:xfrm>
-          <a:prstGeom prst="rect">
-            <a:avLst/>
-          </a:prstGeom>
-          <a:solidFill>
-            <a:srgbClr val="0F0F1A"/>
-          </a:solidFill>
-          <a:ln>
-            <a:noFill/>
-          </a:ln>
-          <a:effectLst/>
-        </p:spPr>
-        <p:style>
-          <a:lnRef idx="1">
-            <a:schemeClr val="accent1"/>
-          </a:lnRef>
-          <a:fillRef idx="3">
-            <a:schemeClr val="accent1"/>
-          </a:fillRef>
-          <a:effectRef idx="2">
-            <a:schemeClr val="accent1"/>
-          </a:effectRef>
-          <a:fontRef idx="minor">
-            <a:schemeClr val="lt1"/>
-          </a:fontRef>
-        </p:style>
-        <p:txBody>
-          <a:bodyPr rtlCol="0" anchor="ctr"/>
-          <a:lstStyle/>
-          <a:p>
-            <a:pPr algn="ctr"/>
-          </a:p>
-        </p:txBody>
-      </p:sp>
-      <p:sp>
-        <p:nvSpPr>
-          <p:cNvPr id="70" name="TextBox 69"/>
-          <p:cNvSpPr txBox="1"/>
-          <p:nvPr/>
-        </p:nvSpPr>
-        <p:spPr>
-          <a:xfrm>
-            <a:off x="5431536" y="3566160"/>
-            <a:ext cx="1232154" cy="502920"/>
-          </a:xfrm>
-          <a:prstGeom prst="rect">
-            <a:avLst/>
-          </a:prstGeom>
-          <a:noFill/>
-        </p:spPr>
-        <p:txBody>
-          <a:bodyPr wrap="square" anchor="ctr" lIns="25400" rIns="25400">
-            <a:spAutoFit/>
-          </a:bodyPr>
-          <a:lstStyle/>
-          <a:p>
-            <a:pPr algn="ctr"/>
-            <a:r>
-              <a:rPr sz="1100" b="0">
-                <a:solidFill>
-                  <a:srgbClr val="E0E0E0"/>
-                </a:solidFill>
-                <a:latin typeface="Inter"/>
-              </a:rPr>
-              <a:t>4</a:t>
-            </a:r>
-          </a:p>
-        </p:txBody>
-      </p:sp>
-      <p:sp>
-        <p:nvSpPr>
-          <p:cNvPr id="71" name="Rectangle 70"/>
-          <p:cNvSpPr/>
-          <p:nvPr/>
-        </p:nvSpPr>
-        <p:spPr>
-          <a:xfrm>
-            <a:off x="6663690" y="3566160"/>
-            <a:ext cx="1680210" cy="502920"/>
-          </a:xfrm>
-          <a:prstGeom prst="rect">
-            <a:avLst/>
-          </a:prstGeom>
-          <a:solidFill>
-            <a:srgbClr val="0F0F1A"/>
-          </a:solidFill>
-          <a:ln>
-            <a:noFill/>
-          </a:ln>
-          <a:effectLst/>
-        </p:spPr>
-        <p:style>
-          <a:lnRef idx="1">
-            <a:schemeClr val="accent1"/>
-          </a:lnRef>
-          <a:fillRef idx="3">
-            <a:schemeClr val="accent1"/>
-          </a:fillRef>
-          <a:effectRef idx="2">
-            <a:schemeClr val="accent1"/>
-          </a:effectRef>
-          <a:fontRef idx="minor">
-            <a:schemeClr val="lt1"/>
-          </a:fontRef>
-        </p:style>
-        <p:txBody>
-          <a:bodyPr rtlCol="0" anchor="ctr"/>
-          <a:lstStyle/>
-          <a:p>
-            <a:pPr algn="ctr"/>
-          </a:p>
-        </p:txBody>
-      </p:sp>
-      <p:sp>
-        <p:nvSpPr>
-          <p:cNvPr id="72" name="TextBox 71"/>
-          <p:cNvSpPr txBox="1"/>
-          <p:nvPr/>
-        </p:nvSpPr>
-        <p:spPr>
-          <a:xfrm>
-            <a:off x="6663690" y="3566160"/>
-            <a:ext cx="1680210" cy="502920"/>
-          </a:xfrm>
-          <a:prstGeom prst="rect">
-            <a:avLst/>
-          </a:prstGeom>
-          <a:noFill/>
-        </p:spPr>
-        <p:txBody>
-          <a:bodyPr wrap="square" anchor="ctr" lIns="25400" rIns="25400">
-            <a:spAutoFit/>
-          </a:bodyPr>
-          <a:lstStyle/>
-          <a:p>
-            <a:pPr algn="ctr"/>
-            <a:r>
-              <a:rPr sz="1100" b="0">
-                <a:solidFill>
-                  <a:srgbClr val="E0E0E0"/>
-                </a:solidFill>
-                <a:latin typeface="Inter"/>
-              </a:rPr>
-              <a:t>17/07/2026</a:t>
-            </a:r>
-          </a:p>
-        </p:txBody>
-      </p:sp>
-      <p:sp>
-        <p:nvSpPr>
-          <p:cNvPr id="73" name="Rectangle 72"/>
-          <p:cNvSpPr/>
-          <p:nvPr/>
-        </p:nvSpPr>
-        <p:spPr>
-          <a:xfrm>
-            <a:off x="8343900" y="3566160"/>
-            <a:ext cx="1680210" cy="502920"/>
-          </a:xfrm>
-          <a:prstGeom prst="rect">
-            <a:avLst/>
-          </a:prstGeom>
-          <a:solidFill>
-            <a:srgbClr val="0F0F1A"/>
-          </a:solidFill>
-          <a:ln>
-            <a:noFill/>
-          </a:ln>
-          <a:effectLst/>
-        </p:spPr>
-        <p:style>
-          <a:lnRef idx="1">
-            <a:schemeClr val="accent1"/>
-          </a:lnRef>
-          <a:fillRef idx="3">
-            <a:schemeClr val="accent1"/>
-          </a:fillRef>
-          <a:effectRef idx="2">
-            <a:schemeClr val="accent1"/>
-          </a:effectRef>
-          <a:fontRef idx="minor">
-            <a:schemeClr val="lt1"/>
-          </a:fontRef>
-        </p:style>
-        <p:txBody>
-          <a:bodyPr rtlCol="0" anchor="ctr"/>
-          <a:lstStyle/>
-          <a:p>
-            <a:pPr algn="ctr"/>
-          </a:p>
-        </p:txBody>
-      </p:sp>
-      <p:sp>
-        <p:nvSpPr>
-          <p:cNvPr id="74" name="TextBox 73"/>
-          <p:cNvSpPr txBox="1"/>
-          <p:nvPr/>
-        </p:nvSpPr>
-        <p:spPr>
-          <a:xfrm>
-            <a:off x="8343900" y="3566160"/>
-            <a:ext cx="1680210" cy="502920"/>
-          </a:xfrm>
-          <a:prstGeom prst="rect">
-            <a:avLst/>
-          </a:prstGeom>
-          <a:noFill/>
-        </p:spPr>
-        <p:txBody>
-          <a:bodyPr wrap="square" anchor="ctr" lIns="25400" rIns="25400">
-            <a:spAutoFit/>
-          </a:bodyPr>
-          <a:lstStyle/>
-          <a:p>
-            <a:pPr algn="ctr"/>
-            <a:r>
-              <a:rPr sz="1100" b="1">
-                <a:solidFill>
-                  <a:srgbClr val="E0E0E0"/>
-                </a:solidFill>
-                <a:latin typeface="Inter"/>
-              </a:rPr>
-              <a:t>30/09/2026</a:t>
-            </a:r>
-          </a:p>
-        </p:txBody>
-      </p:sp>
-      <p:sp>
-        <p:nvSpPr>
-          <p:cNvPr id="75" name="Rectangle 74"/>
-          <p:cNvSpPr/>
-          <p:nvPr/>
-        </p:nvSpPr>
-        <p:spPr>
-          <a:xfrm>
-            <a:off x="10024110" y="3566160"/>
-            <a:ext cx="1680210" cy="502920"/>
-          </a:xfrm>
-          <a:prstGeom prst="rect">
-            <a:avLst/>
-          </a:prstGeom>
-          <a:solidFill>
-            <a:srgbClr val="0F0F1A"/>
-          </a:solidFill>
-          <a:ln>
-            <a:noFill/>
-          </a:ln>
-          <a:effectLst/>
-        </p:spPr>
-        <p:style>
-          <a:lnRef idx="1">
-            <a:schemeClr val="accent1"/>
-          </a:lnRef>
-          <a:fillRef idx="3">
-            <a:schemeClr val="accent1"/>
-          </a:fillRef>
-          <a:effectRef idx="2">
-            <a:schemeClr val="accent1"/>
-          </a:effectRef>
-          <a:fontRef idx="minor">
-            <a:schemeClr val="lt1"/>
-          </a:fontRef>
-        </p:style>
-        <p:txBody>
-          <a:bodyPr rtlCol="0" anchor="ctr"/>
-          <a:lstStyle/>
-          <a:p>
-            <a:pPr algn="ctr"/>
-          </a:p>
-        </p:txBody>
-      </p:sp>
-      <p:sp>
-        <p:nvSpPr>
-          <p:cNvPr id="76" name="TextBox 75"/>
-          <p:cNvSpPr txBox="1"/>
-          <p:nvPr/>
-        </p:nvSpPr>
-        <p:spPr>
-          <a:xfrm>
-            <a:off x="10024110" y="3566160"/>
-            <a:ext cx="1680210" cy="502920"/>
-          </a:xfrm>
-          <a:prstGeom prst="rect">
-            <a:avLst/>
-          </a:prstGeom>
-          <a:noFill/>
-        </p:spPr>
-        <p:txBody>
-          <a:bodyPr wrap="square" anchor="ctr" lIns="25400" rIns="25400">
-            <a:spAutoFit/>
-          </a:bodyPr>
-          <a:lstStyle/>
-          <a:p>
-            <a:pPr algn="ctr"/>
-            <a:r>
-              <a:rPr sz="1100" b="1">
-                <a:solidFill>
-                  <a:srgbClr val="EAB308"/>
-                </a:solidFill>
-                <a:latin typeface="Inter"/>
-              </a:rPr>
-              <a:t>3 urgentes</a:t>
-            </a:r>
-          </a:p>
-        </p:txBody>
-      </p:sp>
-      <p:sp>
-        <p:nvSpPr>
-          <p:cNvPr id="77" name="Rectangle 76"/>
-          <p:cNvSpPr/>
-          <p:nvPr/>
-        </p:nvSpPr>
-        <p:spPr>
-          <a:xfrm>
-            <a:off x="502920" y="4069080"/>
-            <a:ext cx="2240280" cy="502920"/>
-          </a:xfrm>
-          <a:prstGeom prst="rect">
-            <a:avLst/>
-          </a:prstGeom>
-          <a:solidFill>
-            <a:srgbClr val="F97316"/>
-          </a:solidFill>
-          <a:ln>
-            <a:noFill/>
-          </a:ln>
-          <a:effectLst/>
-        </p:spPr>
-        <p:style>
-          <a:lnRef idx="1">
-            <a:schemeClr val="accent1"/>
-          </a:lnRef>
-          <a:fillRef idx="3">
-            <a:schemeClr val="accent1"/>
-          </a:fillRef>
-          <a:effectRef idx="2">
-            <a:schemeClr val="accent1"/>
-          </a:effectRef>
-          <a:fontRef idx="minor">
-            <a:schemeClr val="lt1"/>
-          </a:fontRef>
-        </p:style>
-        <p:txBody>
-          <a:bodyPr rtlCol="0" anchor="ctr"/>
-          <a:lstStyle/>
-          <a:p>
-            <a:pPr algn="ctr"/>
-          </a:p>
-        </p:txBody>
-      </p:sp>
-      <p:sp>
-        <p:nvSpPr>
-          <p:cNvPr id="78" name="TextBox 77"/>
-          <p:cNvSpPr txBox="1"/>
-          <p:nvPr/>
-        </p:nvSpPr>
-        <p:spPr>
-          <a:xfrm>
-            <a:off x="502920" y="4069080"/>
-            <a:ext cx="2240280" cy="502920"/>
-          </a:xfrm>
-          <a:prstGeom prst="rect">
-            <a:avLst/>
-          </a:prstGeom>
-          <a:noFill/>
-        </p:spPr>
-        <p:txBody>
-          <a:bodyPr wrap="square" anchor="ctr" lIns="25400" rIns="25400">
-            <a:spAutoFit/>
-          </a:bodyPr>
-          <a:lstStyle/>
-          <a:p>
-            <a:pPr algn="l"/>
-            <a:r>
-              <a:rPr sz="1100" b="1">
-                <a:solidFill>
-                  <a:srgbClr val="0F0F1A"/>
-                </a:solidFill>
-                <a:latin typeface="Inter"/>
-              </a:rPr>
-              <a:t>TOTAL (4 unidades)</a:t>
-            </a:r>
-          </a:p>
-        </p:txBody>
-      </p:sp>
-      <p:sp>
-        <p:nvSpPr>
-          <p:cNvPr id="79" name="Rectangle 78"/>
-          <p:cNvSpPr/>
-          <p:nvPr/>
-        </p:nvSpPr>
-        <p:spPr>
-          <a:xfrm>
-            <a:off x="2743200" y="4069080"/>
-            <a:ext cx="1344168" cy="502920"/>
-          </a:xfrm>
-          <a:prstGeom prst="rect">
-            <a:avLst/>
-          </a:prstGeom>
-          <a:solidFill>
-            <a:srgbClr val="F97316"/>
-          </a:solidFill>
-          <a:ln>
-            <a:noFill/>
-          </a:ln>
-          <a:effectLst/>
-        </p:spPr>
-        <p:style>
-          <a:lnRef idx="1">
-            <a:schemeClr val="accent1"/>
-          </a:lnRef>
-          <a:fillRef idx="3">
-            <a:schemeClr val="accent1"/>
-          </a:fillRef>
-          <a:effectRef idx="2">
-            <a:schemeClr val="accent1"/>
-          </a:effectRef>
-          <a:fontRef idx="minor">
-            <a:schemeClr val="lt1"/>
-          </a:fontRef>
-        </p:style>
-        <p:txBody>
-          <a:bodyPr rtlCol="0" anchor="ctr"/>
-          <a:lstStyle/>
-          <a:p>
-            <a:pPr algn="ctr"/>
-          </a:p>
-        </p:txBody>
-      </p:sp>
-      <p:sp>
-        <p:nvSpPr>
-          <p:cNvPr id="80" name="TextBox 79"/>
-          <p:cNvSpPr txBox="1"/>
-          <p:nvPr/>
-        </p:nvSpPr>
-        <p:spPr>
-          <a:xfrm>
-            <a:off x="2743200" y="4069080"/>
-            <a:ext cx="1344168" cy="502920"/>
-          </a:xfrm>
-          <a:prstGeom prst="rect">
-            <a:avLst/>
-          </a:prstGeom>
-          <a:noFill/>
-        </p:spPr>
-        <p:txBody>
-          <a:bodyPr wrap="square" anchor="ctr" lIns="25400" rIns="25400">
-            <a:spAutoFit/>
-          </a:bodyPr>
-          <a:lstStyle/>
-          <a:p>
-            <a:pPr algn="ctr"/>
-            <a:r>
-              <a:rPr sz="1100" b="1">
-                <a:solidFill>
-                  <a:srgbClr val="0F0F1A"/>
-                </a:solidFill>
-                <a:latin typeface="Inter"/>
-              </a:rPr>
-              <a:t>43</a:t>
-            </a:r>
-          </a:p>
-        </p:txBody>
-      </p:sp>
-      <p:sp>
-        <p:nvSpPr>
-          <p:cNvPr id="81" name="Rectangle 80"/>
-          <p:cNvSpPr/>
-          <p:nvPr/>
-        </p:nvSpPr>
-        <p:spPr>
-          <a:xfrm>
-            <a:off x="4087368" y="4069080"/>
-            <a:ext cx="1344168" cy="502920"/>
-          </a:xfrm>
-          <a:prstGeom prst="rect">
-            <a:avLst/>
-          </a:prstGeom>
-          <a:solidFill>
-            <a:srgbClr val="F97316"/>
-          </a:solidFill>
-          <a:ln>
-            <a:noFill/>
-          </a:ln>
-          <a:effectLst/>
-        </p:spPr>
-        <p:style>
-          <a:lnRef idx="1">
-            <a:schemeClr val="accent1"/>
-          </a:lnRef>
-          <a:fillRef idx="3">
-            <a:schemeClr val="accent1"/>
-          </a:fillRef>
-          <a:effectRef idx="2">
-            <a:schemeClr val="accent1"/>
-          </a:effectRef>
-          <a:fontRef idx="minor">
-            <a:schemeClr val="lt1"/>
-          </a:fontRef>
-        </p:style>
-        <p:txBody>
-          <a:bodyPr rtlCol="0" anchor="ctr"/>
-          <a:lstStyle/>
-          <a:p>
-            <a:pPr algn="ctr"/>
-          </a:p>
-        </p:txBody>
-      </p:sp>
-      <p:sp>
-        <p:nvSpPr>
-          <p:cNvPr id="82" name="TextBox 81"/>
-          <p:cNvSpPr txBox="1"/>
-          <p:nvPr/>
-        </p:nvSpPr>
-        <p:spPr>
-          <a:xfrm>
-            <a:off x="4087368" y="4069080"/>
-            <a:ext cx="1344168" cy="502920"/>
-          </a:xfrm>
-          <a:prstGeom prst="rect">
-            <a:avLst/>
-          </a:prstGeom>
-          <a:noFill/>
-        </p:spPr>
-        <p:txBody>
-          <a:bodyPr wrap="square" anchor="ctr" lIns="25400" rIns="25400">
-            <a:spAutoFit/>
-          </a:bodyPr>
-          <a:lstStyle/>
-          <a:p>
-            <a:pPr algn="ctr"/>
-            <a:r>
-              <a:rPr sz="1100" b="1">
-                <a:solidFill>
-                  <a:srgbClr val="0F0F1A"/>
-                </a:solidFill>
-                <a:latin typeface="Inter"/>
-              </a:rPr>
-              <a:t>2</a:t>
-            </a:r>
-          </a:p>
-        </p:txBody>
-      </p:sp>
-      <p:sp>
-        <p:nvSpPr>
-          <p:cNvPr id="83" name="Rectangle 82"/>
-          <p:cNvSpPr/>
-          <p:nvPr/>
-        </p:nvSpPr>
-        <p:spPr>
-          <a:xfrm>
-            <a:off x="5431536" y="4069080"/>
-            <a:ext cx="1232154" cy="502920"/>
-          </a:xfrm>
-          <a:prstGeom prst="rect">
-            <a:avLst/>
-          </a:prstGeom>
-          <a:solidFill>
-            <a:srgbClr val="F97316"/>
-          </a:solidFill>
-          <a:ln>
-            <a:noFill/>
-          </a:ln>
-          <a:effectLst/>
-        </p:spPr>
-        <p:style>
-          <a:lnRef idx="1">
-            <a:schemeClr val="accent1"/>
-          </a:lnRef>
-          <a:fillRef idx="3">
-            <a:schemeClr val="accent1"/>
-          </a:fillRef>
-          <a:effectRef idx="2">
-            <a:schemeClr val="accent1"/>
-          </a:effectRef>
-          <a:fontRef idx="minor">
-            <a:schemeClr val="lt1"/>
-          </a:fontRef>
-        </p:style>
-        <p:txBody>
-          <a:bodyPr rtlCol="0" anchor="ctr"/>
-          <a:lstStyle/>
-          <a:p>
-            <a:pPr algn="ctr"/>
-          </a:p>
-        </p:txBody>
-      </p:sp>
-      <p:sp>
-        <p:nvSpPr>
-          <p:cNvPr id="84" name="TextBox 83"/>
-          <p:cNvSpPr txBox="1"/>
-          <p:nvPr/>
-        </p:nvSpPr>
-        <p:spPr>
-          <a:xfrm>
-            <a:off x="5431536" y="4069080"/>
-            <a:ext cx="1232154" cy="502920"/>
-          </a:xfrm>
-          <a:prstGeom prst="rect">
-            <a:avLst/>
-          </a:prstGeom>
-          <a:noFill/>
-        </p:spPr>
-        <p:txBody>
-          <a:bodyPr wrap="square" anchor="ctr" lIns="25400" rIns="25400">
-            <a:spAutoFit/>
-          </a:bodyPr>
-          <a:lstStyle/>
-          <a:p>
-            <a:pPr algn="ctr"/>
-            <a:r>
-              <a:rPr sz="1100" b="1">
-                <a:solidFill>
-                  <a:srgbClr val="0F0F1A"/>
-                </a:solidFill>
-                <a:latin typeface="Inter"/>
-              </a:rPr>
-              <a:t>41</a:t>
-            </a:r>
-          </a:p>
-        </p:txBody>
-      </p:sp>
-      <p:sp>
-        <p:nvSpPr>
-          <p:cNvPr id="85" name="Rectangle 84"/>
-          <p:cNvSpPr/>
-          <p:nvPr/>
-        </p:nvSpPr>
-        <p:spPr>
-          <a:xfrm>
-            <a:off x="6663690" y="4069080"/>
-            <a:ext cx="1680210" cy="502920"/>
-          </a:xfrm>
-          <a:prstGeom prst="rect">
-            <a:avLst/>
-          </a:prstGeom>
-          <a:solidFill>
-            <a:srgbClr val="F97316"/>
-          </a:solidFill>
-          <a:ln>
-            <a:noFill/>
-          </a:ln>
-          <a:effectLst/>
-        </p:spPr>
-        <p:style>
-          <a:lnRef idx="1">
-            <a:schemeClr val="accent1"/>
-          </a:lnRef>
-          <a:fillRef idx="3">
-            <a:schemeClr val="accent1"/>
-          </a:fillRef>
-          <a:effectRef idx="2">
-            <a:schemeClr val="accent1"/>
-          </a:effectRef>
-          <a:fontRef idx="minor">
-            <a:schemeClr val="lt1"/>
-          </a:fontRef>
-        </p:style>
-        <p:txBody>
-          <a:bodyPr rtlCol="0" anchor="ctr"/>
-          <a:lstStyle/>
-          <a:p>
-            <a:pPr algn="ctr"/>
-          </a:p>
-        </p:txBody>
-      </p:sp>
-      <p:sp>
-        <p:nvSpPr>
-          <p:cNvPr id="86" name="TextBox 85"/>
-          <p:cNvSpPr txBox="1"/>
-          <p:nvPr/>
-        </p:nvSpPr>
-        <p:spPr>
-          <a:xfrm>
-            <a:off x="6663690" y="4069080"/>
-            <a:ext cx="1680210" cy="502920"/>
-          </a:xfrm>
-          <a:prstGeom prst="rect">
-            <a:avLst/>
-          </a:prstGeom>
-          <a:noFill/>
-        </p:spPr>
-        <p:txBody>
-          <a:bodyPr wrap="square" anchor="ctr" lIns="25400" rIns="25400">
-            <a:spAutoFit/>
-          </a:bodyPr>
-          <a:lstStyle/>
-          <a:p>
-            <a:pPr algn="ctr"/>
-            <a:r>
-              <a:rPr sz="1100" b="1">
-                <a:solidFill>
-                  <a:srgbClr val="0F0F1A"/>
-                </a:solidFill>
-                <a:latin typeface="Inter"/>
-              </a:rPr>
-              <a:t>—</a:t>
-            </a:r>
-          </a:p>
-        </p:txBody>
-      </p:sp>
-      <p:sp>
-        <p:nvSpPr>
-          <p:cNvPr id="87" name="Rectangle 86"/>
-          <p:cNvSpPr/>
-          <p:nvPr/>
-        </p:nvSpPr>
-        <p:spPr>
-          <a:xfrm>
-            <a:off x="8343900" y="4069080"/>
-            <a:ext cx="1680210" cy="502920"/>
-          </a:xfrm>
-          <a:prstGeom prst="rect">
-            <a:avLst/>
-          </a:prstGeom>
-          <a:solidFill>
-            <a:srgbClr val="F97316"/>
-          </a:solidFill>
-          <a:ln>
-            <a:noFill/>
-          </a:ln>
-          <a:effectLst/>
-        </p:spPr>
-        <p:style>
-          <a:lnRef idx="1">
-            <a:schemeClr val="accent1"/>
-          </a:lnRef>
-          <a:fillRef idx="3">
-            <a:schemeClr val="accent1"/>
-          </a:fillRef>
-          <a:effectRef idx="2">
-            <a:schemeClr val="accent1"/>
-          </a:effectRef>
-          <a:fontRef idx="minor">
-            <a:schemeClr val="lt1"/>
-          </a:fontRef>
-        </p:style>
-        <p:txBody>
-          <a:bodyPr rtlCol="0" anchor="ctr"/>
-          <a:lstStyle/>
-          <a:p>
-            <a:pPr algn="ctr"/>
-          </a:p>
-        </p:txBody>
-      </p:sp>
-      <p:sp>
-        <p:nvSpPr>
-          <p:cNvPr id="88" name="TextBox 87"/>
-          <p:cNvSpPr txBox="1"/>
-          <p:nvPr/>
-        </p:nvSpPr>
-        <p:spPr>
-          <a:xfrm>
-            <a:off x="8343900" y="4069080"/>
-            <a:ext cx="1680210" cy="502920"/>
-          </a:xfrm>
-          <a:prstGeom prst="rect">
-            <a:avLst/>
-          </a:prstGeom>
-          <a:noFill/>
-        </p:spPr>
-        <p:txBody>
-          <a:bodyPr wrap="square" anchor="ctr" lIns="25400" rIns="25400">
-            <a:spAutoFit/>
-          </a:bodyPr>
-          <a:lstStyle/>
-          <a:p>
-            <a:pPr algn="ctr"/>
-            <a:r>
-              <a:rPr sz="1100" b="1">
-                <a:solidFill>
-                  <a:srgbClr val="0F0F1A"/>
-                </a:solidFill>
-                <a:latin typeface="Inter"/>
-              </a:rPr>
-              <a:t>10/10/2026</a:t>
-            </a:r>
-          </a:p>
-        </p:txBody>
-      </p:sp>
-      <p:sp>
-        <p:nvSpPr>
-          <p:cNvPr id="89" name="Rectangle 88"/>
-          <p:cNvSpPr/>
-          <p:nvPr/>
-        </p:nvSpPr>
-        <p:spPr>
-          <a:xfrm>
-            <a:off x="10024110" y="4069080"/>
-            <a:ext cx="1680210" cy="502920"/>
-          </a:xfrm>
-          <a:prstGeom prst="rect">
-            <a:avLst/>
-          </a:prstGeom>
-          <a:solidFill>
-            <a:srgbClr val="F97316"/>
-          </a:solidFill>
-          <a:ln>
-            <a:noFill/>
-          </a:ln>
-          <a:effectLst/>
-        </p:spPr>
-        <p:style>
-          <a:lnRef idx="1">
-            <a:schemeClr val="accent1"/>
-          </a:lnRef>
-          <a:fillRef idx="3">
-            <a:schemeClr val="accent1"/>
-          </a:fillRef>
-          <a:effectRef idx="2">
-            <a:schemeClr val="accent1"/>
-          </a:effectRef>
-          <a:fontRef idx="minor">
-            <a:schemeClr val="lt1"/>
-          </a:fontRef>
-        </p:style>
-        <p:txBody>
-          <a:bodyPr rtlCol="0" anchor="ctr"/>
-          <a:lstStyle/>
-          <a:p>
-            <a:pPr algn="ctr"/>
-          </a:p>
-        </p:txBody>
-      </p:sp>
-      <p:sp>
-        <p:nvSpPr>
-          <p:cNvPr id="90" name="TextBox 89"/>
-          <p:cNvSpPr txBox="1"/>
-          <p:nvPr/>
-        </p:nvSpPr>
-        <p:spPr>
-          <a:xfrm>
-            <a:off x="10024110" y="4069080"/>
-            <a:ext cx="1680210" cy="502920"/>
-          </a:xfrm>
-          <a:prstGeom prst="rect">
-            <a:avLst/>
-          </a:prstGeom>
-          <a:noFill/>
-        </p:spPr>
-        <p:txBody>
-          <a:bodyPr wrap="square" anchor="ctr" lIns="25400" rIns="25400">
-            <a:spAutoFit/>
-          </a:bodyPr>
-          <a:lstStyle/>
-          <a:p>
-            <a:pPr algn="ctr"/>
-            <a:r>
-              <a:rPr sz="1100" b="1">
-                <a:solidFill>
-                  <a:srgbClr val="0F0F1A"/>
-                </a:solidFill>
-                <a:latin typeface="Inter"/>
-              </a:rPr>
-              <a:t>1 venc / 10 urg</a:t>
-            </a:r>
-          </a:p>
-        </p:txBody>
-      </p:sp>
-      <p:sp>
-        <p:nvSpPr>
-          <p:cNvPr id="91" name="TextBox 90"/>
-          <p:cNvSpPr txBox="1"/>
-          <p:nvPr/>
-        </p:nvSpPr>
-        <p:spPr>
-          <a:xfrm>
-            <a:off x="502920" y="6446520"/>
-            <a:ext cx="8229600" cy="320040"/>
+            <a:off x="6446520" y="1600200"/>
+            <a:ext cx="5029200" cy="365760"/>
           </a:xfrm>
           <a:prstGeom prst="rect">
             <a:avLst/>
@@ -9680,20 +6723,265 @@
           <a:p>
             <a:pPr algn="l"/>
             <a:r>
+              <a:rPr sz="1500" b="1">
+                <a:solidFill>
+                  <a:srgbClr val="22C55E"/>
+                </a:solidFill>
+                <a:latin typeface="Inter"/>
+              </a:rPr>
+              <a:t>Plano de execução (dashboard atual)</a:t>
+            </a:r>
+          </a:p>
+        </p:txBody>
+      </p:sp>
+      <p:sp>
+        <p:nvSpPr>
+          <p:cNvPr id="16" name="TextBox 15"/>
+          <p:cNvSpPr txBox="1"/>
+          <p:nvPr/>
+        </p:nvSpPr>
+        <p:spPr>
+          <a:xfrm>
+            <a:off x="6492240" y="2148840"/>
+            <a:ext cx="5029200" cy="640080"/>
+          </a:xfrm>
+          <a:prstGeom prst="rect">
+            <a:avLst/>
+          </a:prstGeom>
+          <a:noFill/>
+        </p:spPr>
+        <p:txBody>
+          <a:bodyPr wrap="square" anchor="t" lIns="25400" rIns="25400">
+            <a:spAutoFit/>
+          </a:bodyPr>
+          <a:lstStyle/>
+          <a:p>
+            <a:pPr algn="l"/>
+            <a:r>
+              <a:rPr sz="1300" b="1">
+                <a:solidFill>
+                  <a:srgbClr val="FFFFFF"/>
+                </a:solidFill>
+                <a:latin typeface="Inter"/>
+              </a:rPr>
+              <a:t>•  46 correias no plano  ✓ bate com as 46</a:t>
+            </a:r>
+          </a:p>
+        </p:txBody>
+      </p:sp>
+      <p:sp>
+        <p:nvSpPr>
+          <p:cNvPr id="17" name="TextBox 16"/>
+          <p:cNvSpPr txBox="1"/>
+          <p:nvPr/>
+        </p:nvSpPr>
+        <p:spPr>
+          <a:xfrm>
+            <a:off x="6492240" y="2807208"/>
+            <a:ext cx="5029200" cy="640080"/>
+          </a:xfrm>
+          <a:prstGeom prst="rect">
+            <a:avLst/>
+          </a:prstGeom>
+          <a:noFill/>
+        </p:spPr>
+        <p:txBody>
+          <a:bodyPr wrap="square" anchor="t" lIns="25400" rIns="25400">
+            <a:spAutoFit/>
+          </a:bodyPr>
+          <a:lstStyle/>
+          <a:p>
+            <a:pPr algn="l"/>
+            <a:r>
+              <a:rPr sz="1300" b="0">
+                <a:solidFill>
+                  <a:srgbClr val="9CA3AF"/>
+                </a:solidFill>
+                <a:latin typeface="Inter"/>
+              </a:rPr>
+              <a:t>   • 3 já concluídas</a:t>
+            </a:r>
+          </a:p>
+        </p:txBody>
+      </p:sp>
+      <p:sp>
+        <p:nvSpPr>
+          <p:cNvPr id="18" name="TextBox 17"/>
+          <p:cNvSpPr txBox="1"/>
+          <p:nvPr/>
+        </p:nvSpPr>
+        <p:spPr>
+          <a:xfrm>
+            <a:off x="6492240" y="3465576"/>
+            <a:ext cx="5029200" cy="640080"/>
+          </a:xfrm>
+          <a:prstGeom prst="rect">
+            <a:avLst/>
+          </a:prstGeom>
+          <a:noFill/>
+        </p:spPr>
+        <p:txBody>
+          <a:bodyPr wrap="square" anchor="t" lIns="25400" rIns="25400">
+            <a:spAutoFit/>
+          </a:bodyPr>
+          <a:lstStyle/>
+          <a:p>
+            <a:pPr algn="l"/>
+            <a:r>
+              <a:rPr sz="1300" b="0">
+                <a:solidFill>
+                  <a:srgbClr val="9CA3AF"/>
+                </a:solidFill>
+                <a:latin typeface="Inter"/>
+              </a:rPr>
+              <a:t>   • 43 em execução</a:t>
+            </a:r>
+          </a:p>
+        </p:txBody>
+      </p:sp>
+      <p:sp>
+        <p:nvSpPr>
+          <p:cNvPr id="19" name="TextBox 18"/>
+          <p:cNvSpPr txBox="1"/>
+          <p:nvPr/>
+        </p:nvSpPr>
+        <p:spPr>
+          <a:xfrm>
+            <a:off x="6492240" y="4123944"/>
+            <a:ext cx="5029200" cy="640080"/>
+          </a:xfrm>
+          <a:prstGeom prst="rect">
+            <a:avLst/>
+          </a:prstGeom>
+          <a:noFill/>
+        </p:spPr>
+        <p:txBody>
+          <a:bodyPr wrap="square" anchor="t" lIns="25400" rIns="25400">
+            <a:spAutoFit/>
+          </a:bodyPr>
+          <a:lstStyle/>
+          <a:p>
+            <a:pPr algn="l"/>
+            <a:r>
+              <a:rPr sz="1300" b="1">
+                <a:solidFill>
+                  <a:srgbClr val="FFFFFF"/>
+                </a:solidFill>
+                <a:latin typeface="Inter"/>
+              </a:rPr>
+              <a:t>•  Conclusão: 30/12/2026</a:t>
+            </a:r>
+          </a:p>
+        </p:txBody>
+      </p:sp>
+      <p:sp>
+        <p:nvSpPr>
+          <p:cNvPr id="20" name="TextBox 19"/>
+          <p:cNvSpPr txBox="1"/>
+          <p:nvPr/>
+        </p:nvSpPr>
+        <p:spPr>
+          <a:xfrm>
+            <a:off x="6492240" y="4782312"/>
+            <a:ext cx="5029200" cy="640080"/>
+          </a:xfrm>
+          <a:prstGeom prst="rect">
+            <a:avLst/>
+          </a:prstGeom>
+          <a:noFill/>
+        </p:spPr>
+        <p:txBody>
+          <a:bodyPr wrap="square" anchor="t" lIns="25400" rIns="25400">
+            <a:spAutoFit/>
+          </a:bodyPr>
+          <a:lstStyle/>
+          <a:p>
+            <a:pPr algn="l"/>
+            <a:r>
+              <a:rPr sz="1300" b="0">
+                <a:solidFill>
+                  <a:srgbClr val="9CA3AF"/>
+                </a:solidFill>
+                <a:latin typeface="Inter"/>
+              </a:rPr>
+              <a:t>0 correias vencidas</a:t>
+            </a:r>
+          </a:p>
+        </p:txBody>
+      </p:sp>
+      <p:sp>
+        <p:nvSpPr>
+          <p:cNvPr id="21" name="TextBox 20"/>
+          <p:cNvSpPr txBox="1"/>
+          <p:nvPr/>
+        </p:nvSpPr>
+        <p:spPr>
+          <a:xfrm>
+            <a:off x="502920" y="5989320"/>
+            <a:ext cx="11247120" cy="457200"/>
+          </a:xfrm>
+          <a:prstGeom prst="rect">
+            <a:avLst/>
+          </a:prstGeom>
+          <a:noFill/>
+        </p:spPr>
+        <p:txBody>
+          <a:bodyPr wrap="square" anchor="t" lIns="25400" rIns="25400">
+            <a:spAutoFit/>
+          </a:bodyPr>
+          <a:lstStyle/>
+          <a:p>
+            <a:pPr algn="l"/>
+            <a:r>
+              <a:rPr sz="1050" b="0">
+                <a:solidFill>
+                  <a:srgbClr val="EAB308"/>
+                </a:solidFill>
+                <a:latin typeface="Inter"/>
+              </a:rPr>
+              <a:t>Obs.: padronizar código NMT/NVM (mesma planta) · confirmar unidades DRD e LEM · 1 dos 46 é sobressalente em estoque (45 esteiras físicas).</a:t>
+            </a:r>
+          </a:p>
+        </p:txBody>
+      </p:sp>
+      <p:sp>
+        <p:nvSpPr>
+          <p:cNvPr id="22" name="TextBox 21"/>
+          <p:cNvSpPr txBox="1"/>
+          <p:nvPr/>
+        </p:nvSpPr>
+        <p:spPr>
+          <a:xfrm>
+            <a:off x="502920" y="6446520"/>
+            <a:ext cx="8229600" cy="320040"/>
+          </a:xfrm>
+          <a:prstGeom prst="rect">
+            <a:avLst/>
+          </a:prstGeom>
+          <a:noFill/>
+        </p:spPr>
+        <p:txBody>
+          <a:bodyPr wrap="square" anchor="t" lIns="25400" rIns="25400">
+            <a:spAutoFit/>
+          </a:bodyPr>
+          <a:lstStyle/>
+          <a:p>
+            <a:pPr algn="l"/>
+            <a:r>
               <a:rPr sz="900" b="0">
                 <a:solidFill>
                   <a:srgbClr val="6B7280"/>
                 </a:solidFill>
                 <a:latin typeface="Inter"/>
               </a:rPr>
-              <a:t>INPASA  •  Plano de Substituição de Correias Transportadoras  •  2026</a:t>
-            </a:r>
-          </a:p>
-        </p:txBody>
-      </p:sp>
-      <p:sp>
-        <p:nvSpPr>
-          <p:cNvPr id="92" name="TextBox 91"/>
+              <a:t>INPASA  •  Plano de Substituição de Correias Transportadoras  •  ref. 02/07/2026</a:t>
+            </a:r>
+          </a:p>
+        </p:txBody>
+      </p:sp>
+      <p:sp>
+        <p:nvSpPr>
+          <p:cNvPr id="23" name="TextBox 22"/>
           <p:cNvSpPr txBox="1"/>
           <p:nvPr/>
         </p:nvSpPr>
@@ -9906,7 +7194,7 @@
                 </a:solidFill>
                 <a:latin typeface="Inter"/>
               </a:rPr>
-              <a:t>DECISÃO</a:t>
+              <a:t>DECISÃO E AÇÃO</a:t>
             </a:r>
           </a:p>
         </p:txBody>
@@ -9941,7 +7229,7 @@
                 </a:solidFill>
                 <a:latin typeface="Inter"/>
               </a:rPr>
-              <a:t>Pontos de atenção e próximos passos</a:t>
+              <a:t>Cuidado especial até concluir a substituição</a:t>
             </a:r>
           </a:p>
         </p:txBody>
@@ -10020,7 +7308,7 @@
                 </a:solidFill>
                 <a:latin typeface="Inter"/>
               </a:rPr>
-              <a:t>⚠  Riscos / prioridades</a:t>
+              <a:t>⚠  Pontos de atenção</a:t>
             </a:r>
           </a:p>
         </p:txBody>
@@ -10033,8 +7321,8 @@
         </p:nvSpPr>
         <p:spPr>
           <a:xfrm>
-            <a:off x="777240" y="2103120"/>
-            <a:ext cx="5029200" cy="914400"/>
+            <a:off x="777240" y="2148840"/>
+            <a:ext cx="4937760" cy="914400"/>
           </a:xfrm>
           <a:prstGeom prst="rect">
             <a:avLst/>
@@ -10059,7 +7347,7 @@
                 </a:solidFill>
                 <a:latin typeface="Inter"/>
               </a:rPr>
-              <a:t>•  NVM: 1 correia VENCIDA (atrasada desde 09/05/2026) — regularizar imediatamente.</a:t>
+              <a:t>•  7 correias urgentes (&lt;=30 dias) — biomassa (SNP), DDGS (SDL/BLS), julho.</a:t>
             </a:r>
           </a:p>
         </p:txBody>
@@ -10072,8 +7360,8 @@
         </p:nvSpPr>
         <p:spPr>
           <a:xfrm>
-            <a:off x="777240" y="3035808"/>
-            <a:ext cx="5029200" cy="914400"/>
+            <a:off x="777240" y="3063240"/>
+            <a:ext cx="4937760" cy="914400"/>
           </a:xfrm>
           <a:prstGeom prst="rect">
             <a:avLst/>
@@ -10098,7 +7386,7 @@
                 </a:solidFill>
                 <a:latin typeface="Inter"/>
               </a:rPr>
-              <a:t>•  10 correias urgentes (≤30 dias), concentradas em 17/07 e 01/08 — biomassa (SNP), DDGS (SDL/BLS).</a:t>
+              <a:t>•  Conclusão do programa depende da SNP (esteiras de cavacos, 30/12/2026).</a:t>
             </a:r>
           </a:p>
         </p:txBody>
@@ -10111,8 +7399,8 @@
         </p:nvSpPr>
         <p:spPr>
           <a:xfrm>
-            <a:off x="777240" y="3968496"/>
-            <a:ext cx="5029200" cy="914400"/>
+            <a:off x="777240" y="3977640"/>
+            <a:ext cx="4937760" cy="914400"/>
           </a:xfrm>
           <a:prstGeom prst="rect">
             <a:avLst/>
@@ -10137,7 +7425,7 @@
                 </a:solidFill>
                 <a:latin typeface="Inter"/>
               </a:rPr>
-              <a:t>•  Áreas de biomassa e grãos: maior exposição a incêndio por atrito (rolete/correia).</a:t>
+              <a:t>•  Biomassa e grãos: maior exposição a incêndio por atrito (rolete/correia).</a:t>
             </a:r>
           </a:p>
         </p:txBody>
@@ -10150,8 +7438,8 @@
         </p:nvSpPr>
         <p:spPr>
           <a:xfrm>
-            <a:off x="777240" y="4901184"/>
-            <a:ext cx="5029200" cy="914400"/>
+            <a:off x="777240" y="4892040"/>
+            <a:ext cx="4937760" cy="914400"/>
           </a:xfrm>
           <a:prstGeom prst="rect">
             <a:avLst/>
@@ -10176,7 +7464,7 @@
                 </a:solidFill>
                 <a:latin typeface="Inter"/>
               </a:rPr>
-              <a:t>•  Conclusão do programa depende de NVM (última em 10/10/2026).</a:t>
+              <a:t>•  Janela de transição: risco elevado até a troca de todas as correias.</a:t>
             </a:r>
           </a:p>
         </p:txBody>
@@ -10255,7 +7543,7 @@
                 </a:solidFill>
                 <a:latin typeface="Inter"/>
               </a:rPr>
-              <a:t>✓  Próximos passos</a:t>
+              <a:t>✓  Encaminhamentos</a:t>
             </a:r>
           </a:p>
         </p:txBody>
@@ -10268,8 +7556,8 @@
         </p:nvSpPr>
         <p:spPr>
           <a:xfrm>
-            <a:off x="6492240" y="2103120"/>
-            <a:ext cx="5029200" cy="914400"/>
+            <a:off x="6492240" y="2148840"/>
+            <a:ext cx="4937760" cy="914400"/>
           </a:xfrm>
           <a:prstGeom prst="rect">
             <a:avLst/>
@@ -10294,7 +7582,7 @@
                 </a:solidFill>
                 <a:latin typeface="Inter"/>
               </a:rPr>
-              <a:t>•  Priorizar a correia vencida de NVM e as urgentes de 17/07 nesta semana.</a:t>
+              <a:t>•  PCM acionado para alinhar com TODAS as áreas cuidado reforçado até concluir a substituição das correias.</a:t>
             </a:r>
           </a:p>
         </p:txBody>
@@ -10307,8 +7595,8 @@
         </p:nvSpPr>
         <p:spPr>
           <a:xfrm>
-            <a:off x="6492240" y="3035808"/>
-            <a:ext cx="5029200" cy="914400"/>
+            <a:off x="6492240" y="3063240"/>
+            <a:ext cx="4937760" cy="914400"/>
           </a:xfrm>
           <a:prstGeom prst="rect">
             <a:avLst/>
@@ -10333,7 +7621,7 @@
                 </a:solidFill>
                 <a:latin typeface="Inter"/>
               </a:rPr>
-              <a:t>•  Confirmar disponibilidade de correia antichama e mão de obra para o pico de set/2026.</a:t>
+              <a:t>•  Priorizar as correias urgentes de julho (biomassa/DDGS).</a:t>
             </a:r>
           </a:p>
         </p:txBody>
@@ -10346,8 +7634,8 @@
         </p:nvSpPr>
         <p:spPr>
           <a:xfrm>
-            <a:off x="6492240" y="3968496"/>
-            <a:ext cx="5029200" cy="914400"/>
+            <a:off x="6492240" y="3977640"/>
+            <a:ext cx="4937760" cy="914400"/>
           </a:xfrm>
           <a:prstGeom prst="rect">
             <a:avLst/>
@@ -10372,7 +7660,7 @@
                 </a:solidFill>
                 <a:latin typeface="Inter"/>
               </a:rPr>
-              <a:t>•  Reportar avanço quinzenal por unidade (esteiras concluídas x plano).</a:t>
+              <a:t>•  Reporte quinzenal de avanço por unidade (concluídas x plano).</a:t>
             </a:r>
           </a:p>
         </p:txBody>
@@ -10385,8 +7673,8 @@
         </p:nvSpPr>
         <p:spPr>
           <a:xfrm>
-            <a:off x="6492240" y="4901184"/>
-            <a:ext cx="5029200" cy="914400"/>
+            <a:off x="6492240" y="4892040"/>
+            <a:ext cx="4937760" cy="914400"/>
           </a:xfrm>
           <a:prstGeom prst="rect">
             <a:avLst/>
@@ -10411,7 +7699,7 @@
                 </a:solidFill>
                 <a:latin typeface="Inter"/>
               </a:rPr>
-              <a:t>•  Antecipar itens de NVM para fechar o programa antes de 10/10/2026, se possível.</a:t>
+              <a:t>•  Padronizar cadastro (NMT/NVM) e confirmar DRD/LEM.</a:t>
             </a:r>
           </a:p>
         </p:txBody>
@@ -10446,7 +7734,7 @@
                 </a:solidFill>
                 <a:latin typeface="Inter"/>
               </a:rPr>
-              <a:t>INPASA  •  Plano de Substituição de Correias Transportadoras  •  2026</a:t>
+              <a:t>INPASA  •  Plano de Substituição de Correias Transportadoras  •  ref. 02/07/2026</a:t>
             </a:r>
           </a:p>
         </p:txBody>

--- a/plano_seguranca/Apresentacao_Estrategica_Correias_INPASA.pptx
+++ b/plano_seguranca/Apresentacao_Estrategica_Correias_INPASA.pptx
@@ -3107,7 +3107,7 @@
             <a:avLst/>
           </a:prstGeom>
           <a:solidFill>
-            <a:srgbClr val="0F0F1A"/>
+            <a:srgbClr val="124E81"/>
           </a:solidFill>
           <a:ln>
             <a:noFill/>
@@ -3144,14 +3144,14 @@
         </p:nvSpPr>
         <p:spPr>
           <a:xfrm>
-            <a:off x="0" y="4160520"/>
-            <a:ext cx="12191695" cy="45720"/>
+            <a:off x="0" y="0"/>
+            <a:ext cx="12191695" cy="320040"/>
           </a:xfrm>
           <a:prstGeom prst="rect">
             <a:avLst/>
           </a:prstGeom>
           <a:solidFill>
-            <a:srgbClr val="F97316"/>
+            <a:srgbClr val="FFA32A"/>
           </a:solidFill>
           <a:ln>
             <a:noFill/>
@@ -3188,7 +3188,7 @@
         </p:nvSpPr>
         <p:spPr>
           <a:xfrm>
-            <a:off x="822960" y="1371600"/>
+            <a:off x="822960" y="1234440"/>
             <a:ext cx="10515600" cy="457200"/>
           </a:xfrm>
           <a:prstGeom prst="rect">
@@ -3204,13 +3204,13 @@
           <a:p>
             <a:pPr algn="l"/>
             <a:r>
-              <a:rPr sz="1500" b="1">
-                <a:solidFill>
-                  <a:srgbClr val="F97316"/>
-                </a:solidFill>
-                <a:latin typeface="Inter"/>
-              </a:rPr>
-              <a:t>🏭  INPASA  •  APRESENTAÇÃO À DIRETORIA</a:t>
+              <a:rPr sz="1500" b="1" i="0">
+                <a:solidFill>
+                  <a:srgbClr val="EAA239"/>
+                </a:solidFill>
+                <a:latin typeface="Montserrat"/>
+              </a:rPr>
+              <a:t>APRESENTAÇÃO À DIRETORIA</a:t>
             </a:r>
           </a:p>
         </p:txBody>
@@ -3223,7 +3223,7 @@
         </p:nvSpPr>
         <p:spPr>
           <a:xfrm>
-            <a:off x="822960" y="2057400"/>
+            <a:off x="822960" y="1920240"/>
             <a:ext cx="10607040" cy="1645920"/>
           </a:xfrm>
           <a:prstGeom prst="rect">
@@ -3243,11 +3243,11 @@
               </a:lnSpc>
             </a:pPr>
             <a:r>
-              <a:rPr sz="4400" b="1">
+              <a:rPr sz="4400" b="1" i="0">
                 <a:solidFill>
                   <a:srgbClr val="FFFFFF"/>
                 </a:solidFill>
-                <a:latin typeface="Inter"/>
+                <a:latin typeface="Montserrat"/>
               </a:rPr>
               <a:t>Plano de Substituição de</a:t>
             </a:r>
@@ -3259,11 +3259,11 @@
               </a:lnSpc>
             </a:pPr>
             <a:r>
-              <a:rPr sz="4400" b="1">
+              <a:rPr sz="4400" b="1" i="0">
                 <a:solidFill>
                   <a:srgbClr val="FFFFFF"/>
                 </a:solidFill>
-                <a:latin typeface="Inter"/>
+                <a:latin typeface="Montserrat"/>
               </a:rPr>
               <a:t>Correias Transportadoras</a:t>
             </a:r>
@@ -3278,8 +3278,8 @@
         </p:nvSpPr>
         <p:spPr>
           <a:xfrm>
-            <a:off x="822960" y="4343400"/>
-            <a:ext cx="10607040" cy="914400"/>
+            <a:off x="822960" y="4160520"/>
+            <a:ext cx="10607040" cy="822960"/>
           </a:xfrm>
           <a:prstGeom prst="rect">
             <a:avLst/>
@@ -3298,11 +3298,11 @@
               </a:lnSpc>
             </a:pPr>
             <a:r>
-              <a:rPr sz="1700" b="0">
-                <a:solidFill>
-                  <a:srgbClr val="9CA3AF"/>
-                </a:solidFill>
-                <a:latin typeface="Inter"/>
+              <a:rPr sz="1600" b="0" i="0">
+                <a:solidFill>
+                  <a:srgbClr val="C7D6E6"/>
+                </a:solidFill>
+                <a:latin typeface="Montserrat"/>
               </a:rPr>
               <a:t>Status do programa e cronograma de regularização por unidade</a:t>
             </a:r>
@@ -3314,27 +3314,71 @@
               </a:lnSpc>
             </a:pPr>
             <a:r>
-              <a:rPr sz="1700" b="0">
-                <a:solidFill>
-                  <a:srgbClr val="9CA3AF"/>
-                </a:solidFill>
-                <a:latin typeface="Inter"/>
-              </a:rPr>
-              <a:t>Nova Mutum • Sinop • Sidrolândia • Balsas</a:t>
-            </a:r>
-          </a:p>
-        </p:txBody>
-      </p:sp>
-      <p:sp>
-        <p:nvSpPr>
-          <p:cNvPr id="7" name="TextBox 6"/>
+              <a:rPr sz="1600" b="0" i="0">
+                <a:solidFill>
+                  <a:srgbClr val="C7D6E6"/>
+                </a:solidFill>
+                <a:latin typeface="Montserrat"/>
+              </a:rPr>
+              <a:t>Nova Mutum · Sinop · Sidrolândia · Balsas</a:t>
+            </a:r>
+          </a:p>
+        </p:txBody>
+      </p:sp>
+      <p:sp>
+        <p:nvSpPr>
+          <p:cNvPr id="7" name="Rectangle 6"/>
+          <p:cNvSpPr/>
+          <p:nvPr/>
+        </p:nvSpPr>
+        <p:spPr>
+          <a:xfrm>
+            <a:off x="822960" y="5257800"/>
+            <a:ext cx="2743200" cy="25400"/>
+          </a:xfrm>
+          <a:prstGeom prst="rect">
+            <a:avLst/>
+          </a:prstGeom>
+          <a:solidFill>
+            <a:srgbClr val="FFA32A"/>
+          </a:solidFill>
+          <a:ln>
+            <a:noFill/>
+          </a:ln>
+          <a:effectLst/>
+        </p:spPr>
+        <p:style>
+          <a:lnRef idx="1">
+            <a:schemeClr val="accent1"/>
+          </a:lnRef>
+          <a:fillRef idx="3">
+            <a:schemeClr val="accent1"/>
+          </a:fillRef>
+          <a:effectRef idx="2">
+            <a:schemeClr val="accent1"/>
+          </a:effectRef>
+          <a:fontRef idx="minor">
+            <a:schemeClr val="lt1"/>
+          </a:fontRef>
+        </p:style>
+        <p:txBody>
+          <a:bodyPr rtlCol="0" anchor="ctr"/>
+          <a:lstStyle/>
+          <a:p>
+            <a:pPr algn="ctr"/>
+          </a:p>
+        </p:txBody>
+      </p:sp>
+      <p:sp>
+        <p:nvSpPr>
+          <p:cNvPr id="8" name="TextBox 7"/>
           <p:cNvSpPr txBox="1"/>
           <p:nvPr/>
         </p:nvSpPr>
         <p:spPr>
           <a:xfrm>
-            <a:off x="822960" y="5989320"/>
-            <a:ext cx="10607040" cy="457200"/>
+            <a:off x="822960" y="5440680"/>
+            <a:ext cx="10058400" cy="457200"/>
           </a:xfrm>
           <a:prstGeom prst="rect">
             <a:avLst/>
@@ -3349,13 +3393,48 @@
           <a:p>
             <a:pPr algn="l"/>
             <a:r>
-              <a:rPr sz="1200" b="0">
-                <a:solidFill>
-                  <a:srgbClr val="6B7280"/>
-                </a:solidFill>
-                <a:latin typeface="Inter"/>
-              </a:rPr>
-              <a:t>Base: levantamento FLEXLAB (jun/2026) + plano de execução  |  Data de referência: 02/07/2026</a:t>
+              <a:rPr sz="1800" b="1" i="1">
+                <a:solidFill>
+                  <a:srgbClr val="EAA239"/>
+                </a:solidFill>
+                <a:latin typeface="Montserrat"/>
+              </a:rPr>
+              <a:t>MAIS QUE ENERGIA</a:t>
+            </a:r>
+          </a:p>
+        </p:txBody>
+      </p:sp>
+      <p:sp>
+        <p:nvSpPr>
+          <p:cNvPr id="9" name="TextBox 8"/>
+          <p:cNvSpPr txBox="1"/>
+          <p:nvPr/>
+        </p:nvSpPr>
+        <p:spPr>
+          <a:xfrm>
+            <a:off x="822960" y="6126480"/>
+            <a:ext cx="10607040" cy="365760"/>
+          </a:xfrm>
+          <a:prstGeom prst="rect">
+            <a:avLst/>
+          </a:prstGeom>
+          <a:noFill/>
+        </p:spPr>
+        <p:txBody>
+          <a:bodyPr wrap="square" anchor="t" lIns="25400" rIns="25400">
+            <a:spAutoFit/>
+          </a:bodyPr>
+          <a:lstStyle/>
+          <a:p>
+            <a:pPr algn="l"/>
+            <a:r>
+              <a:rPr sz="1100" b="0" i="0">
+                <a:solidFill>
+                  <a:srgbClr val="9FB4C9"/>
+                </a:solidFill>
+                <a:latin typeface="Montserrat"/>
+              </a:rPr>
+              <a:t>Base: levantamento FLEXLAB (jun/2026) + plano de execução  |  ref. 02/07/2026</a:t>
             </a:r>
           </a:p>
         </p:txBody>
@@ -3393,7 +3472,7 @@
             <a:avLst/>
           </a:prstGeom>
           <a:solidFill>
-            <a:srgbClr val="0F0F1A"/>
+            <a:srgbClr val="FFFFFF"/>
           </a:solidFill>
           <a:ln>
             <a:noFill/>
@@ -3431,13 +3510,13 @@
         <p:spPr>
           <a:xfrm>
             <a:off x="0" y="0"/>
-            <a:ext cx="12191695" cy="1097280"/>
+            <a:ext cx="12191695" cy="1051560"/>
           </a:xfrm>
           <a:prstGeom prst="rect">
             <a:avLst/>
           </a:prstGeom>
           <a:solidFill>
-            <a:srgbClr val="1E1E30"/>
+            <a:srgbClr val="124E81"/>
           </a:solidFill>
           <a:ln>
             <a:noFill/>
@@ -3474,14 +3553,14 @@
         </p:nvSpPr>
         <p:spPr>
           <a:xfrm>
-            <a:off x="0" y="1097280"/>
-            <a:ext cx="12191695" cy="36576"/>
+            <a:off x="0" y="1051560"/>
+            <a:ext cx="12191695" cy="45720"/>
           </a:xfrm>
           <a:prstGeom prst="rect">
             <a:avLst/>
           </a:prstGeom>
           <a:solidFill>
-            <a:srgbClr val="F97316"/>
+            <a:srgbClr val="FFA32A"/>
           </a:solidFill>
           <a:ln>
             <a:noFill/>
@@ -3534,11 +3613,11 @@
           <a:p>
             <a:pPr algn="l"/>
             <a:r>
-              <a:rPr sz="1200" b="1">
-                <a:solidFill>
-                  <a:srgbClr val="F97316"/>
-                </a:solidFill>
-                <a:latin typeface="Inter"/>
+              <a:rPr sz="1200" b="1" i="0">
+                <a:solidFill>
+                  <a:srgbClr val="EAA239"/>
+                </a:solidFill>
+                <a:latin typeface="Montserrat"/>
               </a:rPr>
               <a:t>A PERGUNTA DA DIRETORIA</a:t>
             </a:r>
@@ -3553,8 +3632,8 @@
         </p:nvSpPr>
         <p:spPr>
           <a:xfrm>
-            <a:off x="502920" y="420624"/>
-            <a:ext cx="11155680" cy="548640"/>
+            <a:off x="502920" y="402336"/>
+            <a:ext cx="11155680" cy="566928"/>
           </a:xfrm>
           <a:prstGeom prst="rect">
             <a:avLst/>
@@ -3569,11 +3648,11 @@
           <a:p>
             <a:pPr algn="l"/>
             <a:r>
-              <a:rPr sz="2500" b="1">
+              <a:rPr sz="2500" b="1" i="0">
                 <a:solidFill>
                   <a:srgbClr val="FFFFFF"/>
                 </a:solidFill>
-                <a:latin typeface="Inter"/>
+                <a:latin typeface="Montserrat"/>
               </a:rPr>
               <a:t>Quando cada unidade estará regularizada?</a:t>
             </a:r>
@@ -3589,17 +3668,17 @@
         <p:spPr>
           <a:xfrm>
             <a:off x="502920" y="1325880"/>
-            <a:ext cx="11201400" cy="777240"/>
+            <a:ext cx="11201400" cy="731520"/>
           </a:xfrm>
           <a:prstGeom prst="roundRect">
             <a:avLst/>
           </a:prstGeom>
           <a:solidFill>
-            <a:srgbClr val="252538"/>
+            <a:srgbClr val="F2F5F8"/>
           </a:solidFill>
           <a:ln w="15875">
             <a:solidFill>
-              <a:srgbClr val="F97316"/>
+              <a:srgbClr val="124E81"/>
             </a:solidFill>
           </a:ln>
           <a:effectLst/>
@@ -3635,7 +3714,7 @@
         <p:spPr>
           <a:xfrm>
             <a:off x="731520" y="1325880"/>
-            <a:ext cx="10789920" cy="777240"/>
+            <a:ext cx="10789920" cy="731520"/>
           </a:xfrm>
           <a:prstGeom prst="rect">
             <a:avLst/>
@@ -3650,13 +3729,13 @@
           <a:p>
             <a:pPr algn="l"/>
             <a:r>
-              <a:rPr sz="1500" b="1">
-                <a:solidFill>
-                  <a:srgbClr val="FFFFFF"/>
-                </a:solidFill>
-                <a:latin typeface="Inter"/>
-              </a:rPr>
-              <a:t>Programa concluído em  30/12/2026    |    46 correias  •  3 já concluídas  •  7 urgentes (&lt;=30 dias)  •  0 vencidas</a:t>
+              <a:rPr sz="1500" b="1" i="0">
+                <a:solidFill>
+                  <a:srgbClr val="124E81"/>
+                </a:solidFill>
+                <a:latin typeface="Montserrat"/>
+              </a:rPr>
+              <a:t>Programa concluído em 30/12/2026    |    46 correias · 3 concluídas · 7 urgentes (&lt;=30 dias) · 0 vencidas</a:t>
             </a:r>
           </a:p>
         </p:txBody>
@@ -3669,14 +3748,14 @@
         </p:nvSpPr>
         <p:spPr>
           <a:xfrm>
-            <a:off x="502920" y="2331720"/>
-            <a:ext cx="2697480" cy="2880360"/>
+            <a:off x="502920" y="2286000"/>
+            <a:ext cx="2697480" cy="2926080"/>
           </a:xfrm>
           <a:prstGeom prst="roundRect">
             <a:avLst/>
           </a:prstGeom>
           <a:solidFill>
-            <a:srgbClr val="1E1E30"/>
+            <a:srgbClr val="F2F5F8"/>
           </a:solidFill>
           <a:ln>
             <a:noFill/>
@@ -3713,14 +3792,14 @@
         </p:nvSpPr>
         <p:spPr>
           <a:xfrm>
-            <a:off x="502920" y="2331720"/>
-            <a:ext cx="2697480" cy="109728"/>
+            <a:off x="502920" y="2286000"/>
+            <a:ext cx="2697480" cy="118872"/>
           </a:xfrm>
           <a:prstGeom prst="rect">
             <a:avLst/>
           </a:prstGeom>
           <a:solidFill>
-            <a:srgbClr val="3B82F6"/>
+            <a:srgbClr val="124E81"/>
           </a:solidFill>
           <a:ln>
             <a:noFill/>
@@ -3757,7 +3836,7 @@
         </p:nvSpPr>
         <p:spPr>
           <a:xfrm>
-            <a:off x="685800" y="2587752"/>
+            <a:off x="685800" y="2560320"/>
             <a:ext cx="2331720" cy="365760"/>
           </a:xfrm>
           <a:prstGeom prst="rect">
@@ -3773,13 +3852,13 @@
           <a:p>
             <a:pPr algn="l"/>
             <a:r>
-              <a:rPr sz="1300" b="1">
-                <a:solidFill>
-                  <a:srgbClr val="3B82F6"/>
-                </a:solidFill>
-                <a:latin typeface="Inter"/>
-              </a:rPr>
-              <a:t>NVM</a:t>
+              <a:rPr sz="1300" b="1" i="0">
+                <a:solidFill>
+                  <a:srgbClr val="124E81"/>
+                </a:solidFill>
+                <a:latin typeface="Montserrat"/>
+              </a:rPr>
+              <a:t>NMT</a:t>
             </a:r>
           </a:p>
         </p:txBody>
@@ -3792,7 +3871,7 @@
         </p:nvSpPr>
         <p:spPr>
           <a:xfrm>
-            <a:off x="685800" y="2898648"/>
+            <a:off x="685800" y="2871216"/>
             <a:ext cx="2331720" cy="457200"/>
           </a:xfrm>
           <a:prstGeom prst="rect">
@@ -3808,11 +3887,11 @@
           <a:p>
             <a:pPr algn="l"/>
             <a:r>
-              <a:rPr sz="1500" b="1">
-                <a:solidFill>
-                  <a:srgbClr val="FFFFFF"/>
-                </a:solidFill>
-                <a:latin typeface="Inter"/>
+              <a:rPr sz="1500" b="1" i="0">
+                <a:solidFill>
+                  <a:srgbClr val="20303F"/>
+                </a:solidFill>
+                <a:latin typeface="Montserrat"/>
               </a:rPr>
               <a:t>Nova Mutum</a:t>
             </a:r>
@@ -3827,7 +3906,7 @@
         </p:nvSpPr>
         <p:spPr>
           <a:xfrm>
-            <a:off x="685800" y="3383280"/>
+            <a:off x="685800" y="3364992"/>
             <a:ext cx="2331720" cy="320040"/>
           </a:xfrm>
           <a:prstGeom prst="rect">
@@ -3843,11 +3922,11 @@
           <a:p>
             <a:pPr algn="l"/>
             <a:r>
-              <a:rPr sz="1000" b="1">
-                <a:solidFill>
-                  <a:srgbClr val="9CA3AF"/>
-                </a:solidFill>
-                <a:latin typeface="Inter"/>
+              <a:rPr sz="1000" b="1" i="0">
+                <a:solidFill>
+                  <a:srgbClr val="6B7885"/>
+                </a:solidFill>
+                <a:latin typeface="Montserrat"/>
               </a:rPr>
               <a:t>CONCLUÍDA EM</a:t>
             </a:r>
@@ -3862,7 +3941,7 @@
         </p:nvSpPr>
         <p:spPr>
           <a:xfrm>
-            <a:off x="685800" y="3630168"/>
+            <a:off x="685800" y="3611880"/>
             <a:ext cx="2331720" cy="502920"/>
           </a:xfrm>
           <a:prstGeom prst="rect">
@@ -3878,11 +3957,11 @@
           <a:p>
             <a:pPr algn="l"/>
             <a:r>
-              <a:rPr sz="2200" b="1">
-                <a:solidFill>
-                  <a:srgbClr val="3B82F6"/>
-                </a:solidFill>
-                <a:latin typeface="Inter"/>
+              <a:rPr sz="2200" b="1" i="0">
+                <a:solidFill>
+                  <a:srgbClr val="124E81"/>
+                </a:solidFill>
+                <a:latin typeface="Montserrat"/>
               </a:rPr>
               <a:t>22/10/2026</a:t>
             </a:r>
@@ -3897,7 +3976,7 @@
         </p:nvSpPr>
         <p:spPr>
           <a:xfrm>
-            <a:off x="685800" y="4206239"/>
+            <a:off x="685800" y="4206240"/>
             <a:ext cx="2331720" cy="914400"/>
           </a:xfrm>
           <a:prstGeom prst="rect">
@@ -3917,13 +3996,13 @@
               </a:lnSpc>
             </a:pPr>
             <a:r>
-              <a:rPr sz="1050" b="0">
-                <a:solidFill>
-                  <a:srgbClr val="E0E0E0"/>
-                </a:solidFill>
-                <a:latin typeface="Inter"/>
-              </a:rPr>
-              <a:t>16 correias no plano; 1 já concluída. Última substituição em 22/10/2026.</a:t>
+              <a:rPr sz="1050" b="0" i="0">
+                <a:solidFill>
+                  <a:srgbClr val="20303F"/>
+                </a:solidFill>
+                <a:latin typeface="Montserrat"/>
+              </a:rPr>
+              <a:t>16 correias no plano; 1 concluída. Última substituição em 22/10/2026.</a:t>
             </a:r>
           </a:p>
         </p:txBody>
@@ -3936,14 +4015,14 @@
         </p:nvSpPr>
         <p:spPr>
           <a:xfrm>
-            <a:off x="3319272" y="2331720"/>
-            <a:ext cx="2697480" cy="2880360"/>
+            <a:off x="3319272" y="2286000"/>
+            <a:ext cx="2697480" cy="2926080"/>
           </a:xfrm>
           <a:prstGeom prst="roundRect">
             <a:avLst/>
           </a:prstGeom>
           <a:solidFill>
-            <a:srgbClr val="1E1E30"/>
+            <a:srgbClr val="F2F5F8"/>
           </a:solidFill>
           <a:ln>
             <a:noFill/>
@@ -3980,14 +4059,14 @@
         </p:nvSpPr>
         <p:spPr>
           <a:xfrm>
-            <a:off x="3319272" y="2331720"/>
-            <a:ext cx="2697480" cy="109728"/>
+            <a:off x="3319272" y="2286000"/>
+            <a:ext cx="2697480" cy="118872"/>
           </a:xfrm>
           <a:prstGeom prst="rect">
             <a:avLst/>
           </a:prstGeom>
           <a:solidFill>
-            <a:srgbClr val="F97316"/>
+            <a:srgbClr val="EAA239"/>
           </a:solidFill>
           <a:ln>
             <a:noFill/>
@@ -4024,7 +4103,7 @@
         </p:nvSpPr>
         <p:spPr>
           <a:xfrm>
-            <a:off x="3502152" y="2587752"/>
+            <a:off x="3502152" y="2560320"/>
             <a:ext cx="2331720" cy="365760"/>
           </a:xfrm>
           <a:prstGeom prst="rect">
@@ -4040,11 +4119,11 @@
           <a:p>
             <a:pPr algn="l"/>
             <a:r>
-              <a:rPr sz="1300" b="1">
-                <a:solidFill>
-                  <a:srgbClr val="F97316"/>
-                </a:solidFill>
-                <a:latin typeface="Inter"/>
+              <a:rPr sz="1300" b="1" i="0">
+                <a:solidFill>
+                  <a:srgbClr val="EAA239"/>
+                </a:solidFill>
+                <a:latin typeface="Montserrat"/>
               </a:rPr>
               <a:t>SNP</a:t>
             </a:r>
@@ -4059,7 +4138,7 @@
         </p:nvSpPr>
         <p:spPr>
           <a:xfrm>
-            <a:off x="3502152" y="2898648"/>
+            <a:off x="3502152" y="2871216"/>
             <a:ext cx="2331720" cy="457200"/>
           </a:xfrm>
           <a:prstGeom prst="rect">
@@ -4075,11 +4154,11 @@
           <a:p>
             <a:pPr algn="l"/>
             <a:r>
-              <a:rPr sz="1500" b="1">
-                <a:solidFill>
-                  <a:srgbClr val="FFFFFF"/>
-                </a:solidFill>
-                <a:latin typeface="Inter"/>
+              <a:rPr sz="1500" b="1" i="0">
+                <a:solidFill>
+                  <a:srgbClr val="20303F"/>
+                </a:solidFill>
+                <a:latin typeface="Montserrat"/>
               </a:rPr>
               <a:t>Sinop</a:t>
             </a:r>
@@ -4094,7 +4173,7 @@
         </p:nvSpPr>
         <p:spPr>
           <a:xfrm>
-            <a:off x="3502152" y="3383280"/>
+            <a:off x="3502152" y="3364992"/>
             <a:ext cx="2331720" cy="320040"/>
           </a:xfrm>
           <a:prstGeom prst="rect">
@@ -4110,11 +4189,11 @@
           <a:p>
             <a:pPr algn="l"/>
             <a:r>
-              <a:rPr sz="1000" b="1">
-                <a:solidFill>
-                  <a:srgbClr val="9CA3AF"/>
-                </a:solidFill>
-                <a:latin typeface="Inter"/>
+              <a:rPr sz="1000" b="1" i="0">
+                <a:solidFill>
+                  <a:srgbClr val="6B7885"/>
+                </a:solidFill>
+                <a:latin typeface="Montserrat"/>
               </a:rPr>
               <a:t>CONCLUÍDA EM</a:t>
             </a:r>
@@ -4129,7 +4208,7 @@
         </p:nvSpPr>
         <p:spPr>
           <a:xfrm>
-            <a:off x="3502152" y="3630168"/>
+            <a:off x="3502152" y="3611880"/>
             <a:ext cx="2331720" cy="502920"/>
           </a:xfrm>
           <a:prstGeom prst="rect">
@@ -4145,11 +4224,11 @@
           <a:p>
             <a:pPr algn="l"/>
             <a:r>
-              <a:rPr sz="2200" b="1">
-                <a:solidFill>
-                  <a:srgbClr val="F97316"/>
-                </a:solidFill>
-                <a:latin typeface="Inter"/>
+              <a:rPr sz="2200" b="1" i="0">
+                <a:solidFill>
+                  <a:srgbClr val="EAA239"/>
+                </a:solidFill>
+                <a:latin typeface="Montserrat"/>
               </a:rPr>
               <a:t>30/12/2026</a:t>
             </a:r>
@@ -4164,7 +4243,7 @@
         </p:nvSpPr>
         <p:spPr>
           <a:xfrm>
-            <a:off x="3502152" y="4206239"/>
+            <a:off x="3502152" y="4206240"/>
             <a:ext cx="2331720" cy="914400"/>
           </a:xfrm>
           <a:prstGeom prst="rect">
@@ -4184,13 +4263,13 @@
               </a:lnSpc>
             </a:pPr>
             <a:r>
-              <a:rPr sz="1050" b="0">
-                <a:solidFill>
-                  <a:srgbClr val="E0E0E0"/>
-                </a:solidFill>
-                <a:latin typeface="Inter"/>
-              </a:rPr>
-              <a:t>23 correias no plano; 1 já concluída. Última em 30/12/2026 (esteiras de cavacos).</a:t>
+              <a:rPr sz="1050" b="0" i="0">
+                <a:solidFill>
+                  <a:srgbClr val="20303F"/>
+                </a:solidFill>
+                <a:latin typeface="Montserrat"/>
+              </a:rPr>
+              <a:t>23 correias no plano; 1 concluída. Última em 30/12/2026 (esteiras de cavacos).</a:t>
             </a:r>
           </a:p>
         </p:txBody>
@@ -4203,14 +4282,14 @@
         </p:nvSpPr>
         <p:spPr>
           <a:xfrm>
-            <a:off x="6135624" y="2331720"/>
-            <a:ext cx="2697480" cy="2880360"/>
+            <a:off x="6135624" y="2286000"/>
+            <a:ext cx="2697480" cy="2926080"/>
           </a:xfrm>
           <a:prstGeom prst="roundRect">
             <a:avLst/>
           </a:prstGeom>
           <a:solidFill>
-            <a:srgbClr val="1E1E30"/>
+            <a:srgbClr val="F2F5F8"/>
           </a:solidFill>
           <a:ln>
             <a:noFill/>
@@ -4247,14 +4326,14 @@
         </p:nvSpPr>
         <p:spPr>
           <a:xfrm>
-            <a:off x="6135624" y="2331720"/>
-            <a:ext cx="2697480" cy="109728"/>
+            <a:off x="6135624" y="2286000"/>
+            <a:ext cx="2697480" cy="118872"/>
           </a:xfrm>
           <a:prstGeom prst="rect">
             <a:avLst/>
           </a:prstGeom>
           <a:solidFill>
-            <a:srgbClr val="22C55E"/>
+            <a:srgbClr val="007D77"/>
           </a:solidFill>
           <a:ln>
             <a:noFill/>
@@ -4291,7 +4370,7 @@
         </p:nvSpPr>
         <p:spPr>
           <a:xfrm>
-            <a:off x="6318504" y="2587752"/>
+            <a:off x="6318504" y="2560320"/>
             <a:ext cx="2331720" cy="365760"/>
           </a:xfrm>
           <a:prstGeom prst="rect">
@@ -4307,13 +4386,13 @@
           <a:p>
             <a:pPr algn="l"/>
             <a:r>
-              <a:rPr sz="1300" b="1">
-                <a:solidFill>
-                  <a:srgbClr val="22C55E"/>
-                </a:solidFill>
-                <a:latin typeface="Inter"/>
-              </a:rPr>
-              <a:t>SDL</a:t>
+              <a:rPr sz="1300" b="1" i="0">
+                <a:solidFill>
+                  <a:srgbClr val="007D77"/>
+                </a:solidFill>
+                <a:latin typeface="Montserrat"/>
+              </a:rPr>
+              <a:t>SDR</a:t>
             </a:r>
           </a:p>
         </p:txBody>
@@ -4326,7 +4405,7 @@
         </p:nvSpPr>
         <p:spPr>
           <a:xfrm>
-            <a:off x="6318504" y="2898648"/>
+            <a:off x="6318504" y="2871216"/>
             <a:ext cx="2331720" cy="457200"/>
           </a:xfrm>
           <a:prstGeom prst="rect">
@@ -4342,11 +4421,11 @@
           <a:p>
             <a:pPr algn="l"/>
             <a:r>
-              <a:rPr sz="1500" b="1">
-                <a:solidFill>
-                  <a:srgbClr val="FFFFFF"/>
-                </a:solidFill>
-                <a:latin typeface="Inter"/>
+              <a:rPr sz="1500" b="1" i="0">
+                <a:solidFill>
+                  <a:srgbClr val="20303F"/>
+                </a:solidFill>
+                <a:latin typeface="Montserrat"/>
               </a:rPr>
               <a:t>Sidrolândia</a:t>
             </a:r>
@@ -4361,7 +4440,7 @@
         </p:nvSpPr>
         <p:spPr>
           <a:xfrm>
-            <a:off x="6318504" y="3383280"/>
+            <a:off x="6318504" y="3364992"/>
             <a:ext cx="2331720" cy="320040"/>
           </a:xfrm>
           <a:prstGeom prst="rect">
@@ -4377,11 +4456,11 @@
           <a:p>
             <a:pPr algn="l"/>
             <a:r>
-              <a:rPr sz="1000" b="1">
-                <a:solidFill>
-                  <a:srgbClr val="9CA3AF"/>
-                </a:solidFill>
-                <a:latin typeface="Inter"/>
+              <a:rPr sz="1000" b="1" i="0">
+                <a:solidFill>
+                  <a:srgbClr val="6B7885"/>
+                </a:solidFill>
+                <a:latin typeface="Montserrat"/>
               </a:rPr>
               <a:t>CONCLUÍDA EM</a:t>
             </a:r>
@@ -4396,7 +4475,7 @@
         </p:nvSpPr>
         <p:spPr>
           <a:xfrm>
-            <a:off x="6318504" y="3630168"/>
+            <a:off x="6318504" y="3611880"/>
             <a:ext cx="2331720" cy="502920"/>
           </a:xfrm>
           <a:prstGeom prst="rect">
@@ -4412,11 +4491,11 @@
           <a:p>
             <a:pPr algn="l"/>
             <a:r>
-              <a:rPr sz="2200" b="1">
-                <a:solidFill>
-                  <a:srgbClr val="22C55E"/>
-                </a:solidFill>
-                <a:latin typeface="Inter"/>
+              <a:rPr sz="2200" b="1" i="0">
+                <a:solidFill>
+                  <a:srgbClr val="007D77"/>
+                </a:solidFill>
+                <a:latin typeface="Montserrat"/>
               </a:rPr>
               <a:t>30/09/2026</a:t>
             </a:r>
@@ -4431,7 +4510,7 @@
         </p:nvSpPr>
         <p:spPr>
           <a:xfrm>
-            <a:off x="6318504" y="4206239"/>
+            <a:off x="6318504" y="4206240"/>
             <a:ext cx="2331720" cy="914400"/>
           </a:xfrm>
           <a:prstGeom prst="rect">
@@ -4451,11 +4530,11 @@
               </a:lnSpc>
             </a:pPr>
             <a:r>
-              <a:rPr sz="1050" b="0">
-                <a:solidFill>
-                  <a:srgbClr val="E0E0E0"/>
-                </a:solidFill>
-                <a:latin typeface="Inter"/>
+              <a:rPr sz="1050" b="0" i="0">
+                <a:solidFill>
+                  <a:srgbClr val="20303F"/>
+                </a:solidFill>
+                <a:latin typeface="Montserrat"/>
               </a:rPr>
               <a:t>2 correias no plano. Ambas concluídas até 30/09/2026.</a:t>
             </a:r>
@@ -4470,14 +4549,14 @@
         </p:nvSpPr>
         <p:spPr>
           <a:xfrm>
-            <a:off x="8951976" y="2331720"/>
-            <a:ext cx="2697480" cy="2880360"/>
+            <a:off x="8951976" y="2286000"/>
+            <a:ext cx="2697480" cy="2926080"/>
           </a:xfrm>
           <a:prstGeom prst="roundRect">
             <a:avLst/>
           </a:prstGeom>
           <a:solidFill>
-            <a:srgbClr val="1E1E30"/>
+            <a:srgbClr val="F2F5F8"/>
           </a:solidFill>
           <a:ln>
             <a:noFill/>
@@ -4514,14 +4593,14 @@
         </p:nvSpPr>
         <p:spPr>
           <a:xfrm>
-            <a:off x="8951976" y="2331720"/>
-            <a:ext cx="2697480" cy="109728"/>
+            <a:off x="8951976" y="2286000"/>
+            <a:ext cx="2697480" cy="118872"/>
           </a:xfrm>
           <a:prstGeom prst="rect">
             <a:avLst/>
           </a:prstGeom>
           <a:solidFill>
-            <a:srgbClr val="A855F7"/>
+            <a:srgbClr val="007CC5"/>
           </a:solidFill>
           <a:ln>
             <a:noFill/>
@@ -4558,7 +4637,7 @@
         </p:nvSpPr>
         <p:spPr>
           <a:xfrm>
-            <a:off x="9134856" y="2587752"/>
+            <a:off x="9134856" y="2560320"/>
             <a:ext cx="2331720" cy="365760"/>
           </a:xfrm>
           <a:prstGeom prst="rect">
@@ -4574,11 +4653,11 @@
           <a:p>
             <a:pPr algn="l"/>
             <a:r>
-              <a:rPr sz="1300" b="1">
-                <a:solidFill>
-                  <a:srgbClr val="A855F7"/>
-                </a:solidFill>
-                <a:latin typeface="Inter"/>
+              <a:rPr sz="1300" b="1" i="0">
+                <a:solidFill>
+                  <a:srgbClr val="007CC5"/>
+                </a:solidFill>
+                <a:latin typeface="Montserrat"/>
               </a:rPr>
               <a:t>BLS</a:t>
             </a:r>
@@ -4593,7 +4672,7 @@
         </p:nvSpPr>
         <p:spPr>
           <a:xfrm>
-            <a:off x="9134856" y="2898648"/>
+            <a:off x="9134856" y="2871216"/>
             <a:ext cx="2331720" cy="457200"/>
           </a:xfrm>
           <a:prstGeom prst="rect">
@@ -4609,11 +4688,11 @@
           <a:p>
             <a:pPr algn="l"/>
             <a:r>
-              <a:rPr sz="1500" b="1">
-                <a:solidFill>
-                  <a:srgbClr val="FFFFFF"/>
-                </a:solidFill>
-                <a:latin typeface="Inter"/>
+              <a:rPr sz="1500" b="1" i="0">
+                <a:solidFill>
+                  <a:srgbClr val="20303F"/>
+                </a:solidFill>
+                <a:latin typeface="Montserrat"/>
               </a:rPr>
               <a:t>Balsas</a:t>
             </a:r>
@@ -4628,7 +4707,7 @@
         </p:nvSpPr>
         <p:spPr>
           <a:xfrm>
-            <a:off x="9134856" y="3383280"/>
+            <a:off x="9134856" y="3364992"/>
             <a:ext cx="2331720" cy="320040"/>
           </a:xfrm>
           <a:prstGeom prst="rect">
@@ -4644,11 +4723,11 @@
           <a:p>
             <a:pPr algn="l"/>
             <a:r>
-              <a:rPr sz="1000" b="1">
-                <a:solidFill>
-                  <a:srgbClr val="9CA3AF"/>
-                </a:solidFill>
-                <a:latin typeface="Inter"/>
+              <a:rPr sz="1000" b="1" i="0">
+                <a:solidFill>
+                  <a:srgbClr val="6B7885"/>
+                </a:solidFill>
+                <a:latin typeface="Montserrat"/>
               </a:rPr>
               <a:t>CONCLUÍDA EM</a:t>
             </a:r>
@@ -4663,7 +4742,7 @@
         </p:nvSpPr>
         <p:spPr>
           <a:xfrm>
-            <a:off x="9134856" y="3630168"/>
+            <a:off x="9134856" y="3611880"/>
             <a:ext cx="2331720" cy="502920"/>
           </a:xfrm>
           <a:prstGeom prst="rect">
@@ -4679,11 +4758,11 @@
           <a:p>
             <a:pPr algn="l"/>
             <a:r>
-              <a:rPr sz="2200" b="1">
-                <a:solidFill>
-                  <a:srgbClr val="A855F7"/>
-                </a:solidFill>
-                <a:latin typeface="Inter"/>
+              <a:rPr sz="2200" b="1" i="0">
+                <a:solidFill>
+                  <a:srgbClr val="007CC5"/>
+                </a:solidFill>
+                <a:latin typeface="Montserrat"/>
               </a:rPr>
               <a:t>24/07/2026</a:t>
             </a:r>
@@ -4698,7 +4777,7 @@
         </p:nvSpPr>
         <p:spPr>
           <a:xfrm>
-            <a:off x="9134856" y="4206239"/>
+            <a:off x="9134856" y="4206240"/>
             <a:ext cx="2331720" cy="914400"/>
           </a:xfrm>
           <a:prstGeom prst="rect">
@@ -4718,11 +4797,11 @@
               </a:lnSpc>
             </a:pPr>
             <a:r>
-              <a:rPr sz="1050" b="0">
-                <a:solidFill>
-                  <a:srgbClr val="E0E0E0"/>
-                </a:solidFill>
-                <a:latin typeface="Inter"/>
+              <a:rPr sz="1050" b="0" i="0">
+                <a:solidFill>
+                  <a:srgbClr val="20303F"/>
+                </a:solidFill>
+                <a:latin typeface="Montserrat"/>
               </a:rPr>
               <a:t>4 esteiras + 1 sobressalente; 1 concluída. Esteiras concluídas até 24/07/2026.</a:t>
             </a:r>
@@ -4737,8 +4816,8 @@
         </p:nvSpPr>
         <p:spPr>
           <a:xfrm>
-            <a:off x="502920" y="6446520"/>
-            <a:ext cx="8229600" cy="320040"/>
+            <a:off x="502920" y="6419088"/>
+            <a:ext cx="9144000" cy="320040"/>
           </a:xfrm>
           <a:prstGeom prst="rect">
             <a:avLst/>
@@ -4753,13 +4832,13 @@
           <a:p>
             <a:pPr algn="l"/>
             <a:r>
-              <a:rPr sz="900" b="0">
-                <a:solidFill>
-                  <a:srgbClr val="6B7280"/>
-                </a:solidFill>
-                <a:latin typeface="Inter"/>
-              </a:rPr>
-              <a:t>INPASA  •  Plano de Substituição de Correias Transportadoras  •  ref. 02/07/2026</a:t>
+              <a:rPr sz="900" b="0" i="0">
+                <a:solidFill>
+                  <a:srgbClr val="6B7885"/>
+                </a:solidFill>
+                <a:latin typeface="Montserrat"/>
+              </a:rPr>
+              <a:t>INPASA Agroindustrial S/A  ·  Manutenção &amp; Automação  ·  ref. 02/07/2026</a:t>
             </a:r>
           </a:p>
         </p:txBody>
@@ -4772,7 +4851,7 @@
         </p:nvSpPr>
         <p:spPr>
           <a:xfrm>
-            <a:off x="11155680" y="6446520"/>
+            <a:off x="11155680" y="6419088"/>
             <a:ext cx="822960" cy="320040"/>
           </a:xfrm>
           <a:prstGeom prst="rect">
@@ -4788,11 +4867,11 @@
           <a:p>
             <a:pPr algn="r"/>
             <a:r>
-              <a:rPr sz="900" b="0">
-                <a:solidFill>
-                  <a:srgbClr val="6B7280"/>
-                </a:solidFill>
-                <a:latin typeface="Inter"/>
+              <a:rPr sz="900" b="0" i="0">
+                <a:solidFill>
+                  <a:srgbClr val="6B7885"/>
+                </a:solidFill>
+                <a:latin typeface="Montserrat"/>
               </a:rPr>
               <a:t>2</a:t>
             </a:r>
@@ -4832,7 +4911,7 @@
             <a:avLst/>
           </a:prstGeom>
           <a:solidFill>
-            <a:srgbClr val="0F0F1A"/>
+            <a:srgbClr val="FFFFFF"/>
           </a:solidFill>
           <a:ln>
             <a:noFill/>
@@ -4870,13 +4949,13 @@
         <p:spPr>
           <a:xfrm>
             <a:off x="0" y="0"/>
-            <a:ext cx="12191695" cy="1097280"/>
+            <a:ext cx="12191695" cy="1051560"/>
           </a:xfrm>
           <a:prstGeom prst="rect">
             <a:avLst/>
           </a:prstGeom>
           <a:solidFill>
-            <a:srgbClr val="1E1E30"/>
+            <a:srgbClr val="124E81"/>
           </a:solidFill>
           <a:ln>
             <a:noFill/>
@@ -4913,14 +4992,14 @@
         </p:nvSpPr>
         <p:spPr>
           <a:xfrm>
-            <a:off x="0" y="1097280"/>
-            <a:ext cx="12191695" cy="36576"/>
+            <a:off x="0" y="1051560"/>
+            <a:ext cx="12191695" cy="45720"/>
           </a:xfrm>
           <a:prstGeom prst="rect">
             <a:avLst/>
           </a:prstGeom>
           <a:solidFill>
-            <a:srgbClr val="F97316"/>
+            <a:srgbClr val="FFA32A"/>
           </a:solidFill>
           <a:ln>
             <a:noFill/>
@@ -4973,11 +5052,11 @@
           <a:p>
             <a:pPr algn="l"/>
             <a:r>
-              <a:rPr sz="1200" b="1">
-                <a:solidFill>
-                  <a:srgbClr val="F97316"/>
-                </a:solidFill>
-                <a:latin typeface="Inter"/>
+              <a:rPr sz="1200" b="1" i="0">
+                <a:solidFill>
+                  <a:srgbClr val="EAA239"/>
+                </a:solidFill>
+                <a:latin typeface="Montserrat"/>
               </a:rPr>
               <a:t>LINHA DO TEMPO</a:t>
             </a:r>
@@ -4992,8 +5071,8 @@
         </p:nvSpPr>
         <p:spPr>
           <a:xfrm>
-            <a:off x="502920" y="420624"/>
-            <a:ext cx="11155680" cy="548640"/>
+            <a:off x="502920" y="402336"/>
+            <a:ext cx="11155680" cy="566928"/>
           </a:xfrm>
           <a:prstGeom prst="rect">
             <a:avLst/>
@@ -5008,11 +5087,11 @@
           <a:p>
             <a:pPr algn="l"/>
             <a:r>
-              <a:rPr sz="2500" b="1">
+              <a:rPr sz="2500" b="1" i="0">
                 <a:solidFill>
                   <a:srgbClr val="FFFFFF"/>
                 </a:solidFill>
-                <a:latin typeface="Inter"/>
+                <a:latin typeface="Montserrat"/>
               </a:rPr>
               <a:t>Marcos de conclusão (jul → dez/2026)</a:t>
             </a:r>
@@ -5034,7 +5113,7 @@
             <a:avLst/>
           </a:prstGeom>
           <a:solidFill>
-            <a:srgbClr val="2A2A40"/>
+            <a:srgbClr val="BDBFC1"/>
           </a:solidFill>
           <a:ln>
             <a:noFill/>
@@ -5087,11 +5166,11 @@
           <a:p>
             <a:pPr algn="l"/>
             <a:r>
-              <a:rPr sz="1200" b="1">
-                <a:solidFill>
-                  <a:srgbClr val="F97316"/>
-                </a:solidFill>
-                <a:latin typeface="Inter"/>
+              <a:rPr sz="1200" b="1" i="0">
+                <a:solidFill>
+                  <a:srgbClr val="124E81"/>
+                </a:solidFill>
+                <a:latin typeface="Montserrat"/>
               </a:rPr>
               <a:t>Jul</a:t>
             </a:r>
@@ -5113,7 +5192,7 @@
             <a:avLst/>
           </a:prstGeom>
           <a:solidFill>
-            <a:srgbClr val="2A2A40"/>
+            <a:srgbClr val="BDBFC1"/>
           </a:solidFill>
           <a:ln>
             <a:noFill/>
@@ -5166,11 +5245,11 @@
           <a:p>
             <a:pPr algn="l"/>
             <a:r>
-              <a:rPr sz="1200" b="1">
-                <a:solidFill>
-                  <a:srgbClr val="F97316"/>
-                </a:solidFill>
-                <a:latin typeface="Inter"/>
+              <a:rPr sz="1200" b="1" i="0">
+                <a:solidFill>
+                  <a:srgbClr val="124E81"/>
+                </a:solidFill>
+                <a:latin typeface="Montserrat"/>
               </a:rPr>
               <a:t>Ago</a:t>
             </a:r>
@@ -5192,7 +5271,7 @@
             <a:avLst/>
           </a:prstGeom>
           <a:solidFill>
-            <a:srgbClr val="2A2A40"/>
+            <a:srgbClr val="BDBFC1"/>
           </a:solidFill>
           <a:ln>
             <a:noFill/>
@@ -5245,11 +5324,11 @@
           <a:p>
             <a:pPr algn="l"/>
             <a:r>
-              <a:rPr sz="1200" b="1">
-                <a:solidFill>
-                  <a:srgbClr val="F97316"/>
-                </a:solidFill>
-                <a:latin typeface="Inter"/>
+              <a:rPr sz="1200" b="1" i="0">
+                <a:solidFill>
+                  <a:srgbClr val="124E81"/>
+                </a:solidFill>
+                <a:latin typeface="Montserrat"/>
               </a:rPr>
               <a:t>Set</a:t>
             </a:r>
@@ -5271,7 +5350,7 @@
             <a:avLst/>
           </a:prstGeom>
           <a:solidFill>
-            <a:srgbClr val="2A2A40"/>
+            <a:srgbClr val="BDBFC1"/>
           </a:solidFill>
           <a:ln>
             <a:noFill/>
@@ -5324,11 +5403,11 @@
           <a:p>
             <a:pPr algn="l"/>
             <a:r>
-              <a:rPr sz="1200" b="1">
-                <a:solidFill>
-                  <a:srgbClr val="F97316"/>
-                </a:solidFill>
-                <a:latin typeface="Inter"/>
+              <a:rPr sz="1200" b="1" i="0">
+                <a:solidFill>
+                  <a:srgbClr val="124E81"/>
+                </a:solidFill>
+                <a:latin typeface="Montserrat"/>
               </a:rPr>
               <a:t>Out</a:t>
             </a:r>
@@ -5350,7 +5429,7 @@
             <a:avLst/>
           </a:prstGeom>
           <a:solidFill>
-            <a:srgbClr val="2A2A40"/>
+            <a:srgbClr val="BDBFC1"/>
           </a:solidFill>
           <a:ln>
             <a:noFill/>
@@ -5403,11 +5482,11 @@
           <a:p>
             <a:pPr algn="l"/>
             <a:r>
-              <a:rPr sz="1200" b="1">
-                <a:solidFill>
-                  <a:srgbClr val="F97316"/>
-                </a:solidFill>
-                <a:latin typeface="Inter"/>
+              <a:rPr sz="1200" b="1" i="0">
+                <a:solidFill>
+                  <a:srgbClr val="124E81"/>
+                </a:solidFill>
+                <a:latin typeface="Montserrat"/>
               </a:rPr>
               <a:t>Nov</a:t>
             </a:r>
@@ -5429,7 +5508,7 @@
             <a:avLst/>
           </a:prstGeom>
           <a:solidFill>
-            <a:srgbClr val="2A2A40"/>
+            <a:srgbClr val="BDBFC1"/>
           </a:solidFill>
           <a:ln>
             <a:noFill/>
@@ -5482,11 +5561,11 @@
           <a:p>
             <a:pPr algn="l"/>
             <a:r>
-              <a:rPr sz="1200" b="1">
-                <a:solidFill>
-                  <a:srgbClr val="F97316"/>
-                </a:solidFill>
-                <a:latin typeface="Inter"/>
+              <a:rPr sz="1200" b="1" i="0">
+                <a:solidFill>
+                  <a:srgbClr val="124E81"/>
+                </a:solidFill>
+                <a:latin typeface="Montserrat"/>
               </a:rPr>
               <a:t>Dez</a:t>
             </a:r>
@@ -5508,7 +5587,7 @@
             <a:avLst/>
           </a:prstGeom>
           <a:solidFill>
-            <a:srgbClr val="EF4444"/>
+            <a:srgbClr val="CC5121"/>
           </a:solidFill>
           <a:ln>
             <a:noFill/>
@@ -5561,11 +5640,11 @@
           <a:p>
             <a:pPr algn="l"/>
             <a:r>
-              <a:rPr sz="1000" b="1">
-                <a:solidFill>
-                  <a:srgbClr val="EF4444"/>
-                </a:solidFill>
-                <a:latin typeface="Inter"/>
+              <a:rPr sz="1000" b="1" i="0">
+                <a:solidFill>
+                  <a:srgbClr val="CC5121"/>
+                </a:solidFill>
+                <a:latin typeface="Montserrat"/>
               </a:rPr>
               <a:t>HOJE</a:t>
             </a:r>
@@ -5596,23 +5675,23 @@
           <a:p>
             <a:pPr algn="l"/>
             <a:r>
-              <a:rPr sz="1100" b="1">
-                <a:solidFill>
-                  <a:srgbClr val="3B82F6"/>
-                </a:solidFill>
-                <a:latin typeface="Inter"/>
-              </a:rPr>
-              <a:t>NVM · Nova Mutum</a:t>
+              <a:rPr sz="1100" b="1" i="0">
+                <a:solidFill>
+                  <a:srgbClr val="124E81"/>
+                </a:solidFill>
+                <a:latin typeface="Montserrat"/>
+              </a:rPr>
+              <a:t>NMT · Nova Mutum</a:t>
             </a:r>
           </a:p>
           <a:p>
             <a:pPr algn="l"/>
             <a:r>
-              <a:rPr sz="1100" b="1">
-                <a:solidFill>
-                  <a:srgbClr val="3B82F6"/>
-                </a:solidFill>
-                <a:latin typeface="Inter"/>
+              <a:rPr sz="1100" b="1" i="0">
+                <a:solidFill>
+                  <a:srgbClr val="124E81"/>
+                </a:solidFill>
+                <a:latin typeface="Montserrat"/>
               </a:rPr>
               <a:t>16 correias</a:t>
             </a:r>
@@ -5634,7 +5713,7 @@
             <a:avLst/>
           </a:prstGeom>
           <a:solidFill>
-            <a:srgbClr val="3B82F6"/>
+            <a:srgbClr val="124E81"/>
           </a:solidFill>
           <a:ln>
             <a:noFill/>
@@ -5687,11 +5766,11 @@
           <a:p>
             <a:pPr algn="l"/>
             <a:r>
-              <a:rPr sz="1100" b="1">
-                <a:solidFill>
-                  <a:srgbClr val="FFFFFF"/>
-                </a:solidFill>
-                <a:latin typeface="Inter"/>
+              <a:rPr sz="1100" b="1" i="0">
+                <a:solidFill>
+                  <a:srgbClr val="20303F"/>
+                </a:solidFill>
+                <a:latin typeface="Montserrat"/>
               </a:rPr>
               <a:t>22/10/2026</a:t>
             </a:r>
@@ -5722,11 +5801,11 @@
           <a:p>
             <a:pPr algn="l"/>
             <a:r>
-              <a:rPr sz="1100" b="1">
-                <a:solidFill>
-                  <a:srgbClr val="F97316"/>
-                </a:solidFill>
-                <a:latin typeface="Inter"/>
+              <a:rPr sz="1100" b="1" i="0">
+                <a:solidFill>
+                  <a:srgbClr val="EAA239"/>
+                </a:solidFill>
+                <a:latin typeface="Montserrat"/>
               </a:rPr>
               <a:t>SNP · Sinop</a:t>
             </a:r>
@@ -5734,11 +5813,11 @@
           <a:p>
             <a:pPr algn="l"/>
             <a:r>
-              <a:rPr sz="1100" b="1">
-                <a:solidFill>
-                  <a:srgbClr val="F97316"/>
-                </a:solidFill>
-                <a:latin typeface="Inter"/>
+              <a:rPr sz="1100" b="1" i="0">
+                <a:solidFill>
+                  <a:srgbClr val="EAA239"/>
+                </a:solidFill>
+                <a:latin typeface="Montserrat"/>
               </a:rPr>
               <a:t>23 correias</a:t>
             </a:r>
@@ -5760,7 +5839,7 @@
             <a:avLst/>
           </a:prstGeom>
           <a:solidFill>
-            <a:srgbClr val="F97316"/>
+            <a:srgbClr val="EAA239"/>
           </a:solidFill>
           <a:ln>
             <a:noFill/>
@@ -5813,11 +5892,11 @@
           <a:p>
             <a:pPr algn="l"/>
             <a:r>
-              <a:rPr sz="1100" b="1">
-                <a:solidFill>
-                  <a:srgbClr val="FFFFFF"/>
-                </a:solidFill>
-                <a:latin typeface="Inter"/>
+              <a:rPr sz="1100" b="1" i="0">
+                <a:solidFill>
+                  <a:srgbClr val="20303F"/>
+                </a:solidFill>
+                <a:latin typeface="Montserrat"/>
               </a:rPr>
               <a:t>30/12/2026</a:t>
             </a:r>
@@ -5848,23 +5927,23 @@
           <a:p>
             <a:pPr algn="l"/>
             <a:r>
-              <a:rPr sz="1100" b="1">
-                <a:solidFill>
-                  <a:srgbClr val="22C55E"/>
-                </a:solidFill>
-                <a:latin typeface="Inter"/>
-              </a:rPr>
-              <a:t>SDL · Sidrolândia</a:t>
+              <a:rPr sz="1100" b="1" i="0">
+                <a:solidFill>
+                  <a:srgbClr val="007D77"/>
+                </a:solidFill>
+                <a:latin typeface="Montserrat"/>
+              </a:rPr>
+              <a:t>SDR · Sidrolândia</a:t>
             </a:r>
           </a:p>
           <a:p>
             <a:pPr algn="l"/>
             <a:r>
-              <a:rPr sz="1100" b="1">
-                <a:solidFill>
-                  <a:srgbClr val="22C55E"/>
-                </a:solidFill>
-                <a:latin typeface="Inter"/>
+              <a:rPr sz="1100" b="1" i="0">
+                <a:solidFill>
+                  <a:srgbClr val="007D77"/>
+                </a:solidFill>
+                <a:latin typeface="Montserrat"/>
               </a:rPr>
               <a:t>2 correias</a:t>
             </a:r>
@@ -5886,7 +5965,7 @@
             <a:avLst/>
           </a:prstGeom>
           <a:solidFill>
-            <a:srgbClr val="22C55E"/>
+            <a:srgbClr val="007D77"/>
           </a:solidFill>
           <a:ln>
             <a:noFill/>
@@ -5939,11 +6018,11 @@
           <a:p>
             <a:pPr algn="l"/>
             <a:r>
-              <a:rPr sz="1100" b="1">
-                <a:solidFill>
-                  <a:srgbClr val="FFFFFF"/>
-                </a:solidFill>
-                <a:latin typeface="Inter"/>
+              <a:rPr sz="1100" b="1" i="0">
+                <a:solidFill>
+                  <a:srgbClr val="20303F"/>
+                </a:solidFill>
+                <a:latin typeface="Montserrat"/>
               </a:rPr>
               <a:t>30/09/2026</a:t>
             </a:r>
@@ -5974,11 +6053,11 @@
           <a:p>
             <a:pPr algn="l"/>
             <a:r>
-              <a:rPr sz="1100" b="1">
-                <a:solidFill>
-                  <a:srgbClr val="A855F7"/>
-                </a:solidFill>
-                <a:latin typeface="Inter"/>
+              <a:rPr sz="1100" b="1" i="0">
+                <a:solidFill>
+                  <a:srgbClr val="007CC5"/>
+                </a:solidFill>
+                <a:latin typeface="Montserrat"/>
               </a:rPr>
               <a:t>BLS · Balsas</a:t>
             </a:r>
@@ -5986,11 +6065,11 @@
           <a:p>
             <a:pPr algn="l"/>
             <a:r>
-              <a:rPr sz="1100" b="1">
-                <a:solidFill>
-                  <a:srgbClr val="A855F7"/>
-                </a:solidFill>
-                <a:latin typeface="Inter"/>
+              <a:rPr sz="1100" b="1" i="0">
+                <a:solidFill>
+                  <a:srgbClr val="007CC5"/>
+                </a:solidFill>
+                <a:latin typeface="Montserrat"/>
               </a:rPr>
               <a:t>5 correias</a:t>
             </a:r>
@@ -6012,7 +6091,7 @@
             <a:avLst/>
           </a:prstGeom>
           <a:solidFill>
-            <a:srgbClr val="A855F7"/>
+            <a:srgbClr val="007CC5"/>
           </a:solidFill>
           <a:ln>
             <a:noFill/>
@@ -6065,11 +6144,11 @@
           <a:p>
             <a:pPr algn="l"/>
             <a:r>
-              <a:rPr sz="1100" b="1">
-                <a:solidFill>
-                  <a:srgbClr val="FFFFFF"/>
-                </a:solidFill>
-                <a:latin typeface="Inter"/>
+              <a:rPr sz="1100" b="1" i="0">
+                <a:solidFill>
+                  <a:srgbClr val="20303F"/>
+                </a:solidFill>
+                <a:latin typeface="Montserrat"/>
               </a:rPr>
               <a:t>24/07/2026</a:t>
             </a:r>
@@ -6100,11 +6179,11 @@
           <a:p>
             <a:pPr algn="l"/>
             <a:r>
-              <a:rPr sz="1300" b="1">
-                <a:solidFill>
-                  <a:srgbClr val="F97316"/>
-                </a:solidFill>
-                <a:latin typeface="Inter"/>
+              <a:rPr sz="1300" b="1" i="0">
+                <a:solidFill>
+                  <a:srgbClr val="124E81"/>
+                </a:solidFill>
+                <a:latin typeface="Montserrat"/>
               </a:rPr>
               <a:t>Conclusão de todo o programa: 30/12/2026 (última — Sinop, esteiras de cavacos da biomassa).</a:t>
             </a:r>
@@ -6119,8 +6198,8 @@
         </p:nvSpPr>
         <p:spPr>
           <a:xfrm>
-            <a:off x="502920" y="6446520"/>
-            <a:ext cx="8229600" cy="320040"/>
+            <a:off x="502920" y="6419088"/>
+            <a:ext cx="9144000" cy="320040"/>
           </a:xfrm>
           <a:prstGeom prst="rect">
             <a:avLst/>
@@ -6135,13 +6214,13 @@
           <a:p>
             <a:pPr algn="l"/>
             <a:r>
-              <a:rPr sz="900" b="0">
-                <a:solidFill>
-                  <a:srgbClr val="6B7280"/>
-                </a:solidFill>
-                <a:latin typeface="Inter"/>
-              </a:rPr>
-              <a:t>INPASA  •  Plano de Substituição de Correias Transportadoras  •  ref. 02/07/2026</a:t>
+              <a:rPr sz="900" b="0" i="0">
+                <a:solidFill>
+                  <a:srgbClr val="6B7885"/>
+                </a:solidFill>
+                <a:latin typeface="Montserrat"/>
+              </a:rPr>
+              <a:t>INPASA Agroindustrial S/A  ·  Manutenção &amp; Automação  ·  ref. 02/07/2026</a:t>
             </a:r>
           </a:p>
         </p:txBody>
@@ -6154,7 +6233,7 @@
         </p:nvSpPr>
         <p:spPr>
           <a:xfrm>
-            <a:off x="11155680" y="6446520"/>
+            <a:off x="11155680" y="6419088"/>
             <a:ext cx="822960" cy="320040"/>
           </a:xfrm>
           <a:prstGeom prst="rect">
@@ -6170,11 +6249,11 @@
           <a:p>
             <a:pPr algn="r"/>
             <a:r>
-              <a:rPr sz="900" b="0">
-                <a:solidFill>
-                  <a:srgbClr val="6B7280"/>
-                </a:solidFill>
-                <a:latin typeface="Inter"/>
+              <a:rPr sz="900" b="0" i="0">
+                <a:solidFill>
+                  <a:srgbClr val="6B7885"/>
+                </a:solidFill>
+                <a:latin typeface="Montserrat"/>
               </a:rPr>
               <a:t>3</a:t>
             </a:r>
@@ -6214,7 +6293,7 @@
             <a:avLst/>
           </a:prstGeom>
           <a:solidFill>
-            <a:srgbClr val="0F0F1A"/>
+            <a:srgbClr val="FFFFFF"/>
           </a:solidFill>
           <a:ln>
             <a:noFill/>
@@ -6252,13 +6331,13 @@
         <p:spPr>
           <a:xfrm>
             <a:off x="0" y="0"/>
-            <a:ext cx="12191695" cy="1097280"/>
+            <a:ext cx="12191695" cy="1051560"/>
           </a:xfrm>
           <a:prstGeom prst="rect">
             <a:avLst/>
           </a:prstGeom>
           <a:solidFill>
-            <a:srgbClr val="1E1E30"/>
+            <a:srgbClr val="124E81"/>
           </a:solidFill>
           <a:ln>
             <a:noFill/>
@@ -6295,14 +6374,14 @@
         </p:nvSpPr>
         <p:spPr>
           <a:xfrm>
-            <a:off x="0" y="1097280"/>
-            <a:ext cx="12191695" cy="36576"/>
+            <a:off x="0" y="1051560"/>
+            <a:ext cx="12191695" cy="45720"/>
           </a:xfrm>
           <a:prstGeom prst="rect">
             <a:avLst/>
           </a:prstGeom>
           <a:solidFill>
-            <a:srgbClr val="F97316"/>
+            <a:srgbClr val="FFA32A"/>
           </a:solidFill>
           <a:ln>
             <a:noFill/>
@@ -6355,11 +6434,11 @@
           <a:p>
             <a:pPr algn="l"/>
             <a:r>
-              <a:rPr sz="1200" b="1">
-                <a:solidFill>
-                  <a:srgbClr val="F97316"/>
-                </a:solidFill>
-                <a:latin typeface="Inter"/>
+              <a:rPr sz="1200" b="1" i="0">
+                <a:solidFill>
+                  <a:srgbClr val="EAA239"/>
+                </a:solidFill>
+                <a:latin typeface="Montserrat"/>
               </a:rPr>
               <a:t>CONSISTÊNCIA DOS NÚMEROS</a:t>
             </a:r>
@@ -6374,8 +6453,8 @@
         </p:nvSpPr>
         <p:spPr>
           <a:xfrm>
-            <a:off x="502920" y="420624"/>
-            <a:ext cx="11155680" cy="548640"/>
+            <a:off x="502920" y="402336"/>
+            <a:ext cx="11155680" cy="566928"/>
           </a:xfrm>
           <a:prstGeom prst="rect">
             <a:avLst/>
@@ -6390,11 +6469,11 @@
           <a:p>
             <a:pPr algn="l"/>
             <a:r>
-              <a:rPr sz="2500" b="1">
+              <a:rPr sz="2500" b="1" i="0">
                 <a:solidFill>
                   <a:srgbClr val="FFFFFF"/>
                 </a:solidFill>
-                <a:latin typeface="Inter"/>
+                <a:latin typeface="Montserrat"/>
               </a:rPr>
               <a:t>Reconciliação: levantamento × execução</a:t>
             </a:r>
@@ -6410,13 +6489,13 @@
         <p:spPr>
           <a:xfrm>
             <a:off x="502920" y="1417320"/>
-            <a:ext cx="5486400" cy="4480560"/>
+            <a:ext cx="5486400" cy="4343400"/>
           </a:xfrm>
           <a:prstGeom prst="roundRect">
             <a:avLst/>
           </a:prstGeom>
           <a:solidFill>
-            <a:srgbClr val="1E1E30"/>
+            <a:srgbClr val="F2F5F8"/>
           </a:solidFill>
           <a:ln>
             <a:noFill/>
@@ -6469,11 +6548,11 @@
           <a:p>
             <a:pPr algn="l"/>
             <a:r>
-              <a:rPr sz="1500" b="1">
-                <a:solidFill>
-                  <a:srgbClr val="F97316"/>
-                </a:solidFill>
-                <a:latin typeface="Inter"/>
+              <a:rPr sz="1500" b="1" i="0">
+                <a:solidFill>
+                  <a:srgbClr val="124E81"/>
+                </a:solidFill>
+                <a:latin typeface="Montserrat"/>
               </a:rPr>
               <a:t>Levantamento FLEXLAB (jun/2026)</a:t>
             </a:r>
@@ -6489,7 +6568,7 @@
         <p:spPr>
           <a:xfrm>
             <a:off x="777240" y="2148840"/>
-            <a:ext cx="5029200" cy="640080"/>
+            <a:ext cx="5029200" cy="603504"/>
           </a:xfrm>
           <a:prstGeom prst="rect">
             <a:avLst/>
@@ -6504,11 +6583,11 @@
           <a:p>
             <a:pPr algn="l"/>
             <a:r>
-              <a:rPr sz="1300" b="0">
-                <a:solidFill>
-                  <a:srgbClr val="FFFFFF"/>
-                </a:solidFill>
-                <a:latin typeface="Inter"/>
+              <a:rPr sz="1300" b="0" i="0">
+                <a:solidFill>
+                  <a:srgbClr val="20303F"/>
+                </a:solidFill>
+                <a:latin typeface="Montserrat"/>
               </a:rPr>
               <a:t>•  148 correias auditadas no grupo</a:t>
             </a:r>
@@ -6523,8 +6602,8 @@
         </p:nvSpPr>
         <p:spPr>
           <a:xfrm>
-            <a:off x="777240" y="2807208"/>
-            <a:ext cx="5029200" cy="640080"/>
+            <a:off x="777240" y="2770632"/>
+            <a:ext cx="5029200" cy="603504"/>
           </a:xfrm>
           <a:prstGeom prst="rect">
             <a:avLst/>
@@ -6539,13 +6618,13 @@
           <a:p>
             <a:pPr algn="l"/>
             <a:r>
-              <a:rPr sz="1300" b="0">
-                <a:solidFill>
-                  <a:srgbClr val="9CA3AF"/>
-                </a:solidFill>
-                <a:latin typeface="Inter"/>
-              </a:rPr>
-              <a:t>102 mantidas em operação (conforme norma / 2ª linha)</a:t>
+              <a:rPr sz="1300" b="0" i="0">
+                <a:solidFill>
+                  <a:srgbClr val="6B7885"/>
+                </a:solidFill>
+                <a:latin typeface="Montserrat"/>
+              </a:rPr>
+              <a:t>102 mantidas em operação</a:t>
             </a:r>
           </a:p>
         </p:txBody>
@@ -6558,8 +6637,8 @@
         </p:nvSpPr>
         <p:spPr>
           <a:xfrm>
-            <a:off x="777240" y="3465576"/>
-            <a:ext cx="5029200" cy="640080"/>
+            <a:off x="777240" y="3392424"/>
+            <a:ext cx="5029200" cy="603504"/>
           </a:xfrm>
           <a:prstGeom prst="rect">
             <a:avLst/>
@@ -6574,11 +6653,11 @@
           <a:p>
             <a:pPr algn="l"/>
             <a:r>
-              <a:rPr sz="1300" b="1">
-                <a:solidFill>
-                  <a:srgbClr val="FFFFFF"/>
-                </a:solidFill>
-                <a:latin typeface="Inter"/>
+              <a:rPr sz="1300" b="1" i="0">
+                <a:solidFill>
+                  <a:srgbClr val="20303F"/>
+                </a:solidFill>
+                <a:latin typeface="Montserrat"/>
               </a:rPr>
               <a:t>•  46 a substituir  →  R$ 6,15 mi</a:t>
             </a:r>
@@ -6593,8 +6672,8 @@
         </p:nvSpPr>
         <p:spPr>
           <a:xfrm>
-            <a:off x="777240" y="4123944"/>
-            <a:ext cx="5029200" cy="640080"/>
+            <a:off x="777240" y="4014216"/>
+            <a:ext cx="5029200" cy="603504"/>
           </a:xfrm>
           <a:prstGeom prst="rect">
             <a:avLst/>
@@ -6609,13 +6688,13 @@
           <a:p>
             <a:pPr algn="l"/>
             <a:r>
-              <a:rPr sz="1300" b="0">
-                <a:solidFill>
-                  <a:srgbClr val="9CA3AF"/>
-                </a:solidFill>
-                <a:latin typeface="Inter"/>
-              </a:rPr>
-              <a:t>   • 41 reprovadas no ensaio ISO 340 (imediata)</a:t>
+              <a:rPr sz="1300" b="0" i="0">
+                <a:solidFill>
+                  <a:srgbClr val="6B7885"/>
+                </a:solidFill>
+                <a:latin typeface="Montserrat"/>
+              </a:rPr>
+              <a:t>   • 41 reprovadas no ensaio ISO 340</a:t>
             </a:r>
           </a:p>
         </p:txBody>
@@ -6628,8 +6707,8 @@
         </p:nvSpPr>
         <p:spPr>
           <a:xfrm>
-            <a:off x="777240" y="4782312"/>
-            <a:ext cx="5029200" cy="640080"/>
+            <a:off x="777240" y="4636008"/>
+            <a:ext cx="5029200" cy="603504"/>
           </a:xfrm>
           <a:prstGeom prst="rect">
             <a:avLst/>
@@ -6644,13 +6723,13 @@
           <a:p>
             <a:pPr algn="l"/>
             <a:r>
-              <a:rPr sz="1300" b="0">
-                <a:solidFill>
-                  <a:srgbClr val="9CA3AF"/>
-                </a:solidFill>
-                <a:latin typeface="Inter"/>
-              </a:rPr>
-              <a:t>   • 5 por degradação física (programada)</a:t>
+              <a:rPr sz="1300" b="0" i="0">
+                <a:solidFill>
+                  <a:srgbClr val="6B7885"/>
+                </a:solidFill>
+                <a:latin typeface="Montserrat"/>
+              </a:rPr>
+              <a:t>   • 5 por degradação física</a:t>
             </a:r>
           </a:p>
         </p:txBody>
@@ -6664,13 +6743,13 @@
         <p:spPr>
           <a:xfrm>
             <a:off x="6217920" y="1417320"/>
-            <a:ext cx="5486400" cy="4480560"/>
+            <a:ext cx="5486400" cy="4343400"/>
           </a:xfrm>
           <a:prstGeom prst="roundRect">
             <a:avLst/>
           </a:prstGeom>
           <a:solidFill>
-            <a:srgbClr val="1E1E30"/>
+            <a:srgbClr val="F2F5F8"/>
           </a:solidFill>
           <a:ln>
             <a:noFill/>
@@ -6723,11 +6802,11 @@
           <a:p>
             <a:pPr algn="l"/>
             <a:r>
-              <a:rPr sz="1500" b="1">
-                <a:solidFill>
-                  <a:srgbClr val="22C55E"/>
-                </a:solidFill>
-                <a:latin typeface="Inter"/>
+              <a:rPr sz="1500" b="1" i="0">
+                <a:solidFill>
+                  <a:srgbClr val="609346"/>
+                </a:solidFill>
+                <a:latin typeface="Montserrat"/>
               </a:rPr>
               <a:t>Plano de execução (dashboard atual)</a:t>
             </a:r>
@@ -6743,7 +6822,7 @@
         <p:spPr>
           <a:xfrm>
             <a:off x="6492240" y="2148840"/>
-            <a:ext cx="5029200" cy="640080"/>
+            <a:ext cx="5029200" cy="603504"/>
           </a:xfrm>
           <a:prstGeom prst="rect">
             <a:avLst/>
@@ -6758,11 +6837,11 @@
           <a:p>
             <a:pPr algn="l"/>
             <a:r>
-              <a:rPr sz="1300" b="1">
-                <a:solidFill>
-                  <a:srgbClr val="FFFFFF"/>
-                </a:solidFill>
-                <a:latin typeface="Inter"/>
+              <a:rPr sz="1300" b="1" i="0">
+                <a:solidFill>
+                  <a:srgbClr val="20303F"/>
+                </a:solidFill>
+                <a:latin typeface="Montserrat"/>
               </a:rPr>
               <a:t>•  46 correias no plano  ✓ bate com as 46</a:t>
             </a:r>
@@ -6777,8 +6856,8 @@
         </p:nvSpPr>
         <p:spPr>
           <a:xfrm>
-            <a:off x="6492240" y="2807208"/>
-            <a:ext cx="5029200" cy="640080"/>
+            <a:off x="6492240" y="2770632"/>
+            <a:ext cx="5029200" cy="603504"/>
           </a:xfrm>
           <a:prstGeom prst="rect">
             <a:avLst/>
@@ -6793,11 +6872,11 @@
           <a:p>
             <a:pPr algn="l"/>
             <a:r>
-              <a:rPr sz="1300" b="0">
-                <a:solidFill>
-                  <a:srgbClr val="9CA3AF"/>
-                </a:solidFill>
-                <a:latin typeface="Inter"/>
+              <a:rPr sz="1300" b="0" i="0">
+                <a:solidFill>
+                  <a:srgbClr val="6B7885"/>
+                </a:solidFill>
+                <a:latin typeface="Montserrat"/>
               </a:rPr>
               <a:t>   • 3 já concluídas</a:t>
             </a:r>
@@ -6812,8 +6891,8 @@
         </p:nvSpPr>
         <p:spPr>
           <a:xfrm>
-            <a:off x="6492240" y="3465576"/>
-            <a:ext cx="5029200" cy="640080"/>
+            <a:off x="6492240" y="3392424"/>
+            <a:ext cx="5029200" cy="603504"/>
           </a:xfrm>
           <a:prstGeom prst="rect">
             <a:avLst/>
@@ -6828,11 +6907,11 @@
           <a:p>
             <a:pPr algn="l"/>
             <a:r>
-              <a:rPr sz="1300" b="0">
-                <a:solidFill>
-                  <a:srgbClr val="9CA3AF"/>
-                </a:solidFill>
-                <a:latin typeface="Inter"/>
+              <a:rPr sz="1300" b="0" i="0">
+                <a:solidFill>
+                  <a:srgbClr val="6B7885"/>
+                </a:solidFill>
+                <a:latin typeface="Montserrat"/>
               </a:rPr>
               <a:t>   • 43 em execução</a:t>
             </a:r>
@@ -6847,8 +6926,8 @@
         </p:nvSpPr>
         <p:spPr>
           <a:xfrm>
-            <a:off x="6492240" y="4123944"/>
-            <a:ext cx="5029200" cy="640080"/>
+            <a:off x="6492240" y="4014216"/>
+            <a:ext cx="5029200" cy="603504"/>
           </a:xfrm>
           <a:prstGeom prst="rect">
             <a:avLst/>
@@ -6863,11 +6942,11 @@
           <a:p>
             <a:pPr algn="l"/>
             <a:r>
-              <a:rPr sz="1300" b="1">
-                <a:solidFill>
-                  <a:srgbClr val="FFFFFF"/>
-                </a:solidFill>
-                <a:latin typeface="Inter"/>
+              <a:rPr sz="1300" b="1" i="0">
+                <a:solidFill>
+                  <a:srgbClr val="20303F"/>
+                </a:solidFill>
+                <a:latin typeface="Montserrat"/>
               </a:rPr>
               <a:t>•  Conclusão: 30/12/2026</a:t>
             </a:r>
@@ -6882,8 +6961,8 @@
         </p:nvSpPr>
         <p:spPr>
           <a:xfrm>
-            <a:off x="6492240" y="4782312"/>
-            <a:ext cx="5029200" cy="640080"/>
+            <a:off x="6492240" y="4636008"/>
+            <a:ext cx="5029200" cy="603504"/>
           </a:xfrm>
           <a:prstGeom prst="rect">
             <a:avLst/>
@@ -6898,11 +6977,11 @@
           <a:p>
             <a:pPr algn="l"/>
             <a:r>
-              <a:rPr sz="1300" b="0">
-                <a:solidFill>
-                  <a:srgbClr val="9CA3AF"/>
-                </a:solidFill>
-                <a:latin typeface="Inter"/>
+              <a:rPr sz="1300" b="0" i="0">
+                <a:solidFill>
+                  <a:srgbClr val="6B7885"/>
+                </a:solidFill>
+                <a:latin typeface="Montserrat"/>
               </a:rPr>
               <a:t>0 correias vencidas</a:t>
             </a:r>
@@ -6917,7 +6996,7 @@
         </p:nvSpPr>
         <p:spPr>
           <a:xfrm>
-            <a:off x="502920" y="5989320"/>
+            <a:off x="502920" y="5897880"/>
             <a:ext cx="11247120" cy="457200"/>
           </a:xfrm>
           <a:prstGeom prst="rect">
@@ -6933,13 +7012,13 @@
           <a:p>
             <a:pPr algn="l"/>
             <a:r>
-              <a:rPr sz="1050" b="0">
-                <a:solidFill>
-                  <a:srgbClr val="EAB308"/>
-                </a:solidFill>
-                <a:latin typeface="Inter"/>
-              </a:rPr>
-              <a:t>Obs.: padronizar código NMT/NVM (mesma planta) · confirmar unidades DRD e LEM · 1 dos 46 é sobressalente em estoque (45 esteiras físicas).</a:t>
+              <a:rPr sz="1050" b="0" i="0">
+                <a:solidFill>
+                  <a:srgbClr val="CC5121"/>
+                </a:solidFill>
+                <a:latin typeface="Montserrat"/>
+              </a:rPr>
+              <a:t>Obs.: cadastro do dashboard usa NVM/SDL — padronizar p/ os códigos oficiais NMT e SDR · confirmar unidades DRD e LEM · 1 dos 46 é sobressalente em estoque (45 esteiras físicas).</a:t>
             </a:r>
           </a:p>
         </p:txBody>
@@ -6952,8 +7031,8 @@
         </p:nvSpPr>
         <p:spPr>
           <a:xfrm>
-            <a:off x="502920" y="6446520"/>
-            <a:ext cx="8229600" cy="320040"/>
+            <a:off x="502920" y="6419088"/>
+            <a:ext cx="9144000" cy="320040"/>
           </a:xfrm>
           <a:prstGeom prst="rect">
             <a:avLst/>
@@ -6968,13 +7047,13 @@
           <a:p>
             <a:pPr algn="l"/>
             <a:r>
-              <a:rPr sz="900" b="0">
-                <a:solidFill>
-                  <a:srgbClr val="6B7280"/>
-                </a:solidFill>
-                <a:latin typeface="Inter"/>
-              </a:rPr>
-              <a:t>INPASA  •  Plano de Substituição de Correias Transportadoras  •  ref. 02/07/2026</a:t>
+              <a:rPr sz="900" b="0" i="0">
+                <a:solidFill>
+                  <a:srgbClr val="6B7885"/>
+                </a:solidFill>
+                <a:latin typeface="Montserrat"/>
+              </a:rPr>
+              <a:t>INPASA Agroindustrial S/A  ·  Manutenção &amp; Automação  ·  ref. 02/07/2026</a:t>
             </a:r>
           </a:p>
         </p:txBody>
@@ -6987,7 +7066,7 @@
         </p:nvSpPr>
         <p:spPr>
           <a:xfrm>
-            <a:off x="11155680" y="6446520"/>
+            <a:off x="11155680" y="6419088"/>
             <a:ext cx="822960" cy="320040"/>
           </a:xfrm>
           <a:prstGeom prst="rect">
@@ -7003,11 +7082,11 @@
           <a:p>
             <a:pPr algn="r"/>
             <a:r>
-              <a:rPr sz="900" b="0">
-                <a:solidFill>
-                  <a:srgbClr val="6B7280"/>
-                </a:solidFill>
-                <a:latin typeface="Inter"/>
+              <a:rPr sz="900" b="0" i="0">
+                <a:solidFill>
+                  <a:srgbClr val="6B7885"/>
+                </a:solidFill>
+                <a:latin typeface="Montserrat"/>
               </a:rPr>
               <a:t>4</a:t>
             </a:r>
@@ -7047,7 +7126,7 @@
             <a:avLst/>
           </a:prstGeom>
           <a:solidFill>
-            <a:srgbClr val="0F0F1A"/>
+            <a:srgbClr val="FFFFFF"/>
           </a:solidFill>
           <a:ln>
             <a:noFill/>
@@ -7085,13 +7164,13 @@
         <p:spPr>
           <a:xfrm>
             <a:off x="0" y="0"/>
-            <a:ext cx="12191695" cy="1097280"/>
+            <a:ext cx="12191695" cy="1051560"/>
           </a:xfrm>
           <a:prstGeom prst="rect">
             <a:avLst/>
           </a:prstGeom>
           <a:solidFill>
-            <a:srgbClr val="1E1E30"/>
+            <a:srgbClr val="124E81"/>
           </a:solidFill>
           <a:ln>
             <a:noFill/>
@@ -7128,14 +7207,14 @@
         </p:nvSpPr>
         <p:spPr>
           <a:xfrm>
-            <a:off x="0" y="1097280"/>
-            <a:ext cx="12191695" cy="36576"/>
+            <a:off x="0" y="1051560"/>
+            <a:ext cx="12191695" cy="45720"/>
           </a:xfrm>
           <a:prstGeom prst="rect">
             <a:avLst/>
           </a:prstGeom>
           <a:solidFill>
-            <a:srgbClr val="F97316"/>
+            <a:srgbClr val="FFA32A"/>
           </a:solidFill>
           <a:ln>
             <a:noFill/>
@@ -7188,11 +7267,11 @@
           <a:p>
             <a:pPr algn="l"/>
             <a:r>
-              <a:rPr sz="1200" b="1">
-                <a:solidFill>
-                  <a:srgbClr val="F97316"/>
-                </a:solidFill>
-                <a:latin typeface="Inter"/>
+              <a:rPr sz="1200" b="1" i="0">
+                <a:solidFill>
+                  <a:srgbClr val="EAA239"/>
+                </a:solidFill>
+                <a:latin typeface="Montserrat"/>
               </a:rPr>
               <a:t>DECISÃO E AÇÃO</a:t>
             </a:r>
@@ -7207,8 +7286,8 @@
         </p:nvSpPr>
         <p:spPr>
           <a:xfrm>
-            <a:off x="502920" y="420624"/>
-            <a:ext cx="11155680" cy="548640"/>
+            <a:off x="502920" y="402336"/>
+            <a:ext cx="11155680" cy="566928"/>
           </a:xfrm>
           <a:prstGeom prst="rect">
             <a:avLst/>
@@ -7223,11 +7302,11 @@
           <a:p>
             <a:pPr algn="l"/>
             <a:r>
-              <a:rPr sz="2500" b="1">
+              <a:rPr sz="2500" b="1" i="0">
                 <a:solidFill>
                   <a:srgbClr val="FFFFFF"/>
                 </a:solidFill>
-                <a:latin typeface="Inter"/>
+                <a:latin typeface="Montserrat"/>
               </a:rPr>
               <a:t>Cuidado especial até concluir a substituição</a:t>
             </a:r>
@@ -7243,13 +7322,13 @@
         <p:spPr>
           <a:xfrm>
             <a:off x="502920" y="1417320"/>
-            <a:ext cx="5486400" cy="4480560"/>
+            <a:ext cx="5486400" cy="4343400"/>
           </a:xfrm>
           <a:prstGeom prst="roundRect">
             <a:avLst/>
           </a:prstGeom>
           <a:solidFill>
-            <a:srgbClr val="1E1E30"/>
+            <a:srgbClr val="F2F5F8"/>
           </a:solidFill>
           <a:ln>
             <a:noFill/>
@@ -7302,13 +7381,13 @@
           <a:p>
             <a:pPr algn="l"/>
             <a:r>
-              <a:rPr sz="1600" b="1">
-                <a:solidFill>
-                  <a:srgbClr val="EF4444"/>
-                </a:solidFill>
-                <a:latin typeface="Inter"/>
-              </a:rPr>
-              <a:t>⚠  Pontos de atenção</a:t>
+              <a:rPr sz="1600" b="1" i="0">
+                <a:solidFill>
+                  <a:srgbClr val="CC5121"/>
+                </a:solidFill>
+                <a:latin typeface="Montserrat"/>
+              </a:rPr>
+              <a:t>Pontos de atenção</a:t>
             </a:r>
           </a:p>
         </p:txBody>
@@ -7322,7 +7401,7 @@
         <p:spPr>
           <a:xfrm>
             <a:off x="777240" y="2148840"/>
-            <a:ext cx="4937760" cy="914400"/>
+            <a:ext cx="4937760" cy="868680"/>
           </a:xfrm>
           <a:prstGeom prst="rect">
             <a:avLst/>
@@ -7341,13 +7420,13 @@
               </a:lnSpc>
             </a:pPr>
             <a:r>
-              <a:rPr sz="1300" b="0">
-                <a:solidFill>
-                  <a:srgbClr val="E0E0E0"/>
-                </a:solidFill>
-                <a:latin typeface="Inter"/>
-              </a:rPr>
-              <a:t>•  7 correias urgentes (&lt;=30 dias) — biomassa (SNP), DDGS (SDL/BLS), julho.</a:t>
+              <a:rPr sz="1300" b="0" i="0">
+                <a:solidFill>
+                  <a:srgbClr val="20303F"/>
+                </a:solidFill>
+                <a:latin typeface="Montserrat"/>
+              </a:rPr>
+              <a:t>•  7 correias urgentes (&lt;=30 dias) — biomassa (SNP), DDGS (SDR/BLS), julho.</a:t>
             </a:r>
           </a:p>
         </p:txBody>
@@ -7360,8 +7439,8 @@
         </p:nvSpPr>
         <p:spPr>
           <a:xfrm>
-            <a:off x="777240" y="3063240"/>
-            <a:ext cx="4937760" cy="914400"/>
+            <a:off x="777240" y="3017520"/>
+            <a:ext cx="4937760" cy="868680"/>
           </a:xfrm>
           <a:prstGeom prst="rect">
             <a:avLst/>
@@ -7380,11 +7459,11 @@
               </a:lnSpc>
             </a:pPr>
             <a:r>
-              <a:rPr sz="1300" b="0">
-                <a:solidFill>
-                  <a:srgbClr val="E0E0E0"/>
-                </a:solidFill>
-                <a:latin typeface="Inter"/>
+              <a:rPr sz="1300" b="0" i="0">
+                <a:solidFill>
+                  <a:srgbClr val="20303F"/>
+                </a:solidFill>
+                <a:latin typeface="Montserrat"/>
               </a:rPr>
               <a:t>•  Conclusão do programa depende da SNP (esteiras de cavacos, 30/12/2026).</a:t>
             </a:r>
@@ -7399,8 +7478,8 @@
         </p:nvSpPr>
         <p:spPr>
           <a:xfrm>
-            <a:off x="777240" y="3977640"/>
-            <a:ext cx="4937760" cy="914400"/>
+            <a:off x="777240" y="3886200"/>
+            <a:ext cx="4937760" cy="868680"/>
           </a:xfrm>
           <a:prstGeom prst="rect">
             <a:avLst/>
@@ -7419,11 +7498,11 @@
               </a:lnSpc>
             </a:pPr>
             <a:r>
-              <a:rPr sz="1300" b="0">
-                <a:solidFill>
-                  <a:srgbClr val="E0E0E0"/>
-                </a:solidFill>
-                <a:latin typeface="Inter"/>
+              <a:rPr sz="1300" b="0" i="0">
+                <a:solidFill>
+                  <a:srgbClr val="20303F"/>
+                </a:solidFill>
+                <a:latin typeface="Montserrat"/>
               </a:rPr>
               <a:t>•  Biomassa e grãos: maior exposição a incêndio por atrito (rolete/correia).</a:t>
             </a:r>
@@ -7438,8 +7517,8 @@
         </p:nvSpPr>
         <p:spPr>
           <a:xfrm>
-            <a:off x="777240" y="4892040"/>
-            <a:ext cx="4937760" cy="914400"/>
+            <a:off x="777240" y="4754880"/>
+            <a:ext cx="4937760" cy="868680"/>
           </a:xfrm>
           <a:prstGeom prst="rect">
             <a:avLst/>
@@ -7458,11 +7537,11 @@
               </a:lnSpc>
             </a:pPr>
             <a:r>
-              <a:rPr sz="1300" b="0">
-                <a:solidFill>
-                  <a:srgbClr val="E0E0E0"/>
-                </a:solidFill>
-                <a:latin typeface="Inter"/>
+              <a:rPr sz="1300" b="0" i="0">
+                <a:solidFill>
+                  <a:srgbClr val="20303F"/>
+                </a:solidFill>
+                <a:latin typeface="Montserrat"/>
               </a:rPr>
               <a:t>•  Janela de transição: risco elevado até a troca de todas as correias.</a:t>
             </a:r>
@@ -7478,13 +7557,13 @@
         <p:spPr>
           <a:xfrm>
             <a:off x="6217920" y="1417320"/>
-            <a:ext cx="5486400" cy="4480560"/>
+            <a:ext cx="5486400" cy="4343400"/>
           </a:xfrm>
           <a:prstGeom prst="roundRect">
             <a:avLst/>
           </a:prstGeom>
           <a:solidFill>
-            <a:srgbClr val="1E1E30"/>
+            <a:srgbClr val="F2F5F8"/>
           </a:solidFill>
           <a:ln>
             <a:noFill/>
@@ -7537,13 +7616,13 @@
           <a:p>
             <a:pPr algn="l"/>
             <a:r>
-              <a:rPr sz="1600" b="1">
-                <a:solidFill>
-                  <a:srgbClr val="22C55E"/>
-                </a:solidFill>
-                <a:latin typeface="Inter"/>
-              </a:rPr>
-              <a:t>✓  Encaminhamentos</a:t>
+              <a:rPr sz="1600" b="1" i="0">
+                <a:solidFill>
+                  <a:srgbClr val="609346"/>
+                </a:solidFill>
+                <a:latin typeface="Montserrat"/>
+              </a:rPr>
+              <a:t>Encaminhamentos</a:t>
             </a:r>
           </a:p>
         </p:txBody>
@@ -7557,7 +7636,7 @@
         <p:spPr>
           <a:xfrm>
             <a:off x="6492240" y="2148840"/>
-            <a:ext cx="4937760" cy="914400"/>
+            <a:ext cx="4937760" cy="868680"/>
           </a:xfrm>
           <a:prstGeom prst="rect">
             <a:avLst/>
@@ -7576,11 +7655,11 @@
               </a:lnSpc>
             </a:pPr>
             <a:r>
-              <a:rPr sz="1300" b="0">
-                <a:solidFill>
-                  <a:srgbClr val="E0E0E0"/>
-                </a:solidFill>
-                <a:latin typeface="Inter"/>
+              <a:rPr sz="1300" b="0" i="0">
+                <a:solidFill>
+                  <a:srgbClr val="20303F"/>
+                </a:solidFill>
+                <a:latin typeface="Montserrat"/>
               </a:rPr>
               <a:t>•  PCM acionado para alinhar com TODAS as áreas cuidado reforçado até concluir a substituição das correias.</a:t>
             </a:r>
@@ -7595,8 +7674,8 @@
         </p:nvSpPr>
         <p:spPr>
           <a:xfrm>
-            <a:off x="6492240" y="3063240"/>
-            <a:ext cx="4937760" cy="914400"/>
+            <a:off x="6492240" y="3017520"/>
+            <a:ext cx="4937760" cy="868680"/>
           </a:xfrm>
           <a:prstGeom prst="rect">
             <a:avLst/>
@@ -7615,11 +7694,11 @@
               </a:lnSpc>
             </a:pPr>
             <a:r>
-              <a:rPr sz="1300" b="0">
-                <a:solidFill>
-                  <a:srgbClr val="E0E0E0"/>
-                </a:solidFill>
-                <a:latin typeface="Inter"/>
+              <a:rPr sz="1300" b="0" i="0">
+                <a:solidFill>
+                  <a:srgbClr val="20303F"/>
+                </a:solidFill>
+                <a:latin typeface="Montserrat"/>
               </a:rPr>
               <a:t>•  Priorizar as correias urgentes de julho (biomassa/DDGS).</a:t>
             </a:r>
@@ -7634,8 +7713,8 @@
         </p:nvSpPr>
         <p:spPr>
           <a:xfrm>
-            <a:off x="6492240" y="3977640"/>
-            <a:ext cx="4937760" cy="914400"/>
+            <a:off x="6492240" y="3886200"/>
+            <a:ext cx="4937760" cy="868680"/>
           </a:xfrm>
           <a:prstGeom prst="rect">
             <a:avLst/>
@@ -7654,11 +7733,11 @@
               </a:lnSpc>
             </a:pPr>
             <a:r>
-              <a:rPr sz="1300" b="0">
-                <a:solidFill>
-                  <a:srgbClr val="E0E0E0"/>
-                </a:solidFill>
-                <a:latin typeface="Inter"/>
+              <a:rPr sz="1300" b="0" i="0">
+                <a:solidFill>
+                  <a:srgbClr val="20303F"/>
+                </a:solidFill>
+                <a:latin typeface="Montserrat"/>
               </a:rPr>
               <a:t>•  Reporte quinzenal de avanço por unidade (concluídas x plano).</a:t>
             </a:r>
@@ -7673,8 +7752,8 @@
         </p:nvSpPr>
         <p:spPr>
           <a:xfrm>
-            <a:off x="6492240" y="4892040"/>
-            <a:ext cx="4937760" cy="914400"/>
+            <a:off x="6492240" y="4754880"/>
+            <a:ext cx="4937760" cy="868680"/>
           </a:xfrm>
           <a:prstGeom prst="rect">
             <a:avLst/>
@@ -7693,13 +7772,13 @@
               </a:lnSpc>
             </a:pPr>
             <a:r>
-              <a:rPr sz="1300" b="0">
-                <a:solidFill>
-                  <a:srgbClr val="E0E0E0"/>
-                </a:solidFill>
-                <a:latin typeface="Inter"/>
-              </a:rPr>
-              <a:t>•  Padronizar cadastro (NMT/NVM) e confirmar DRD/LEM.</a:t>
+              <a:rPr sz="1300" b="0" i="0">
+                <a:solidFill>
+                  <a:srgbClr val="20303F"/>
+                </a:solidFill>
+                <a:latin typeface="Montserrat"/>
+              </a:rPr>
+              <a:t>•  Padronizar cadastro (NVM/SDL → NMT/SDR) e confirmar DRD/LEM.</a:t>
             </a:r>
           </a:p>
         </p:txBody>
@@ -7712,8 +7791,8 @@
         </p:nvSpPr>
         <p:spPr>
           <a:xfrm>
-            <a:off x="502920" y="6446520"/>
-            <a:ext cx="8229600" cy="320040"/>
+            <a:off x="502920" y="6419088"/>
+            <a:ext cx="9144000" cy="320040"/>
           </a:xfrm>
           <a:prstGeom prst="rect">
             <a:avLst/>
@@ -7728,13 +7807,13 @@
           <a:p>
             <a:pPr algn="l"/>
             <a:r>
-              <a:rPr sz="900" b="0">
-                <a:solidFill>
-                  <a:srgbClr val="6B7280"/>
-                </a:solidFill>
-                <a:latin typeface="Inter"/>
-              </a:rPr>
-              <a:t>INPASA  •  Plano de Substituição de Correias Transportadoras  •  ref. 02/07/2026</a:t>
+              <a:rPr sz="900" b="0" i="0">
+                <a:solidFill>
+                  <a:srgbClr val="6B7885"/>
+                </a:solidFill>
+                <a:latin typeface="Montserrat"/>
+              </a:rPr>
+              <a:t>INPASA Agroindustrial S/A  ·  Manutenção &amp; Automação  ·  ref. 02/07/2026</a:t>
             </a:r>
           </a:p>
         </p:txBody>
@@ -7747,7 +7826,7 @@
         </p:nvSpPr>
         <p:spPr>
           <a:xfrm>
-            <a:off x="11155680" y="6446520"/>
+            <a:off x="11155680" y="6419088"/>
             <a:ext cx="822960" cy="320040"/>
           </a:xfrm>
           <a:prstGeom prst="rect">
@@ -7763,11 +7842,11 @@
           <a:p>
             <a:pPr algn="r"/>
             <a:r>
-              <a:rPr sz="900" b="0">
-                <a:solidFill>
-                  <a:srgbClr val="6B7280"/>
-                </a:solidFill>
-                <a:latin typeface="Inter"/>
+              <a:rPr sz="900" b="0" i="0">
+                <a:solidFill>
+                  <a:srgbClr val="6B7885"/>
+                </a:solidFill>
+                <a:latin typeface="Montserrat"/>
               </a:rPr>
               <a:t>5</a:t>
             </a:r>

--- a/plano_seguranca/Apresentacao_Estrategica_Correias_INPASA.pptx
+++ b/plano_seguranca/Apresentacao_Estrategica_Correias_INPASA.pptx
@@ -6659,7 +6659,7 @@
                 </a:solidFill>
                 <a:latin typeface="Montserrat"/>
               </a:rPr>
-              <a:t>•  46 a substituir  →  R$ 6,15 mi</a:t>
+              <a:t>•  46 a substituir  →  R$ 6,15 mi (só correias)</a:t>
             </a:r>
           </a:p>
         </p:txBody>
@@ -6996,8 +6996,8 @@
         </p:nvSpPr>
         <p:spPr>
           <a:xfrm>
-            <a:off x="502920" y="5897880"/>
-            <a:ext cx="11247120" cy="457200"/>
+            <a:off x="502920" y="5806440"/>
+            <a:ext cx="11247120" cy="548640"/>
           </a:xfrm>
           <a:prstGeom prst="rect">
             <a:avLst/>
@@ -7018,7 +7018,7 @@
                 </a:solidFill>
                 <a:latin typeface="Montserrat"/>
               </a:rPr>
-              <a:t>Obs.: cadastro do dashboard usa NVM/SDL — padronizar p/ os códigos oficiais NMT e SDR · confirmar unidades DRD e LEM · 1 dos 46 é sobressalente em estoque (45 esteiras físicas).</a:t>
+              <a:t>Obs.: R$ 6,15 mi = somente as correias (material) — montagem com mão de obra interna, apenas vulcanização externa · Dourados (DRD) e LEM sem pendências (fora do escopo) · cadastro do dashboard usa NVM/SDL → padronizar p/ NMT/SDR · 1 dos 46 é sobressalente em estoque (45 esteiras físicas).</a:t>
             </a:r>
           </a:p>
         </p:txBody>
@@ -7778,7 +7778,7 @@
                 </a:solidFill>
                 <a:latin typeface="Montserrat"/>
               </a:rPr>
-              <a:t>•  Padronizar cadastro (NVM/SDL → NMT/SDR) e confirmar DRD/LEM.</a:t>
+              <a:t>•  Padronizar cadastro na origem (NVM/SDL → NMT/SDR).</a:t>
             </a:r>
           </a:p>
         </p:txBody>

--- a/plano_seguranca/Apresentacao_Estrategica_Correias_INPASA.pptx
+++ b/plano_seguranca/Apresentacao_Estrategica_Correias_INPASA.pptx
@@ -10,6 +10,7 @@
     <p:sldId id="258" r:id="rId9"/>
     <p:sldId id="259" r:id="rId10"/>
     <p:sldId id="260" r:id="rId11"/>
+    <p:sldId id="261" r:id="rId12"/>
   </p:sldIdLst>
   <p:sldSz cx="12191695" cy="6858000" type="screen4x3"/>
   <p:notesSz cx="6858000" cy="9144000"/>
@@ -3459,23 +3460,4204 @@
       <p:grpSpPr/>
       <p:sp>
         <p:nvSpPr>
-          <p:cNvPr id="2" name="Rectangle 1"/>
+          <p:cNvPr id="2" name="Shape 0"/>
           <p:cNvSpPr/>
           <p:nvPr/>
         </p:nvSpPr>
         <p:spPr>
           <a:xfrm>
             <a:off x="0" y="0"/>
-            <a:ext cx="12191695" cy="6858000"/>
+            <a:ext cx="12161520" cy="585216"/>
           </a:xfrm>
           <a:prstGeom prst="rect">
             <a:avLst/>
           </a:prstGeom>
           <a:solidFill>
-            <a:srgbClr val="FFFFFF"/>
+            <a:srgbClr val="124E81"/>
           </a:solidFill>
-          <a:ln>
-            <a:noFill/>
+          <a:ln w="12700">
+            <a:solidFill>
+              <a:srgbClr val="124E81"/>
+            </a:solidFill>
+            <a:prstDash val="solid"/>
+          </a:ln>
+        </p:spPr>
+        <p:txBody>
+          <a:bodyPr/>
+          <a:lstStyle/>
+          <a:p>
+            <a:endParaRPr lang="pt-BR"/>
+          </a:p>
+        </p:txBody>
+      </p:sp>
+      <p:sp>
+        <p:nvSpPr>
+          <p:cNvPr id="3" name="Shape 1"/>
+          <p:cNvSpPr/>
+          <p:nvPr/>
+        </p:nvSpPr>
+        <p:spPr>
+          <a:xfrm>
+            <a:off x="0" y="0"/>
+            <a:ext cx="54864" cy="585216"/>
+          </a:xfrm>
+          <a:prstGeom prst="rect">
+            <a:avLst/>
+          </a:prstGeom>
+          <a:solidFill>
+            <a:srgbClr val="FFA32A"/>
+          </a:solidFill>
+          <a:ln w="12700">
+            <a:solidFill>
+              <a:srgbClr val="FFA32A"/>
+            </a:solidFill>
+            <a:prstDash val="solid"/>
+          </a:ln>
+        </p:spPr>
+        <p:txBody>
+          <a:bodyPr/>
+          <a:lstStyle/>
+          <a:p>
+            <a:endParaRPr lang="pt-BR"/>
+          </a:p>
+        </p:txBody>
+      </p:sp>
+      <p:sp>
+        <p:nvSpPr>
+          <p:cNvPr id="4" name="Text 2"/>
+          <p:cNvSpPr/>
+          <p:nvPr/>
+        </p:nvSpPr>
+        <p:spPr>
+          <a:xfrm>
+            <a:off x="182880" y="0"/>
+            <a:ext cx="9144000" cy="585216"/>
+          </a:xfrm>
+          <a:prstGeom prst="rect">
+            <a:avLst/>
+          </a:prstGeom>
+          <a:noFill/>
+          <a:ln/>
+        </p:spPr>
+        <p:txBody>
+          <a:bodyPr wrap="square" rtlCol="0" anchor="ctr"/>
+          <a:lstStyle/>
+          <a:p>
+            <a:pPr marL="0" indent="0">
+              <a:buNone/>
+            </a:pPr>
+            <a:r>
+              <a:rPr lang="en-US" sz="1300" b="1" dirty="0">
+                <a:solidFill>
+                  <a:srgbClr val="FFFFFF"/>
+                </a:solidFill>
+                <a:latin typeface="Arial" pitchFamily="34" charset="0"/>
+                <a:ea typeface="Arial" pitchFamily="34" charset="-122"/>
+                <a:cs typeface="Arial" pitchFamily="34" charset="-120"/>
+              </a:rPr>
+              <a:t>Resultado do Levantamento — 148 Correias · NMT · SNP · SDL · DRD · BLS · LEM</a:t>
+            </a:r>
+            <a:endParaRPr lang="en-US" sz="1300" dirty="0"/>
+          </a:p>
+        </p:txBody>
+      </p:sp>
+      <p:sp>
+        <p:nvSpPr>
+          <p:cNvPr id="5" name="Text 3"/>
+          <p:cNvSpPr/>
+          <p:nvPr/>
+        </p:nvSpPr>
+        <p:spPr>
+          <a:xfrm>
+            <a:off x="9509760" y="0"/>
+            <a:ext cx="2468880" cy="585216"/>
+          </a:xfrm>
+          <a:prstGeom prst="rect">
+            <a:avLst/>
+          </a:prstGeom>
+          <a:noFill/>
+          <a:ln/>
+        </p:spPr>
+        <p:txBody>
+          <a:bodyPr wrap="square" rtlCol="0" anchor="ctr"/>
+          <a:lstStyle/>
+          <a:p>
+            <a:pPr marL="0" indent="0" algn="r">
+              <a:buNone/>
+            </a:pPr>
+            <a:r>
+              <a:rPr lang="en-US" sz="1000" dirty="0">
+                <a:solidFill>
+                  <a:srgbClr val="BDBFC1"/>
+                </a:solidFill>
+                <a:latin typeface="Arial" pitchFamily="34" charset="0"/>
+                <a:ea typeface="Arial" pitchFamily="34" charset="-122"/>
+                <a:cs typeface="Arial" pitchFamily="34" charset="-120"/>
+              </a:rPr>
+              <a:t>Grupo INPASA · Jun/2026</a:t>
+            </a:r>
+            <a:endParaRPr lang="en-US" sz="1000" dirty="0"/>
+          </a:p>
+        </p:txBody>
+      </p:sp>
+      <p:sp>
+        <p:nvSpPr>
+          <p:cNvPr id="6" name="Shape 4"/>
+          <p:cNvSpPr/>
+          <p:nvPr/>
+        </p:nvSpPr>
+        <p:spPr>
+          <a:xfrm>
+            <a:off x="182880" y="694944"/>
+            <a:ext cx="11795760" cy="475488"/>
+          </a:xfrm>
+          <a:prstGeom prst="rect">
+            <a:avLst/>
+          </a:prstGeom>
+          <a:solidFill>
+            <a:srgbClr val="609346"/>
+          </a:solidFill>
+          <a:ln w="12700">
+            <a:solidFill>
+              <a:srgbClr val="609346"/>
+            </a:solidFill>
+            <a:prstDash val="solid"/>
+          </a:ln>
+        </p:spPr>
+        <p:txBody>
+          <a:bodyPr/>
+          <a:lstStyle/>
+          <a:p>
+            <a:endParaRPr lang="pt-BR"/>
+          </a:p>
+        </p:txBody>
+      </p:sp>
+      <p:sp>
+        <p:nvSpPr>
+          <p:cNvPr id="7" name="Text 5"/>
+          <p:cNvSpPr/>
+          <p:nvPr/>
+        </p:nvSpPr>
+        <p:spPr>
+          <a:xfrm>
+            <a:off x="182880" y="694944"/>
+            <a:ext cx="11795760" cy="475488"/>
+          </a:xfrm>
+          <a:prstGeom prst="rect">
+            <a:avLst/>
+          </a:prstGeom>
+          <a:noFill/>
+          <a:ln/>
+        </p:spPr>
+        <p:txBody>
+          <a:bodyPr wrap="square" lIns="0" tIns="152400" rIns="152400" bIns="0" rtlCol="0" anchor="ctr"/>
+          <a:lstStyle/>
+          <a:p>
+            <a:pPr marL="0" indent="0">
+              <a:buNone/>
+            </a:pPr>
+            <a:r>
+              <a:rPr lang="en-US" sz="1050" b="1" dirty="0">
+                <a:solidFill>
+                  <a:srgbClr val="FFFFFF"/>
+                </a:solidFill>
+                <a:latin typeface="Arial" pitchFamily="34" charset="0"/>
+                <a:ea typeface="Arial" pitchFamily="34" charset="-122"/>
+                <a:cs typeface="Arial" pitchFamily="34" charset="-120"/>
+              </a:rPr>
+              <a:t>✓  FLEXLAB 0397/26 · 08/06/2026  ·  </a:t>
+            </a:r>
+            <a:r>
+              <a:rPr lang="en-US" sz="1050" dirty="0">
+                <a:solidFill>
+                  <a:srgbClr val="D4F5C4"/>
+                </a:solidFill>
+                <a:latin typeface="Arial" pitchFamily="34" charset="0"/>
+                <a:ea typeface="Arial" pitchFamily="34" charset="-122"/>
+                <a:cs typeface="Arial" pitchFamily="34" charset="-120"/>
+              </a:rPr>
+              <a:t>NMT CT-010 (correia do sinistro): </a:t>
+            </a:r>
+            <a:r>
+              <a:rPr lang="en-US" sz="1100" b="1" dirty="0">
+                <a:solidFill>
+                  <a:srgbClr val="FFFFFF"/>
+                </a:solidFill>
+                <a:latin typeface="Arial" pitchFamily="34" charset="0"/>
+                <a:ea typeface="Arial" pitchFamily="34" charset="-122"/>
+                <a:cs typeface="Arial" pitchFamily="34" charset="-120"/>
+              </a:rPr>
+              <a:t>ANTICHAMA CONFIRMADA — ISO 340</a:t>
+            </a:r>
+            <a:r>
+              <a:rPr lang="en-US" sz="1000" dirty="0">
+                <a:solidFill>
+                  <a:srgbClr val="D4F5C4"/>
+                </a:solidFill>
+                <a:latin typeface="Arial" pitchFamily="34" charset="0"/>
+                <a:ea typeface="Arial" pitchFamily="34" charset="-122"/>
+                <a:cs typeface="Arial" pitchFamily="34" charset="-120"/>
+              </a:rPr>
+              <a:t>  ·  Inclusa nas 88 antichama 2ª linha (categoria: com laudo, sem ID visual).</a:t>
+            </a:r>
+            <a:endParaRPr lang="en-US" sz="1050" dirty="0"/>
+          </a:p>
+        </p:txBody>
+      </p:sp>
+      <p:sp>
+        <p:nvSpPr>
+          <p:cNvPr id="8" name="Shape 6"/>
+          <p:cNvSpPr/>
+          <p:nvPr/>
+        </p:nvSpPr>
+        <p:spPr>
+          <a:xfrm>
+            <a:off x="182880" y="1261872"/>
+            <a:ext cx="7845552" cy="274320"/>
+          </a:xfrm>
+          <a:prstGeom prst="rect">
+            <a:avLst/>
+          </a:prstGeom>
+          <a:solidFill>
+            <a:srgbClr val="609346"/>
+          </a:solidFill>
+          <a:ln w="12700">
+            <a:solidFill>
+              <a:srgbClr val="609346"/>
+            </a:solidFill>
+            <a:prstDash val="solid"/>
+          </a:ln>
+        </p:spPr>
+        <p:txBody>
+          <a:bodyPr/>
+          <a:lstStyle/>
+          <a:p>
+            <a:endParaRPr lang="pt-BR"/>
+          </a:p>
+        </p:txBody>
+      </p:sp>
+      <p:sp>
+        <p:nvSpPr>
+          <p:cNvPr id="9" name="Text 7"/>
+          <p:cNvSpPr/>
+          <p:nvPr/>
+        </p:nvSpPr>
+        <p:spPr>
+          <a:xfrm>
+            <a:off x="182880" y="1261872"/>
+            <a:ext cx="8449056" cy="274320"/>
+          </a:xfrm>
+          <a:prstGeom prst="rect">
+            <a:avLst/>
+          </a:prstGeom>
+          <a:noFill/>
+          <a:ln/>
+        </p:spPr>
+        <p:txBody>
+          <a:bodyPr wrap="square" rtlCol="0" anchor="ctr"/>
+          <a:lstStyle/>
+          <a:p>
+            <a:pPr marL="0" indent="0" algn="ctr">
+              <a:buNone/>
+            </a:pPr>
+            <a:r>
+              <a:rPr lang="en-US" sz="950" b="1" dirty="0">
+                <a:solidFill>
+                  <a:srgbClr val="FFFFFF"/>
+                </a:solidFill>
+                <a:latin typeface="Arial" pitchFamily="34" charset="0"/>
+                <a:ea typeface="Arial" pitchFamily="34" charset="-122"/>
+                <a:cs typeface="Arial" pitchFamily="34" charset="-120"/>
+              </a:rPr>
+              <a:t>MANTER EM OPERAÇÃO — 102 correias</a:t>
+            </a:r>
+            <a:endParaRPr lang="en-US" sz="950" dirty="0"/>
+          </a:p>
+        </p:txBody>
+      </p:sp>
+      <p:sp>
+        <p:nvSpPr>
+          <p:cNvPr id="10" name="Shape 8"/>
+          <p:cNvSpPr/>
+          <p:nvPr/>
+        </p:nvSpPr>
+        <p:spPr>
+          <a:xfrm>
+            <a:off x="8083296" y="1261872"/>
+            <a:ext cx="3895344" cy="274320"/>
+          </a:xfrm>
+          <a:prstGeom prst="rect">
+            <a:avLst/>
+          </a:prstGeom>
+          <a:solidFill>
+            <a:srgbClr val="CC5121"/>
+          </a:solidFill>
+          <a:ln w="12700">
+            <a:solidFill>
+              <a:srgbClr val="CC5121"/>
+            </a:solidFill>
+            <a:prstDash val="solid"/>
+          </a:ln>
+        </p:spPr>
+        <p:txBody>
+          <a:bodyPr/>
+          <a:lstStyle/>
+          <a:p>
+            <a:endParaRPr lang="pt-BR"/>
+          </a:p>
+        </p:txBody>
+      </p:sp>
+      <p:sp>
+        <p:nvSpPr>
+          <p:cNvPr id="11" name="Text 9"/>
+          <p:cNvSpPr/>
+          <p:nvPr/>
+        </p:nvSpPr>
+        <p:spPr>
+          <a:xfrm>
+            <a:off x="8741664" y="1261872"/>
+            <a:ext cx="3236976" cy="274320"/>
+          </a:xfrm>
+          <a:prstGeom prst="rect">
+            <a:avLst/>
+          </a:prstGeom>
+          <a:noFill/>
+          <a:ln/>
+        </p:spPr>
+        <p:txBody>
+          <a:bodyPr wrap="square" rtlCol="0" anchor="ctr"/>
+          <a:lstStyle/>
+          <a:p>
+            <a:pPr marL="0" indent="0" algn="ctr">
+              <a:buNone/>
+            </a:pPr>
+            <a:r>
+              <a:rPr lang="en-US" sz="950" b="1" dirty="0">
+                <a:solidFill>
+                  <a:srgbClr val="FFFFFF"/>
+                </a:solidFill>
+                <a:latin typeface="Arial" pitchFamily="34" charset="0"/>
+                <a:ea typeface="Arial" pitchFamily="34" charset="-122"/>
+                <a:cs typeface="Arial" pitchFamily="34" charset="-120"/>
+              </a:rPr>
+              <a:t>SUBSTITUIR — 46  ·  R$ 6,15M</a:t>
+            </a:r>
+            <a:endParaRPr lang="en-US" sz="950" dirty="0"/>
+          </a:p>
+        </p:txBody>
+      </p:sp>
+      <p:sp>
+        <p:nvSpPr>
+          <p:cNvPr id="12" name="Shape 10"/>
+          <p:cNvSpPr/>
+          <p:nvPr/>
+        </p:nvSpPr>
+        <p:spPr>
+          <a:xfrm>
+            <a:off x="182880" y="1627632"/>
+            <a:ext cx="1920240" cy="4681728"/>
+          </a:xfrm>
+          <a:prstGeom prst="rect">
+            <a:avLst/>
+          </a:prstGeom>
+          <a:solidFill>
+            <a:srgbClr val="EAF5DC"/>
+          </a:solidFill>
+          <a:ln w="12700">
+            <a:solidFill>
+              <a:srgbClr val="609346">
+                <a:alpha val="45000"/>
+              </a:srgbClr>
+            </a:solidFill>
+            <a:prstDash val="solid"/>
+          </a:ln>
+          <a:effectLst>
+            <a:outerShdw blurRad="50800" dist="25400" dir="8100000" algn="bl" rotWithShape="0">
+              <a:srgbClr val="000000">
+                <a:alpha val="7000"/>
+              </a:srgbClr>
+            </a:outerShdw>
+          </a:effectLst>
+        </p:spPr>
+        <p:txBody>
+          <a:bodyPr/>
+          <a:lstStyle/>
+          <a:p>
+            <a:endParaRPr lang="pt-BR"/>
+          </a:p>
+        </p:txBody>
+      </p:sp>
+      <p:sp>
+        <p:nvSpPr>
+          <p:cNvPr id="13" name="Shape 11"/>
+          <p:cNvSpPr/>
+          <p:nvPr/>
+        </p:nvSpPr>
+        <p:spPr>
+          <a:xfrm>
+            <a:off x="182880" y="1627632"/>
+            <a:ext cx="1920240" cy="475488"/>
+          </a:xfrm>
+          <a:prstGeom prst="rect">
+            <a:avLst/>
+          </a:prstGeom>
+          <a:solidFill>
+            <a:srgbClr val="609346"/>
+          </a:solidFill>
+          <a:ln w="12700">
+            <a:solidFill>
+              <a:srgbClr val="609346"/>
+            </a:solidFill>
+            <a:prstDash val="solid"/>
+          </a:ln>
+        </p:spPr>
+        <p:txBody>
+          <a:bodyPr/>
+          <a:lstStyle/>
+          <a:p>
+            <a:endParaRPr lang="pt-BR"/>
+          </a:p>
+        </p:txBody>
+      </p:sp>
+      <p:sp>
+        <p:nvSpPr>
+          <p:cNvPr id="14" name="Text 12"/>
+          <p:cNvSpPr/>
+          <p:nvPr/>
+        </p:nvSpPr>
+        <p:spPr>
+          <a:xfrm>
+            <a:off x="274320" y="1636776"/>
+            <a:ext cx="1097280" cy="457200"/>
+          </a:xfrm>
+          <a:prstGeom prst="rect">
+            <a:avLst/>
+          </a:prstGeom>
+          <a:noFill/>
+          <a:ln/>
+        </p:spPr>
+        <p:txBody>
+          <a:bodyPr wrap="square" rtlCol="0" anchor="ctr"/>
+          <a:lstStyle/>
+          <a:p>
+            <a:pPr marL="0" indent="0">
+              <a:buNone/>
+            </a:pPr>
+            <a:r>
+              <a:rPr lang="en-US" sz="2800" b="1" dirty="0">
+                <a:solidFill>
+                  <a:srgbClr val="FFFFFF"/>
+                </a:solidFill>
+                <a:latin typeface="Arial" pitchFamily="34" charset="0"/>
+                <a:ea typeface="Arial" pitchFamily="34" charset="-122"/>
+                <a:cs typeface="Arial" pitchFamily="34" charset="-120"/>
+              </a:rPr>
+              <a:t>19</a:t>
+            </a:r>
+            <a:endParaRPr lang="en-US" sz="2800" dirty="0"/>
+          </a:p>
+        </p:txBody>
+      </p:sp>
+      <p:sp>
+        <p:nvSpPr>
+          <p:cNvPr id="15" name="Text 13"/>
+          <p:cNvSpPr/>
+          <p:nvPr/>
+        </p:nvSpPr>
+        <p:spPr>
+          <a:xfrm>
+            <a:off x="1188720" y="1755648"/>
+            <a:ext cx="822960" cy="256032"/>
+          </a:xfrm>
+          <a:prstGeom prst="rect">
+            <a:avLst/>
+          </a:prstGeom>
+          <a:noFill/>
+          <a:ln/>
+        </p:spPr>
+        <p:txBody>
+          <a:bodyPr wrap="square" rtlCol="0" anchor="ctr"/>
+          <a:lstStyle/>
+          <a:p>
+            <a:pPr marL="0" indent="0" algn="r">
+              <a:buNone/>
+            </a:pPr>
+            <a:r>
+              <a:rPr lang="en-US" sz="1100" dirty="0">
+                <a:solidFill>
+                  <a:srgbClr val="FFFFFF"/>
+                </a:solidFill>
+                <a:latin typeface="Arial" pitchFamily="34" charset="0"/>
+                <a:ea typeface="Arial" pitchFamily="34" charset="-122"/>
+                <a:cs typeface="Arial" pitchFamily="34" charset="-120"/>
+              </a:rPr>
+              <a:t>12,8%</a:t>
+            </a:r>
+            <a:endParaRPr lang="en-US" sz="1100" dirty="0"/>
+          </a:p>
+        </p:txBody>
+      </p:sp>
+      <p:sp>
+        <p:nvSpPr>
+          <p:cNvPr id="16" name="Text 14"/>
+          <p:cNvSpPr/>
+          <p:nvPr/>
+        </p:nvSpPr>
+        <p:spPr>
+          <a:xfrm>
+            <a:off x="274320" y="2139696"/>
+            <a:ext cx="1792224" cy="237744"/>
+          </a:xfrm>
+          <a:prstGeom prst="rect">
+            <a:avLst/>
+          </a:prstGeom>
+          <a:noFill/>
+          <a:ln/>
+        </p:spPr>
+        <p:txBody>
+          <a:bodyPr wrap="square" rtlCol="0" anchor="ctr"/>
+          <a:lstStyle/>
+          <a:p>
+            <a:pPr marL="0" indent="0">
+              <a:buNone/>
+            </a:pPr>
+            <a:r>
+              <a:rPr lang="en-US" sz="1050" b="1" dirty="0">
+                <a:solidFill>
+                  <a:srgbClr val="609346"/>
+                </a:solidFill>
+                <a:latin typeface="Arial" pitchFamily="34" charset="0"/>
+                <a:ea typeface="Arial" pitchFamily="34" charset="-122"/>
+                <a:cs typeface="Arial" pitchFamily="34" charset="-120"/>
+              </a:rPr>
+              <a:t>1ª Linha</a:t>
+            </a:r>
+            <a:endParaRPr lang="en-US" sz="1050" dirty="0"/>
+          </a:p>
+        </p:txBody>
+      </p:sp>
+      <p:sp>
+        <p:nvSpPr>
+          <p:cNvPr id="17" name="Text 15"/>
+          <p:cNvSpPr/>
+          <p:nvPr/>
+        </p:nvSpPr>
+        <p:spPr>
+          <a:xfrm>
+            <a:off x="274320" y="2377440"/>
+            <a:ext cx="1792224" cy="256032"/>
+          </a:xfrm>
+          <a:prstGeom prst="rect">
+            <a:avLst/>
+          </a:prstGeom>
+          <a:noFill/>
+          <a:ln/>
+        </p:spPr>
+        <p:txBody>
+          <a:bodyPr wrap="square" rtlCol="0" anchor="ctr"/>
+          <a:lstStyle/>
+          <a:p>
+            <a:pPr marL="0" indent="0">
+              <a:buNone/>
+            </a:pPr>
+            <a:r>
+              <a:rPr lang="en-US" sz="800" i="1" dirty="0">
+                <a:solidFill>
+                  <a:srgbClr val="6B7280"/>
+                </a:solidFill>
+                <a:latin typeface="Arial" pitchFamily="34" charset="0"/>
+                <a:ea typeface="Arial" pitchFamily="34" charset="-122"/>
+                <a:cs typeface="Arial" pitchFamily="34" charset="-120"/>
+              </a:rPr>
+              <a:t>Identificação visual na correia</a:t>
+            </a:r>
+            <a:endParaRPr lang="en-US" sz="800" dirty="0"/>
+          </a:p>
+        </p:txBody>
+      </p:sp>
+      <p:sp>
+        <p:nvSpPr>
+          <p:cNvPr id="18" name="Shape 16"/>
+          <p:cNvSpPr/>
+          <p:nvPr/>
+        </p:nvSpPr>
+        <p:spPr>
+          <a:xfrm>
+            <a:off x="274320" y="2670048"/>
+            <a:ext cx="1737360" cy="18288"/>
+          </a:xfrm>
+          <a:prstGeom prst="rect">
+            <a:avLst/>
+          </a:prstGeom>
+          <a:solidFill>
+            <a:srgbClr val="609346">
+              <a:alpha val="45000"/>
+            </a:srgbClr>
+          </a:solidFill>
+          <a:ln w="12700">
+            <a:solidFill>
+              <a:srgbClr val="609346">
+                <a:alpha val="45000"/>
+              </a:srgbClr>
+            </a:solidFill>
+            <a:prstDash val="solid"/>
+          </a:ln>
+        </p:spPr>
+        <p:txBody>
+          <a:bodyPr/>
+          <a:lstStyle/>
+          <a:p>
+            <a:endParaRPr lang="pt-BR"/>
+          </a:p>
+        </p:txBody>
+      </p:sp>
+      <p:sp>
+        <p:nvSpPr>
+          <p:cNvPr id="19" name="Text 17"/>
+          <p:cNvSpPr/>
+          <p:nvPr/>
+        </p:nvSpPr>
+        <p:spPr>
+          <a:xfrm>
+            <a:off x="274320" y="2724912"/>
+            <a:ext cx="1792224" cy="914400"/>
+          </a:xfrm>
+          <a:prstGeom prst="rect">
+            <a:avLst/>
+          </a:prstGeom>
+          <a:noFill/>
+          <a:ln/>
+        </p:spPr>
+        <p:txBody>
+          <a:bodyPr wrap="square" rtlCol="0" anchor="ctr"/>
+          <a:lstStyle/>
+          <a:p>
+            <a:pPr marL="0" indent="0">
+              <a:buNone/>
+            </a:pPr>
+            <a:r>
+              <a:rPr lang="en-US" sz="800" dirty="0">
+                <a:solidFill>
+                  <a:srgbClr val="374151"/>
+                </a:solidFill>
+                <a:latin typeface="Arial" pitchFamily="34" charset="0"/>
+                <a:ea typeface="Arial" pitchFamily="34" charset="-122"/>
+                <a:cs typeface="Arial" pitchFamily="34" charset="-120"/>
+              </a:rPr>
+              <a:t>Correia com marcação visual impressa, conforme exigido pela norma. Critério mais rigoroso.</a:t>
+            </a:r>
+            <a:endParaRPr lang="en-US" sz="800" dirty="0"/>
+          </a:p>
+        </p:txBody>
+      </p:sp>
+      <p:sp>
+        <p:nvSpPr>
+          <p:cNvPr id="20" name="Shape 18"/>
+          <p:cNvSpPr/>
+          <p:nvPr/>
+        </p:nvSpPr>
+        <p:spPr>
+          <a:xfrm>
+            <a:off x="274320" y="3831336"/>
+            <a:ext cx="82296" cy="82296"/>
+          </a:xfrm>
+          <a:prstGeom prst="ellipse">
+            <a:avLst/>
+          </a:prstGeom>
+          <a:solidFill>
+            <a:srgbClr val="609346"/>
+          </a:solidFill>
+          <a:ln w="12700">
+            <a:solidFill>
+              <a:srgbClr val="609346"/>
+            </a:solidFill>
+            <a:prstDash val="solid"/>
+          </a:ln>
+        </p:spPr>
+        <p:txBody>
+          <a:bodyPr/>
+          <a:lstStyle/>
+          <a:p>
+            <a:endParaRPr lang="pt-BR"/>
+          </a:p>
+        </p:txBody>
+      </p:sp>
+      <p:sp>
+        <p:nvSpPr>
+          <p:cNvPr id="21" name="Text 19"/>
+          <p:cNvSpPr/>
+          <p:nvPr/>
+        </p:nvSpPr>
+        <p:spPr>
+          <a:xfrm>
+            <a:off x="384048" y="3767328"/>
+            <a:ext cx="1682496" cy="310896"/>
+          </a:xfrm>
+          <a:prstGeom prst="rect">
+            <a:avLst/>
+          </a:prstGeom>
+          <a:noFill/>
+          <a:ln/>
+        </p:spPr>
+        <p:txBody>
+          <a:bodyPr wrap="square" rtlCol="0" anchor="ctr"/>
+          <a:lstStyle/>
+          <a:p>
+            <a:pPr marL="0" indent="0">
+              <a:buNone/>
+            </a:pPr>
+            <a:r>
+              <a:rPr lang="en-US" sz="800" b="1" dirty="0">
+                <a:solidFill>
+                  <a:srgbClr val="1F2937"/>
+                </a:solidFill>
+                <a:latin typeface="Arial" pitchFamily="34" charset="0"/>
+                <a:ea typeface="Arial" pitchFamily="34" charset="-122"/>
+                <a:cs typeface="Arial" pitchFamily="34" charset="-120"/>
+              </a:rPr>
+              <a:t>ID visual impressa na correia</a:t>
+            </a:r>
+            <a:endParaRPr lang="en-US" sz="800" dirty="0"/>
+          </a:p>
+        </p:txBody>
+      </p:sp>
+      <p:sp>
+        <p:nvSpPr>
+          <p:cNvPr id="22" name="Shape 20"/>
+          <p:cNvSpPr/>
+          <p:nvPr/>
+        </p:nvSpPr>
+        <p:spPr>
+          <a:xfrm>
+            <a:off x="274320" y="4160520"/>
+            <a:ext cx="82296" cy="82296"/>
+          </a:xfrm>
+          <a:prstGeom prst="ellipse">
+            <a:avLst/>
+          </a:prstGeom>
+          <a:solidFill>
+            <a:srgbClr val="609346"/>
+          </a:solidFill>
+          <a:ln w="12700">
+            <a:solidFill>
+              <a:srgbClr val="609346"/>
+            </a:solidFill>
+            <a:prstDash val="solid"/>
+          </a:ln>
+        </p:spPr>
+        <p:txBody>
+          <a:bodyPr/>
+          <a:lstStyle/>
+          <a:p>
+            <a:endParaRPr lang="pt-BR"/>
+          </a:p>
+        </p:txBody>
+      </p:sp>
+      <p:sp>
+        <p:nvSpPr>
+          <p:cNvPr id="23" name="Text 21"/>
+          <p:cNvSpPr/>
+          <p:nvPr/>
+        </p:nvSpPr>
+        <p:spPr>
+          <a:xfrm>
+            <a:off x="384048" y="4096512"/>
+            <a:ext cx="1682496" cy="310896"/>
+          </a:xfrm>
+          <a:prstGeom prst="rect">
+            <a:avLst/>
+          </a:prstGeom>
+          <a:noFill/>
+          <a:ln/>
+        </p:spPr>
+        <p:txBody>
+          <a:bodyPr wrap="square" rtlCol="0" anchor="ctr"/>
+          <a:lstStyle/>
+          <a:p>
+            <a:pPr marL="0" indent="0">
+              <a:buNone/>
+            </a:pPr>
+            <a:r>
+              <a:rPr lang="en-US" sz="800" dirty="0">
+                <a:solidFill>
+                  <a:srgbClr val="1F2937"/>
+                </a:solidFill>
+                <a:latin typeface="Arial" pitchFamily="34" charset="0"/>
+                <a:ea typeface="Arial" pitchFamily="34" charset="-122"/>
+                <a:cs typeface="Arial" pitchFamily="34" charset="-120"/>
+              </a:rPr>
+              <a:t>Conforme exigência normativa</a:t>
+            </a:r>
+            <a:endParaRPr lang="en-US" sz="800" dirty="0"/>
+          </a:p>
+        </p:txBody>
+      </p:sp>
+      <p:sp>
+        <p:nvSpPr>
+          <p:cNvPr id="24" name="Shape 22"/>
+          <p:cNvSpPr/>
+          <p:nvPr/>
+        </p:nvSpPr>
+        <p:spPr>
+          <a:xfrm>
+            <a:off x="274320" y="4489704"/>
+            <a:ext cx="82296" cy="82296"/>
+          </a:xfrm>
+          <a:prstGeom prst="ellipse">
+            <a:avLst/>
+          </a:prstGeom>
+          <a:solidFill>
+            <a:srgbClr val="609346"/>
+          </a:solidFill>
+          <a:ln w="12700">
+            <a:solidFill>
+              <a:srgbClr val="609346"/>
+            </a:solidFill>
+            <a:prstDash val="solid"/>
+          </a:ln>
+        </p:spPr>
+        <p:txBody>
+          <a:bodyPr/>
+          <a:lstStyle/>
+          <a:p>
+            <a:endParaRPr lang="pt-BR"/>
+          </a:p>
+        </p:txBody>
+      </p:sp>
+      <p:sp>
+        <p:nvSpPr>
+          <p:cNvPr id="25" name="Text 23"/>
+          <p:cNvSpPr/>
+          <p:nvPr/>
+        </p:nvSpPr>
+        <p:spPr>
+          <a:xfrm>
+            <a:off x="384048" y="4425696"/>
+            <a:ext cx="1682496" cy="310896"/>
+          </a:xfrm>
+          <a:prstGeom prst="rect">
+            <a:avLst/>
+          </a:prstGeom>
+          <a:noFill/>
+          <a:ln/>
+        </p:spPr>
+        <p:txBody>
+          <a:bodyPr wrap="square" rtlCol="0" anchor="ctr"/>
+          <a:lstStyle/>
+          <a:p>
+            <a:pPr marL="0" indent="0">
+              <a:buNone/>
+            </a:pPr>
+            <a:r>
+              <a:rPr lang="en-US" sz="800" dirty="0">
+                <a:solidFill>
+                  <a:srgbClr val="1F2937"/>
+                </a:solidFill>
+                <a:latin typeface="Arial" pitchFamily="34" charset="0"/>
+                <a:ea typeface="Arial" pitchFamily="34" charset="-122"/>
+                <a:cs typeface="Arial" pitchFamily="34" charset="-120"/>
+              </a:rPr>
+              <a:t>Rastreabilidade completa</a:t>
+            </a:r>
+            <a:endParaRPr lang="en-US" sz="800" dirty="0"/>
+          </a:p>
+        </p:txBody>
+      </p:sp>
+      <p:sp>
+        <p:nvSpPr>
+          <p:cNvPr id="26" name="Shape 24"/>
+          <p:cNvSpPr/>
+          <p:nvPr/>
+        </p:nvSpPr>
+        <p:spPr>
+          <a:xfrm>
+            <a:off x="274320" y="5888736"/>
+            <a:ext cx="1737360" cy="329184"/>
+          </a:xfrm>
+          <a:prstGeom prst="roundRect">
+            <a:avLst>
+              <a:gd name="adj" fmla="val 11111"/>
+            </a:avLst>
+          </a:prstGeom>
+          <a:solidFill>
+            <a:srgbClr val="609346">
+              <a:alpha val="90000"/>
+            </a:srgbClr>
+          </a:solidFill>
+          <a:ln w="12700">
+            <a:solidFill>
+              <a:srgbClr val="609346">
+                <a:alpha val="60000"/>
+              </a:srgbClr>
+            </a:solidFill>
+            <a:prstDash val="solid"/>
+          </a:ln>
+        </p:spPr>
+        <p:txBody>
+          <a:bodyPr/>
+          <a:lstStyle/>
+          <a:p>
+            <a:endParaRPr lang="pt-BR"/>
+          </a:p>
+        </p:txBody>
+      </p:sp>
+      <p:sp>
+        <p:nvSpPr>
+          <p:cNvPr id="27" name="Text 25"/>
+          <p:cNvSpPr/>
+          <p:nvPr/>
+        </p:nvSpPr>
+        <p:spPr>
+          <a:xfrm>
+            <a:off x="274320" y="5888736"/>
+            <a:ext cx="1737360" cy="329184"/>
+          </a:xfrm>
+          <a:prstGeom prst="rect">
+            <a:avLst/>
+          </a:prstGeom>
+          <a:noFill/>
+          <a:ln/>
+        </p:spPr>
+        <p:txBody>
+          <a:bodyPr wrap="square" rtlCol="0" anchor="ctr"/>
+          <a:lstStyle/>
+          <a:p>
+            <a:pPr marL="0" indent="0" algn="ctr">
+              <a:buNone/>
+            </a:pPr>
+            <a:r>
+              <a:rPr lang="en-US" sz="750" b="1" dirty="0">
+                <a:solidFill>
+                  <a:srgbClr val="FFFFFF"/>
+                </a:solidFill>
+                <a:latin typeface="Arial" pitchFamily="34" charset="0"/>
+                <a:ea typeface="Arial" pitchFamily="34" charset="-122"/>
+                <a:cs typeface="Arial" pitchFamily="34" charset="-120"/>
+              </a:rPr>
+              <a:t>CONFORME NORMA</a:t>
+            </a:r>
+            <a:endParaRPr lang="en-US" sz="750" dirty="0"/>
+          </a:p>
+        </p:txBody>
+      </p:sp>
+      <p:sp>
+        <p:nvSpPr>
+          <p:cNvPr id="28" name="Shape 26"/>
+          <p:cNvSpPr/>
+          <p:nvPr/>
+        </p:nvSpPr>
+        <p:spPr>
+          <a:xfrm>
+            <a:off x="2157984" y="1627632"/>
+            <a:ext cx="1920240" cy="4681728"/>
+          </a:xfrm>
+          <a:prstGeom prst="rect">
+            <a:avLst/>
+          </a:prstGeom>
+          <a:solidFill>
+            <a:srgbClr val="EEF7E3"/>
+          </a:solidFill>
+          <a:ln w="12700">
+            <a:solidFill>
+              <a:srgbClr val="74A83A">
+                <a:alpha val="45000"/>
+              </a:srgbClr>
+            </a:solidFill>
+            <a:prstDash val="solid"/>
+          </a:ln>
+          <a:effectLst>
+            <a:outerShdw blurRad="50800" dist="25400" dir="8100000" algn="bl" rotWithShape="0">
+              <a:srgbClr val="000000">
+                <a:alpha val="7000"/>
+              </a:srgbClr>
+            </a:outerShdw>
+          </a:effectLst>
+        </p:spPr>
+        <p:txBody>
+          <a:bodyPr/>
+          <a:lstStyle/>
+          <a:p>
+            <a:endParaRPr lang="pt-BR"/>
+          </a:p>
+        </p:txBody>
+      </p:sp>
+      <p:sp>
+        <p:nvSpPr>
+          <p:cNvPr id="29" name="Shape 27"/>
+          <p:cNvSpPr/>
+          <p:nvPr/>
+        </p:nvSpPr>
+        <p:spPr>
+          <a:xfrm>
+            <a:off x="2157984" y="1627632"/>
+            <a:ext cx="1920240" cy="475488"/>
+          </a:xfrm>
+          <a:prstGeom prst="rect">
+            <a:avLst/>
+          </a:prstGeom>
+          <a:solidFill>
+            <a:srgbClr val="74A83A"/>
+          </a:solidFill>
+          <a:ln w="12700">
+            <a:solidFill>
+              <a:srgbClr val="74A83A"/>
+            </a:solidFill>
+            <a:prstDash val="solid"/>
+          </a:ln>
+        </p:spPr>
+        <p:txBody>
+          <a:bodyPr/>
+          <a:lstStyle/>
+          <a:p>
+            <a:endParaRPr lang="pt-BR"/>
+          </a:p>
+        </p:txBody>
+      </p:sp>
+      <p:sp>
+        <p:nvSpPr>
+          <p:cNvPr id="30" name="Text 28"/>
+          <p:cNvSpPr/>
+          <p:nvPr/>
+        </p:nvSpPr>
+        <p:spPr>
+          <a:xfrm>
+            <a:off x="2249424" y="1636776"/>
+            <a:ext cx="1097280" cy="457200"/>
+          </a:xfrm>
+          <a:prstGeom prst="rect">
+            <a:avLst/>
+          </a:prstGeom>
+          <a:noFill/>
+          <a:ln/>
+        </p:spPr>
+        <p:txBody>
+          <a:bodyPr wrap="square" rtlCol="0" anchor="ctr"/>
+          <a:lstStyle/>
+          <a:p>
+            <a:pPr marL="0" indent="0">
+              <a:buNone/>
+            </a:pPr>
+            <a:r>
+              <a:rPr lang="en-US" sz="2800" b="1" dirty="0">
+                <a:solidFill>
+                  <a:srgbClr val="FFFFFF"/>
+                </a:solidFill>
+                <a:latin typeface="Arial" pitchFamily="34" charset="0"/>
+                <a:ea typeface="Arial" pitchFamily="34" charset="-122"/>
+                <a:cs typeface="Arial" pitchFamily="34" charset="-120"/>
+              </a:rPr>
+              <a:t>56</a:t>
+            </a:r>
+            <a:endParaRPr lang="en-US" sz="2800" dirty="0"/>
+          </a:p>
+        </p:txBody>
+      </p:sp>
+      <p:sp>
+        <p:nvSpPr>
+          <p:cNvPr id="31" name="Text 29"/>
+          <p:cNvSpPr/>
+          <p:nvPr/>
+        </p:nvSpPr>
+        <p:spPr>
+          <a:xfrm>
+            <a:off x="3163824" y="1755648"/>
+            <a:ext cx="822960" cy="256032"/>
+          </a:xfrm>
+          <a:prstGeom prst="rect">
+            <a:avLst/>
+          </a:prstGeom>
+          <a:noFill/>
+          <a:ln/>
+        </p:spPr>
+        <p:txBody>
+          <a:bodyPr wrap="square" rtlCol="0" anchor="ctr"/>
+          <a:lstStyle/>
+          <a:p>
+            <a:pPr marL="0" indent="0" algn="r">
+              <a:buNone/>
+            </a:pPr>
+            <a:r>
+              <a:rPr lang="en-US" sz="1100" dirty="0">
+                <a:solidFill>
+                  <a:srgbClr val="FFFFFF"/>
+                </a:solidFill>
+                <a:latin typeface="Arial" pitchFamily="34" charset="0"/>
+                <a:ea typeface="Arial" pitchFamily="34" charset="-122"/>
+                <a:cs typeface="Arial" pitchFamily="34" charset="-120"/>
+              </a:rPr>
+              <a:t>37,8%</a:t>
+            </a:r>
+            <a:endParaRPr lang="en-US" sz="1100" dirty="0"/>
+          </a:p>
+        </p:txBody>
+      </p:sp>
+      <p:sp>
+        <p:nvSpPr>
+          <p:cNvPr id="32" name="Text 30"/>
+          <p:cNvSpPr/>
+          <p:nvPr/>
+        </p:nvSpPr>
+        <p:spPr>
+          <a:xfrm>
+            <a:off x="2249424" y="2139696"/>
+            <a:ext cx="1792224" cy="237744"/>
+          </a:xfrm>
+          <a:prstGeom prst="rect">
+            <a:avLst/>
+          </a:prstGeom>
+          <a:noFill/>
+          <a:ln/>
+        </p:spPr>
+        <p:txBody>
+          <a:bodyPr wrap="square" rtlCol="0" anchor="ctr"/>
+          <a:lstStyle/>
+          <a:p>
+            <a:pPr marL="0" indent="0">
+              <a:buNone/>
+            </a:pPr>
+            <a:r>
+              <a:rPr lang="en-US" sz="1050" b="1" dirty="0">
+                <a:solidFill>
+                  <a:srgbClr val="74A83A"/>
+                </a:solidFill>
+                <a:latin typeface="Arial" pitchFamily="34" charset="0"/>
+                <a:ea typeface="Arial" pitchFamily="34" charset="-122"/>
+                <a:cs typeface="Arial" pitchFamily="34" charset="-120"/>
+              </a:rPr>
+              <a:t>2ª Linha</a:t>
+            </a:r>
+            <a:endParaRPr lang="en-US" sz="1050" dirty="0"/>
+          </a:p>
+        </p:txBody>
+      </p:sp>
+      <p:sp>
+        <p:nvSpPr>
+          <p:cNvPr id="33" name="Text 31"/>
+          <p:cNvSpPr/>
+          <p:nvPr/>
+        </p:nvSpPr>
+        <p:spPr>
+          <a:xfrm>
+            <a:off x="2249424" y="2377440"/>
+            <a:ext cx="1792224" cy="256032"/>
+          </a:xfrm>
+          <a:prstGeom prst="rect">
+            <a:avLst/>
+          </a:prstGeom>
+          <a:noFill/>
+          <a:ln/>
+        </p:spPr>
+        <p:txBody>
+          <a:bodyPr wrap="square" rtlCol="0" anchor="ctr"/>
+          <a:lstStyle/>
+          <a:p>
+            <a:pPr marL="0" indent="0">
+              <a:buNone/>
+            </a:pPr>
+            <a:r>
+              <a:rPr lang="en-US" sz="800" i="1" dirty="0">
+                <a:solidFill>
+                  <a:srgbClr val="6B7280"/>
+                </a:solidFill>
+                <a:latin typeface="Arial" pitchFamily="34" charset="0"/>
+                <a:ea typeface="Arial" pitchFamily="34" charset="-122"/>
+                <a:cs typeface="Arial" pitchFamily="34" charset="-120"/>
+              </a:rPr>
+              <a:t>Ev. física + teste aprovado</a:t>
+            </a:r>
+            <a:endParaRPr lang="en-US" sz="800" dirty="0"/>
+          </a:p>
+        </p:txBody>
+      </p:sp>
+      <p:sp>
+        <p:nvSpPr>
+          <p:cNvPr id="34" name="Shape 32"/>
+          <p:cNvSpPr/>
+          <p:nvPr/>
+        </p:nvSpPr>
+        <p:spPr>
+          <a:xfrm>
+            <a:off x="2249424" y="2670048"/>
+            <a:ext cx="1737360" cy="18288"/>
+          </a:xfrm>
+          <a:prstGeom prst="rect">
+            <a:avLst/>
+          </a:prstGeom>
+          <a:solidFill>
+            <a:srgbClr val="74A83A">
+              <a:alpha val="45000"/>
+            </a:srgbClr>
+          </a:solidFill>
+          <a:ln w="12700">
+            <a:solidFill>
+              <a:srgbClr val="74A83A">
+                <a:alpha val="45000"/>
+              </a:srgbClr>
+            </a:solidFill>
+            <a:prstDash val="solid"/>
+          </a:ln>
+        </p:spPr>
+        <p:txBody>
+          <a:bodyPr/>
+          <a:lstStyle/>
+          <a:p>
+            <a:endParaRPr lang="pt-BR"/>
+          </a:p>
+        </p:txBody>
+      </p:sp>
+      <p:sp>
+        <p:nvSpPr>
+          <p:cNvPr id="35" name="Text 33"/>
+          <p:cNvSpPr/>
+          <p:nvPr/>
+        </p:nvSpPr>
+        <p:spPr>
+          <a:xfrm>
+            <a:off x="2249424" y="2724912"/>
+            <a:ext cx="1792224" cy="914400"/>
+          </a:xfrm>
+          <a:prstGeom prst="rect">
+            <a:avLst/>
+          </a:prstGeom>
+          <a:noFill/>
+          <a:ln/>
+        </p:spPr>
+        <p:txBody>
+          <a:bodyPr wrap="square" rtlCol="0" anchor="ctr"/>
+          <a:lstStyle/>
+          <a:p>
+            <a:pPr marL="0" indent="0">
+              <a:buNone/>
+            </a:pPr>
+            <a:r>
+              <a:rPr lang="en-US" sz="800" dirty="0">
+                <a:solidFill>
+                  <a:srgbClr val="374151"/>
+                </a:solidFill>
+                <a:latin typeface="Arial" pitchFamily="34" charset="0"/>
+                <a:ea typeface="Arial" pitchFamily="34" charset="-122"/>
+                <a:cs typeface="Arial" pitchFamily="34" charset="-120"/>
+              </a:rPr>
+              <a:t>Evidência física localizada em campo e aprovadas no ensaio ISO 340. Com marcação visual. Aguardando laudo formal.</a:t>
+            </a:r>
+            <a:endParaRPr lang="en-US" sz="800" dirty="0"/>
+          </a:p>
+        </p:txBody>
+      </p:sp>
+      <p:sp>
+        <p:nvSpPr>
+          <p:cNvPr id="36" name="Shape 34"/>
+          <p:cNvSpPr/>
+          <p:nvPr/>
+        </p:nvSpPr>
+        <p:spPr>
+          <a:xfrm>
+            <a:off x="2249424" y="3831336"/>
+            <a:ext cx="82296" cy="82296"/>
+          </a:xfrm>
+          <a:prstGeom prst="ellipse">
+            <a:avLst/>
+          </a:prstGeom>
+          <a:solidFill>
+            <a:srgbClr val="74A83A"/>
+          </a:solidFill>
+          <a:ln w="12700">
+            <a:solidFill>
+              <a:srgbClr val="74A83A"/>
+            </a:solidFill>
+            <a:prstDash val="solid"/>
+          </a:ln>
+        </p:spPr>
+        <p:txBody>
+          <a:bodyPr/>
+          <a:lstStyle/>
+          <a:p>
+            <a:endParaRPr lang="pt-BR"/>
+          </a:p>
+        </p:txBody>
+      </p:sp>
+      <p:sp>
+        <p:nvSpPr>
+          <p:cNvPr id="37" name="Text 35"/>
+          <p:cNvSpPr/>
+          <p:nvPr/>
+        </p:nvSpPr>
+        <p:spPr>
+          <a:xfrm>
+            <a:off x="2359152" y="3767328"/>
+            <a:ext cx="1682496" cy="310896"/>
+          </a:xfrm>
+          <a:prstGeom prst="rect">
+            <a:avLst/>
+          </a:prstGeom>
+          <a:noFill/>
+          <a:ln/>
+        </p:spPr>
+        <p:txBody>
+          <a:bodyPr wrap="square" rtlCol="0" anchor="ctr"/>
+          <a:lstStyle/>
+          <a:p>
+            <a:pPr marL="0" indent="0">
+              <a:buNone/>
+            </a:pPr>
+            <a:r>
+              <a:rPr lang="en-US" sz="800" dirty="0">
+                <a:solidFill>
+                  <a:srgbClr val="1F2937"/>
+                </a:solidFill>
+                <a:latin typeface="Arial" pitchFamily="34" charset="0"/>
+                <a:ea typeface="Arial" pitchFamily="34" charset="-122"/>
+                <a:cs typeface="Arial" pitchFamily="34" charset="-120"/>
+              </a:rPr>
+              <a:t>Evidência física em campo</a:t>
+            </a:r>
+            <a:endParaRPr lang="en-US" sz="800" dirty="0"/>
+          </a:p>
+        </p:txBody>
+      </p:sp>
+      <p:sp>
+        <p:nvSpPr>
+          <p:cNvPr id="38" name="Shape 36"/>
+          <p:cNvSpPr/>
+          <p:nvPr/>
+        </p:nvSpPr>
+        <p:spPr>
+          <a:xfrm>
+            <a:off x="2249424" y="4160520"/>
+            <a:ext cx="82296" cy="82296"/>
+          </a:xfrm>
+          <a:prstGeom prst="ellipse">
+            <a:avLst/>
+          </a:prstGeom>
+          <a:solidFill>
+            <a:srgbClr val="74A83A"/>
+          </a:solidFill>
+          <a:ln w="12700">
+            <a:solidFill>
+              <a:srgbClr val="74A83A"/>
+            </a:solidFill>
+            <a:prstDash val="solid"/>
+          </a:ln>
+        </p:spPr>
+        <p:txBody>
+          <a:bodyPr/>
+          <a:lstStyle/>
+          <a:p>
+            <a:endParaRPr lang="pt-BR"/>
+          </a:p>
+        </p:txBody>
+      </p:sp>
+      <p:sp>
+        <p:nvSpPr>
+          <p:cNvPr id="39" name="Text 37"/>
+          <p:cNvSpPr/>
+          <p:nvPr/>
+        </p:nvSpPr>
+        <p:spPr>
+          <a:xfrm>
+            <a:off x="2359152" y="4096512"/>
+            <a:ext cx="1682496" cy="310896"/>
+          </a:xfrm>
+          <a:prstGeom prst="rect">
+            <a:avLst/>
+          </a:prstGeom>
+          <a:noFill/>
+          <a:ln/>
+        </p:spPr>
+        <p:txBody>
+          <a:bodyPr wrap="square" rtlCol="0" anchor="ctr"/>
+          <a:lstStyle/>
+          <a:p>
+            <a:pPr marL="0" indent="0">
+              <a:buNone/>
+            </a:pPr>
+            <a:r>
+              <a:rPr lang="en-US" sz="800" dirty="0">
+                <a:solidFill>
+                  <a:srgbClr val="1F2937"/>
+                </a:solidFill>
+                <a:latin typeface="Arial" pitchFamily="34" charset="0"/>
+                <a:ea typeface="Arial" pitchFamily="34" charset="-122"/>
+                <a:cs typeface="Arial" pitchFamily="34" charset="-120"/>
+              </a:rPr>
+              <a:t>Aprovadas — ISO 340 campo</a:t>
+            </a:r>
+            <a:endParaRPr lang="en-US" sz="800" dirty="0"/>
+          </a:p>
+        </p:txBody>
+      </p:sp>
+      <p:sp>
+        <p:nvSpPr>
+          <p:cNvPr id="40" name="Shape 38"/>
+          <p:cNvSpPr/>
+          <p:nvPr/>
+        </p:nvSpPr>
+        <p:spPr>
+          <a:xfrm>
+            <a:off x="2249424" y="4489704"/>
+            <a:ext cx="82296" cy="82296"/>
+          </a:xfrm>
+          <a:prstGeom prst="ellipse">
+            <a:avLst/>
+          </a:prstGeom>
+          <a:solidFill>
+            <a:srgbClr val="74A83A"/>
+          </a:solidFill>
+          <a:ln w="12700">
+            <a:solidFill>
+              <a:srgbClr val="74A83A"/>
+            </a:solidFill>
+            <a:prstDash val="solid"/>
+          </a:ln>
+        </p:spPr>
+        <p:txBody>
+          <a:bodyPr/>
+          <a:lstStyle/>
+          <a:p>
+            <a:endParaRPr lang="pt-BR"/>
+          </a:p>
+        </p:txBody>
+      </p:sp>
+      <p:sp>
+        <p:nvSpPr>
+          <p:cNvPr id="41" name="Text 39"/>
+          <p:cNvSpPr/>
+          <p:nvPr/>
+        </p:nvSpPr>
+        <p:spPr>
+          <a:xfrm>
+            <a:off x="2359152" y="4425696"/>
+            <a:ext cx="1682496" cy="310896"/>
+          </a:xfrm>
+          <a:prstGeom prst="rect">
+            <a:avLst/>
+          </a:prstGeom>
+          <a:noFill/>
+          <a:ln/>
+        </p:spPr>
+        <p:txBody>
+          <a:bodyPr wrap="square" rtlCol="0" anchor="ctr"/>
+          <a:lstStyle/>
+          <a:p>
+            <a:pPr marL="0" indent="0">
+              <a:buNone/>
+            </a:pPr>
+            <a:r>
+              <a:rPr lang="en-US" sz="800" b="1" dirty="0">
+                <a:solidFill>
+                  <a:srgbClr val="1F2937"/>
+                </a:solidFill>
+                <a:latin typeface="Arial" pitchFamily="34" charset="0"/>
+                <a:ea typeface="Arial" pitchFamily="34" charset="-122"/>
+                <a:cs typeface="Arial" pitchFamily="34" charset="-120"/>
+              </a:rPr>
+              <a:t>Pendente laudo laboratorial</a:t>
+            </a:r>
+            <a:endParaRPr lang="en-US" sz="800" dirty="0"/>
+          </a:p>
+        </p:txBody>
+      </p:sp>
+      <p:sp>
+        <p:nvSpPr>
+          <p:cNvPr id="42" name="Shape 40"/>
+          <p:cNvSpPr/>
+          <p:nvPr/>
+        </p:nvSpPr>
+        <p:spPr>
+          <a:xfrm>
+            <a:off x="2249424" y="5888736"/>
+            <a:ext cx="1737360" cy="329184"/>
+          </a:xfrm>
+          <a:prstGeom prst="roundRect">
+            <a:avLst>
+              <a:gd name="adj" fmla="val 11111"/>
+            </a:avLst>
+          </a:prstGeom>
+          <a:solidFill>
+            <a:srgbClr val="74A83A">
+              <a:alpha val="90000"/>
+            </a:srgbClr>
+          </a:solidFill>
+          <a:ln w="12700">
+            <a:solidFill>
+              <a:srgbClr val="74A83A">
+                <a:alpha val="60000"/>
+              </a:srgbClr>
+            </a:solidFill>
+            <a:prstDash val="solid"/>
+          </a:ln>
+        </p:spPr>
+        <p:txBody>
+          <a:bodyPr/>
+          <a:lstStyle/>
+          <a:p>
+            <a:endParaRPr lang="pt-BR"/>
+          </a:p>
+        </p:txBody>
+      </p:sp>
+      <p:sp>
+        <p:nvSpPr>
+          <p:cNvPr id="43" name="Text 41"/>
+          <p:cNvSpPr/>
+          <p:nvPr/>
+        </p:nvSpPr>
+        <p:spPr>
+          <a:xfrm>
+            <a:off x="2249424" y="5888736"/>
+            <a:ext cx="1737360" cy="329184"/>
+          </a:xfrm>
+          <a:prstGeom prst="rect">
+            <a:avLst/>
+          </a:prstGeom>
+          <a:noFill/>
+          <a:ln/>
+        </p:spPr>
+        <p:txBody>
+          <a:bodyPr wrap="square" rtlCol="0" anchor="ctr"/>
+          <a:lstStyle/>
+          <a:p>
+            <a:pPr marL="0" indent="0" algn="ctr">
+              <a:buNone/>
+            </a:pPr>
+            <a:r>
+              <a:rPr lang="en-US" sz="750" b="1" dirty="0">
+                <a:solidFill>
+                  <a:srgbClr val="FFFFFF"/>
+                </a:solidFill>
+                <a:latin typeface="Arial" pitchFamily="34" charset="0"/>
+                <a:ea typeface="Arial" pitchFamily="34" charset="-122"/>
+                <a:cs typeface="Arial" pitchFamily="34" charset="-120"/>
+              </a:rPr>
+              <a:t>PENDENTE LAUDO</a:t>
+            </a:r>
+            <a:endParaRPr lang="en-US" sz="750" dirty="0"/>
+          </a:p>
+        </p:txBody>
+      </p:sp>
+      <p:sp>
+        <p:nvSpPr>
+          <p:cNvPr id="44" name="Shape 42"/>
+          <p:cNvSpPr/>
+          <p:nvPr/>
+        </p:nvSpPr>
+        <p:spPr>
+          <a:xfrm>
+            <a:off x="4133088" y="1627632"/>
+            <a:ext cx="1920240" cy="4681728"/>
+          </a:xfrm>
+          <a:prstGeom prst="rect">
+            <a:avLst/>
+          </a:prstGeom>
+          <a:solidFill>
+            <a:srgbClr val="F0FAE8"/>
+          </a:solidFill>
+          <a:ln w="12700">
+            <a:solidFill>
+              <a:srgbClr val="8DC255">
+                <a:alpha val="45000"/>
+              </a:srgbClr>
+            </a:solidFill>
+            <a:prstDash val="solid"/>
+          </a:ln>
+          <a:effectLst>
+            <a:outerShdw blurRad="50800" dist="25400" dir="8100000" algn="bl" rotWithShape="0">
+              <a:srgbClr val="000000">
+                <a:alpha val="7000"/>
+              </a:srgbClr>
+            </a:outerShdw>
+          </a:effectLst>
+        </p:spPr>
+        <p:txBody>
+          <a:bodyPr/>
+          <a:lstStyle/>
+          <a:p>
+            <a:endParaRPr lang="pt-BR"/>
+          </a:p>
+        </p:txBody>
+      </p:sp>
+      <p:sp>
+        <p:nvSpPr>
+          <p:cNvPr id="45" name="Shape 43"/>
+          <p:cNvSpPr/>
+          <p:nvPr/>
+        </p:nvSpPr>
+        <p:spPr>
+          <a:xfrm>
+            <a:off x="4133088" y="1627632"/>
+            <a:ext cx="1920240" cy="475488"/>
+          </a:xfrm>
+          <a:prstGeom prst="rect">
+            <a:avLst/>
+          </a:prstGeom>
+          <a:solidFill>
+            <a:srgbClr val="8DC255"/>
+          </a:solidFill>
+          <a:ln w="12700">
+            <a:solidFill>
+              <a:srgbClr val="8DC255"/>
+            </a:solidFill>
+            <a:prstDash val="solid"/>
+          </a:ln>
+        </p:spPr>
+        <p:txBody>
+          <a:bodyPr/>
+          <a:lstStyle/>
+          <a:p>
+            <a:endParaRPr lang="pt-BR"/>
+          </a:p>
+        </p:txBody>
+      </p:sp>
+      <p:sp>
+        <p:nvSpPr>
+          <p:cNvPr id="46" name="Text 44"/>
+          <p:cNvSpPr/>
+          <p:nvPr/>
+        </p:nvSpPr>
+        <p:spPr>
+          <a:xfrm>
+            <a:off x="4224528" y="1636776"/>
+            <a:ext cx="1097280" cy="457200"/>
+          </a:xfrm>
+          <a:prstGeom prst="rect">
+            <a:avLst/>
+          </a:prstGeom>
+          <a:noFill/>
+          <a:ln/>
+        </p:spPr>
+        <p:txBody>
+          <a:bodyPr wrap="square" rtlCol="0" anchor="ctr"/>
+          <a:lstStyle/>
+          <a:p>
+            <a:pPr marL="0" indent="0">
+              <a:buNone/>
+            </a:pPr>
+            <a:r>
+              <a:rPr lang="en-US" sz="2800" b="1" dirty="0">
+                <a:solidFill>
+                  <a:srgbClr val="FFFFFF"/>
+                </a:solidFill>
+                <a:latin typeface="Arial" pitchFamily="34" charset="0"/>
+                <a:ea typeface="Arial" pitchFamily="34" charset="-122"/>
+                <a:cs typeface="Arial" pitchFamily="34" charset="-120"/>
+              </a:rPr>
+              <a:t>10</a:t>
+            </a:r>
+            <a:endParaRPr lang="en-US" sz="2800" dirty="0"/>
+          </a:p>
+        </p:txBody>
+      </p:sp>
+      <p:sp>
+        <p:nvSpPr>
+          <p:cNvPr id="47" name="Text 45"/>
+          <p:cNvSpPr/>
+          <p:nvPr/>
+        </p:nvSpPr>
+        <p:spPr>
+          <a:xfrm>
+            <a:off x="5138928" y="1755648"/>
+            <a:ext cx="822960" cy="256032"/>
+          </a:xfrm>
+          <a:prstGeom prst="rect">
+            <a:avLst/>
+          </a:prstGeom>
+          <a:noFill/>
+          <a:ln/>
+        </p:spPr>
+        <p:txBody>
+          <a:bodyPr wrap="square" rtlCol="0" anchor="ctr"/>
+          <a:lstStyle/>
+          <a:p>
+            <a:pPr marL="0" indent="0" algn="r">
+              <a:buNone/>
+            </a:pPr>
+            <a:r>
+              <a:rPr lang="en-US" sz="1100" dirty="0">
+                <a:solidFill>
+                  <a:srgbClr val="FFFFFF"/>
+                </a:solidFill>
+                <a:latin typeface="Arial" pitchFamily="34" charset="0"/>
+                <a:ea typeface="Arial" pitchFamily="34" charset="-122"/>
+                <a:cs typeface="Arial" pitchFamily="34" charset="-120"/>
+              </a:rPr>
+              <a:t>6,8%</a:t>
+            </a:r>
+            <a:endParaRPr lang="en-US" sz="1100" dirty="0"/>
+          </a:p>
+        </p:txBody>
+      </p:sp>
+      <p:sp>
+        <p:nvSpPr>
+          <p:cNvPr id="48" name="Text 46"/>
+          <p:cNvSpPr/>
+          <p:nvPr/>
+        </p:nvSpPr>
+        <p:spPr>
+          <a:xfrm>
+            <a:off x="4224528" y="2139696"/>
+            <a:ext cx="1792224" cy="237744"/>
+          </a:xfrm>
+          <a:prstGeom prst="rect">
+            <a:avLst/>
+          </a:prstGeom>
+          <a:noFill/>
+          <a:ln/>
+        </p:spPr>
+        <p:txBody>
+          <a:bodyPr wrap="square" rtlCol="0" anchor="ctr"/>
+          <a:lstStyle/>
+          <a:p>
+            <a:pPr marL="0" indent="0">
+              <a:buNone/>
+            </a:pPr>
+            <a:r>
+              <a:rPr lang="en-US" sz="1050" b="1" dirty="0">
+                <a:solidFill>
+                  <a:srgbClr val="8DC255"/>
+                </a:solidFill>
+                <a:latin typeface="Arial" pitchFamily="34" charset="0"/>
+                <a:ea typeface="Arial" pitchFamily="34" charset="-122"/>
+                <a:cs typeface="Arial" pitchFamily="34" charset="-120"/>
+              </a:rPr>
+              <a:t>2ª Linha</a:t>
+            </a:r>
+            <a:endParaRPr lang="en-US" sz="1050" dirty="0"/>
+          </a:p>
+        </p:txBody>
+      </p:sp>
+      <p:sp>
+        <p:nvSpPr>
+          <p:cNvPr id="49" name="Text 47"/>
+          <p:cNvSpPr/>
+          <p:nvPr/>
+        </p:nvSpPr>
+        <p:spPr>
+          <a:xfrm>
+            <a:off x="4224528" y="2377440"/>
+            <a:ext cx="1792224" cy="256032"/>
+          </a:xfrm>
+          <a:prstGeom prst="rect">
+            <a:avLst/>
+          </a:prstGeom>
+          <a:noFill/>
+          <a:ln/>
+        </p:spPr>
+        <p:txBody>
+          <a:bodyPr wrap="square" rtlCol="0" anchor="ctr"/>
+          <a:lstStyle/>
+          <a:p>
+            <a:pPr marL="0" indent="0">
+              <a:buNone/>
+            </a:pPr>
+            <a:r>
+              <a:rPr lang="en-US" sz="800" i="1" dirty="0">
+                <a:solidFill>
+                  <a:srgbClr val="6B7280"/>
+                </a:solidFill>
+                <a:latin typeface="Arial" pitchFamily="34" charset="0"/>
+                <a:ea typeface="Arial" pitchFamily="34" charset="-122"/>
+                <a:cs typeface="Arial" pitchFamily="34" charset="-120"/>
+              </a:rPr>
+              <a:t>Com laudo, sem ID visual</a:t>
+            </a:r>
+            <a:endParaRPr lang="en-US" sz="800" dirty="0"/>
+          </a:p>
+        </p:txBody>
+      </p:sp>
+      <p:sp>
+        <p:nvSpPr>
+          <p:cNvPr id="50" name="Shape 48"/>
+          <p:cNvSpPr/>
+          <p:nvPr/>
+        </p:nvSpPr>
+        <p:spPr>
+          <a:xfrm>
+            <a:off x="4224528" y="2670048"/>
+            <a:ext cx="1737360" cy="18288"/>
+          </a:xfrm>
+          <a:prstGeom prst="rect">
+            <a:avLst/>
+          </a:prstGeom>
+          <a:solidFill>
+            <a:srgbClr val="8DC255">
+              <a:alpha val="45000"/>
+            </a:srgbClr>
+          </a:solidFill>
+          <a:ln w="12700">
+            <a:solidFill>
+              <a:srgbClr val="8DC255">
+                <a:alpha val="45000"/>
+              </a:srgbClr>
+            </a:solidFill>
+            <a:prstDash val="solid"/>
+          </a:ln>
+        </p:spPr>
+        <p:txBody>
+          <a:bodyPr/>
+          <a:lstStyle/>
+          <a:p>
+            <a:endParaRPr lang="pt-BR"/>
+          </a:p>
+        </p:txBody>
+      </p:sp>
+      <p:sp>
+        <p:nvSpPr>
+          <p:cNvPr id="51" name="Text 49"/>
+          <p:cNvSpPr/>
+          <p:nvPr/>
+        </p:nvSpPr>
+        <p:spPr>
+          <a:xfrm>
+            <a:off x="4224528" y="2724912"/>
+            <a:ext cx="1792224" cy="914400"/>
+          </a:xfrm>
+          <a:prstGeom prst="rect">
+            <a:avLst/>
+          </a:prstGeom>
+          <a:noFill/>
+          <a:ln/>
+        </p:spPr>
+        <p:txBody>
+          <a:bodyPr wrap="square" rtlCol="0" anchor="ctr"/>
+          <a:lstStyle/>
+          <a:p>
+            <a:r>
+              <a:rPr lang="en-US" sz="800" dirty="0">
+                <a:solidFill>
+                  <a:srgbClr val="374151"/>
+                </a:solidFill>
+                <a:latin typeface="Arial" pitchFamily="34" charset="0"/>
+                <a:ea typeface="Arial" pitchFamily="34" charset="-122"/>
+                <a:cs typeface="Arial" pitchFamily="34" charset="-120"/>
+              </a:rPr>
+              <a:t>Possuem laudo ou documento de conformidade. </a:t>
+            </a:r>
+            <a:r>
+              <a:rPr lang="en-US" sz="800" dirty="0" err="1">
+                <a:solidFill>
+                  <a:srgbClr val="374151"/>
+                </a:solidFill>
+                <a:latin typeface="Arial" pitchFamily="34" charset="0"/>
+                <a:ea typeface="Arial" pitchFamily="34" charset="-122"/>
+                <a:cs typeface="Arial" pitchFamily="34" charset="-120"/>
+              </a:rPr>
+              <a:t>Aprovadas</a:t>
+            </a:r>
+            <a:r>
+              <a:rPr lang="en-US" sz="800" dirty="0">
+                <a:solidFill>
+                  <a:srgbClr val="374151"/>
+                </a:solidFill>
+                <a:latin typeface="Arial" pitchFamily="34" charset="0"/>
+                <a:ea typeface="Arial" pitchFamily="34" charset="-122"/>
+                <a:cs typeface="Arial" pitchFamily="34" charset="-120"/>
+              </a:rPr>
+              <a:t> no </a:t>
+            </a:r>
+            <a:r>
+              <a:rPr lang="en-US" sz="800" dirty="0" err="1">
+                <a:solidFill>
+                  <a:srgbClr val="374151"/>
+                </a:solidFill>
+                <a:latin typeface="Arial" pitchFamily="34" charset="0"/>
+                <a:ea typeface="Arial" pitchFamily="34" charset="-122"/>
+                <a:cs typeface="Arial" pitchFamily="34" charset="-120"/>
+              </a:rPr>
+              <a:t>ensaio</a:t>
+            </a:r>
+            <a:r>
+              <a:rPr lang="en-US" sz="800" dirty="0">
+                <a:solidFill>
+                  <a:srgbClr val="374151"/>
+                </a:solidFill>
+                <a:latin typeface="Arial" pitchFamily="34" charset="0"/>
+                <a:ea typeface="Arial" pitchFamily="34" charset="-122"/>
+                <a:cs typeface="Arial" pitchFamily="34" charset="-120"/>
+              </a:rPr>
+              <a:t> ISO 340. Sem identificação visual na correia. NMT CT-010 inclusa (Flexlab 0397/26).</a:t>
+            </a:r>
+            <a:endParaRPr lang="en-US" sz="800" dirty="0"/>
+          </a:p>
+        </p:txBody>
+      </p:sp>
+      <p:sp>
+        <p:nvSpPr>
+          <p:cNvPr id="52" name="Shape 50"/>
+          <p:cNvSpPr/>
+          <p:nvPr/>
+        </p:nvSpPr>
+        <p:spPr>
+          <a:xfrm>
+            <a:off x="4224528" y="3831336"/>
+            <a:ext cx="82296" cy="82296"/>
+          </a:xfrm>
+          <a:prstGeom prst="ellipse">
+            <a:avLst/>
+          </a:prstGeom>
+          <a:solidFill>
+            <a:srgbClr val="8DC255"/>
+          </a:solidFill>
+          <a:ln w="12700">
+            <a:solidFill>
+              <a:srgbClr val="8DC255"/>
+            </a:solidFill>
+            <a:prstDash val="solid"/>
+          </a:ln>
+        </p:spPr>
+        <p:txBody>
+          <a:bodyPr/>
+          <a:lstStyle/>
+          <a:p>
+            <a:endParaRPr lang="pt-BR"/>
+          </a:p>
+        </p:txBody>
+      </p:sp>
+      <p:sp>
+        <p:nvSpPr>
+          <p:cNvPr id="53" name="Text 51"/>
+          <p:cNvSpPr/>
+          <p:nvPr/>
+        </p:nvSpPr>
+        <p:spPr>
+          <a:xfrm>
+            <a:off x="4334256" y="3767328"/>
+            <a:ext cx="1682496" cy="310896"/>
+          </a:xfrm>
+          <a:prstGeom prst="rect">
+            <a:avLst/>
+          </a:prstGeom>
+          <a:noFill/>
+          <a:ln/>
+        </p:spPr>
+        <p:txBody>
+          <a:bodyPr wrap="square" rtlCol="0" anchor="ctr"/>
+          <a:lstStyle/>
+          <a:p>
+            <a:pPr marL="0" indent="0">
+              <a:buNone/>
+            </a:pPr>
+            <a:r>
+              <a:rPr lang="en-US" sz="800" dirty="0">
+                <a:solidFill>
+                  <a:srgbClr val="1F2937"/>
+                </a:solidFill>
+                <a:latin typeface="Arial" pitchFamily="34" charset="0"/>
+                <a:ea typeface="Arial" pitchFamily="34" charset="-122"/>
+                <a:cs typeface="Arial" pitchFamily="34" charset="-120"/>
+              </a:rPr>
+              <a:t>Laudo ou doc. de conformidade</a:t>
+            </a:r>
+            <a:endParaRPr lang="en-US" sz="800" dirty="0"/>
+          </a:p>
+        </p:txBody>
+      </p:sp>
+      <p:sp>
+        <p:nvSpPr>
+          <p:cNvPr id="54" name="Shape 52"/>
+          <p:cNvSpPr/>
+          <p:nvPr/>
+        </p:nvSpPr>
+        <p:spPr>
+          <a:xfrm>
+            <a:off x="4224528" y="4160520"/>
+            <a:ext cx="82296" cy="82296"/>
+          </a:xfrm>
+          <a:prstGeom prst="ellipse">
+            <a:avLst/>
+          </a:prstGeom>
+          <a:solidFill>
+            <a:srgbClr val="8DC255"/>
+          </a:solidFill>
+          <a:ln w="12700">
+            <a:solidFill>
+              <a:srgbClr val="8DC255"/>
+            </a:solidFill>
+            <a:prstDash val="solid"/>
+          </a:ln>
+        </p:spPr>
+        <p:txBody>
+          <a:bodyPr/>
+          <a:lstStyle/>
+          <a:p>
+            <a:endParaRPr lang="pt-BR"/>
+          </a:p>
+        </p:txBody>
+      </p:sp>
+      <p:sp>
+        <p:nvSpPr>
+          <p:cNvPr id="55" name="Text 53"/>
+          <p:cNvSpPr/>
+          <p:nvPr/>
+        </p:nvSpPr>
+        <p:spPr>
+          <a:xfrm>
+            <a:off x="4334256" y="4096512"/>
+            <a:ext cx="1682496" cy="310896"/>
+          </a:xfrm>
+          <a:prstGeom prst="rect">
+            <a:avLst/>
+          </a:prstGeom>
+          <a:noFill/>
+          <a:ln/>
+        </p:spPr>
+        <p:txBody>
+          <a:bodyPr wrap="square" rtlCol="0" anchor="ctr"/>
+          <a:lstStyle/>
+          <a:p>
+            <a:pPr marL="0" indent="0">
+              <a:buNone/>
+            </a:pPr>
+            <a:r>
+              <a:rPr lang="en-US" sz="800" dirty="0">
+                <a:solidFill>
+                  <a:srgbClr val="1F2937"/>
+                </a:solidFill>
+                <a:latin typeface="Arial" pitchFamily="34" charset="0"/>
+                <a:ea typeface="Arial" pitchFamily="34" charset="-122"/>
+                <a:cs typeface="Arial" pitchFamily="34" charset="-120"/>
+              </a:rPr>
+              <a:t>Sem marcação visual na correia</a:t>
+            </a:r>
+            <a:endParaRPr lang="en-US" sz="800" dirty="0"/>
+          </a:p>
+        </p:txBody>
+      </p:sp>
+      <p:sp>
+        <p:nvSpPr>
+          <p:cNvPr id="56" name="Shape 54"/>
+          <p:cNvSpPr/>
+          <p:nvPr/>
+        </p:nvSpPr>
+        <p:spPr>
+          <a:xfrm>
+            <a:off x="4224528" y="4489704"/>
+            <a:ext cx="82296" cy="82296"/>
+          </a:xfrm>
+          <a:prstGeom prst="ellipse">
+            <a:avLst/>
+          </a:prstGeom>
+          <a:solidFill>
+            <a:srgbClr val="8DC255"/>
+          </a:solidFill>
+          <a:ln w="12700">
+            <a:solidFill>
+              <a:srgbClr val="8DC255"/>
+            </a:solidFill>
+            <a:prstDash val="solid"/>
+          </a:ln>
+        </p:spPr>
+        <p:txBody>
+          <a:bodyPr/>
+          <a:lstStyle/>
+          <a:p>
+            <a:endParaRPr lang="pt-BR"/>
+          </a:p>
+        </p:txBody>
+      </p:sp>
+      <p:sp>
+        <p:nvSpPr>
+          <p:cNvPr id="57" name="Text 55"/>
+          <p:cNvSpPr/>
+          <p:nvPr/>
+        </p:nvSpPr>
+        <p:spPr>
+          <a:xfrm>
+            <a:off x="4334256" y="4425696"/>
+            <a:ext cx="1682496" cy="310896"/>
+          </a:xfrm>
+          <a:prstGeom prst="rect">
+            <a:avLst/>
+          </a:prstGeom>
+          <a:noFill/>
+          <a:ln/>
+        </p:spPr>
+        <p:txBody>
+          <a:bodyPr wrap="square" rtlCol="0" anchor="ctr"/>
+          <a:lstStyle/>
+          <a:p>
+            <a:pPr marL="0" indent="0">
+              <a:buNone/>
+            </a:pPr>
+            <a:r>
+              <a:rPr lang="en-US" sz="800" b="1" dirty="0">
+                <a:solidFill>
+                  <a:srgbClr val="1F2937"/>
+                </a:solidFill>
+                <a:latin typeface="Arial" pitchFamily="34" charset="0"/>
+                <a:ea typeface="Arial" pitchFamily="34" charset="-122"/>
+                <a:cs typeface="Arial" pitchFamily="34" charset="-120"/>
+              </a:rPr>
+              <a:t>NMT CT-010 — Flexlab 0397/26</a:t>
+            </a:r>
+            <a:endParaRPr lang="en-US" sz="800" dirty="0"/>
+          </a:p>
+        </p:txBody>
+      </p:sp>
+      <p:sp>
+        <p:nvSpPr>
+          <p:cNvPr id="58" name="Shape 56"/>
+          <p:cNvSpPr/>
+          <p:nvPr/>
+        </p:nvSpPr>
+        <p:spPr>
+          <a:xfrm>
+            <a:off x="4224528" y="5888736"/>
+            <a:ext cx="1737360" cy="329184"/>
+          </a:xfrm>
+          <a:prstGeom prst="roundRect">
+            <a:avLst>
+              <a:gd name="adj" fmla="val 11111"/>
+            </a:avLst>
+          </a:prstGeom>
+          <a:solidFill>
+            <a:srgbClr val="8DC255">
+              <a:alpha val="90000"/>
+            </a:srgbClr>
+          </a:solidFill>
+          <a:ln w="12700">
+            <a:solidFill>
+              <a:srgbClr val="8DC255">
+                <a:alpha val="60000"/>
+              </a:srgbClr>
+            </a:solidFill>
+            <a:prstDash val="solid"/>
+          </a:ln>
+        </p:spPr>
+        <p:txBody>
+          <a:bodyPr/>
+          <a:lstStyle/>
+          <a:p>
+            <a:endParaRPr lang="pt-BR"/>
+          </a:p>
+        </p:txBody>
+      </p:sp>
+      <p:sp>
+        <p:nvSpPr>
+          <p:cNvPr id="59" name="Text 57"/>
+          <p:cNvSpPr/>
+          <p:nvPr/>
+        </p:nvSpPr>
+        <p:spPr>
+          <a:xfrm>
+            <a:off x="4224528" y="5888736"/>
+            <a:ext cx="1737360" cy="329184"/>
+          </a:xfrm>
+          <a:prstGeom prst="rect">
+            <a:avLst/>
+          </a:prstGeom>
+          <a:noFill/>
+          <a:ln/>
+        </p:spPr>
+        <p:txBody>
+          <a:bodyPr wrap="square" rtlCol="0" anchor="ctr"/>
+          <a:lstStyle/>
+          <a:p>
+            <a:pPr marL="0" indent="0" algn="ctr">
+              <a:buNone/>
+            </a:pPr>
+            <a:r>
+              <a:rPr lang="en-US" sz="750" b="1" dirty="0">
+                <a:solidFill>
+                  <a:srgbClr val="FFFFFF"/>
+                </a:solidFill>
+                <a:latin typeface="Arial" pitchFamily="34" charset="0"/>
+                <a:ea typeface="Arial" pitchFamily="34" charset="-122"/>
+                <a:cs typeface="Arial" pitchFamily="34" charset="-120"/>
+              </a:rPr>
+              <a:t>REGULARIZAR ID</a:t>
+            </a:r>
+            <a:endParaRPr lang="en-US" sz="750" dirty="0"/>
+          </a:p>
+        </p:txBody>
+      </p:sp>
+      <p:sp>
+        <p:nvSpPr>
+          <p:cNvPr id="60" name="Shape 58"/>
+          <p:cNvSpPr/>
+          <p:nvPr/>
+        </p:nvSpPr>
+        <p:spPr>
+          <a:xfrm>
+            <a:off x="6108192" y="1627632"/>
+            <a:ext cx="1920240" cy="4681728"/>
+          </a:xfrm>
+          <a:prstGeom prst="rect">
+            <a:avLst/>
+          </a:prstGeom>
+          <a:solidFill>
+            <a:srgbClr val="F4FBED"/>
+          </a:solidFill>
+          <a:ln w="12700">
+            <a:solidFill>
+              <a:srgbClr val="A8C96B">
+                <a:alpha val="45000"/>
+              </a:srgbClr>
+            </a:solidFill>
+            <a:prstDash val="solid"/>
+          </a:ln>
+          <a:effectLst>
+            <a:outerShdw blurRad="50800" dist="25400" dir="8100000" algn="bl" rotWithShape="0">
+              <a:srgbClr val="000000">
+                <a:alpha val="7000"/>
+              </a:srgbClr>
+            </a:outerShdw>
+          </a:effectLst>
+        </p:spPr>
+        <p:txBody>
+          <a:bodyPr/>
+          <a:lstStyle/>
+          <a:p>
+            <a:endParaRPr lang="pt-BR"/>
+          </a:p>
+        </p:txBody>
+      </p:sp>
+      <p:sp>
+        <p:nvSpPr>
+          <p:cNvPr id="61" name="Shape 59"/>
+          <p:cNvSpPr/>
+          <p:nvPr/>
+        </p:nvSpPr>
+        <p:spPr>
+          <a:xfrm>
+            <a:off x="6108192" y="1627632"/>
+            <a:ext cx="1920240" cy="475488"/>
+          </a:xfrm>
+          <a:prstGeom prst="rect">
+            <a:avLst/>
+          </a:prstGeom>
+          <a:solidFill>
+            <a:srgbClr val="A8C96B"/>
+          </a:solidFill>
+          <a:ln w="12700">
+            <a:solidFill>
+              <a:srgbClr val="A8C96B"/>
+            </a:solidFill>
+            <a:prstDash val="solid"/>
+          </a:ln>
+        </p:spPr>
+        <p:txBody>
+          <a:bodyPr/>
+          <a:lstStyle/>
+          <a:p>
+            <a:endParaRPr lang="pt-BR"/>
+          </a:p>
+        </p:txBody>
+      </p:sp>
+      <p:sp>
+        <p:nvSpPr>
+          <p:cNvPr id="62" name="Text 60"/>
+          <p:cNvSpPr/>
+          <p:nvPr/>
+        </p:nvSpPr>
+        <p:spPr>
+          <a:xfrm>
+            <a:off x="6199632" y="1636776"/>
+            <a:ext cx="1097280" cy="457200"/>
+          </a:xfrm>
+          <a:prstGeom prst="rect">
+            <a:avLst/>
+          </a:prstGeom>
+          <a:noFill/>
+          <a:ln/>
+        </p:spPr>
+        <p:txBody>
+          <a:bodyPr wrap="square" rtlCol="0" anchor="ctr"/>
+          <a:lstStyle/>
+          <a:p>
+            <a:pPr marL="0" indent="0">
+              <a:buNone/>
+            </a:pPr>
+            <a:r>
+              <a:rPr lang="en-US" sz="2800" b="1" dirty="0">
+                <a:solidFill>
+                  <a:srgbClr val="FFFFFF"/>
+                </a:solidFill>
+                <a:latin typeface="Arial" pitchFamily="34" charset="0"/>
+                <a:ea typeface="Arial" pitchFamily="34" charset="-122"/>
+                <a:cs typeface="Arial" pitchFamily="34" charset="-120"/>
+              </a:rPr>
+              <a:t>17</a:t>
+            </a:r>
+            <a:endParaRPr lang="en-US" sz="2800" dirty="0"/>
+          </a:p>
+        </p:txBody>
+      </p:sp>
+      <p:sp>
+        <p:nvSpPr>
+          <p:cNvPr id="63" name="Text 61"/>
+          <p:cNvSpPr/>
+          <p:nvPr/>
+        </p:nvSpPr>
+        <p:spPr>
+          <a:xfrm>
+            <a:off x="7114032" y="1755648"/>
+            <a:ext cx="822960" cy="256032"/>
+          </a:xfrm>
+          <a:prstGeom prst="rect">
+            <a:avLst/>
+          </a:prstGeom>
+          <a:noFill/>
+          <a:ln/>
+        </p:spPr>
+        <p:txBody>
+          <a:bodyPr wrap="square" rtlCol="0" anchor="ctr"/>
+          <a:lstStyle/>
+          <a:p>
+            <a:pPr marL="0" indent="0" algn="r">
+              <a:buNone/>
+            </a:pPr>
+            <a:r>
+              <a:rPr lang="en-US" sz="1100" dirty="0">
+                <a:solidFill>
+                  <a:srgbClr val="FFFFFF"/>
+                </a:solidFill>
+                <a:latin typeface="Arial" pitchFamily="34" charset="0"/>
+                <a:ea typeface="Arial" pitchFamily="34" charset="-122"/>
+                <a:cs typeface="Arial" pitchFamily="34" charset="-120"/>
+              </a:rPr>
+              <a:t>11,5%</a:t>
+            </a:r>
+            <a:endParaRPr lang="en-US" sz="1100" dirty="0"/>
+          </a:p>
+        </p:txBody>
+      </p:sp>
+      <p:sp>
+        <p:nvSpPr>
+          <p:cNvPr id="64" name="Text 62"/>
+          <p:cNvSpPr/>
+          <p:nvPr/>
+        </p:nvSpPr>
+        <p:spPr>
+          <a:xfrm>
+            <a:off x="6199632" y="2139696"/>
+            <a:ext cx="1792224" cy="237744"/>
+          </a:xfrm>
+          <a:prstGeom prst="rect">
+            <a:avLst/>
+          </a:prstGeom>
+          <a:noFill/>
+          <a:ln/>
+        </p:spPr>
+        <p:txBody>
+          <a:bodyPr wrap="square" rtlCol="0" anchor="ctr"/>
+          <a:lstStyle/>
+          <a:p>
+            <a:pPr marL="0" indent="0">
+              <a:buNone/>
+            </a:pPr>
+            <a:r>
+              <a:rPr lang="en-US" sz="1050" b="1" dirty="0">
+                <a:solidFill>
+                  <a:srgbClr val="A8C96B"/>
+                </a:solidFill>
+                <a:latin typeface="Arial" pitchFamily="34" charset="0"/>
+                <a:ea typeface="Arial" pitchFamily="34" charset="-122"/>
+                <a:cs typeface="Arial" pitchFamily="34" charset="-120"/>
+              </a:rPr>
+              <a:t>2ª Linha</a:t>
+            </a:r>
+            <a:endParaRPr lang="en-US" sz="1050" dirty="0"/>
+          </a:p>
+        </p:txBody>
+      </p:sp>
+      <p:sp>
+        <p:nvSpPr>
+          <p:cNvPr id="65" name="Text 63"/>
+          <p:cNvSpPr/>
+          <p:nvPr/>
+        </p:nvSpPr>
+        <p:spPr>
+          <a:xfrm>
+            <a:off x="6199632" y="2377440"/>
+            <a:ext cx="1792224" cy="256032"/>
+          </a:xfrm>
+          <a:prstGeom prst="rect">
+            <a:avLst/>
+          </a:prstGeom>
+          <a:noFill/>
+          <a:ln/>
+        </p:spPr>
+        <p:txBody>
+          <a:bodyPr wrap="square" rtlCol="0" anchor="ctr"/>
+          <a:lstStyle/>
+          <a:p>
+            <a:pPr marL="0" indent="0">
+              <a:buNone/>
+            </a:pPr>
+            <a:r>
+              <a:rPr lang="en-US" sz="800" i="1" dirty="0">
+                <a:solidFill>
+                  <a:srgbClr val="6B7280"/>
+                </a:solidFill>
+                <a:latin typeface="Arial" pitchFamily="34" charset="0"/>
+                <a:ea typeface="Arial" pitchFamily="34" charset="-122"/>
+                <a:cs typeface="Arial" pitchFamily="34" charset="-120"/>
+              </a:rPr>
+              <a:t>Só teste, sem laudo e sem ID</a:t>
+            </a:r>
+            <a:endParaRPr lang="en-US" sz="800" dirty="0"/>
+          </a:p>
+        </p:txBody>
+      </p:sp>
+      <p:sp>
+        <p:nvSpPr>
+          <p:cNvPr id="66" name="Shape 64"/>
+          <p:cNvSpPr/>
+          <p:nvPr/>
+        </p:nvSpPr>
+        <p:spPr>
+          <a:xfrm>
+            <a:off x="6199632" y="2670048"/>
+            <a:ext cx="1737360" cy="18288"/>
+          </a:xfrm>
+          <a:prstGeom prst="rect">
+            <a:avLst/>
+          </a:prstGeom>
+          <a:solidFill>
+            <a:srgbClr val="A8C96B">
+              <a:alpha val="45000"/>
+            </a:srgbClr>
+          </a:solidFill>
+          <a:ln w="12700">
+            <a:solidFill>
+              <a:srgbClr val="A8C96B">
+                <a:alpha val="45000"/>
+              </a:srgbClr>
+            </a:solidFill>
+            <a:prstDash val="solid"/>
+          </a:ln>
+        </p:spPr>
+        <p:txBody>
+          <a:bodyPr/>
+          <a:lstStyle/>
+          <a:p>
+            <a:endParaRPr lang="pt-BR"/>
+          </a:p>
+        </p:txBody>
+      </p:sp>
+      <p:sp>
+        <p:nvSpPr>
+          <p:cNvPr id="67" name="Text 65"/>
+          <p:cNvSpPr/>
+          <p:nvPr/>
+        </p:nvSpPr>
+        <p:spPr>
+          <a:xfrm>
+            <a:off x="6199632" y="2724912"/>
+            <a:ext cx="1792224" cy="914400"/>
+          </a:xfrm>
+          <a:prstGeom prst="rect">
+            <a:avLst/>
+          </a:prstGeom>
+          <a:noFill/>
+          <a:ln/>
+        </p:spPr>
+        <p:txBody>
+          <a:bodyPr wrap="square" rtlCol="0" anchor="ctr"/>
+          <a:lstStyle/>
+          <a:p>
+            <a:pPr marL="0" indent="0">
+              <a:buNone/>
+            </a:pPr>
+            <a:r>
+              <a:rPr lang="en-US" sz="800" dirty="0">
+                <a:solidFill>
+                  <a:srgbClr val="374151"/>
+                </a:solidFill>
+                <a:latin typeface="Arial" pitchFamily="34" charset="0"/>
+                <a:ea typeface="Arial" pitchFamily="34" charset="-122"/>
+                <a:cs typeface="Arial" pitchFamily="34" charset="-120"/>
+              </a:rPr>
+              <a:t>Sem laudo formal e sem identificação visual. Aprovadas apenas pelo ensaio ISO 340 em campo. Maior exposição documental.</a:t>
+            </a:r>
+            <a:endParaRPr lang="en-US" sz="800" dirty="0"/>
+          </a:p>
+        </p:txBody>
+      </p:sp>
+      <p:sp>
+        <p:nvSpPr>
+          <p:cNvPr id="68" name="Shape 66"/>
+          <p:cNvSpPr/>
+          <p:nvPr/>
+        </p:nvSpPr>
+        <p:spPr>
+          <a:xfrm>
+            <a:off x="6199632" y="3831336"/>
+            <a:ext cx="82296" cy="82296"/>
+          </a:xfrm>
+          <a:prstGeom prst="ellipse">
+            <a:avLst/>
+          </a:prstGeom>
+          <a:solidFill>
+            <a:srgbClr val="A8C96B"/>
+          </a:solidFill>
+          <a:ln w="12700">
+            <a:solidFill>
+              <a:srgbClr val="A8C96B"/>
+            </a:solidFill>
+            <a:prstDash val="solid"/>
+          </a:ln>
+        </p:spPr>
+        <p:txBody>
+          <a:bodyPr/>
+          <a:lstStyle/>
+          <a:p>
+            <a:endParaRPr lang="pt-BR"/>
+          </a:p>
+        </p:txBody>
+      </p:sp>
+      <p:sp>
+        <p:nvSpPr>
+          <p:cNvPr id="69" name="Text 67"/>
+          <p:cNvSpPr/>
+          <p:nvPr/>
+        </p:nvSpPr>
+        <p:spPr>
+          <a:xfrm>
+            <a:off x="6309360" y="3767328"/>
+            <a:ext cx="1682496" cy="310896"/>
+          </a:xfrm>
+          <a:prstGeom prst="rect">
+            <a:avLst/>
+          </a:prstGeom>
+          <a:noFill/>
+          <a:ln/>
+        </p:spPr>
+        <p:txBody>
+          <a:bodyPr wrap="square" rtlCol="0" anchor="ctr"/>
+          <a:lstStyle/>
+          <a:p>
+            <a:pPr marL="0" indent="0">
+              <a:buNone/>
+            </a:pPr>
+            <a:r>
+              <a:rPr lang="en-US" sz="800" dirty="0">
+                <a:solidFill>
+                  <a:srgbClr val="1F2937"/>
+                </a:solidFill>
+                <a:latin typeface="Arial" pitchFamily="34" charset="0"/>
+                <a:ea typeface="Arial" pitchFamily="34" charset="-122"/>
+                <a:cs typeface="Arial" pitchFamily="34" charset="-120"/>
+              </a:rPr>
+              <a:t>Aprovadas no teste ISO 340</a:t>
+            </a:r>
+            <a:endParaRPr lang="en-US" sz="800" dirty="0"/>
+          </a:p>
+        </p:txBody>
+      </p:sp>
+      <p:sp>
+        <p:nvSpPr>
+          <p:cNvPr id="70" name="Shape 68"/>
+          <p:cNvSpPr/>
+          <p:nvPr/>
+        </p:nvSpPr>
+        <p:spPr>
+          <a:xfrm>
+            <a:off x="6199632" y="4160520"/>
+            <a:ext cx="82296" cy="82296"/>
+          </a:xfrm>
+          <a:prstGeom prst="ellipse">
+            <a:avLst/>
+          </a:prstGeom>
+          <a:solidFill>
+            <a:srgbClr val="A8C96B"/>
+          </a:solidFill>
+          <a:ln w="12700">
+            <a:solidFill>
+              <a:srgbClr val="A8C96B"/>
+            </a:solidFill>
+            <a:prstDash val="solid"/>
+          </a:ln>
+        </p:spPr>
+        <p:txBody>
+          <a:bodyPr/>
+          <a:lstStyle/>
+          <a:p>
+            <a:endParaRPr lang="pt-BR"/>
+          </a:p>
+        </p:txBody>
+      </p:sp>
+      <p:sp>
+        <p:nvSpPr>
+          <p:cNvPr id="71" name="Text 69"/>
+          <p:cNvSpPr/>
+          <p:nvPr/>
+        </p:nvSpPr>
+        <p:spPr>
+          <a:xfrm>
+            <a:off x="6309360" y="4096512"/>
+            <a:ext cx="1682496" cy="310896"/>
+          </a:xfrm>
+          <a:prstGeom prst="rect">
+            <a:avLst/>
+          </a:prstGeom>
+          <a:noFill/>
+          <a:ln/>
+        </p:spPr>
+        <p:txBody>
+          <a:bodyPr wrap="square" rtlCol="0" anchor="ctr"/>
+          <a:lstStyle/>
+          <a:p>
+            <a:pPr marL="0" indent="0">
+              <a:buNone/>
+            </a:pPr>
+            <a:r>
+              <a:rPr lang="en-US" sz="800" dirty="0">
+                <a:solidFill>
+                  <a:srgbClr val="1F2937"/>
+                </a:solidFill>
+                <a:latin typeface="Arial" pitchFamily="34" charset="0"/>
+                <a:ea typeface="Arial" pitchFamily="34" charset="-122"/>
+                <a:cs typeface="Arial" pitchFamily="34" charset="-120"/>
+              </a:rPr>
+              <a:t>Sem laudo e sem ID visual</a:t>
+            </a:r>
+            <a:endParaRPr lang="en-US" sz="800" dirty="0"/>
+          </a:p>
+        </p:txBody>
+      </p:sp>
+      <p:sp>
+        <p:nvSpPr>
+          <p:cNvPr id="72" name="Shape 70"/>
+          <p:cNvSpPr/>
+          <p:nvPr/>
+        </p:nvSpPr>
+        <p:spPr>
+          <a:xfrm>
+            <a:off x="6199632" y="4489704"/>
+            <a:ext cx="82296" cy="82296"/>
+          </a:xfrm>
+          <a:prstGeom prst="ellipse">
+            <a:avLst/>
+          </a:prstGeom>
+          <a:solidFill>
+            <a:srgbClr val="A8C96B"/>
+          </a:solidFill>
+          <a:ln w="12700">
+            <a:solidFill>
+              <a:srgbClr val="A8C96B"/>
+            </a:solidFill>
+            <a:prstDash val="solid"/>
+          </a:ln>
+        </p:spPr>
+        <p:txBody>
+          <a:bodyPr/>
+          <a:lstStyle/>
+          <a:p>
+            <a:endParaRPr lang="pt-BR"/>
+          </a:p>
+        </p:txBody>
+      </p:sp>
+      <p:sp>
+        <p:nvSpPr>
+          <p:cNvPr id="73" name="Text 71"/>
+          <p:cNvSpPr/>
+          <p:nvPr/>
+        </p:nvSpPr>
+        <p:spPr>
+          <a:xfrm>
+            <a:off x="6309360" y="4425696"/>
+            <a:ext cx="1682496" cy="310896"/>
+          </a:xfrm>
+          <a:prstGeom prst="rect">
+            <a:avLst/>
+          </a:prstGeom>
+          <a:noFill/>
+          <a:ln/>
+        </p:spPr>
+        <p:txBody>
+          <a:bodyPr wrap="square" rtlCol="0" anchor="ctr"/>
+          <a:lstStyle/>
+          <a:p>
+            <a:pPr marL="0" indent="0">
+              <a:buNone/>
+            </a:pPr>
+            <a:r>
+              <a:rPr lang="en-US" sz="800" b="1" dirty="0">
+                <a:solidFill>
+                  <a:srgbClr val="1F2937"/>
+                </a:solidFill>
+                <a:latin typeface="Arial" pitchFamily="34" charset="0"/>
+                <a:ea typeface="Arial" pitchFamily="34" charset="-122"/>
+                <a:cs typeface="Arial" pitchFamily="34" charset="-120"/>
+              </a:rPr>
+              <a:t>Maior exposição — priorizar doc.</a:t>
+            </a:r>
+            <a:endParaRPr lang="en-US" sz="800" dirty="0"/>
+          </a:p>
+        </p:txBody>
+      </p:sp>
+      <p:sp>
+        <p:nvSpPr>
+          <p:cNvPr id="74" name="Shape 72"/>
+          <p:cNvSpPr/>
+          <p:nvPr/>
+        </p:nvSpPr>
+        <p:spPr>
+          <a:xfrm>
+            <a:off x="6199632" y="5888736"/>
+            <a:ext cx="1737360" cy="329184"/>
+          </a:xfrm>
+          <a:prstGeom prst="roundRect">
+            <a:avLst>
+              <a:gd name="adj" fmla="val 11111"/>
+            </a:avLst>
+          </a:prstGeom>
+          <a:solidFill>
+            <a:srgbClr val="A8C96B">
+              <a:alpha val="90000"/>
+            </a:srgbClr>
+          </a:solidFill>
+          <a:ln w="12700">
+            <a:solidFill>
+              <a:srgbClr val="A8C96B">
+                <a:alpha val="60000"/>
+              </a:srgbClr>
+            </a:solidFill>
+            <a:prstDash val="solid"/>
+          </a:ln>
+        </p:spPr>
+        <p:txBody>
+          <a:bodyPr/>
+          <a:lstStyle/>
+          <a:p>
+            <a:endParaRPr lang="pt-BR"/>
+          </a:p>
+        </p:txBody>
+      </p:sp>
+      <p:sp>
+        <p:nvSpPr>
+          <p:cNvPr id="75" name="Text 73"/>
+          <p:cNvSpPr/>
+          <p:nvPr/>
+        </p:nvSpPr>
+        <p:spPr>
+          <a:xfrm>
+            <a:off x="6199632" y="5888736"/>
+            <a:ext cx="1737360" cy="329184"/>
+          </a:xfrm>
+          <a:prstGeom prst="rect">
+            <a:avLst/>
+          </a:prstGeom>
+          <a:noFill/>
+          <a:ln/>
+        </p:spPr>
+        <p:txBody>
+          <a:bodyPr wrap="square" rtlCol="0" anchor="ctr"/>
+          <a:lstStyle/>
+          <a:p>
+            <a:pPr marL="0" indent="0" algn="ctr">
+              <a:buNone/>
+            </a:pPr>
+            <a:r>
+              <a:rPr lang="en-US" sz="750" b="1" dirty="0">
+                <a:solidFill>
+                  <a:srgbClr val="FFFFFF"/>
+                </a:solidFill>
+                <a:latin typeface="Arial" pitchFamily="34" charset="0"/>
+                <a:ea typeface="Arial" pitchFamily="34" charset="-122"/>
+                <a:cs typeface="Arial" pitchFamily="34" charset="-120"/>
+              </a:rPr>
+              <a:t>OBTER LAUDO</a:t>
+            </a:r>
+            <a:endParaRPr lang="en-US" sz="750" dirty="0"/>
+          </a:p>
+        </p:txBody>
+      </p:sp>
+      <p:sp>
+        <p:nvSpPr>
+          <p:cNvPr id="76" name="Shape 74"/>
+          <p:cNvSpPr/>
+          <p:nvPr/>
+        </p:nvSpPr>
+        <p:spPr>
+          <a:xfrm>
+            <a:off x="8083296" y="1627632"/>
+            <a:ext cx="1920240" cy="4681728"/>
+          </a:xfrm>
+          <a:prstGeom prst="rect">
+            <a:avLst/>
+          </a:prstGeom>
+          <a:solidFill>
+            <a:srgbClr val="FEF0EB"/>
+          </a:solidFill>
+          <a:ln w="12700">
+            <a:solidFill>
+              <a:srgbClr val="CC5121">
+                <a:alpha val="45000"/>
+              </a:srgbClr>
+            </a:solidFill>
+            <a:prstDash val="solid"/>
+          </a:ln>
+          <a:effectLst>
+            <a:outerShdw blurRad="50800" dist="25400" dir="8100000" algn="bl" rotWithShape="0">
+              <a:srgbClr val="000000">
+                <a:alpha val="7000"/>
+              </a:srgbClr>
+            </a:outerShdw>
+          </a:effectLst>
+        </p:spPr>
+        <p:txBody>
+          <a:bodyPr/>
+          <a:lstStyle/>
+          <a:p>
+            <a:endParaRPr lang="pt-BR"/>
+          </a:p>
+        </p:txBody>
+      </p:sp>
+      <p:sp>
+        <p:nvSpPr>
+          <p:cNvPr id="77" name="Shape 75"/>
+          <p:cNvSpPr/>
+          <p:nvPr/>
+        </p:nvSpPr>
+        <p:spPr>
+          <a:xfrm>
+            <a:off x="8083296" y="1627632"/>
+            <a:ext cx="1920240" cy="475488"/>
+          </a:xfrm>
+          <a:prstGeom prst="rect">
+            <a:avLst/>
+          </a:prstGeom>
+          <a:solidFill>
+            <a:srgbClr val="CC5121"/>
+          </a:solidFill>
+          <a:ln w="12700">
+            <a:solidFill>
+              <a:srgbClr val="CC5121"/>
+            </a:solidFill>
+            <a:prstDash val="solid"/>
+          </a:ln>
+        </p:spPr>
+        <p:txBody>
+          <a:bodyPr/>
+          <a:lstStyle/>
+          <a:p>
+            <a:endParaRPr lang="pt-BR"/>
+          </a:p>
+        </p:txBody>
+      </p:sp>
+      <p:sp>
+        <p:nvSpPr>
+          <p:cNvPr id="78" name="Text 76"/>
+          <p:cNvSpPr/>
+          <p:nvPr/>
+        </p:nvSpPr>
+        <p:spPr>
+          <a:xfrm>
+            <a:off x="8174736" y="1636776"/>
+            <a:ext cx="1097280" cy="457200"/>
+          </a:xfrm>
+          <a:prstGeom prst="rect">
+            <a:avLst/>
+          </a:prstGeom>
+          <a:noFill/>
+          <a:ln/>
+        </p:spPr>
+        <p:txBody>
+          <a:bodyPr wrap="square" rtlCol="0" anchor="ctr"/>
+          <a:lstStyle/>
+          <a:p>
+            <a:pPr marL="0" indent="0">
+              <a:buNone/>
+            </a:pPr>
+            <a:r>
+              <a:rPr lang="en-US" sz="2800" b="1" dirty="0">
+                <a:solidFill>
+                  <a:srgbClr val="FFFFFF"/>
+                </a:solidFill>
+                <a:latin typeface="Arial" pitchFamily="34" charset="0"/>
+                <a:ea typeface="Arial" pitchFamily="34" charset="-122"/>
+                <a:cs typeface="Arial" pitchFamily="34" charset="-120"/>
+              </a:rPr>
+              <a:t>41</a:t>
+            </a:r>
+            <a:endParaRPr lang="en-US" sz="2800" dirty="0"/>
+          </a:p>
+        </p:txBody>
+      </p:sp>
+      <p:sp>
+        <p:nvSpPr>
+          <p:cNvPr id="79" name="Text 77"/>
+          <p:cNvSpPr/>
+          <p:nvPr/>
+        </p:nvSpPr>
+        <p:spPr>
+          <a:xfrm>
+            <a:off x="9089136" y="1755648"/>
+            <a:ext cx="822960" cy="256032"/>
+          </a:xfrm>
+          <a:prstGeom prst="rect">
+            <a:avLst/>
+          </a:prstGeom>
+          <a:noFill/>
+          <a:ln/>
+        </p:spPr>
+        <p:txBody>
+          <a:bodyPr wrap="square" rtlCol="0" anchor="ctr"/>
+          <a:lstStyle/>
+          <a:p>
+            <a:pPr marL="0" indent="0" algn="r">
+              <a:buNone/>
+            </a:pPr>
+            <a:r>
+              <a:rPr lang="en-US" sz="1100" dirty="0">
+                <a:solidFill>
+                  <a:srgbClr val="FFFFFF"/>
+                </a:solidFill>
+                <a:latin typeface="Arial" pitchFamily="34" charset="0"/>
+                <a:ea typeface="Arial" pitchFamily="34" charset="-122"/>
+                <a:cs typeface="Arial" pitchFamily="34" charset="-120"/>
+              </a:rPr>
+              <a:t>27,7%</a:t>
+            </a:r>
+            <a:endParaRPr lang="en-US" sz="1100" dirty="0"/>
+          </a:p>
+        </p:txBody>
+      </p:sp>
+      <p:sp>
+        <p:nvSpPr>
+          <p:cNvPr id="80" name="Text 78"/>
+          <p:cNvSpPr/>
+          <p:nvPr/>
+        </p:nvSpPr>
+        <p:spPr>
+          <a:xfrm>
+            <a:off x="8174736" y="2139696"/>
+            <a:ext cx="1792224" cy="237744"/>
+          </a:xfrm>
+          <a:prstGeom prst="rect">
+            <a:avLst/>
+          </a:prstGeom>
+          <a:noFill/>
+          <a:ln/>
+        </p:spPr>
+        <p:txBody>
+          <a:bodyPr wrap="square" rtlCol="0" anchor="ctr"/>
+          <a:lstStyle/>
+          <a:p>
+            <a:pPr marL="0" indent="0">
+              <a:buNone/>
+            </a:pPr>
+            <a:r>
+              <a:rPr lang="en-US" sz="1050" b="1" dirty="0">
+                <a:solidFill>
+                  <a:srgbClr val="CC5121"/>
+                </a:solidFill>
+                <a:latin typeface="Arial" pitchFamily="34" charset="0"/>
+                <a:ea typeface="Arial" pitchFamily="34" charset="-122"/>
+                <a:cs typeface="Arial" pitchFamily="34" charset="-120"/>
+              </a:rPr>
+              <a:t>Reprovadas</a:t>
+            </a:r>
+            <a:endParaRPr lang="en-US" sz="1050" dirty="0"/>
+          </a:p>
+        </p:txBody>
+      </p:sp>
+      <p:sp>
+        <p:nvSpPr>
+          <p:cNvPr id="81" name="Text 79"/>
+          <p:cNvSpPr/>
+          <p:nvPr/>
+        </p:nvSpPr>
+        <p:spPr>
+          <a:xfrm>
+            <a:off x="8174736" y="2377440"/>
+            <a:ext cx="1792224" cy="256032"/>
+          </a:xfrm>
+          <a:prstGeom prst="rect">
+            <a:avLst/>
+          </a:prstGeom>
+          <a:noFill/>
+          <a:ln/>
+        </p:spPr>
+        <p:txBody>
+          <a:bodyPr wrap="square" rtlCol="0" anchor="ctr"/>
+          <a:lstStyle/>
+          <a:p>
+            <a:pPr marL="0" indent="0">
+              <a:buNone/>
+            </a:pPr>
+            <a:r>
+              <a:rPr lang="en-US" sz="800" i="1" dirty="0">
+                <a:solidFill>
+                  <a:srgbClr val="6B7280"/>
+                </a:solidFill>
+                <a:latin typeface="Arial" pitchFamily="34" charset="0"/>
+                <a:ea typeface="Arial" pitchFamily="34" charset="-122"/>
+                <a:cs typeface="Arial" pitchFamily="34" charset="-120"/>
+              </a:rPr>
+              <a:t>Falha no ensaio ISO 340</a:t>
+            </a:r>
+            <a:endParaRPr lang="en-US" sz="800" dirty="0"/>
+          </a:p>
+        </p:txBody>
+      </p:sp>
+      <p:sp>
+        <p:nvSpPr>
+          <p:cNvPr id="82" name="Shape 80"/>
+          <p:cNvSpPr/>
+          <p:nvPr/>
+        </p:nvSpPr>
+        <p:spPr>
+          <a:xfrm>
+            <a:off x="8174736" y="2670048"/>
+            <a:ext cx="1737360" cy="18288"/>
+          </a:xfrm>
+          <a:prstGeom prst="rect">
+            <a:avLst/>
+          </a:prstGeom>
+          <a:solidFill>
+            <a:srgbClr val="CC5121">
+              <a:alpha val="45000"/>
+            </a:srgbClr>
+          </a:solidFill>
+          <a:ln w="12700">
+            <a:solidFill>
+              <a:srgbClr val="CC5121">
+                <a:alpha val="45000"/>
+              </a:srgbClr>
+            </a:solidFill>
+            <a:prstDash val="solid"/>
+          </a:ln>
+        </p:spPr>
+        <p:txBody>
+          <a:bodyPr/>
+          <a:lstStyle/>
+          <a:p>
+            <a:endParaRPr lang="pt-BR"/>
+          </a:p>
+        </p:txBody>
+      </p:sp>
+      <p:sp>
+        <p:nvSpPr>
+          <p:cNvPr id="83" name="Text 81"/>
+          <p:cNvSpPr/>
+          <p:nvPr/>
+        </p:nvSpPr>
+        <p:spPr>
+          <a:xfrm>
+            <a:off x="8174736" y="2724912"/>
+            <a:ext cx="1792224" cy="914400"/>
+          </a:xfrm>
+          <a:prstGeom prst="rect">
+            <a:avLst/>
+          </a:prstGeom>
+          <a:noFill/>
+          <a:ln/>
+        </p:spPr>
+        <p:txBody>
+          <a:bodyPr wrap="square" rtlCol="0" anchor="ctr"/>
+          <a:lstStyle/>
+          <a:p>
+            <a:pPr marL="0" indent="0">
+              <a:buNone/>
+            </a:pPr>
+            <a:r>
+              <a:rPr lang="en-US" sz="800" dirty="0">
+                <a:solidFill>
+                  <a:srgbClr val="374151"/>
+                </a:solidFill>
+                <a:latin typeface="Arial" pitchFamily="34" charset="0"/>
+                <a:ea typeface="Arial" pitchFamily="34" charset="-122"/>
+                <a:cs typeface="Arial" pitchFamily="34" charset="-120"/>
+              </a:rPr>
+              <a:t>Reprovadas no ensaio de flamabilidade ISO 340 em campo. Substituição prioritária por criticidade.</a:t>
+            </a:r>
+            <a:endParaRPr lang="en-US" sz="800" dirty="0"/>
+          </a:p>
+        </p:txBody>
+      </p:sp>
+      <p:sp>
+        <p:nvSpPr>
+          <p:cNvPr id="84" name="Shape 82"/>
+          <p:cNvSpPr/>
+          <p:nvPr/>
+        </p:nvSpPr>
+        <p:spPr>
+          <a:xfrm>
+            <a:off x="8174736" y="3831336"/>
+            <a:ext cx="82296" cy="82296"/>
+          </a:xfrm>
+          <a:prstGeom prst="ellipse">
+            <a:avLst/>
+          </a:prstGeom>
+          <a:solidFill>
+            <a:srgbClr val="CC5121"/>
+          </a:solidFill>
+          <a:ln w="12700">
+            <a:solidFill>
+              <a:srgbClr val="CC5121"/>
+            </a:solidFill>
+            <a:prstDash val="solid"/>
+          </a:ln>
+        </p:spPr>
+        <p:txBody>
+          <a:bodyPr/>
+          <a:lstStyle/>
+          <a:p>
+            <a:endParaRPr lang="pt-BR"/>
+          </a:p>
+        </p:txBody>
+      </p:sp>
+      <p:sp>
+        <p:nvSpPr>
+          <p:cNvPr id="85" name="Text 83"/>
+          <p:cNvSpPr/>
+          <p:nvPr/>
+        </p:nvSpPr>
+        <p:spPr>
+          <a:xfrm>
+            <a:off x="8284464" y="3767328"/>
+            <a:ext cx="1682496" cy="310896"/>
+          </a:xfrm>
+          <a:prstGeom prst="rect">
+            <a:avLst/>
+          </a:prstGeom>
+          <a:noFill/>
+          <a:ln/>
+        </p:spPr>
+        <p:txBody>
+          <a:bodyPr wrap="square" rtlCol="0" anchor="ctr"/>
+          <a:lstStyle/>
+          <a:p>
+            <a:pPr marL="0" indent="0">
+              <a:buNone/>
+            </a:pPr>
+            <a:r>
+              <a:rPr lang="en-US" sz="800" b="1" dirty="0">
+                <a:solidFill>
+                  <a:srgbClr val="1F2937"/>
+                </a:solidFill>
+                <a:latin typeface="Arial" pitchFamily="34" charset="0"/>
+                <a:ea typeface="Arial" pitchFamily="34" charset="-122"/>
+                <a:cs typeface="Arial" pitchFamily="34" charset="-120"/>
+              </a:rPr>
+              <a:t>SNP: 21 itens · R$ 3,55 mi</a:t>
+            </a:r>
+            <a:endParaRPr lang="en-US" sz="800" dirty="0"/>
+          </a:p>
+        </p:txBody>
+      </p:sp>
+      <p:sp>
+        <p:nvSpPr>
+          <p:cNvPr id="86" name="Shape 84"/>
+          <p:cNvSpPr/>
+          <p:nvPr/>
+        </p:nvSpPr>
+        <p:spPr>
+          <a:xfrm>
+            <a:off x="8174736" y="4160520"/>
+            <a:ext cx="82296" cy="82296"/>
+          </a:xfrm>
+          <a:prstGeom prst="ellipse">
+            <a:avLst/>
+          </a:prstGeom>
+          <a:solidFill>
+            <a:srgbClr val="CC5121"/>
+          </a:solidFill>
+          <a:ln w="12700">
+            <a:solidFill>
+              <a:srgbClr val="CC5121"/>
+            </a:solidFill>
+            <a:prstDash val="solid"/>
+          </a:ln>
+        </p:spPr>
+        <p:txBody>
+          <a:bodyPr/>
+          <a:lstStyle/>
+          <a:p>
+            <a:endParaRPr lang="pt-BR"/>
+          </a:p>
+        </p:txBody>
+      </p:sp>
+      <p:sp>
+        <p:nvSpPr>
+          <p:cNvPr id="87" name="Text 85"/>
+          <p:cNvSpPr/>
+          <p:nvPr/>
+        </p:nvSpPr>
+        <p:spPr>
+          <a:xfrm>
+            <a:off x="8284464" y="4096512"/>
+            <a:ext cx="1682496" cy="310896"/>
+          </a:xfrm>
+          <a:prstGeom prst="rect">
+            <a:avLst/>
+          </a:prstGeom>
+          <a:noFill/>
+          <a:ln/>
+        </p:spPr>
+        <p:txBody>
+          <a:bodyPr wrap="square" rtlCol="0" anchor="ctr"/>
+          <a:lstStyle/>
+          <a:p>
+            <a:pPr marL="0" indent="0">
+              <a:buNone/>
+            </a:pPr>
+            <a:r>
+              <a:rPr lang="en-US" sz="800" dirty="0">
+                <a:solidFill>
+                  <a:srgbClr val="1F2937"/>
+                </a:solidFill>
+                <a:latin typeface="Arial" pitchFamily="34" charset="0"/>
+                <a:ea typeface="Arial" pitchFamily="34" charset="-122"/>
+                <a:cs typeface="Arial" pitchFamily="34" charset="-120"/>
+              </a:rPr>
+              <a:t>NMT: 15 itens · R$ 1,70 mi</a:t>
+            </a:r>
+            <a:endParaRPr lang="en-US" sz="800" dirty="0"/>
+          </a:p>
+        </p:txBody>
+      </p:sp>
+      <p:sp>
+        <p:nvSpPr>
+          <p:cNvPr id="88" name="Shape 86"/>
+          <p:cNvSpPr/>
+          <p:nvPr/>
+        </p:nvSpPr>
+        <p:spPr>
+          <a:xfrm>
+            <a:off x="8174736" y="4489704"/>
+            <a:ext cx="82296" cy="82296"/>
+          </a:xfrm>
+          <a:prstGeom prst="ellipse">
+            <a:avLst/>
+          </a:prstGeom>
+          <a:solidFill>
+            <a:srgbClr val="CC5121"/>
+          </a:solidFill>
+          <a:ln w="12700">
+            <a:solidFill>
+              <a:srgbClr val="CC5121"/>
+            </a:solidFill>
+            <a:prstDash val="solid"/>
+          </a:ln>
+        </p:spPr>
+        <p:txBody>
+          <a:bodyPr/>
+          <a:lstStyle/>
+          <a:p>
+            <a:endParaRPr lang="pt-BR"/>
+          </a:p>
+        </p:txBody>
+      </p:sp>
+      <p:sp>
+        <p:nvSpPr>
+          <p:cNvPr id="89" name="Text 87"/>
+          <p:cNvSpPr/>
+          <p:nvPr/>
+        </p:nvSpPr>
+        <p:spPr>
+          <a:xfrm>
+            <a:off x="8284464" y="4425696"/>
+            <a:ext cx="1682496" cy="310896"/>
+          </a:xfrm>
+          <a:prstGeom prst="rect">
+            <a:avLst/>
+          </a:prstGeom>
+          <a:noFill/>
+          <a:ln/>
+        </p:spPr>
+        <p:txBody>
+          <a:bodyPr wrap="square" rtlCol="0" anchor="ctr"/>
+          <a:lstStyle/>
+          <a:p>
+            <a:pPr marL="0" indent="0">
+              <a:buNone/>
+            </a:pPr>
+            <a:r>
+              <a:rPr lang="en-US" sz="800" dirty="0">
+                <a:solidFill>
+                  <a:srgbClr val="1F2937"/>
+                </a:solidFill>
+                <a:latin typeface="Arial" pitchFamily="34" charset="0"/>
+                <a:ea typeface="Arial" pitchFamily="34" charset="-122"/>
+                <a:cs typeface="Arial" pitchFamily="34" charset="-120"/>
+              </a:rPr>
+              <a:t>SDL/BLS/LEM: 5 itens · R$ 0,90 mi</a:t>
+            </a:r>
+            <a:endParaRPr lang="en-US" sz="800" dirty="0"/>
+          </a:p>
+        </p:txBody>
+      </p:sp>
+      <p:sp>
+        <p:nvSpPr>
+          <p:cNvPr id="90" name="Shape 88"/>
+          <p:cNvSpPr/>
+          <p:nvPr/>
+        </p:nvSpPr>
+        <p:spPr>
+          <a:xfrm>
+            <a:off x="8174736" y="5888736"/>
+            <a:ext cx="1737360" cy="329184"/>
+          </a:xfrm>
+          <a:prstGeom prst="roundRect">
+            <a:avLst>
+              <a:gd name="adj" fmla="val 11111"/>
+            </a:avLst>
+          </a:prstGeom>
+          <a:solidFill>
+            <a:srgbClr val="CC5121">
+              <a:alpha val="90000"/>
+            </a:srgbClr>
+          </a:solidFill>
+          <a:ln w="12700">
+            <a:solidFill>
+              <a:srgbClr val="CC5121">
+                <a:alpha val="60000"/>
+              </a:srgbClr>
+            </a:solidFill>
+            <a:prstDash val="solid"/>
+          </a:ln>
+        </p:spPr>
+        <p:txBody>
+          <a:bodyPr/>
+          <a:lstStyle/>
+          <a:p>
+            <a:endParaRPr lang="pt-BR"/>
+          </a:p>
+        </p:txBody>
+      </p:sp>
+      <p:sp>
+        <p:nvSpPr>
+          <p:cNvPr id="91" name="Text 89"/>
+          <p:cNvSpPr/>
+          <p:nvPr/>
+        </p:nvSpPr>
+        <p:spPr>
+          <a:xfrm>
+            <a:off x="8174736" y="5888736"/>
+            <a:ext cx="1737360" cy="329184"/>
+          </a:xfrm>
+          <a:prstGeom prst="rect">
+            <a:avLst/>
+          </a:prstGeom>
+          <a:noFill/>
+          <a:ln/>
+        </p:spPr>
+        <p:txBody>
+          <a:bodyPr wrap="square" rtlCol="0" anchor="ctr"/>
+          <a:lstStyle/>
+          <a:p>
+            <a:pPr marL="0" indent="0" algn="ctr">
+              <a:buNone/>
+            </a:pPr>
+            <a:r>
+              <a:rPr lang="en-US" sz="750" b="1" dirty="0">
+                <a:solidFill>
+                  <a:srgbClr val="FFFFFF"/>
+                </a:solidFill>
+                <a:latin typeface="Arial" pitchFamily="34" charset="0"/>
+                <a:ea typeface="Arial" pitchFamily="34" charset="-122"/>
+                <a:cs typeface="Arial" pitchFamily="34" charset="-120"/>
+              </a:rPr>
+              <a:t>SUBSTITUICAO IMEDIATA</a:t>
+            </a:r>
+            <a:endParaRPr lang="en-US" sz="750" dirty="0"/>
+          </a:p>
+        </p:txBody>
+      </p:sp>
+      <p:sp>
+        <p:nvSpPr>
+          <p:cNvPr id="92" name="Shape 90"/>
+          <p:cNvSpPr/>
+          <p:nvPr/>
+        </p:nvSpPr>
+        <p:spPr>
+          <a:xfrm>
+            <a:off x="10058400" y="1627632"/>
+            <a:ext cx="1920240" cy="4681728"/>
+          </a:xfrm>
+          <a:prstGeom prst="rect">
+            <a:avLst/>
+          </a:prstGeom>
+          <a:solidFill>
+            <a:srgbClr val="FFF8EB"/>
+          </a:solidFill>
+          <a:ln w="12700">
+            <a:solidFill>
+              <a:srgbClr val="D97706">
+                <a:alpha val="45000"/>
+              </a:srgbClr>
+            </a:solidFill>
+            <a:prstDash val="solid"/>
+          </a:ln>
+          <a:effectLst>
+            <a:outerShdw blurRad="50800" dist="25400" dir="8100000" algn="bl" rotWithShape="0">
+              <a:srgbClr val="000000">
+                <a:alpha val="7000"/>
+              </a:srgbClr>
+            </a:outerShdw>
+          </a:effectLst>
+        </p:spPr>
+        <p:txBody>
+          <a:bodyPr/>
+          <a:lstStyle/>
+          <a:p>
+            <a:endParaRPr lang="pt-BR"/>
+          </a:p>
+        </p:txBody>
+      </p:sp>
+      <p:sp>
+        <p:nvSpPr>
+          <p:cNvPr id="93" name="Shape 91"/>
+          <p:cNvSpPr/>
+          <p:nvPr/>
+        </p:nvSpPr>
+        <p:spPr>
+          <a:xfrm>
+            <a:off x="10058400" y="1627632"/>
+            <a:ext cx="1920240" cy="475488"/>
+          </a:xfrm>
+          <a:prstGeom prst="rect">
+            <a:avLst/>
+          </a:prstGeom>
+          <a:solidFill>
+            <a:srgbClr val="D97706"/>
+          </a:solidFill>
+          <a:ln w="12700">
+            <a:solidFill>
+              <a:srgbClr val="D97706"/>
+            </a:solidFill>
+            <a:prstDash val="solid"/>
+          </a:ln>
+        </p:spPr>
+        <p:txBody>
+          <a:bodyPr/>
+          <a:lstStyle/>
+          <a:p>
+            <a:endParaRPr lang="pt-BR"/>
+          </a:p>
+        </p:txBody>
+      </p:sp>
+      <p:sp>
+        <p:nvSpPr>
+          <p:cNvPr id="94" name="Text 92"/>
+          <p:cNvSpPr/>
+          <p:nvPr/>
+        </p:nvSpPr>
+        <p:spPr>
+          <a:xfrm>
+            <a:off x="10149840" y="1636776"/>
+            <a:ext cx="1097280" cy="457200"/>
+          </a:xfrm>
+          <a:prstGeom prst="rect">
+            <a:avLst/>
+          </a:prstGeom>
+          <a:noFill/>
+          <a:ln/>
+        </p:spPr>
+        <p:txBody>
+          <a:bodyPr wrap="square" rtlCol="0" anchor="ctr"/>
+          <a:lstStyle/>
+          <a:p>
+            <a:pPr marL="0" indent="0">
+              <a:buNone/>
+            </a:pPr>
+            <a:r>
+              <a:rPr lang="en-US" sz="2800" b="1" dirty="0">
+                <a:solidFill>
+                  <a:srgbClr val="FFFFFF"/>
+                </a:solidFill>
+                <a:latin typeface="Arial" pitchFamily="34" charset="0"/>
+                <a:ea typeface="Arial" pitchFamily="34" charset="-122"/>
+                <a:cs typeface="Arial" pitchFamily="34" charset="-120"/>
+              </a:rPr>
+              <a:t>5</a:t>
+            </a:r>
+            <a:endParaRPr lang="en-US" sz="2800" dirty="0"/>
+          </a:p>
+        </p:txBody>
+      </p:sp>
+      <p:sp>
+        <p:nvSpPr>
+          <p:cNvPr id="95" name="Text 93"/>
+          <p:cNvSpPr/>
+          <p:nvPr/>
+        </p:nvSpPr>
+        <p:spPr>
+          <a:xfrm>
+            <a:off x="11064240" y="1755648"/>
+            <a:ext cx="822960" cy="256032"/>
+          </a:xfrm>
+          <a:prstGeom prst="rect">
+            <a:avLst/>
+          </a:prstGeom>
+          <a:noFill/>
+          <a:ln/>
+        </p:spPr>
+        <p:txBody>
+          <a:bodyPr wrap="square" rtlCol="0" anchor="ctr"/>
+          <a:lstStyle/>
+          <a:p>
+            <a:pPr marL="0" indent="0" algn="r">
+              <a:buNone/>
+            </a:pPr>
+            <a:r>
+              <a:rPr lang="en-US" sz="1100" dirty="0">
+                <a:solidFill>
+                  <a:srgbClr val="FFFFFF"/>
+                </a:solidFill>
+                <a:latin typeface="Arial" pitchFamily="34" charset="0"/>
+                <a:ea typeface="Arial" pitchFamily="34" charset="-122"/>
+                <a:cs typeface="Arial" pitchFamily="34" charset="-120"/>
+              </a:rPr>
+              <a:t>3,4%</a:t>
+            </a:r>
+            <a:endParaRPr lang="en-US" sz="1100" dirty="0"/>
+          </a:p>
+        </p:txBody>
+      </p:sp>
+      <p:sp>
+        <p:nvSpPr>
+          <p:cNvPr id="96" name="Text 94"/>
+          <p:cNvSpPr/>
+          <p:nvPr/>
+        </p:nvSpPr>
+        <p:spPr>
+          <a:xfrm>
+            <a:off x="10149840" y="2139696"/>
+            <a:ext cx="1792224" cy="237744"/>
+          </a:xfrm>
+          <a:prstGeom prst="rect">
+            <a:avLst/>
+          </a:prstGeom>
+          <a:noFill/>
+          <a:ln/>
+        </p:spPr>
+        <p:txBody>
+          <a:bodyPr wrap="square" rtlCol="0" anchor="ctr"/>
+          <a:lstStyle/>
+          <a:p>
+            <a:pPr marL="0" indent="0">
+              <a:buNone/>
+            </a:pPr>
+            <a:r>
+              <a:rPr lang="en-US" sz="1050" b="1" dirty="0">
+                <a:solidFill>
+                  <a:srgbClr val="D97706"/>
+                </a:solidFill>
+                <a:latin typeface="Arial" pitchFamily="34" charset="0"/>
+                <a:ea typeface="Arial" pitchFamily="34" charset="-122"/>
+                <a:cs typeface="Arial" pitchFamily="34" charset="-120"/>
+              </a:rPr>
+              <a:t>Degradação</a:t>
+            </a:r>
+            <a:endParaRPr lang="en-US" sz="1050" dirty="0"/>
+          </a:p>
+        </p:txBody>
+      </p:sp>
+      <p:sp>
+        <p:nvSpPr>
+          <p:cNvPr id="97" name="Text 95"/>
+          <p:cNvSpPr/>
+          <p:nvPr/>
+        </p:nvSpPr>
+        <p:spPr>
+          <a:xfrm>
+            <a:off x="10149840" y="2377440"/>
+            <a:ext cx="1792224" cy="256032"/>
+          </a:xfrm>
+          <a:prstGeom prst="rect">
+            <a:avLst/>
+          </a:prstGeom>
+          <a:noFill/>
+          <a:ln/>
+        </p:spPr>
+        <p:txBody>
+          <a:bodyPr wrap="square" rtlCol="0" anchor="ctr"/>
+          <a:lstStyle/>
+          <a:p>
+            <a:pPr marL="0" indent="0">
+              <a:buNone/>
+            </a:pPr>
+            <a:r>
+              <a:rPr lang="en-US" sz="800" i="1" dirty="0">
+                <a:solidFill>
+                  <a:srgbClr val="6B7280"/>
+                </a:solidFill>
+                <a:latin typeface="Arial" pitchFamily="34" charset="0"/>
+                <a:ea typeface="Arial" pitchFamily="34" charset="-122"/>
+                <a:cs typeface="Arial" pitchFamily="34" charset="-120"/>
+              </a:rPr>
+              <a:t>Antichama 2ª linha</a:t>
+            </a:r>
+            <a:endParaRPr lang="en-US" sz="800" dirty="0"/>
+          </a:p>
+        </p:txBody>
+      </p:sp>
+      <p:sp>
+        <p:nvSpPr>
+          <p:cNvPr id="98" name="Shape 96"/>
+          <p:cNvSpPr/>
+          <p:nvPr/>
+        </p:nvSpPr>
+        <p:spPr>
+          <a:xfrm>
+            <a:off x="10149840" y="2670048"/>
+            <a:ext cx="1737360" cy="18288"/>
+          </a:xfrm>
+          <a:prstGeom prst="rect">
+            <a:avLst/>
+          </a:prstGeom>
+          <a:solidFill>
+            <a:srgbClr val="D97706">
+              <a:alpha val="45000"/>
+            </a:srgbClr>
+          </a:solidFill>
+          <a:ln w="12700">
+            <a:solidFill>
+              <a:srgbClr val="D97706">
+                <a:alpha val="45000"/>
+              </a:srgbClr>
+            </a:solidFill>
+            <a:prstDash val="solid"/>
+          </a:ln>
+        </p:spPr>
+        <p:txBody>
+          <a:bodyPr/>
+          <a:lstStyle/>
+          <a:p>
+            <a:endParaRPr lang="pt-BR"/>
+          </a:p>
+        </p:txBody>
+      </p:sp>
+      <p:sp>
+        <p:nvSpPr>
+          <p:cNvPr id="99" name="Text 97"/>
+          <p:cNvSpPr/>
+          <p:nvPr/>
+        </p:nvSpPr>
+        <p:spPr>
+          <a:xfrm>
+            <a:off x="10149840" y="2724912"/>
+            <a:ext cx="1792224" cy="914400"/>
+          </a:xfrm>
+          <a:prstGeom prst="rect">
+            <a:avLst/>
+          </a:prstGeom>
+          <a:noFill/>
+          <a:ln/>
+        </p:spPr>
+        <p:txBody>
+          <a:bodyPr wrap="square" rtlCol="0" anchor="ctr"/>
+          <a:lstStyle/>
+          <a:p>
+            <a:pPr marL="0" indent="0">
+              <a:buNone/>
+            </a:pPr>
+            <a:r>
+              <a:rPr lang="en-US" sz="800" dirty="0">
+                <a:solidFill>
+                  <a:srgbClr val="374151"/>
+                </a:solidFill>
+                <a:latin typeface="Arial" pitchFamily="34" charset="0"/>
+                <a:ea typeface="Arial" pitchFamily="34" charset="-122"/>
+                <a:cs typeface="Arial" pitchFamily="34" charset="-120"/>
+              </a:rPr>
+              <a:t>São antichama (2ª linha), mas com degradação prematura. Substituição por condição física, não por falha no ensaio.</a:t>
+            </a:r>
+            <a:endParaRPr lang="en-US" sz="800" dirty="0"/>
+          </a:p>
+        </p:txBody>
+      </p:sp>
+      <p:sp>
+        <p:nvSpPr>
+          <p:cNvPr id="100" name="Shape 98"/>
+          <p:cNvSpPr/>
+          <p:nvPr/>
+        </p:nvSpPr>
+        <p:spPr>
+          <a:xfrm>
+            <a:off x="10149840" y="3831336"/>
+            <a:ext cx="82296" cy="82296"/>
+          </a:xfrm>
+          <a:prstGeom prst="ellipse">
+            <a:avLst/>
+          </a:prstGeom>
+          <a:solidFill>
+            <a:srgbClr val="D97706"/>
+          </a:solidFill>
+          <a:ln w="12700">
+            <a:solidFill>
+              <a:srgbClr val="D97706"/>
+            </a:solidFill>
+            <a:prstDash val="solid"/>
+          </a:ln>
+        </p:spPr>
+        <p:txBody>
+          <a:bodyPr/>
+          <a:lstStyle/>
+          <a:p>
+            <a:endParaRPr lang="pt-BR"/>
+          </a:p>
+        </p:txBody>
+      </p:sp>
+      <p:sp>
+        <p:nvSpPr>
+          <p:cNvPr id="101" name="Text 99"/>
+          <p:cNvSpPr/>
+          <p:nvPr/>
+        </p:nvSpPr>
+        <p:spPr>
+          <a:xfrm>
+            <a:off x="10259568" y="3767328"/>
+            <a:ext cx="1682496" cy="310896"/>
+          </a:xfrm>
+          <a:prstGeom prst="rect">
+            <a:avLst/>
+          </a:prstGeom>
+          <a:noFill/>
+          <a:ln/>
+        </p:spPr>
+        <p:txBody>
+          <a:bodyPr wrap="square" rtlCol="0" anchor="ctr"/>
+          <a:lstStyle/>
+          <a:p>
+            <a:pPr marL="0" indent="0">
+              <a:buNone/>
+            </a:pPr>
+            <a:r>
+              <a:rPr lang="en-US" sz="800" dirty="0">
+                <a:solidFill>
+                  <a:srgbClr val="1F2937"/>
+                </a:solidFill>
+                <a:latin typeface="Arial" pitchFamily="34" charset="0"/>
+                <a:ea typeface="Arial" pitchFamily="34" charset="-122"/>
+                <a:cs typeface="Arial" pitchFamily="34" charset="-120"/>
+              </a:rPr>
+              <a:t>Aprovadas no ensaio ISO 340</a:t>
+            </a:r>
+            <a:endParaRPr lang="en-US" sz="800" dirty="0"/>
+          </a:p>
+        </p:txBody>
+      </p:sp>
+      <p:sp>
+        <p:nvSpPr>
+          <p:cNvPr id="102" name="Shape 100"/>
+          <p:cNvSpPr/>
+          <p:nvPr/>
+        </p:nvSpPr>
+        <p:spPr>
+          <a:xfrm>
+            <a:off x="10149840" y="4160520"/>
+            <a:ext cx="82296" cy="82296"/>
+          </a:xfrm>
+          <a:prstGeom prst="ellipse">
+            <a:avLst/>
+          </a:prstGeom>
+          <a:solidFill>
+            <a:srgbClr val="D97706"/>
+          </a:solidFill>
+          <a:ln w="12700">
+            <a:solidFill>
+              <a:srgbClr val="D97706"/>
+            </a:solidFill>
+            <a:prstDash val="solid"/>
+          </a:ln>
+        </p:spPr>
+        <p:txBody>
+          <a:bodyPr/>
+          <a:lstStyle/>
+          <a:p>
+            <a:endParaRPr lang="pt-BR"/>
+          </a:p>
+        </p:txBody>
+      </p:sp>
+      <p:sp>
+        <p:nvSpPr>
+          <p:cNvPr id="103" name="Text 101"/>
+          <p:cNvSpPr/>
+          <p:nvPr/>
+        </p:nvSpPr>
+        <p:spPr>
+          <a:xfrm>
+            <a:off x="10259568" y="4096512"/>
+            <a:ext cx="1682496" cy="310896"/>
+          </a:xfrm>
+          <a:prstGeom prst="rect">
+            <a:avLst/>
+          </a:prstGeom>
+          <a:noFill/>
+          <a:ln/>
+        </p:spPr>
+        <p:txBody>
+          <a:bodyPr wrap="square" rtlCol="0" anchor="ctr"/>
+          <a:lstStyle/>
+          <a:p>
+            <a:pPr marL="0" indent="0">
+              <a:buNone/>
+            </a:pPr>
+            <a:r>
+              <a:rPr lang="en-US" sz="800" b="1" dirty="0">
+                <a:solidFill>
+                  <a:srgbClr val="1F2937"/>
+                </a:solidFill>
+                <a:latin typeface="Arial" pitchFamily="34" charset="0"/>
+                <a:ea typeface="Arial" pitchFamily="34" charset="-122"/>
+                <a:cs typeface="Arial" pitchFamily="34" charset="-120"/>
+              </a:rPr>
+              <a:t>Degradação física prematura</a:t>
+            </a:r>
+            <a:endParaRPr lang="en-US" sz="800" dirty="0"/>
+          </a:p>
+        </p:txBody>
+      </p:sp>
+      <p:sp>
+        <p:nvSpPr>
+          <p:cNvPr id="104" name="Shape 102"/>
+          <p:cNvSpPr/>
+          <p:nvPr/>
+        </p:nvSpPr>
+        <p:spPr>
+          <a:xfrm>
+            <a:off x="10149840" y="4489704"/>
+            <a:ext cx="82296" cy="82296"/>
+          </a:xfrm>
+          <a:prstGeom prst="ellipse">
+            <a:avLst/>
+          </a:prstGeom>
+          <a:solidFill>
+            <a:srgbClr val="D97706"/>
+          </a:solidFill>
+          <a:ln w="12700">
+            <a:solidFill>
+              <a:srgbClr val="D97706"/>
+            </a:solidFill>
+            <a:prstDash val="solid"/>
+          </a:ln>
+        </p:spPr>
+        <p:txBody>
+          <a:bodyPr/>
+          <a:lstStyle/>
+          <a:p>
+            <a:endParaRPr lang="pt-BR"/>
+          </a:p>
+        </p:txBody>
+      </p:sp>
+      <p:sp>
+        <p:nvSpPr>
+          <p:cNvPr id="105" name="Text 103"/>
+          <p:cNvSpPr/>
+          <p:nvPr/>
+        </p:nvSpPr>
+        <p:spPr>
+          <a:xfrm>
+            <a:off x="10259568" y="4425696"/>
+            <a:ext cx="1682496" cy="310896"/>
+          </a:xfrm>
+          <a:prstGeom prst="rect">
+            <a:avLst/>
+          </a:prstGeom>
+          <a:noFill/>
+          <a:ln/>
+        </p:spPr>
+        <p:txBody>
+          <a:bodyPr wrap="square" rtlCol="0" anchor="ctr"/>
+          <a:lstStyle/>
+          <a:p>
+            <a:pPr marL="0" indent="0">
+              <a:buNone/>
+            </a:pPr>
+            <a:r>
+              <a:rPr lang="en-US" sz="800" dirty="0" err="1">
+                <a:solidFill>
+                  <a:srgbClr val="1F2937"/>
+                </a:solidFill>
+                <a:latin typeface="Arial" pitchFamily="34" charset="0"/>
+                <a:ea typeface="Arial" pitchFamily="34" charset="-122"/>
+                <a:cs typeface="Arial" pitchFamily="34" charset="-120"/>
+              </a:rPr>
+              <a:t>Substituição</a:t>
+            </a:r>
+            <a:r>
+              <a:rPr lang="en-US" sz="800" dirty="0">
+                <a:solidFill>
+                  <a:srgbClr val="1F2937"/>
+                </a:solidFill>
+                <a:latin typeface="Arial" pitchFamily="34" charset="0"/>
+                <a:ea typeface="Arial" pitchFamily="34" charset="-122"/>
+                <a:cs typeface="Arial" pitchFamily="34" charset="-120"/>
+              </a:rPr>
+              <a:t> </a:t>
+            </a:r>
+            <a:r>
+              <a:rPr lang="en-US" sz="800" dirty="0" err="1">
+                <a:solidFill>
+                  <a:srgbClr val="1F2937"/>
+                </a:solidFill>
+                <a:latin typeface="Arial" pitchFamily="34" charset="0"/>
+                <a:ea typeface="Arial" pitchFamily="34" charset="-122"/>
+                <a:cs typeface="Arial" pitchFamily="34" charset="-120"/>
+              </a:rPr>
+              <a:t>sendo</a:t>
+            </a:r>
+            <a:r>
+              <a:rPr lang="en-US" sz="800" dirty="0">
+                <a:solidFill>
+                  <a:srgbClr val="1F2937"/>
+                </a:solidFill>
+                <a:latin typeface="Arial" pitchFamily="34" charset="0"/>
+                <a:ea typeface="Arial" pitchFamily="34" charset="-122"/>
+                <a:cs typeface="Arial" pitchFamily="34" charset="-120"/>
+              </a:rPr>
+              <a:t> </a:t>
+            </a:r>
+            <a:r>
+              <a:rPr lang="en-US" sz="800" dirty="0" err="1">
+                <a:solidFill>
+                  <a:srgbClr val="1F2937"/>
+                </a:solidFill>
+                <a:latin typeface="Arial" pitchFamily="34" charset="0"/>
+                <a:ea typeface="Arial" pitchFamily="34" charset="-122"/>
+                <a:cs typeface="Arial" pitchFamily="34" charset="-120"/>
+              </a:rPr>
+              <a:t>programada</a:t>
+            </a:r>
+            <a:endParaRPr lang="en-US" sz="800" dirty="0"/>
+          </a:p>
+        </p:txBody>
+      </p:sp>
+      <p:sp>
+        <p:nvSpPr>
+          <p:cNvPr id="106" name="Shape 104"/>
+          <p:cNvSpPr/>
+          <p:nvPr/>
+        </p:nvSpPr>
+        <p:spPr>
+          <a:xfrm>
+            <a:off x="10149840" y="5888736"/>
+            <a:ext cx="1737360" cy="329184"/>
+          </a:xfrm>
+          <a:prstGeom prst="roundRect">
+            <a:avLst>
+              <a:gd name="adj" fmla="val 11111"/>
+            </a:avLst>
+          </a:prstGeom>
+          <a:solidFill>
+            <a:srgbClr val="D97706">
+              <a:alpha val="90000"/>
+            </a:srgbClr>
+          </a:solidFill>
+          <a:ln w="12700">
+            <a:solidFill>
+              <a:srgbClr val="D97706">
+                <a:alpha val="60000"/>
+              </a:srgbClr>
+            </a:solidFill>
+            <a:prstDash val="solid"/>
+          </a:ln>
+        </p:spPr>
+        <p:txBody>
+          <a:bodyPr/>
+          <a:lstStyle/>
+          <a:p>
+            <a:endParaRPr lang="pt-BR"/>
+          </a:p>
+        </p:txBody>
+      </p:sp>
+      <p:sp>
+        <p:nvSpPr>
+          <p:cNvPr id="107" name="Text 105"/>
+          <p:cNvSpPr/>
+          <p:nvPr/>
+        </p:nvSpPr>
+        <p:spPr>
+          <a:xfrm>
+            <a:off x="10149840" y="5888736"/>
+            <a:ext cx="1737360" cy="329184"/>
+          </a:xfrm>
+          <a:prstGeom prst="rect">
+            <a:avLst/>
+          </a:prstGeom>
+          <a:noFill/>
+          <a:ln/>
+        </p:spPr>
+        <p:txBody>
+          <a:bodyPr wrap="square" rtlCol="0" anchor="ctr"/>
+          <a:lstStyle/>
+          <a:p>
+            <a:pPr marL="0" indent="0" algn="ctr">
+              <a:buNone/>
+            </a:pPr>
+            <a:r>
+              <a:rPr lang="en-US" sz="750" b="1" dirty="0">
+                <a:solidFill>
+                  <a:srgbClr val="FFFFFF"/>
+                </a:solidFill>
+                <a:latin typeface="Arial" pitchFamily="34" charset="0"/>
+                <a:ea typeface="Arial" pitchFamily="34" charset="-122"/>
+                <a:cs typeface="Arial" pitchFamily="34" charset="-120"/>
+              </a:rPr>
+              <a:t>PROG. SUBSTITUICAO</a:t>
+            </a:r>
+            <a:endParaRPr lang="en-US" sz="750" dirty="0"/>
+          </a:p>
+        </p:txBody>
+      </p:sp>
+      <p:sp>
+        <p:nvSpPr>
+          <p:cNvPr id="108" name="Shape 106"/>
+          <p:cNvSpPr/>
+          <p:nvPr/>
+        </p:nvSpPr>
+        <p:spPr>
+          <a:xfrm>
+            <a:off x="182880" y="6419088"/>
+            <a:ext cx="11795760" cy="201168"/>
+          </a:xfrm>
+          <a:prstGeom prst="rect">
+            <a:avLst/>
+          </a:prstGeom>
+          <a:solidFill>
+            <a:srgbClr val="E4EAF5"/>
+          </a:solidFill>
+          <a:ln w="12700">
+            <a:solidFill>
+              <a:srgbClr val="124E81">
+                <a:alpha val="30000"/>
+              </a:srgbClr>
+            </a:solidFill>
+            <a:prstDash val="solid"/>
+          </a:ln>
+        </p:spPr>
+        <p:txBody>
+          <a:bodyPr/>
+          <a:lstStyle/>
+          <a:p>
+            <a:endParaRPr lang="pt-BR"/>
+          </a:p>
+        </p:txBody>
+      </p:sp>
+      <p:sp>
+        <p:nvSpPr>
+          <p:cNvPr id="109" name="Text 107"/>
+          <p:cNvSpPr/>
+          <p:nvPr/>
+        </p:nvSpPr>
+        <p:spPr>
+          <a:xfrm>
+            <a:off x="219456" y="6419088"/>
+            <a:ext cx="11722608" cy="201168"/>
+          </a:xfrm>
+          <a:prstGeom prst="rect">
+            <a:avLst/>
+          </a:prstGeom>
+          <a:noFill/>
+          <a:ln/>
+        </p:spPr>
+        <p:txBody>
+          <a:bodyPr wrap="square" rtlCol="0" anchor="ctr"/>
+          <a:lstStyle/>
+          <a:p>
+            <a:pPr marL="0" indent="0">
+              <a:buNone/>
+            </a:pPr>
+            <a:r>
+              <a:rPr lang="en-US" sz="700" dirty="0">
+                <a:solidFill>
+                  <a:srgbClr val="124E81"/>
+                </a:solidFill>
+                <a:latin typeface="Arial" pitchFamily="34" charset="0"/>
+                <a:ea typeface="Arial" pitchFamily="34" charset="-122"/>
+                <a:cs typeface="Arial" pitchFamily="34" charset="-120"/>
+              </a:rPr>
+              <a:t>Critério normativo: correia antichama deve ter identificação visual impressa na própria correia — sem ela, classifica-se como 2ª linha independentemente de laudo ou ensaio aprovado.  ·  R$ 6,15M base histórico — Suprimentos orçando valores atuais.  ·  Laudo Flexlab: Rel. 0397/26.</a:t>
+            </a:r>
+            <a:endParaRPr lang="en-US" sz="700" dirty="0"/>
+          </a:p>
+        </p:txBody>
+      </p:sp>
+      <p:sp>
+        <p:nvSpPr>
+          <p:cNvPr id="110" name="Shape 108"/>
+          <p:cNvSpPr/>
+          <p:nvPr/>
+        </p:nvSpPr>
+        <p:spPr>
+          <a:xfrm>
+            <a:off x="0" y="6693408"/>
+            <a:ext cx="12161520" cy="164592"/>
+          </a:xfrm>
+          <a:prstGeom prst="rect">
+            <a:avLst/>
+          </a:prstGeom>
+          <a:solidFill>
+            <a:srgbClr val="124E81"/>
+          </a:solidFill>
+          <a:ln w="12700">
+            <a:solidFill>
+              <a:srgbClr val="124E81"/>
+            </a:solidFill>
+            <a:prstDash val="solid"/>
+          </a:ln>
+        </p:spPr>
+        <p:txBody>
+          <a:bodyPr/>
+          <a:lstStyle/>
+          <a:p>
+            <a:endParaRPr lang="pt-BR"/>
+          </a:p>
+        </p:txBody>
+      </p:sp>
+      <p:sp>
+        <p:nvSpPr>
+          <p:cNvPr id="111" name="Text 109"/>
+          <p:cNvSpPr/>
+          <p:nvPr/>
+        </p:nvSpPr>
+        <p:spPr>
+          <a:xfrm>
+            <a:off x="182880" y="6693408"/>
+            <a:ext cx="11795760" cy="164592"/>
+          </a:xfrm>
+          <a:prstGeom prst="rect">
+            <a:avLst/>
+          </a:prstGeom>
+          <a:noFill/>
+          <a:ln/>
+        </p:spPr>
+        <p:txBody>
+          <a:bodyPr wrap="square" rtlCol="0" anchor="ctr"/>
+          <a:lstStyle/>
+          <a:p>
+            <a:pPr marL="0" indent="0">
+              <a:buNone/>
+            </a:pPr>
+            <a:r>
+              <a:rPr lang="en-US" sz="650" dirty="0">
+                <a:solidFill>
+                  <a:srgbClr val="BDBFC1"/>
+                </a:solidFill>
+                <a:latin typeface="Arial" pitchFamily="34" charset="0"/>
+                <a:ea typeface="Arial" pitchFamily="34" charset="-122"/>
+                <a:cs typeface="Arial" pitchFamily="34" charset="-120"/>
+              </a:rPr>
+              <a:t>INPASA Agroindustrial S/A · VP Manutenção e Obras · Confidencial · APR_MULTI_GERAL_CorreiasAntichama_2026-06-08_v04</a:t>
+            </a:r>
+            <a:endParaRPr lang="en-US" sz="650" dirty="0"/>
+          </a:p>
+        </p:txBody>
+      </p:sp>
+      <p:sp>
+        <p:nvSpPr>
+          <p:cNvPr id="112" name="Rounded Rectangle 111"/>
+          <p:cNvSpPr/>
+          <p:nvPr/>
+        </p:nvSpPr>
+        <p:spPr>
+          <a:xfrm>
+            <a:off x="7991856" y="1188720"/>
+            <a:ext cx="4059936" cy="5193792"/>
+          </a:xfrm>
+          <a:prstGeom prst="roundRect">
+            <a:avLst/>
+          </a:prstGeom>
+          <a:noFill/>
+          <a:ln w="44450">
+            <a:solidFill>
+              <a:srgbClr val="E00000"/>
+            </a:solidFill>
           </a:ln>
           <a:effectLst/>
         </p:spPr>
@@ -3503,20 +7685,20 @@
       </p:sp>
       <p:sp>
         <p:nvSpPr>
-          <p:cNvPr id="3" name="Rectangle 2"/>
-          <p:cNvSpPr/>
-          <p:nvPr/>
-        </p:nvSpPr>
-        <p:spPr>
-          <a:xfrm>
-            <a:off x="0" y="0"/>
-            <a:ext cx="12191695" cy="1051560"/>
-          </a:xfrm>
-          <a:prstGeom prst="rect">
+          <p:cNvPr id="113" name="Rounded Rectangle 112"/>
+          <p:cNvSpPr/>
+          <p:nvPr/>
+        </p:nvSpPr>
+        <p:spPr>
+          <a:xfrm>
+            <a:off x="10451592" y="960120"/>
+            <a:ext cx="1600200" cy="256032"/>
+          </a:xfrm>
+          <a:prstGeom prst="roundRect">
             <a:avLst/>
           </a:prstGeom>
           <a:solidFill>
-            <a:srgbClr val="124E81"/>
+            <a:srgbClr val="E00000"/>
           </a:solidFill>
           <a:ln>
             <a:noFill/>
@@ -3542,1338 +7724,14 @@
           <a:lstStyle/>
           <a:p>
             <a:pPr algn="ctr"/>
-          </a:p>
-        </p:txBody>
-      </p:sp>
-      <p:sp>
-        <p:nvSpPr>
-          <p:cNvPr id="4" name="Rectangle 3"/>
-          <p:cNvSpPr/>
-          <p:nvPr/>
-        </p:nvSpPr>
-        <p:spPr>
-          <a:xfrm>
-            <a:off x="0" y="1051560"/>
-            <a:ext cx="12191695" cy="45720"/>
-          </a:xfrm>
-          <a:prstGeom prst="rect">
-            <a:avLst/>
-          </a:prstGeom>
-          <a:solidFill>
-            <a:srgbClr val="FFA32A"/>
-          </a:solidFill>
-          <a:ln>
-            <a:noFill/>
-          </a:ln>
-          <a:effectLst/>
-        </p:spPr>
-        <p:style>
-          <a:lnRef idx="1">
-            <a:schemeClr val="accent1"/>
-          </a:lnRef>
-          <a:fillRef idx="3">
-            <a:schemeClr val="accent1"/>
-          </a:fillRef>
-          <a:effectRef idx="2">
-            <a:schemeClr val="accent1"/>
-          </a:effectRef>
-          <a:fontRef idx="minor">
-            <a:schemeClr val="lt1"/>
-          </a:fontRef>
-        </p:style>
-        <p:txBody>
-          <a:bodyPr rtlCol="0" anchor="ctr"/>
-          <a:lstStyle/>
-          <a:p>
-            <a:pPr algn="ctr"/>
-          </a:p>
-        </p:txBody>
-      </p:sp>
-      <p:sp>
-        <p:nvSpPr>
-          <p:cNvPr id="5" name="TextBox 4"/>
-          <p:cNvSpPr txBox="1"/>
-          <p:nvPr/>
-        </p:nvSpPr>
-        <p:spPr>
-          <a:xfrm>
-            <a:off x="502920" y="146304"/>
-            <a:ext cx="10972800" cy="274320"/>
-          </a:xfrm>
-          <a:prstGeom prst="rect">
-            <a:avLst/>
-          </a:prstGeom>
-          <a:noFill/>
-        </p:spPr>
-        <p:txBody>
-          <a:bodyPr wrap="square" anchor="t" lIns="25400" rIns="25400">
-            <a:spAutoFit/>
-          </a:bodyPr>
-          <a:lstStyle/>
-          <a:p>
-            <a:pPr algn="l"/>
-            <a:r>
-              <a:rPr sz="1200" b="1" i="0">
-                <a:solidFill>
-                  <a:srgbClr val="EAA239"/>
+            <a:r>
+              <a:rPr sz="1000" b="1">
+                <a:solidFill>
+                  <a:srgbClr val="FFFFFF"/>
                 </a:solidFill>
                 <a:latin typeface="Montserrat"/>
               </a:rPr>
-              <a:t>A PERGUNTA DA DIRETORIA</a:t>
-            </a:r>
-          </a:p>
-        </p:txBody>
-      </p:sp>
-      <p:sp>
-        <p:nvSpPr>
-          <p:cNvPr id="6" name="TextBox 5"/>
-          <p:cNvSpPr txBox="1"/>
-          <p:nvPr/>
-        </p:nvSpPr>
-        <p:spPr>
-          <a:xfrm>
-            <a:off x="502920" y="402336"/>
-            <a:ext cx="11155680" cy="566928"/>
-          </a:xfrm>
-          <a:prstGeom prst="rect">
-            <a:avLst/>
-          </a:prstGeom>
-          <a:noFill/>
-        </p:spPr>
-        <p:txBody>
-          <a:bodyPr wrap="square" anchor="ctr" lIns="25400" rIns="25400">
-            <a:spAutoFit/>
-          </a:bodyPr>
-          <a:lstStyle/>
-          <a:p>
-            <a:pPr algn="l"/>
-            <a:r>
-              <a:rPr sz="2500" b="1" i="0">
-                <a:solidFill>
-                  <a:srgbClr val="FFFFFF"/>
-                </a:solidFill>
-                <a:latin typeface="Montserrat"/>
-              </a:rPr>
-              <a:t>Quando cada unidade estará regularizada?</a:t>
-            </a:r>
-          </a:p>
-        </p:txBody>
-      </p:sp>
-      <p:sp>
-        <p:nvSpPr>
-          <p:cNvPr id="7" name="Rounded Rectangle 6"/>
-          <p:cNvSpPr/>
-          <p:nvPr/>
-        </p:nvSpPr>
-        <p:spPr>
-          <a:xfrm>
-            <a:off x="502920" y="1325880"/>
-            <a:ext cx="11201400" cy="731520"/>
-          </a:xfrm>
-          <a:prstGeom prst="roundRect">
-            <a:avLst/>
-          </a:prstGeom>
-          <a:solidFill>
-            <a:srgbClr val="F2F5F8"/>
-          </a:solidFill>
-          <a:ln w="15875">
-            <a:solidFill>
-              <a:srgbClr val="124E81"/>
-            </a:solidFill>
-          </a:ln>
-          <a:effectLst/>
-        </p:spPr>
-        <p:style>
-          <a:lnRef idx="1">
-            <a:schemeClr val="accent1"/>
-          </a:lnRef>
-          <a:fillRef idx="3">
-            <a:schemeClr val="accent1"/>
-          </a:fillRef>
-          <a:effectRef idx="2">
-            <a:schemeClr val="accent1"/>
-          </a:effectRef>
-          <a:fontRef idx="minor">
-            <a:schemeClr val="lt1"/>
-          </a:fontRef>
-        </p:style>
-        <p:txBody>
-          <a:bodyPr rtlCol="0" anchor="ctr"/>
-          <a:lstStyle/>
-          <a:p>
-            <a:pPr algn="ctr"/>
-          </a:p>
-        </p:txBody>
-      </p:sp>
-      <p:sp>
-        <p:nvSpPr>
-          <p:cNvPr id="8" name="TextBox 7"/>
-          <p:cNvSpPr txBox="1"/>
-          <p:nvPr/>
-        </p:nvSpPr>
-        <p:spPr>
-          <a:xfrm>
-            <a:off x="731520" y="1325880"/>
-            <a:ext cx="10789920" cy="731520"/>
-          </a:xfrm>
-          <a:prstGeom prst="rect">
-            <a:avLst/>
-          </a:prstGeom>
-          <a:noFill/>
-        </p:spPr>
-        <p:txBody>
-          <a:bodyPr wrap="square" anchor="ctr" lIns="25400" rIns="25400">
-            <a:spAutoFit/>
-          </a:bodyPr>
-          <a:lstStyle/>
-          <a:p>
-            <a:pPr algn="l"/>
-            <a:r>
-              <a:rPr sz="1500" b="1" i="0">
-                <a:solidFill>
-                  <a:srgbClr val="124E81"/>
-                </a:solidFill>
-                <a:latin typeface="Montserrat"/>
-              </a:rPr>
-              <a:t>Programa concluído em 30/12/2026    |    46 correias · 3 concluídas · 7 urgentes (&lt;=30 dias) · 0 vencidas</a:t>
-            </a:r>
-          </a:p>
-        </p:txBody>
-      </p:sp>
-      <p:sp>
-        <p:nvSpPr>
-          <p:cNvPr id="9" name="Rounded Rectangle 8"/>
-          <p:cNvSpPr/>
-          <p:nvPr/>
-        </p:nvSpPr>
-        <p:spPr>
-          <a:xfrm>
-            <a:off x="502920" y="2286000"/>
-            <a:ext cx="2697480" cy="2926080"/>
-          </a:xfrm>
-          <a:prstGeom prst="roundRect">
-            <a:avLst/>
-          </a:prstGeom>
-          <a:solidFill>
-            <a:srgbClr val="F2F5F8"/>
-          </a:solidFill>
-          <a:ln>
-            <a:noFill/>
-          </a:ln>
-          <a:effectLst/>
-        </p:spPr>
-        <p:style>
-          <a:lnRef idx="1">
-            <a:schemeClr val="accent1"/>
-          </a:lnRef>
-          <a:fillRef idx="3">
-            <a:schemeClr val="accent1"/>
-          </a:fillRef>
-          <a:effectRef idx="2">
-            <a:schemeClr val="accent1"/>
-          </a:effectRef>
-          <a:fontRef idx="minor">
-            <a:schemeClr val="lt1"/>
-          </a:fontRef>
-        </p:style>
-        <p:txBody>
-          <a:bodyPr rtlCol="0" anchor="ctr"/>
-          <a:lstStyle/>
-          <a:p>
-            <a:pPr algn="ctr"/>
-          </a:p>
-        </p:txBody>
-      </p:sp>
-      <p:sp>
-        <p:nvSpPr>
-          <p:cNvPr id="10" name="Rectangle 9"/>
-          <p:cNvSpPr/>
-          <p:nvPr/>
-        </p:nvSpPr>
-        <p:spPr>
-          <a:xfrm>
-            <a:off x="502920" y="2286000"/>
-            <a:ext cx="2697480" cy="118872"/>
-          </a:xfrm>
-          <a:prstGeom prst="rect">
-            <a:avLst/>
-          </a:prstGeom>
-          <a:solidFill>
-            <a:srgbClr val="124E81"/>
-          </a:solidFill>
-          <a:ln>
-            <a:noFill/>
-          </a:ln>
-          <a:effectLst/>
-        </p:spPr>
-        <p:style>
-          <a:lnRef idx="1">
-            <a:schemeClr val="accent1"/>
-          </a:lnRef>
-          <a:fillRef idx="3">
-            <a:schemeClr val="accent1"/>
-          </a:fillRef>
-          <a:effectRef idx="2">
-            <a:schemeClr val="accent1"/>
-          </a:effectRef>
-          <a:fontRef idx="minor">
-            <a:schemeClr val="lt1"/>
-          </a:fontRef>
-        </p:style>
-        <p:txBody>
-          <a:bodyPr rtlCol="0" anchor="ctr"/>
-          <a:lstStyle/>
-          <a:p>
-            <a:pPr algn="ctr"/>
-          </a:p>
-        </p:txBody>
-      </p:sp>
-      <p:sp>
-        <p:nvSpPr>
-          <p:cNvPr id="11" name="TextBox 10"/>
-          <p:cNvSpPr txBox="1"/>
-          <p:nvPr/>
-        </p:nvSpPr>
-        <p:spPr>
-          <a:xfrm>
-            <a:off x="685800" y="2560320"/>
-            <a:ext cx="2331720" cy="365760"/>
-          </a:xfrm>
-          <a:prstGeom prst="rect">
-            <a:avLst/>
-          </a:prstGeom>
-          <a:noFill/>
-        </p:spPr>
-        <p:txBody>
-          <a:bodyPr wrap="square" anchor="t" lIns="25400" rIns="25400">
-            <a:spAutoFit/>
-          </a:bodyPr>
-          <a:lstStyle/>
-          <a:p>
-            <a:pPr algn="l"/>
-            <a:r>
-              <a:rPr sz="1300" b="1" i="0">
-                <a:solidFill>
-                  <a:srgbClr val="124E81"/>
-                </a:solidFill>
-                <a:latin typeface="Montserrat"/>
-              </a:rPr>
-              <a:t>NMT</a:t>
-            </a:r>
-          </a:p>
-        </p:txBody>
-      </p:sp>
-      <p:sp>
-        <p:nvSpPr>
-          <p:cNvPr id="12" name="TextBox 11"/>
-          <p:cNvSpPr txBox="1"/>
-          <p:nvPr/>
-        </p:nvSpPr>
-        <p:spPr>
-          <a:xfrm>
-            <a:off x="685800" y="2871216"/>
-            <a:ext cx="2331720" cy="457200"/>
-          </a:xfrm>
-          <a:prstGeom prst="rect">
-            <a:avLst/>
-          </a:prstGeom>
-          <a:noFill/>
-        </p:spPr>
-        <p:txBody>
-          <a:bodyPr wrap="square" anchor="t" lIns="25400" rIns="25400">
-            <a:spAutoFit/>
-          </a:bodyPr>
-          <a:lstStyle/>
-          <a:p>
-            <a:pPr algn="l"/>
-            <a:r>
-              <a:rPr sz="1500" b="1" i="0">
-                <a:solidFill>
-                  <a:srgbClr val="20303F"/>
-                </a:solidFill>
-                <a:latin typeface="Montserrat"/>
-              </a:rPr>
-              <a:t>Nova Mutum</a:t>
-            </a:r>
-          </a:p>
-        </p:txBody>
-      </p:sp>
-      <p:sp>
-        <p:nvSpPr>
-          <p:cNvPr id="13" name="TextBox 12"/>
-          <p:cNvSpPr txBox="1"/>
-          <p:nvPr/>
-        </p:nvSpPr>
-        <p:spPr>
-          <a:xfrm>
-            <a:off x="685800" y="3364992"/>
-            <a:ext cx="2331720" cy="320040"/>
-          </a:xfrm>
-          <a:prstGeom prst="rect">
-            <a:avLst/>
-          </a:prstGeom>
-          <a:noFill/>
-        </p:spPr>
-        <p:txBody>
-          <a:bodyPr wrap="square" anchor="t" lIns="25400" rIns="25400">
-            <a:spAutoFit/>
-          </a:bodyPr>
-          <a:lstStyle/>
-          <a:p>
-            <a:pPr algn="l"/>
-            <a:r>
-              <a:rPr sz="1000" b="1" i="0">
-                <a:solidFill>
-                  <a:srgbClr val="6B7885"/>
-                </a:solidFill>
-                <a:latin typeface="Montserrat"/>
-              </a:rPr>
-              <a:t>CONCLUÍDA EM</a:t>
-            </a:r>
-          </a:p>
-        </p:txBody>
-      </p:sp>
-      <p:sp>
-        <p:nvSpPr>
-          <p:cNvPr id="14" name="TextBox 13"/>
-          <p:cNvSpPr txBox="1"/>
-          <p:nvPr/>
-        </p:nvSpPr>
-        <p:spPr>
-          <a:xfrm>
-            <a:off x="685800" y="3611880"/>
-            <a:ext cx="2331720" cy="502920"/>
-          </a:xfrm>
-          <a:prstGeom prst="rect">
-            <a:avLst/>
-          </a:prstGeom>
-          <a:noFill/>
-        </p:spPr>
-        <p:txBody>
-          <a:bodyPr wrap="square" anchor="t" lIns="25400" rIns="25400">
-            <a:spAutoFit/>
-          </a:bodyPr>
-          <a:lstStyle/>
-          <a:p>
-            <a:pPr algn="l"/>
-            <a:r>
-              <a:rPr sz="2200" b="1" i="0">
-                <a:solidFill>
-                  <a:srgbClr val="124E81"/>
-                </a:solidFill>
-                <a:latin typeface="Montserrat"/>
-              </a:rPr>
-              <a:t>22/10/2026</a:t>
-            </a:r>
-          </a:p>
-        </p:txBody>
-      </p:sp>
-      <p:sp>
-        <p:nvSpPr>
-          <p:cNvPr id="15" name="TextBox 14"/>
-          <p:cNvSpPr txBox="1"/>
-          <p:nvPr/>
-        </p:nvSpPr>
-        <p:spPr>
-          <a:xfrm>
-            <a:off x="685800" y="4206240"/>
-            <a:ext cx="2331720" cy="914400"/>
-          </a:xfrm>
-          <a:prstGeom prst="rect">
-            <a:avLst/>
-          </a:prstGeom>
-          <a:noFill/>
-        </p:spPr>
-        <p:txBody>
-          <a:bodyPr wrap="square" anchor="t" lIns="25400" rIns="25400">
-            <a:spAutoFit/>
-          </a:bodyPr>
-          <a:lstStyle/>
-          <a:p>
-            <a:pPr algn="l">
-              <a:lnSpc>
-                <a:spcPct val="105000"/>
-              </a:lnSpc>
-            </a:pPr>
-            <a:r>
-              <a:rPr sz="1050" b="0" i="0">
-                <a:solidFill>
-                  <a:srgbClr val="20303F"/>
-                </a:solidFill>
-                <a:latin typeface="Montserrat"/>
-              </a:rPr>
-              <a:t>16 correias no plano; 1 concluída. Última substituição em 22/10/2026.</a:t>
-            </a:r>
-          </a:p>
-        </p:txBody>
-      </p:sp>
-      <p:sp>
-        <p:nvSpPr>
-          <p:cNvPr id="16" name="Rounded Rectangle 15"/>
-          <p:cNvSpPr/>
-          <p:nvPr/>
-        </p:nvSpPr>
-        <p:spPr>
-          <a:xfrm>
-            <a:off x="3319272" y="2286000"/>
-            <a:ext cx="2697480" cy="2926080"/>
-          </a:xfrm>
-          <a:prstGeom prst="roundRect">
-            <a:avLst/>
-          </a:prstGeom>
-          <a:solidFill>
-            <a:srgbClr val="F2F5F8"/>
-          </a:solidFill>
-          <a:ln>
-            <a:noFill/>
-          </a:ln>
-          <a:effectLst/>
-        </p:spPr>
-        <p:style>
-          <a:lnRef idx="1">
-            <a:schemeClr val="accent1"/>
-          </a:lnRef>
-          <a:fillRef idx="3">
-            <a:schemeClr val="accent1"/>
-          </a:fillRef>
-          <a:effectRef idx="2">
-            <a:schemeClr val="accent1"/>
-          </a:effectRef>
-          <a:fontRef idx="minor">
-            <a:schemeClr val="lt1"/>
-          </a:fontRef>
-        </p:style>
-        <p:txBody>
-          <a:bodyPr rtlCol="0" anchor="ctr"/>
-          <a:lstStyle/>
-          <a:p>
-            <a:pPr algn="ctr"/>
-          </a:p>
-        </p:txBody>
-      </p:sp>
-      <p:sp>
-        <p:nvSpPr>
-          <p:cNvPr id="17" name="Rectangle 16"/>
-          <p:cNvSpPr/>
-          <p:nvPr/>
-        </p:nvSpPr>
-        <p:spPr>
-          <a:xfrm>
-            <a:off x="3319272" y="2286000"/>
-            <a:ext cx="2697480" cy="118872"/>
-          </a:xfrm>
-          <a:prstGeom prst="rect">
-            <a:avLst/>
-          </a:prstGeom>
-          <a:solidFill>
-            <a:srgbClr val="EAA239"/>
-          </a:solidFill>
-          <a:ln>
-            <a:noFill/>
-          </a:ln>
-          <a:effectLst/>
-        </p:spPr>
-        <p:style>
-          <a:lnRef idx="1">
-            <a:schemeClr val="accent1"/>
-          </a:lnRef>
-          <a:fillRef idx="3">
-            <a:schemeClr val="accent1"/>
-          </a:fillRef>
-          <a:effectRef idx="2">
-            <a:schemeClr val="accent1"/>
-          </a:effectRef>
-          <a:fontRef idx="minor">
-            <a:schemeClr val="lt1"/>
-          </a:fontRef>
-        </p:style>
-        <p:txBody>
-          <a:bodyPr rtlCol="0" anchor="ctr"/>
-          <a:lstStyle/>
-          <a:p>
-            <a:pPr algn="ctr"/>
-          </a:p>
-        </p:txBody>
-      </p:sp>
-      <p:sp>
-        <p:nvSpPr>
-          <p:cNvPr id="18" name="TextBox 17"/>
-          <p:cNvSpPr txBox="1"/>
-          <p:nvPr/>
-        </p:nvSpPr>
-        <p:spPr>
-          <a:xfrm>
-            <a:off x="3502152" y="2560320"/>
-            <a:ext cx="2331720" cy="365760"/>
-          </a:xfrm>
-          <a:prstGeom prst="rect">
-            <a:avLst/>
-          </a:prstGeom>
-          <a:noFill/>
-        </p:spPr>
-        <p:txBody>
-          <a:bodyPr wrap="square" anchor="t" lIns="25400" rIns="25400">
-            <a:spAutoFit/>
-          </a:bodyPr>
-          <a:lstStyle/>
-          <a:p>
-            <a:pPr algn="l"/>
-            <a:r>
-              <a:rPr sz="1300" b="1" i="0">
-                <a:solidFill>
-                  <a:srgbClr val="EAA239"/>
-                </a:solidFill>
-                <a:latin typeface="Montserrat"/>
-              </a:rPr>
-              <a:t>SNP</a:t>
-            </a:r>
-          </a:p>
-        </p:txBody>
-      </p:sp>
-      <p:sp>
-        <p:nvSpPr>
-          <p:cNvPr id="19" name="TextBox 18"/>
-          <p:cNvSpPr txBox="1"/>
-          <p:nvPr/>
-        </p:nvSpPr>
-        <p:spPr>
-          <a:xfrm>
-            <a:off x="3502152" y="2871216"/>
-            <a:ext cx="2331720" cy="457200"/>
-          </a:xfrm>
-          <a:prstGeom prst="rect">
-            <a:avLst/>
-          </a:prstGeom>
-          <a:noFill/>
-        </p:spPr>
-        <p:txBody>
-          <a:bodyPr wrap="square" anchor="t" lIns="25400" rIns="25400">
-            <a:spAutoFit/>
-          </a:bodyPr>
-          <a:lstStyle/>
-          <a:p>
-            <a:pPr algn="l"/>
-            <a:r>
-              <a:rPr sz="1500" b="1" i="0">
-                <a:solidFill>
-                  <a:srgbClr val="20303F"/>
-                </a:solidFill>
-                <a:latin typeface="Montserrat"/>
-              </a:rPr>
-              <a:t>Sinop</a:t>
-            </a:r>
-          </a:p>
-        </p:txBody>
-      </p:sp>
-      <p:sp>
-        <p:nvSpPr>
-          <p:cNvPr id="20" name="TextBox 19"/>
-          <p:cNvSpPr txBox="1"/>
-          <p:nvPr/>
-        </p:nvSpPr>
-        <p:spPr>
-          <a:xfrm>
-            <a:off x="3502152" y="3364992"/>
-            <a:ext cx="2331720" cy="320040"/>
-          </a:xfrm>
-          <a:prstGeom prst="rect">
-            <a:avLst/>
-          </a:prstGeom>
-          <a:noFill/>
-        </p:spPr>
-        <p:txBody>
-          <a:bodyPr wrap="square" anchor="t" lIns="25400" rIns="25400">
-            <a:spAutoFit/>
-          </a:bodyPr>
-          <a:lstStyle/>
-          <a:p>
-            <a:pPr algn="l"/>
-            <a:r>
-              <a:rPr sz="1000" b="1" i="0">
-                <a:solidFill>
-                  <a:srgbClr val="6B7885"/>
-                </a:solidFill>
-                <a:latin typeface="Montserrat"/>
-              </a:rPr>
-              <a:t>CONCLUÍDA EM</a:t>
-            </a:r>
-          </a:p>
-        </p:txBody>
-      </p:sp>
-      <p:sp>
-        <p:nvSpPr>
-          <p:cNvPr id="21" name="TextBox 20"/>
-          <p:cNvSpPr txBox="1"/>
-          <p:nvPr/>
-        </p:nvSpPr>
-        <p:spPr>
-          <a:xfrm>
-            <a:off x="3502152" y="3611880"/>
-            <a:ext cx="2331720" cy="502920"/>
-          </a:xfrm>
-          <a:prstGeom prst="rect">
-            <a:avLst/>
-          </a:prstGeom>
-          <a:noFill/>
-        </p:spPr>
-        <p:txBody>
-          <a:bodyPr wrap="square" anchor="t" lIns="25400" rIns="25400">
-            <a:spAutoFit/>
-          </a:bodyPr>
-          <a:lstStyle/>
-          <a:p>
-            <a:pPr algn="l"/>
-            <a:r>
-              <a:rPr sz="2200" b="1" i="0">
-                <a:solidFill>
-                  <a:srgbClr val="EAA239"/>
-                </a:solidFill>
-                <a:latin typeface="Montserrat"/>
-              </a:rPr>
-              <a:t>30/12/2026</a:t>
-            </a:r>
-          </a:p>
-        </p:txBody>
-      </p:sp>
-      <p:sp>
-        <p:nvSpPr>
-          <p:cNvPr id="22" name="TextBox 21"/>
-          <p:cNvSpPr txBox="1"/>
-          <p:nvPr/>
-        </p:nvSpPr>
-        <p:spPr>
-          <a:xfrm>
-            <a:off x="3502152" y="4206240"/>
-            <a:ext cx="2331720" cy="914400"/>
-          </a:xfrm>
-          <a:prstGeom prst="rect">
-            <a:avLst/>
-          </a:prstGeom>
-          <a:noFill/>
-        </p:spPr>
-        <p:txBody>
-          <a:bodyPr wrap="square" anchor="t" lIns="25400" rIns="25400">
-            <a:spAutoFit/>
-          </a:bodyPr>
-          <a:lstStyle/>
-          <a:p>
-            <a:pPr algn="l">
-              <a:lnSpc>
-                <a:spcPct val="105000"/>
-              </a:lnSpc>
-            </a:pPr>
-            <a:r>
-              <a:rPr sz="1050" b="0" i="0">
-                <a:solidFill>
-                  <a:srgbClr val="20303F"/>
-                </a:solidFill>
-                <a:latin typeface="Montserrat"/>
-              </a:rPr>
-              <a:t>23 correias no plano; 1 concluída. Última em 30/12/2026 (esteiras de cavacos).</a:t>
-            </a:r>
-          </a:p>
-        </p:txBody>
-      </p:sp>
-      <p:sp>
-        <p:nvSpPr>
-          <p:cNvPr id="23" name="Rounded Rectangle 22"/>
-          <p:cNvSpPr/>
-          <p:nvPr/>
-        </p:nvSpPr>
-        <p:spPr>
-          <a:xfrm>
-            <a:off x="6135624" y="2286000"/>
-            <a:ext cx="2697480" cy="2926080"/>
-          </a:xfrm>
-          <a:prstGeom prst="roundRect">
-            <a:avLst/>
-          </a:prstGeom>
-          <a:solidFill>
-            <a:srgbClr val="F2F5F8"/>
-          </a:solidFill>
-          <a:ln>
-            <a:noFill/>
-          </a:ln>
-          <a:effectLst/>
-        </p:spPr>
-        <p:style>
-          <a:lnRef idx="1">
-            <a:schemeClr val="accent1"/>
-          </a:lnRef>
-          <a:fillRef idx="3">
-            <a:schemeClr val="accent1"/>
-          </a:fillRef>
-          <a:effectRef idx="2">
-            <a:schemeClr val="accent1"/>
-          </a:effectRef>
-          <a:fontRef idx="minor">
-            <a:schemeClr val="lt1"/>
-          </a:fontRef>
-        </p:style>
-        <p:txBody>
-          <a:bodyPr rtlCol="0" anchor="ctr"/>
-          <a:lstStyle/>
-          <a:p>
-            <a:pPr algn="ctr"/>
-          </a:p>
-        </p:txBody>
-      </p:sp>
-      <p:sp>
-        <p:nvSpPr>
-          <p:cNvPr id="24" name="Rectangle 23"/>
-          <p:cNvSpPr/>
-          <p:nvPr/>
-        </p:nvSpPr>
-        <p:spPr>
-          <a:xfrm>
-            <a:off x="6135624" y="2286000"/>
-            <a:ext cx="2697480" cy="118872"/>
-          </a:xfrm>
-          <a:prstGeom prst="rect">
-            <a:avLst/>
-          </a:prstGeom>
-          <a:solidFill>
-            <a:srgbClr val="007D77"/>
-          </a:solidFill>
-          <a:ln>
-            <a:noFill/>
-          </a:ln>
-          <a:effectLst/>
-        </p:spPr>
-        <p:style>
-          <a:lnRef idx="1">
-            <a:schemeClr val="accent1"/>
-          </a:lnRef>
-          <a:fillRef idx="3">
-            <a:schemeClr val="accent1"/>
-          </a:fillRef>
-          <a:effectRef idx="2">
-            <a:schemeClr val="accent1"/>
-          </a:effectRef>
-          <a:fontRef idx="minor">
-            <a:schemeClr val="lt1"/>
-          </a:fontRef>
-        </p:style>
-        <p:txBody>
-          <a:bodyPr rtlCol="0" anchor="ctr"/>
-          <a:lstStyle/>
-          <a:p>
-            <a:pPr algn="ctr"/>
-          </a:p>
-        </p:txBody>
-      </p:sp>
-      <p:sp>
-        <p:nvSpPr>
-          <p:cNvPr id="25" name="TextBox 24"/>
-          <p:cNvSpPr txBox="1"/>
-          <p:nvPr/>
-        </p:nvSpPr>
-        <p:spPr>
-          <a:xfrm>
-            <a:off x="6318504" y="2560320"/>
-            <a:ext cx="2331720" cy="365760"/>
-          </a:xfrm>
-          <a:prstGeom prst="rect">
-            <a:avLst/>
-          </a:prstGeom>
-          <a:noFill/>
-        </p:spPr>
-        <p:txBody>
-          <a:bodyPr wrap="square" anchor="t" lIns="25400" rIns="25400">
-            <a:spAutoFit/>
-          </a:bodyPr>
-          <a:lstStyle/>
-          <a:p>
-            <a:pPr algn="l"/>
-            <a:r>
-              <a:rPr sz="1300" b="1" i="0">
-                <a:solidFill>
-                  <a:srgbClr val="007D77"/>
-                </a:solidFill>
-                <a:latin typeface="Montserrat"/>
-              </a:rPr>
-              <a:t>SDR</a:t>
-            </a:r>
-          </a:p>
-        </p:txBody>
-      </p:sp>
-      <p:sp>
-        <p:nvSpPr>
-          <p:cNvPr id="26" name="TextBox 25"/>
-          <p:cNvSpPr txBox="1"/>
-          <p:nvPr/>
-        </p:nvSpPr>
-        <p:spPr>
-          <a:xfrm>
-            <a:off x="6318504" y="2871216"/>
-            <a:ext cx="2331720" cy="457200"/>
-          </a:xfrm>
-          <a:prstGeom prst="rect">
-            <a:avLst/>
-          </a:prstGeom>
-          <a:noFill/>
-        </p:spPr>
-        <p:txBody>
-          <a:bodyPr wrap="square" anchor="t" lIns="25400" rIns="25400">
-            <a:spAutoFit/>
-          </a:bodyPr>
-          <a:lstStyle/>
-          <a:p>
-            <a:pPr algn="l"/>
-            <a:r>
-              <a:rPr sz="1500" b="1" i="0">
-                <a:solidFill>
-                  <a:srgbClr val="20303F"/>
-                </a:solidFill>
-                <a:latin typeface="Montserrat"/>
-              </a:rPr>
-              <a:t>Sidrolândia</a:t>
-            </a:r>
-          </a:p>
-        </p:txBody>
-      </p:sp>
-      <p:sp>
-        <p:nvSpPr>
-          <p:cNvPr id="27" name="TextBox 26"/>
-          <p:cNvSpPr txBox="1"/>
-          <p:nvPr/>
-        </p:nvSpPr>
-        <p:spPr>
-          <a:xfrm>
-            <a:off x="6318504" y="3364992"/>
-            <a:ext cx="2331720" cy="320040"/>
-          </a:xfrm>
-          <a:prstGeom prst="rect">
-            <a:avLst/>
-          </a:prstGeom>
-          <a:noFill/>
-        </p:spPr>
-        <p:txBody>
-          <a:bodyPr wrap="square" anchor="t" lIns="25400" rIns="25400">
-            <a:spAutoFit/>
-          </a:bodyPr>
-          <a:lstStyle/>
-          <a:p>
-            <a:pPr algn="l"/>
-            <a:r>
-              <a:rPr sz="1000" b="1" i="0">
-                <a:solidFill>
-                  <a:srgbClr val="6B7885"/>
-                </a:solidFill>
-                <a:latin typeface="Montserrat"/>
-              </a:rPr>
-              <a:t>CONCLUÍDA EM</a:t>
-            </a:r>
-          </a:p>
-        </p:txBody>
-      </p:sp>
-      <p:sp>
-        <p:nvSpPr>
-          <p:cNvPr id="28" name="TextBox 27"/>
-          <p:cNvSpPr txBox="1"/>
-          <p:nvPr/>
-        </p:nvSpPr>
-        <p:spPr>
-          <a:xfrm>
-            <a:off x="6318504" y="3611880"/>
-            <a:ext cx="2331720" cy="502920"/>
-          </a:xfrm>
-          <a:prstGeom prst="rect">
-            <a:avLst/>
-          </a:prstGeom>
-          <a:noFill/>
-        </p:spPr>
-        <p:txBody>
-          <a:bodyPr wrap="square" anchor="t" lIns="25400" rIns="25400">
-            <a:spAutoFit/>
-          </a:bodyPr>
-          <a:lstStyle/>
-          <a:p>
-            <a:pPr algn="l"/>
-            <a:r>
-              <a:rPr sz="2200" b="1" i="0">
-                <a:solidFill>
-                  <a:srgbClr val="007D77"/>
-                </a:solidFill>
-                <a:latin typeface="Montserrat"/>
-              </a:rPr>
-              <a:t>30/09/2026</a:t>
-            </a:r>
-          </a:p>
-        </p:txBody>
-      </p:sp>
-      <p:sp>
-        <p:nvSpPr>
-          <p:cNvPr id="29" name="TextBox 28"/>
-          <p:cNvSpPr txBox="1"/>
-          <p:nvPr/>
-        </p:nvSpPr>
-        <p:spPr>
-          <a:xfrm>
-            <a:off x="6318504" y="4206240"/>
-            <a:ext cx="2331720" cy="914400"/>
-          </a:xfrm>
-          <a:prstGeom prst="rect">
-            <a:avLst/>
-          </a:prstGeom>
-          <a:noFill/>
-        </p:spPr>
-        <p:txBody>
-          <a:bodyPr wrap="square" anchor="t" lIns="25400" rIns="25400">
-            <a:spAutoFit/>
-          </a:bodyPr>
-          <a:lstStyle/>
-          <a:p>
-            <a:pPr algn="l">
-              <a:lnSpc>
-                <a:spcPct val="105000"/>
-              </a:lnSpc>
-            </a:pPr>
-            <a:r>
-              <a:rPr sz="1050" b="0" i="0">
-                <a:solidFill>
-                  <a:srgbClr val="20303F"/>
-                </a:solidFill>
-                <a:latin typeface="Montserrat"/>
-              </a:rPr>
-              <a:t>2 correias no plano. Ambas concluídas até 30/09/2026.</a:t>
-            </a:r>
-          </a:p>
-        </p:txBody>
-      </p:sp>
-      <p:sp>
-        <p:nvSpPr>
-          <p:cNvPr id="30" name="Rounded Rectangle 29"/>
-          <p:cNvSpPr/>
-          <p:nvPr/>
-        </p:nvSpPr>
-        <p:spPr>
-          <a:xfrm>
-            <a:off x="8951976" y="2286000"/>
-            <a:ext cx="2697480" cy="2926080"/>
-          </a:xfrm>
-          <a:prstGeom prst="roundRect">
-            <a:avLst/>
-          </a:prstGeom>
-          <a:solidFill>
-            <a:srgbClr val="F2F5F8"/>
-          </a:solidFill>
-          <a:ln>
-            <a:noFill/>
-          </a:ln>
-          <a:effectLst/>
-        </p:spPr>
-        <p:style>
-          <a:lnRef idx="1">
-            <a:schemeClr val="accent1"/>
-          </a:lnRef>
-          <a:fillRef idx="3">
-            <a:schemeClr val="accent1"/>
-          </a:fillRef>
-          <a:effectRef idx="2">
-            <a:schemeClr val="accent1"/>
-          </a:effectRef>
-          <a:fontRef idx="minor">
-            <a:schemeClr val="lt1"/>
-          </a:fontRef>
-        </p:style>
-        <p:txBody>
-          <a:bodyPr rtlCol="0" anchor="ctr"/>
-          <a:lstStyle/>
-          <a:p>
-            <a:pPr algn="ctr"/>
-          </a:p>
-        </p:txBody>
-      </p:sp>
-      <p:sp>
-        <p:nvSpPr>
-          <p:cNvPr id="31" name="Rectangle 30"/>
-          <p:cNvSpPr/>
-          <p:nvPr/>
-        </p:nvSpPr>
-        <p:spPr>
-          <a:xfrm>
-            <a:off x="8951976" y="2286000"/>
-            <a:ext cx="2697480" cy="118872"/>
-          </a:xfrm>
-          <a:prstGeom prst="rect">
-            <a:avLst/>
-          </a:prstGeom>
-          <a:solidFill>
-            <a:srgbClr val="007CC5"/>
-          </a:solidFill>
-          <a:ln>
-            <a:noFill/>
-          </a:ln>
-          <a:effectLst/>
-        </p:spPr>
-        <p:style>
-          <a:lnRef idx="1">
-            <a:schemeClr val="accent1"/>
-          </a:lnRef>
-          <a:fillRef idx="3">
-            <a:schemeClr val="accent1"/>
-          </a:fillRef>
-          <a:effectRef idx="2">
-            <a:schemeClr val="accent1"/>
-          </a:effectRef>
-          <a:fontRef idx="minor">
-            <a:schemeClr val="lt1"/>
-          </a:fontRef>
-        </p:style>
-        <p:txBody>
-          <a:bodyPr rtlCol="0" anchor="ctr"/>
-          <a:lstStyle/>
-          <a:p>
-            <a:pPr algn="ctr"/>
-          </a:p>
-        </p:txBody>
-      </p:sp>
-      <p:sp>
-        <p:nvSpPr>
-          <p:cNvPr id="32" name="TextBox 31"/>
-          <p:cNvSpPr txBox="1"/>
-          <p:nvPr/>
-        </p:nvSpPr>
-        <p:spPr>
-          <a:xfrm>
-            <a:off x="9134856" y="2560320"/>
-            <a:ext cx="2331720" cy="365760"/>
-          </a:xfrm>
-          <a:prstGeom prst="rect">
-            <a:avLst/>
-          </a:prstGeom>
-          <a:noFill/>
-        </p:spPr>
-        <p:txBody>
-          <a:bodyPr wrap="square" anchor="t" lIns="25400" rIns="25400">
-            <a:spAutoFit/>
-          </a:bodyPr>
-          <a:lstStyle/>
-          <a:p>
-            <a:pPr algn="l"/>
-            <a:r>
-              <a:rPr sz="1300" b="1" i="0">
-                <a:solidFill>
-                  <a:srgbClr val="007CC5"/>
-                </a:solidFill>
-                <a:latin typeface="Montserrat"/>
-              </a:rPr>
-              <a:t>BLS</a:t>
-            </a:r>
-          </a:p>
-        </p:txBody>
-      </p:sp>
-      <p:sp>
-        <p:nvSpPr>
-          <p:cNvPr id="33" name="TextBox 32"/>
-          <p:cNvSpPr txBox="1"/>
-          <p:nvPr/>
-        </p:nvSpPr>
-        <p:spPr>
-          <a:xfrm>
-            <a:off x="9134856" y="2871216"/>
-            <a:ext cx="2331720" cy="457200"/>
-          </a:xfrm>
-          <a:prstGeom prst="rect">
-            <a:avLst/>
-          </a:prstGeom>
-          <a:noFill/>
-        </p:spPr>
-        <p:txBody>
-          <a:bodyPr wrap="square" anchor="t" lIns="25400" rIns="25400">
-            <a:spAutoFit/>
-          </a:bodyPr>
-          <a:lstStyle/>
-          <a:p>
-            <a:pPr algn="l"/>
-            <a:r>
-              <a:rPr sz="1500" b="1" i="0">
-                <a:solidFill>
-                  <a:srgbClr val="20303F"/>
-                </a:solidFill>
-                <a:latin typeface="Montserrat"/>
-              </a:rPr>
-              <a:t>Balsas</a:t>
-            </a:r>
-          </a:p>
-        </p:txBody>
-      </p:sp>
-      <p:sp>
-        <p:nvSpPr>
-          <p:cNvPr id="34" name="TextBox 33"/>
-          <p:cNvSpPr txBox="1"/>
-          <p:nvPr/>
-        </p:nvSpPr>
-        <p:spPr>
-          <a:xfrm>
-            <a:off x="9134856" y="3364992"/>
-            <a:ext cx="2331720" cy="320040"/>
-          </a:xfrm>
-          <a:prstGeom prst="rect">
-            <a:avLst/>
-          </a:prstGeom>
-          <a:noFill/>
-        </p:spPr>
-        <p:txBody>
-          <a:bodyPr wrap="square" anchor="t" lIns="25400" rIns="25400">
-            <a:spAutoFit/>
-          </a:bodyPr>
-          <a:lstStyle/>
-          <a:p>
-            <a:pPr algn="l"/>
-            <a:r>
-              <a:rPr sz="1000" b="1" i="0">
-                <a:solidFill>
-                  <a:srgbClr val="6B7885"/>
-                </a:solidFill>
-                <a:latin typeface="Montserrat"/>
-              </a:rPr>
-              <a:t>CONCLUÍDA EM</a:t>
-            </a:r>
-          </a:p>
-        </p:txBody>
-      </p:sp>
-      <p:sp>
-        <p:nvSpPr>
-          <p:cNvPr id="35" name="TextBox 34"/>
-          <p:cNvSpPr txBox="1"/>
-          <p:nvPr/>
-        </p:nvSpPr>
-        <p:spPr>
-          <a:xfrm>
-            <a:off x="9134856" y="3611880"/>
-            <a:ext cx="2331720" cy="502920"/>
-          </a:xfrm>
-          <a:prstGeom prst="rect">
-            <a:avLst/>
-          </a:prstGeom>
-          <a:noFill/>
-        </p:spPr>
-        <p:txBody>
-          <a:bodyPr wrap="square" anchor="t" lIns="25400" rIns="25400">
-            <a:spAutoFit/>
-          </a:bodyPr>
-          <a:lstStyle/>
-          <a:p>
-            <a:pPr algn="l"/>
-            <a:r>
-              <a:rPr sz="2200" b="1" i="0">
-                <a:solidFill>
-                  <a:srgbClr val="007CC5"/>
-                </a:solidFill>
-                <a:latin typeface="Montserrat"/>
-              </a:rPr>
-              <a:t>24/07/2026</a:t>
-            </a:r>
-          </a:p>
-        </p:txBody>
-      </p:sp>
-      <p:sp>
-        <p:nvSpPr>
-          <p:cNvPr id="36" name="TextBox 35"/>
-          <p:cNvSpPr txBox="1"/>
-          <p:nvPr/>
-        </p:nvSpPr>
-        <p:spPr>
-          <a:xfrm>
-            <a:off x="9134856" y="4206240"/>
-            <a:ext cx="2331720" cy="914400"/>
-          </a:xfrm>
-          <a:prstGeom prst="rect">
-            <a:avLst/>
-          </a:prstGeom>
-          <a:noFill/>
-        </p:spPr>
-        <p:txBody>
-          <a:bodyPr wrap="square" anchor="t" lIns="25400" rIns="25400">
-            <a:spAutoFit/>
-          </a:bodyPr>
-          <a:lstStyle/>
-          <a:p>
-            <a:pPr algn="l">
-              <a:lnSpc>
-                <a:spcPct val="105000"/>
-              </a:lnSpc>
-            </a:pPr>
-            <a:r>
-              <a:rPr sz="1050" b="0" i="0">
-                <a:solidFill>
-                  <a:srgbClr val="20303F"/>
-                </a:solidFill>
-                <a:latin typeface="Montserrat"/>
-              </a:rPr>
-              <a:t>4 esteiras + 1 sobressalente; 1 concluída. Esteiras concluídas até 24/07/2026.</a:t>
-            </a:r>
-          </a:p>
-        </p:txBody>
-      </p:sp>
-      <p:sp>
-        <p:nvSpPr>
-          <p:cNvPr id="37" name="TextBox 36"/>
-          <p:cNvSpPr txBox="1"/>
-          <p:nvPr/>
-        </p:nvSpPr>
-        <p:spPr>
-          <a:xfrm>
-            <a:off x="502920" y="6419088"/>
-            <a:ext cx="9144000" cy="320040"/>
-          </a:xfrm>
-          <a:prstGeom prst="rect">
-            <a:avLst/>
-          </a:prstGeom>
-          <a:noFill/>
-        </p:spPr>
-        <p:txBody>
-          <a:bodyPr wrap="square" anchor="t" lIns="25400" rIns="25400">
-            <a:spAutoFit/>
-          </a:bodyPr>
-          <a:lstStyle/>
-          <a:p>
-            <a:pPr algn="l"/>
-            <a:r>
-              <a:rPr sz="900" b="0" i="0">
-                <a:solidFill>
-                  <a:srgbClr val="6B7885"/>
-                </a:solidFill>
-                <a:latin typeface="Montserrat"/>
-              </a:rPr>
-              <a:t>INPASA Agroindustrial S/A  ·  Manutenção &amp; Automação  ·  ref. 02/07/2026</a:t>
-            </a:r>
-          </a:p>
-        </p:txBody>
-      </p:sp>
-      <p:sp>
-        <p:nvSpPr>
-          <p:cNvPr id="38" name="TextBox 37"/>
-          <p:cNvSpPr txBox="1"/>
-          <p:nvPr/>
-        </p:nvSpPr>
-        <p:spPr>
-          <a:xfrm>
-            <a:off x="11155680" y="6419088"/>
-            <a:ext cx="822960" cy="320040"/>
-          </a:xfrm>
-          <a:prstGeom prst="rect">
-            <a:avLst/>
-          </a:prstGeom>
-          <a:noFill/>
-        </p:spPr>
-        <p:txBody>
-          <a:bodyPr wrap="square" anchor="t" lIns="25400" rIns="25400">
-            <a:spAutoFit/>
-          </a:bodyPr>
-          <a:lstStyle/>
-          <a:p>
-            <a:pPr algn="r"/>
-            <a:r>
-              <a:rPr sz="900" b="0" i="0">
-                <a:solidFill>
-                  <a:srgbClr val="6B7885"/>
-                </a:solidFill>
-                <a:latin typeface="Montserrat"/>
-              </a:rPr>
-              <a:t>2</a:t>
+              <a:t>◄ FOCO AGORA</a:t>
             </a:r>
           </a:p>
         </p:txBody>
@@ -5058,7 +7916,7 @@
                 </a:solidFill>
                 <a:latin typeface="Montserrat"/>
               </a:rPr>
-              <a:t>LINHA DO TEMPO</a:t>
+              <a:t>A PERGUNTA DA DIRETORIA</a:t>
             </a:r>
           </a:p>
         </p:txBody>
@@ -5093,30 +7951,32 @@
                 </a:solidFill>
                 <a:latin typeface="Montserrat"/>
               </a:rPr>
-              <a:t>Marcos de conclusão (jul → dez/2026)</a:t>
-            </a:r>
-          </a:p>
-        </p:txBody>
-      </p:sp>
-      <p:sp>
-        <p:nvSpPr>
-          <p:cNvPr id="7" name="Rectangle 6"/>
-          <p:cNvSpPr/>
-          <p:nvPr/>
-        </p:nvSpPr>
-        <p:spPr>
-          <a:xfrm>
-            <a:off x="2377440" y="1600200"/>
-            <a:ext cx="12700" cy="4023360"/>
-          </a:xfrm>
-          <a:prstGeom prst="rect">
+              <a:t>Quando cada unidade estará regularizada?</a:t>
+            </a:r>
+          </a:p>
+        </p:txBody>
+      </p:sp>
+      <p:sp>
+        <p:nvSpPr>
+          <p:cNvPr id="7" name="Rounded Rectangle 6"/>
+          <p:cNvSpPr/>
+          <p:nvPr/>
+        </p:nvSpPr>
+        <p:spPr>
+          <a:xfrm>
+            <a:off x="502920" y="1325880"/>
+            <a:ext cx="11201400" cy="731520"/>
+          </a:xfrm>
+          <a:prstGeom prst="roundRect">
             <a:avLst/>
           </a:prstGeom>
           <a:solidFill>
-            <a:srgbClr val="BDBFC1"/>
+            <a:srgbClr val="F2F5F8"/>
           </a:solidFill>
-          <a:ln>
-            <a:noFill/>
+          <a:ln w="15875">
+            <a:solidFill>
+              <a:srgbClr val="124E81"/>
+            </a:solidFill>
           </a:ln>
           <a:effectLst/>
         </p:spPr>
@@ -5150,49 +8010,49 @@
         </p:nvSpPr>
         <p:spPr>
           <a:xfrm>
-            <a:off x="2377440" y="1581912"/>
-            <a:ext cx="1280160" cy="274320"/>
-          </a:xfrm>
-          <a:prstGeom prst="rect">
-            <a:avLst/>
-          </a:prstGeom>
-          <a:noFill/>
-        </p:spPr>
-        <p:txBody>
-          <a:bodyPr wrap="square" anchor="t" lIns="25400" rIns="25400">
+            <a:off x="731520" y="1325880"/>
+            <a:ext cx="10789920" cy="731520"/>
+          </a:xfrm>
+          <a:prstGeom prst="rect">
+            <a:avLst/>
+          </a:prstGeom>
+          <a:noFill/>
+        </p:spPr>
+        <p:txBody>
+          <a:bodyPr wrap="square" anchor="ctr" lIns="25400" rIns="25400">
             <a:spAutoFit/>
           </a:bodyPr>
           <a:lstStyle/>
           <a:p>
             <a:pPr algn="l"/>
             <a:r>
-              <a:rPr sz="1200" b="1" i="0">
+              <a:rPr sz="1500" b="1" i="0">
                 <a:solidFill>
                   <a:srgbClr val="124E81"/>
                 </a:solidFill>
                 <a:latin typeface="Montserrat"/>
               </a:rPr>
-              <a:t>Jul</a:t>
-            </a:r>
-          </a:p>
-        </p:txBody>
-      </p:sp>
-      <p:sp>
-        <p:nvSpPr>
-          <p:cNvPr id="9" name="Rectangle 8"/>
-          <p:cNvSpPr/>
-          <p:nvPr/>
-        </p:nvSpPr>
-        <p:spPr>
-          <a:xfrm>
-            <a:off x="3910933" y="1600200"/>
-            <a:ext cx="12700" cy="4023360"/>
-          </a:xfrm>
-          <a:prstGeom prst="rect">
+              <a:t>Programa concluído em 30/12/2026    |    46 correias · 3 concluídas · 7 urgentes (&lt;=30 dias) · 0 vencidas</a:t>
+            </a:r>
+          </a:p>
+        </p:txBody>
+      </p:sp>
+      <p:sp>
+        <p:nvSpPr>
+          <p:cNvPr id="9" name="Rounded Rectangle 8"/>
+          <p:cNvSpPr/>
+          <p:nvPr/>
+        </p:nvSpPr>
+        <p:spPr>
+          <a:xfrm>
+            <a:off x="502920" y="2286000"/>
+            <a:ext cx="2697480" cy="2926080"/>
+          </a:xfrm>
+          <a:prstGeom prst="roundRect">
             <a:avLst/>
           </a:prstGeom>
           <a:solidFill>
-            <a:srgbClr val="BDBFC1"/>
+            <a:srgbClr val="F2F5F8"/>
           </a:solidFill>
           <a:ln>
             <a:noFill/>
@@ -5223,55 +8083,20 @@
       </p:sp>
       <p:sp>
         <p:nvSpPr>
-          <p:cNvPr id="10" name="TextBox 9"/>
-          <p:cNvSpPr txBox="1"/>
-          <p:nvPr/>
-        </p:nvSpPr>
-        <p:spPr>
-          <a:xfrm>
-            <a:off x="3910933" y="1581912"/>
-            <a:ext cx="1280160" cy="274320"/>
-          </a:xfrm>
-          <a:prstGeom prst="rect">
-            <a:avLst/>
-          </a:prstGeom>
-          <a:noFill/>
-        </p:spPr>
-        <p:txBody>
-          <a:bodyPr wrap="square" anchor="t" lIns="25400" rIns="25400">
-            <a:spAutoFit/>
-          </a:bodyPr>
-          <a:lstStyle/>
-          <a:p>
-            <a:pPr algn="l"/>
-            <a:r>
-              <a:rPr sz="1200" b="1" i="0">
-                <a:solidFill>
-                  <a:srgbClr val="124E81"/>
-                </a:solidFill>
-                <a:latin typeface="Montserrat"/>
-              </a:rPr>
-              <a:t>Ago</a:t>
-            </a:r>
-          </a:p>
-        </p:txBody>
-      </p:sp>
-      <p:sp>
-        <p:nvSpPr>
-          <p:cNvPr id="11" name="Rectangle 10"/>
-          <p:cNvSpPr/>
-          <p:nvPr/>
-        </p:nvSpPr>
-        <p:spPr>
-          <a:xfrm>
-            <a:off x="5444427" y="1600200"/>
-            <a:ext cx="12700" cy="4023360"/>
+          <p:cNvPr id="10" name="Rectangle 9"/>
+          <p:cNvSpPr/>
+          <p:nvPr/>
+        </p:nvSpPr>
+        <p:spPr>
+          <a:xfrm>
+            <a:off x="502920" y="2286000"/>
+            <a:ext cx="2697480" cy="118872"/>
           </a:xfrm>
           <a:prstGeom prst="rect">
             <a:avLst/>
           </a:prstGeom>
           <a:solidFill>
-            <a:srgbClr val="BDBFC1"/>
+            <a:srgbClr val="124E81"/>
           </a:solidFill>
           <a:ln>
             <a:noFill/>
@@ -5302,14 +8127,14 @@
       </p:sp>
       <p:sp>
         <p:nvSpPr>
-          <p:cNvPr id="12" name="TextBox 11"/>
+          <p:cNvPr id="11" name="TextBox 10"/>
           <p:cNvSpPr txBox="1"/>
           <p:nvPr/>
         </p:nvSpPr>
         <p:spPr>
           <a:xfrm>
-            <a:off x="5444427" y="1581912"/>
-            <a:ext cx="1280160" cy="274320"/>
+            <a:off x="685800" y="2560320"/>
+            <a:ext cx="2331720" cy="365760"/>
           </a:xfrm>
           <a:prstGeom prst="rect">
             <a:avLst/>
@@ -5324,33 +8149,177 @@
           <a:p>
             <a:pPr algn="l"/>
             <a:r>
-              <a:rPr sz="1200" b="1" i="0">
+              <a:rPr sz="1300" b="1" i="0">
                 <a:solidFill>
                   <a:srgbClr val="124E81"/>
                 </a:solidFill>
                 <a:latin typeface="Montserrat"/>
               </a:rPr>
-              <a:t>Set</a:t>
-            </a:r>
-          </a:p>
-        </p:txBody>
-      </p:sp>
-      <p:sp>
-        <p:nvSpPr>
-          <p:cNvPr id="13" name="Rectangle 12"/>
-          <p:cNvSpPr/>
-          <p:nvPr/>
-        </p:nvSpPr>
-        <p:spPr>
-          <a:xfrm>
-            <a:off x="6928453" y="1600200"/>
-            <a:ext cx="12700" cy="4023360"/>
-          </a:xfrm>
-          <a:prstGeom prst="rect">
+              <a:t>NMT</a:t>
+            </a:r>
+          </a:p>
+        </p:txBody>
+      </p:sp>
+      <p:sp>
+        <p:nvSpPr>
+          <p:cNvPr id="12" name="TextBox 11"/>
+          <p:cNvSpPr txBox="1"/>
+          <p:nvPr/>
+        </p:nvSpPr>
+        <p:spPr>
+          <a:xfrm>
+            <a:off x="685800" y="2871216"/>
+            <a:ext cx="2331720" cy="457200"/>
+          </a:xfrm>
+          <a:prstGeom prst="rect">
+            <a:avLst/>
+          </a:prstGeom>
+          <a:noFill/>
+        </p:spPr>
+        <p:txBody>
+          <a:bodyPr wrap="square" anchor="t" lIns="25400" rIns="25400">
+            <a:spAutoFit/>
+          </a:bodyPr>
+          <a:lstStyle/>
+          <a:p>
+            <a:pPr algn="l"/>
+            <a:r>
+              <a:rPr sz="1500" b="1" i="0">
+                <a:solidFill>
+                  <a:srgbClr val="20303F"/>
+                </a:solidFill>
+                <a:latin typeface="Montserrat"/>
+              </a:rPr>
+              <a:t>Nova Mutum</a:t>
+            </a:r>
+          </a:p>
+        </p:txBody>
+      </p:sp>
+      <p:sp>
+        <p:nvSpPr>
+          <p:cNvPr id="13" name="TextBox 12"/>
+          <p:cNvSpPr txBox="1"/>
+          <p:nvPr/>
+        </p:nvSpPr>
+        <p:spPr>
+          <a:xfrm>
+            <a:off x="685800" y="3364992"/>
+            <a:ext cx="2331720" cy="320040"/>
+          </a:xfrm>
+          <a:prstGeom prst="rect">
+            <a:avLst/>
+          </a:prstGeom>
+          <a:noFill/>
+        </p:spPr>
+        <p:txBody>
+          <a:bodyPr wrap="square" anchor="t" lIns="25400" rIns="25400">
+            <a:spAutoFit/>
+          </a:bodyPr>
+          <a:lstStyle/>
+          <a:p>
+            <a:pPr algn="l"/>
+            <a:r>
+              <a:rPr sz="1000" b="1" i="0">
+                <a:solidFill>
+                  <a:srgbClr val="6B7885"/>
+                </a:solidFill>
+                <a:latin typeface="Montserrat"/>
+              </a:rPr>
+              <a:t>CONCLUÍDA EM</a:t>
+            </a:r>
+          </a:p>
+        </p:txBody>
+      </p:sp>
+      <p:sp>
+        <p:nvSpPr>
+          <p:cNvPr id="14" name="TextBox 13"/>
+          <p:cNvSpPr txBox="1"/>
+          <p:nvPr/>
+        </p:nvSpPr>
+        <p:spPr>
+          <a:xfrm>
+            <a:off x="685800" y="3611880"/>
+            <a:ext cx="2331720" cy="502920"/>
+          </a:xfrm>
+          <a:prstGeom prst="rect">
+            <a:avLst/>
+          </a:prstGeom>
+          <a:noFill/>
+        </p:spPr>
+        <p:txBody>
+          <a:bodyPr wrap="square" anchor="t" lIns="25400" rIns="25400">
+            <a:spAutoFit/>
+          </a:bodyPr>
+          <a:lstStyle/>
+          <a:p>
+            <a:pPr algn="l"/>
+            <a:r>
+              <a:rPr sz="2200" b="1" i="0">
+                <a:solidFill>
+                  <a:srgbClr val="124E81"/>
+                </a:solidFill>
+                <a:latin typeface="Montserrat"/>
+              </a:rPr>
+              <a:t>22/10/2026</a:t>
+            </a:r>
+          </a:p>
+        </p:txBody>
+      </p:sp>
+      <p:sp>
+        <p:nvSpPr>
+          <p:cNvPr id="15" name="TextBox 14"/>
+          <p:cNvSpPr txBox="1"/>
+          <p:nvPr/>
+        </p:nvSpPr>
+        <p:spPr>
+          <a:xfrm>
+            <a:off x="685800" y="4206240"/>
+            <a:ext cx="2331720" cy="914400"/>
+          </a:xfrm>
+          <a:prstGeom prst="rect">
+            <a:avLst/>
+          </a:prstGeom>
+          <a:noFill/>
+        </p:spPr>
+        <p:txBody>
+          <a:bodyPr wrap="square" anchor="t" lIns="25400" rIns="25400">
+            <a:spAutoFit/>
+          </a:bodyPr>
+          <a:lstStyle/>
+          <a:p>
+            <a:pPr algn="l">
+              <a:lnSpc>
+                <a:spcPct val="105000"/>
+              </a:lnSpc>
+            </a:pPr>
+            <a:r>
+              <a:rPr sz="1050" b="0" i="0">
+                <a:solidFill>
+                  <a:srgbClr val="20303F"/>
+                </a:solidFill>
+                <a:latin typeface="Montserrat"/>
+              </a:rPr>
+              <a:t>16 correias no plano; 1 concluída. Última substituição em 22/10/2026.</a:t>
+            </a:r>
+          </a:p>
+        </p:txBody>
+      </p:sp>
+      <p:sp>
+        <p:nvSpPr>
+          <p:cNvPr id="16" name="Rounded Rectangle 15"/>
+          <p:cNvSpPr/>
+          <p:nvPr/>
+        </p:nvSpPr>
+        <p:spPr>
+          <a:xfrm>
+            <a:off x="3319272" y="2286000"/>
+            <a:ext cx="2697480" cy="2926080"/>
+          </a:xfrm>
+          <a:prstGeom prst="roundRect">
             <a:avLst/>
           </a:prstGeom>
           <a:solidFill>
-            <a:srgbClr val="BDBFC1"/>
+            <a:srgbClr val="F2F5F8"/>
           </a:solidFill>
           <a:ln>
             <a:noFill/>
@@ -5381,55 +8350,20 @@
       </p:sp>
       <p:sp>
         <p:nvSpPr>
-          <p:cNvPr id="14" name="TextBox 13"/>
-          <p:cNvSpPr txBox="1"/>
-          <p:nvPr/>
-        </p:nvSpPr>
-        <p:spPr>
-          <a:xfrm>
-            <a:off x="6928453" y="1581912"/>
-            <a:ext cx="1280160" cy="274320"/>
-          </a:xfrm>
-          <a:prstGeom prst="rect">
-            <a:avLst/>
-          </a:prstGeom>
-          <a:noFill/>
-        </p:spPr>
-        <p:txBody>
-          <a:bodyPr wrap="square" anchor="t" lIns="25400" rIns="25400">
-            <a:spAutoFit/>
-          </a:bodyPr>
-          <a:lstStyle/>
-          <a:p>
-            <a:pPr algn="l"/>
-            <a:r>
-              <a:rPr sz="1200" b="1" i="0">
-                <a:solidFill>
-                  <a:srgbClr val="124E81"/>
-                </a:solidFill>
-                <a:latin typeface="Montserrat"/>
-              </a:rPr>
-              <a:t>Out</a:t>
-            </a:r>
-          </a:p>
-        </p:txBody>
-      </p:sp>
-      <p:sp>
-        <p:nvSpPr>
-          <p:cNvPr id="15" name="Rectangle 14"/>
-          <p:cNvSpPr/>
-          <p:nvPr/>
-        </p:nvSpPr>
-        <p:spPr>
-          <a:xfrm>
-            <a:off x="8461947" y="1600200"/>
-            <a:ext cx="12700" cy="4023360"/>
+          <p:cNvPr id="17" name="Rectangle 16"/>
+          <p:cNvSpPr/>
+          <p:nvPr/>
+        </p:nvSpPr>
+        <p:spPr>
+          <a:xfrm>
+            <a:off x="3319272" y="2286000"/>
+            <a:ext cx="2697480" cy="118872"/>
           </a:xfrm>
           <a:prstGeom prst="rect">
             <a:avLst/>
           </a:prstGeom>
           <a:solidFill>
-            <a:srgbClr val="BDBFC1"/>
+            <a:srgbClr val="EAA239"/>
           </a:solidFill>
           <a:ln>
             <a:noFill/>
@@ -5460,14 +8394,14 @@
       </p:sp>
       <p:sp>
         <p:nvSpPr>
-          <p:cNvPr id="16" name="TextBox 15"/>
+          <p:cNvPr id="18" name="TextBox 17"/>
           <p:cNvSpPr txBox="1"/>
           <p:nvPr/>
         </p:nvSpPr>
         <p:spPr>
           <a:xfrm>
-            <a:off x="8461947" y="1581912"/>
-            <a:ext cx="1280160" cy="274320"/>
+            <a:off x="3502152" y="2560320"/>
+            <a:ext cx="2331720" cy="365760"/>
           </a:xfrm>
           <a:prstGeom prst="rect">
             <a:avLst/>
@@ -5482,33 +8416,177 @@
           <a:p>
             <a:pPr algn="l"/>
             <a:r>
-              <a:rPr sz="1200" b="1" i="0">
-                <a:solidFill>
-                  <a:srgbClr val="124E81"/>
+              <a:rPr sz="1300" b="1" i="0">
+                <a:solidFill>
+                  <a:srgbClr val="EAA239"/>
                 </a:solidFill>
                 <a:latin typeface="Montserrat"/>
               </a:rPr>
-              <a:t>Nov</a:t>
-            </a:r>
-          </a:p>
-        </p:txBody>
-      </p:sp>
-      <p:sp>
-        <p:nvSpPr>
-          <p:cNvPr id="17" name="Rectangle 16"/>
-          <p:cNvSpPr/>
-          <p:nvPr/>
-        </p:nvSpPr>
-        <p:spPr>
-          <a:xfrm>
-            <a:off x="9945973" y="1600200"/>
-            <a:ext cx="12700" cy="4023360"/>
-          </a:xfrm>
-          <a:prstGeom prst="rect">
+              <a:t>SNP</a:t>
+            </a:r>
+          </a:p>
+        </p:txBody>
+      </p:sp>
+      <p:sp>
+        <p:nvSpPr>
+          <p:cNvPr id="19" name="TextBox 18"/>
+          <p:cNvSpPr txBox="1"/>
+          <p:nvPr/>
+        </p:nvSpPr>
+        <p:spPr>
+          <a:xfrm>
+            <a:off x="3502152" y="2871216"/>
+            <a:ext cx="2331720" cy="457200"/>
+          </a:xfrm>
+          <a:prstGeom prst="rect">
+            <a:avLst/>
+          </a:prstGeom>
+          <a:noFill/>
+        </p:spPr>
+        <p:txBody>
+          <a:bodyPr wrap="square" anchor="t" lIns="25400" rIns="25400">
+            <a:spAutoFit/>
+          </a:bodyPr>
+          <a:lstStyle/>
+          <a:p>
+            <a:pPr algn="l"/>
+            <a:r>
+              <a:rPr sz="1500" b="1" i="0">
+                <a:solidFill>
+                  <a:srgbClr val="20303F"/>
+                </a:solidFill>
+                <a:latin typeface="Montserrat"/>
+              </a:rPr>
+              <a:t>Sinop</a:t>
+            </a:r>
+          </a:p>
+        </p:txBody>
+      </p:sp>
+      <p:sp>
+        <p:nvSpPr>
+          <p:cNvPr id="20" name="TextBox 19"/>
+          <p:cNvSpPr txBox="1"/>
+          <p:nvPr/>
+        </p:nvSpPr>
+        <p:spPr>
+          <a:xfrm>
+            <a:off x="3502152" y="3364992"/>
+            <a:ext cx="2331720" cy="320040"/>
+          </a:xfrm>
+          <a:prstGeom prst="rect">
+            <a:avLst/>
+          </a:prstGeom>
+          <a:noFill/>
+        </p:spPr>
+        <p:txBody>
+          <a:bodyPr wrap="square" anchor="t" lIns="25400" rIns="25400">
+            <a:spAutoFit/>
+          </a:bodyPr>
+          <a:lstStyle/>
+          <a:p>
+            <a:pPr algn="l"/>
+            <a:r>
+              <a:rPr sz="1000" b="1" i="0">
+                <a:solidFill>
+                  <a:srgbClr val="6B7885"/>
+                </a:solidFill>
+                <a:latin typeface="Montserrat"/>
+              </a:rPr>
+              <a:t>CONCLUÍDA EM</a:t>
+            </a:r>
+          </a:p>
+        </p:txBody>
+      </p:sp>
+      <p:sp>
+        <p:nvSpPr>
+          <p:cNvPr id="21" name="TextBox 20"/>
+          <p:cNvSpPr txBox="1"/>
+          <p:nvPr/>
+        </p:nvSpPr>
+        <p:spPr>
+          <a:xfrm>
+            <a:off x="3502152" y="3611880"/>
+            <a:ext cx="2331720" cy="502920"/>
+          </a:xfrm>
+          <a:prstGeom prst="rect">
+            <a:avLst/>
+          </a:prstGeom>
+          <a:noFill/>
+        </p:spPr>
+        <p:txBody>
+          <a:bodyPr wrap="square" anchor="t" lIns="25400" rIns="25400">
+            <a:spAutoFit/>
+          </a:bodyPr>
+          <a:lstStyle/>
+          <a:p>
+            <a:pPr algn="l"/>
+            <a:r>
+              <a:rPr sz="2200" b="1" i="0">
+                <a:solidFill>
+                  <a:srgbClr val="EAA239"/>
+                </a:solidFill>
+                <a:latin typeface="Montserrat"/>
+              </a:rPr>
+              <a:t>30/12/2026</a:t>
+            </a:r>
+          </a:p>
+        </p:txBody>
+      </p:sp>
+      <p:sp>
+        <p:nvSpPr>
+          <p:cNvPr id="22" name="TextBox 21"/>
+          <p:cNvSpPr txBox="1"/>
+          <p:nvPr/>
+        </p:nvSpPr>
+        <p:spPr>
+          <a:xfrm>
+            <a:off x="3502152" y="4206240"/>
+            <a:ext cx="2331720" cy="914400"/>
+          </a:xfrm>
+          <a:prstGeom prst="rect">
+            <a:avLst/>
+          </a:prstGeom>
+          <a:noFill/>
+        </p:spPr>
+        <p:txBody>
+          <a:bodyPr wrap="square" anchor="t" lIns="25400" rIns="25400">
+            <a:spAutoFit/>
+          </a:bodyPr>
+          <a:lstStyle/>
+          <a:p>
+            <a:pPr algn="l">
+              <a:lnSpc>
+                <a:spcPct val="105000"/>
+              </a:lnSpc>
+            </a:pPr>
+            <a:r>
+              <a:rPr sz="1050" b="0" i="0">
+                <a:solidFill>
+                  <a:srgbClr val="20303F"/>
+                </a:solidFill>
+                <a:latin typeface="Montserrat"/>
+              </a:rPr>
+              <a:t>23 correias no plano; 1 concluída. Última em 30/12/2026 (esteiras de cavacos).</a:t>
+            </a:r>
+          </a:p>
+        </p:txBody>
+      </p:sp>
+      <p:sp>
+        <p:nvSpPr>
+          <p:cNvPr id="23" name="Rounded Rectangle 22"/>
+          <p:cNvSpPr/>
+          <p:nvPr/>
+        </p:nvSpPr>
+        <p:spPr>
+          <a:xfrm>
+            <a:off x="6135624" y="2286000"/>
+            <a:ext cx="2697480" cy="2926080"/>
+          </a:xfrm>
+          <a:prstGeom prst="roundRect">
             <a:avLst/>
           </a:prstGeom>
           <a:solidFill>
-            <a:srgbClr val="BDBFC1"/>
+            <a:srgbClr val="F2F5F8"/>
           </a:solidFill>
           <a:ln>
             <a:noFill/>
@@ -5539,55 +8617,20 @@
       </p:sp>
       <p:sp>
         <p:nvSpPr>
-          <p:cNvPr id="18" name="TextBox 17"/>
-          <p:cNvSpPr txBox="1"/>
-          <p:nvPr/>
-        </p:nvSpPr>
-        <p:spPr>
-          <a:xfrm>
-            <a:off x="9945973" y="1581912"/>
-            <a:ext cx="1280160" cy="274320"/>
-          </a:xfrm>
-          <a:prstGeom prst="rect">
-            <a:avLst/>
-          </a:prstGeom>
-          <a:noFill/>
-        </p:spPr>
-        <p:txBody>
-          <a:bodyPr wrap="square" anchor="t" lIns="25400" rIns="25400">
-            <a:spAutoFit/>
-          </a:bodyPr>
-          <a:lstStyle/>
-          <a:p>
-            <a:pPr algn="l"/>
-            <a:r>
-              <a:rPr sz="1200" b="1" i="0">
-                <a:solidFill>
-                  <a:srgbClr val="124E81"/>
-                </a:solidFill>
-                <a:latin typeface="Montserrat"/>
-              </a:rPr>
-              <a:t>Dez</a:t>
-            </a:r>
-          </a:p>
-        </p:txBody>
-      </p:sp>
-      <p:sp>
-        <p:nvSpPr>
-          <p:cNvPr id="19" name="Rectangle 18"/>
-          <p:cNvSpPr/>
-          <p:nvPr/>
-        </p:nvSpPr>
-        <p:spPr>
-          <a:xfrm>
-            <a:off x="2426907" y="1874520"/>
-            <a:ext cx="25400" cy="3703320"/>
+          <p:cNvPr id="24" name="Rectangle 23"/>
+          <p:cNvSpPr/>
+          <p:nvPr/>
+        </p:nvSpPr>
+        <p:spPr>
+          <a:xfrm>
+            <a:off x="6135624" y="2286000"/>
+            <a:ext cx="2697480" cy="118872"/>
           </a:xfrm>
           <a:prstGeom prst="rect">
             <a:avLst/>
           </a:prstGeom>
           <a:solidFill>
-            <a:srgbClr val="CC5121"/>
+            <a:srgbClr val="007D77"/>
           </a:solidFill>
           <a:ln>
             <a:noFill/>
@@ -5618,14 +8661,14 @@
       </p:sp>
       <p:sp>
         <p:nvSpPr>
-          <p:cNvPr id="20" name="TextBox 19"/>
+          <p:cNvPr id="25" name="TextBox 24"/>
           <p:cNvSpPr txBox="1"/>
           <p:nvPr/>
         </p:nvSpPr>
         <p:spPr>
           <a:xfrm>
-            <a:off x="2152587" y="1618488"/>
-            <a:ext cx="1097280" cy="256032"/>
+            <a:off x="6318504" y="2560320"/>
+            <a:ext cx="2331720" cy="365760"/>
           </a:xfrm>
           <a:prstGeom prst="rect">
             <a:avLst/>
@@ -5640,80 +8683,177 @@
           <a:p>
             <a:pPr algn="l"/>
             <a:r>
-              <a:rPr sz="1000" b="1" i="0">
-                <a:solidFill>
-                  <a:srgbClr val="CC5121"/>
+              <a:rPr sz="1300" b="1" i="0">
+                <a:solidFill>
+                  <a:srgbClr val="007D77"/>
                 </a:solidFill>
                 <a:latin typeface="Montserrat"/>
               </a:rPr>
-              <a:t>HOJE</a:t>
-            </a:r>
-          </a:p>
-        </p:txBody>
-      </p:sp>
-      <p:sp>
-        <p:nvSpPr>
-          <p:cNvPr id="21" name="TextBox 20"/>
+              <a:t>SDR</a:t>
+            </a:r>
+          </a:p>
+        </p:txBody>
+      </p:sp>
+      <p:sp>
+        <p:nvSpPr>
+          <p:cNvPr id="26" name="TextBox 25"/>
           <p:cNvSpPr txBox="1"/>
           <p:nvPr/>
         </p:nvSpPr>
         <p:spPr>
           <a:xfrm>
-            <a:off x="502920" y="2103120"/>
-            <a:ext cx="1783080" cy="868680"/>
-          </a:xfrm>
-          <a:prstGeom prst="rect">
-            <a:avLst/>
-          </a:prstGeom>
-          <a:noFill/>
-        </p:spPr>
-        <p:txBody>
-          <a:bodyPr wrap="square" anchor="ctr" lIns="25400" rIns="25400">
+            <a:off x="6318504" y="2871216"/>
+            <a:ext cx="2331720" cy="457200"/>
+          </a:xfrm>
+          <a:prstGeom prst="rect">
+            <a:avLst/>
+          </a:prstGeom>
+          <a:noFill/>
+        </p:spPr>
+        <p:txBody>
+          <a:bodyPr wrap="square" anchor="t" lIns="25400" rIns="25400">
             <a:spAutoFit/>
           </a:bodyPr>
           <a:lstStyle/>
           <a:p>
             <a:pPr algn="l"/>
             <a:r>
-              <a:rPr sz="1100" b="1" i="0">
-                <a:solidFill>
-                  <a:srgbClr val="124E81"/>
+              <a:rPr sz="1500" b="1" i="0">
+                <a:solidFill>
+                  <a:srgbClr val="20303F"/>
                 </a:solidFill>
                 <a:latin typeface="Montserrat"/>
               </a:rPr>
-              <a:t>NMT · Nova Mutum</a:t>
-            </a:r>
-          </a:p>
+              <a:t>Sidrolândia</a:t>
+            </a:r>
+          </a:p>
+        </p:txBody>
+      </p:sp>
+      <p:sp>
+        <p:nvSpPr>
+          <p:cNvPr id="27" name="TextBox 26"/>
+          <p:cNvSpPr txBox="1"/>
+          <p:nvPr/>
+        </p:nvSpPr>
+        <p:spPr>
+          <a:xfrm>
+            <a:off x="6318504" y="3364992"/>
+            <a:ext cx="2331720" cy="320040"/>
+          </a:xfrm>
+          <a:prstGeom prst="rect">
+            <a:avLst/>
+          </a:prstGeom>
+          <a:noFill/>
+        </p:spPr>
+        <p:txBody>
+          <a:bodyPr wrap="square" anchor="t" lIns="25400" rIns="25400">
+            <a:spAutoFit/>
+          </a:bodyPr>
+          <a:lstStyle/>
           <a:p>
             <a:pPr algn="l"/>
             <a:r>
-              <a:rPr sz="1100" b="1" i="0">
-                <a:solidFill>
-                  <a:srgbClr val="124E81"/>
+              <a:rPr sz="1000" b="1" i="0">
+                <a:solidFill>
+                  <a:srgbClr val="6B7885"/>
                 </a:solidFill>
                 <a:latin typeface="Montserrat"/>
               </a:rPr>
-              <a:t>16 correias</a:t>
-            </a:r>
-          </a:p>
-        </p:txBody>
-      </p:sp>
-      <p:sp>
-        <p:nvSpPr>
-          <p:cNvPr id="22" name="Rounded Rectangle 21"/>
-          <p:cNvSpPr/>
-          <p:nvPr/>
-        </p:nvSpPr>
-        <p:spPr>
-          <a:xfrm>
-            <a:off x="2377440" y="2304288"/>
-            <a:ext cx="5589832" cy="384048"/>
+              <a:t>CONCLUÍDA EM</a:t>
+            </a:r>
+          </a:p>
+        </p:txBody>
+      </p:sp>
+      <p:sp>
+        <p:nvSpPr>
+          <p:cNvPr id="28" name="TextBox 27"/>
+          <p:cNvSpPr txBox="1"/>
+          <p:nvPr/>
+        </p:nvSpPr>
+        <p:spPr>
+          <a:xfrm>
+            <a:off x="6318504" y="3611880"/>
+            <a:ext cx="2331720" cy="502920"/>
+          </a:xfrm>
+          <a:prstGeom prst="rect">
+            <a:avLst/>
+          </a:prstGeom>
+          <a:noFill/>
+        </p:spPr>
+        <p:txBody>
+          <a:bodyPr wrap="square" anchor="t" lIns="25400" rIns="25400">
+            <a:spAutoFit/>
+          </a:bodyPr>
+          <a:lstStyle/>
+          <a:p>
+            <a:pPr algn="l"/>
+            <a:r>
+              <a:rPr sz="2200" b="1" i="0">
+                <a:solidFill>
+                  <a:srgbClr val="007D77"/>
+                </a:solidFill>
+                <a:latin typeface="Montserrat"/>
+              </a:rPr>
+              <a:t>30/09/2026</a:t>
+            </a:r>
+          </a:p>
+        </p:txBody>
+      </p:sp>
+      <p:sp>
+        <p:nvSpPr>
+          <p:cNvPr id="29" name="TextBox 28"/>
+          <p:cNvSpPr txBox="1"/>
+          <p:nvPr/>
+        </p:nvSpPr>
+        <p:spPr>
+          <a:xfrm>
+            <a:off x="6318504" y="4206240"/>
+            <a:ext cx="2331720" cy="914400"/>
+          </a:xfrm>
+          <a:prstGeom prst="rect">
+            <a:avLst/>
+          </a:prstGeom>
+          <a:noFill/>
+        </p:spPr>
+        <p:txBody>
+          <a:bodyPr wrap="square" anchor="t" lIns="25400" rIns="25400">
+            <a:spAutoFit/>
+          </a:bodyPr>
+          <a:lstStyle/>
+          <a:p>
+            <a:pPr algn="l">
+              <a:lnSpc>
+                <a:spcPct val="105000"/>
+              </a:lnSpc>
+            </a:pPr>
+            <a:r>
+              <a:rPr sz="1050" b="0" i="0">
+                <a:solidFill>
+                  <a:srgbClr val="20303F"/>
+                </a:solidFill>
+                <a:latin typeface="Montserrat"/>
+              </a:rPr>
+              <a:t>2 correias no plano. Ambas concluídas até 30/09/2026.</a:t>
+            </a:r>
+          </a:p>
+        </p:txBody>
+      </p:sp>
+      <p:sp>
+        <p:nvSpPr>
+          <p:cNvPr id="30" name="Rounded Rectangle 29"/>
+          <p:cNvSpPr/>
+          <p:nvPr/>
+        </p:nvSpPr>
+        <p:spPr>
+          <a:xfrm>
+            <a:off x="8951976" y="2286000"/>
+            <a:ext cx="2697480" cy="2926080"/>
           </a:xfrm>
           <a:prstGeom prst="roundRect">
             <a:avLst/>
           </a:prstGeom>
           <a:solidFill>
-            <a:srgbClr val="124E81"/>
+            <a:srgbClr val="F2F5F8"/>
           </a:solidFill>
           <a:ln>
             <a:noFill/>
@@ -5744,102 +8884,20 @@
       </p:sp>
       <p:sp>
         <p:nvSpPr>
-          <p:cNvPr id="23" name="TextBox 22"/>
-          <p:cNvSpPr txBox="1"/>
-          <p:nvPr/>
-        </p:nvSpPr>
-        <p:spPr>
-          <a:xfrm>
-            <a:off x="8058712" y="2286000"/>
-            <a:ext cx="1645920" cy="411480"/>
-          </a:xfrm>
-          <a:prstGeom prst="rect">
-            <a:avLst/>
-          </a:prstGeom>
-          <a:noFill/>
-        </p:spPr>
-        <p:txBody>
-          <a:bodyPr wrap="square" anchor="ctr" lIns="25400" rIns="25400">
-            <a:spAutoFit/>
-          </a:bodyPr>
-          <a:lstStyle/>
-          <a:p>
-            <a:pPr algn="l"/>
-            <a:r>
-              <a:rPr sz="1100" b="1" i="0">
-                <a:solidFill>
-                  <a:srgbClr val="20303F"/>
-                </a:solidFill>
-                <a:latin typeface="Montserrat"/>
-              </a:rPr>
-              <a:t>22/10/2026</a:t>
-            </a:r>
-          </a:p>
-        </p:txBody>
-      </p:sp>
-      <p:sp>
-        <p:nvSpPr>
-          <p:cNvPr id="24" name="TextBox 23"/>
-          <p:cNvSpPr txBox="1"/>
-          <p:nvPr/>
-        </p:nvSpPr>
-        <p:spPr>
-          <a:xfrm>
-            <a:off x="502920" y="2971800"/>
-            <a:ext cx="1783080" cy="868680"/>
-          </a:xfrm>
-          <a:prstGeom prst="rect">
-            <a:avLst/>
-          </a:prstGeom>
-          <a:noFill/>
-        </p:spPr>
-        <p:txBody>
-          <a:bodyPr wrap="square" anchor="ctr" lIns="25400" rIns="25400">
-            <a:spAutoFit/>
-          </a:bodyPr>
-          <a:lstStyle/>
-          <a:p>
-            <a:pPr algn="l"/>
-            <a:r>
-              <a:rPr sz="1100" b="1" i="0">
-                <a:solidFill>
-                  <a:srgbClr val="EAA239"/>
-                </a:solidFill>
-                <a:latin typeface="Montserrat"/>
-              </a:rPr>
-              <a:t>SNP · Sinop</a:t>
-            </a:r>
-          </a:p>
-          <a:p>
-            <a:pPr algn="l"/>
-            <a:r>
-              <a:rPr sz="1100" b="1" i="0">
-                <a:solidFill>
-                  <a:srgbClr val="EAA239"/>
-                </a:solidFill>
-                <a:latin typeface="Montserrat"/>
-              </a:rPr>
-              <a:t>23 correias</a:t>
-            </a:r>
-          </a:p>
-        </p:txBody>
-      </p:sp>
-      <p:sp>
-        <p:nvSpPr>
-          <p:cNvPr id="25" name="Rounded Rectangle 24"/>
-          <p:cNvSpPr/>
-          <p:nvPr/>
-        </p:nvSpPr>
-        <p:spPr>
-          <a:xfrm>
-            <a:off x="2377440" y="3172968"/>
-            <a:ext cx="9003092" cy="384048"/>
-          </a:xfrm>
-          <a:prstGeom prst="roundRect">
+          <p:cNvPr id="31" name="Rectangle 30"/>
+          <p:cNvSpPr/>
+          <p:nvPr/>
+        </p:nvSpPr>
+        <p:spPr>
+          <a:xfrm>
+            <a:off x="8951976" y="2286000"/>
+            <a:ext cx="2697480" cy="118872"/>
+          </a:xfrm>
+          <a:prstGeom prst="rect">
             <a:avLst/>
           </a:prstGeom>
           <a:solidFill>
-            <a:srgbClr val="EAA239"/>
+            <a:srgbClr val="007CC5"/>
           </a:solidFill>
           <a:ln>
             <a:noFill/>
@@ -5870,301 +8928,14 @@
       </p:sp>
       <p:sp>
         <p:nvSpPr>
-          <p:cNvPr id="26" name="TextBox 25"/>
-          <p:cNvSpPr txBox="1"/>
-          <p:nvPr/>
-        </p:nvSpPr>
-        <p:spPr>
-          <a:xfrm>
-            <a:off x="11471972" y="3154680"/>
-            <a:ext cx="1645920" cy="411480"/>
-          </a:xfrm>
-          <a:prstGeom prst="rect">
-            <a:avLst/>
-          </a:prstGeom>
-          <a:noFill/>
-        </p:spPr>
-        <p:txBody>
-          <a:bodyPr wrap="square" anchor="ctr" lIns="25400" rIns="25400">
-            <a:spAutoFit/>
-          </a:bodyPr>
-          <a:lstStyle/>
-          <a:p>
-            <a:pPr algn="l"/>
-            <a:r>
-              <a:rPr sz="1100" b="1" i="0">
-                <a:solidFill>
-                  <a:srgbClr val="20303F"/>
-                </a:solidFill>
-                <a:latin typeface="Montserrat"/>
-              </a:rPr>
-              <a:t>30/12/2026</a:t>
-            </a:r>
-          </a:p>
-        </p:txBody>
-      </p:sp>
-      <p:sp>
-        <p:nvSpPr>
-          <p:cNvPr id="27" name="TextBox 26"/>
-          <p:cNvSpPr txBox="1"/>
-          <p:nvPr/>
-        </p:nvSpPr>
-        <p:spPr>
-          <a:xfrm>
-            <a:off x="502920" y="3840480"/>
-            <a:ext cx="1783080" cy="868680"/>
-          </a:xfrm>
-          <a:prstGeom prst="rect">
-            <a:avLst/>
-          </a:prstGeom>
-          <a:noFill/>
-        </p:spPr>
-        <p:txBody>
-          <a:bodyPr wrap="square" anchor="ctr" lIns="25400" rIns="25400">
-            <a:spAutoFit/>
-          </a:bodyPr>
-          <a:lstStyle/>
-          <a:p>
-            <a:pPr algn="l"/>
-            <a:r>
-              <a:rPr sz="1100" b="1" i="0">
-                <a:solidFill>
-                  <a:srgbClr val="007D77"/>
-                </a:solidFill>
-                <a:latin typeface="Montserrat"/>
-              </a:rPr>
-              <a:t>SDR · Sidrolândia</a:t>
-            </a:r>
-          </a:p>
-          <a:p>
-            <a:pPr algn="l"/>
-            <a:r>
-              <a:rPr sz="1100" b="1" i="0">
-                <a:solidFill>
-                  <a:srgbClr val="007D77"/>
-                </a:solidFill>
-                <a:latin typeface="Montserrat"/>
-              </a:rPr>
-              <a:t>2 correias</a:t>
-            </a:r>
-          </a:p>
-        </p:txBody>
-      </p:sp>
-      <p:sp>
-        <p:nvSpPr>
-          <p:cNvPr id="28" name="Rounded Rectangle 27"/>
-          <p:cNvSpPr/>
-          <p:nvPr/>
-        </p:nvSpPr>
-        <p:spPr>
-          <a:xfrm>
-            <a:off x="2377440" y="4041648"/>
-            <a:ext cx="4501546" cy="384048"/>
-          </a:xfrm>
-          <a:prstGeom prst="roundRect">
-            <a:avLst/>
-          </a:prstGeom>
-          <a:solidFill>
-            <a:srgbClr val="007D77"/>
-          </a:solidFill>
-          <a:ln>
-            <a:noFill/>
-          </a:ln>
-          <a:effectLst/>
-        </p:spPr>
-        <p:style>
-          <a:lnRef idx="1">
-            <a:schemeClr val="accent1"/>
-          </a:lnRef>
-          <a:fillRef idx="3">
-            <a:schemeClr val="accent1"/>
-          </a:fillRef>
-          <a:effectRef idx="2">
-            <a:schemeClr val="accent1"/>
-          </a:effectRef>
-          <a:fontRef idx="minor">
-            <a:schemeClr val="lt1"/>
-          </a:fontRef>
-        </p:style>
-        <p:txBody>
-          <a:bodyPr rtlCol="0" anchor="ctr"/>
-          <a:lstStyle/>
-          <a:p>
-            <a:pPr algn="ctr"/>
-          </a:p>
-        </p:txBody>
-      </p:sp>
-      <p:sp>
-        <p:nvSpPr>
-          <p:cNvPr id="29" name="TextBox 28"/>
-          <p:cNvSpPr txBox="1"/>
-          <p:nvPr/>
-        </p:nvSpPr>
-        <p:spPr>
-          <a:xfrm>
-            <a:off x="6970426" y="4023360"/>
-            <a:ext cx="1645920" cy="411480"/>
-          </a:xfrm>
-          <a:prstGeom prst="rect">
-            <a:avLst/>
-          </a:prstGeom>
-          <a:noFill/>
-        </p:spPr>
-        <p:txBody>
-          <a:bodyPr wrap="square" anchor="ctr" lIns="25400" rIns="25400">
-            <a:spAutoFit/>
-          </a:bodyPr>
-          <a:lstStyle/>
-          <a:p>
-            <a:pPr algn="l"/>
-            <a:r>
-              <a:rPr sz="1100" b="1" i="0">
-                <a:solidFill>
-                  <a:srgbClr val="20303F"/>
-                </a:solidFill>
-                <a:latin typeface="Montserrat"/>
-              </a:rPr>
-              <a:t>30/09/2026</a:t>
-            </a:r>
-          </a:p>
-        </p:txBody>
-      </p:sp>
-      <p:sp>
-        <p:nvSpPr>
-          <p:cNvPr id="30" name="TextBox 29"/>
-          <p:cNvSpPr txBox="1"/>
-          <p:nvPr/>
-        </p:nvSpPr>
-        <p:spPr>
-          <a:xfrm>
-            <a:off x="502920" y="4709160"/>
-            <a:ext cx="1783080" cy="868680"/>
-          </a:xfrm>
-          <a:prstGeom prst="rect">
-            <a:avLst/>
-          </a:prstGeom>
-          <a:noFill/>
-        </p:spPr>
-        <p:txBody>
-          <a:bodyPr wrap="square" anchor="ctr" lIns="25400" rIns="25400">
-            <a:spAutoFit/>
-          </a:bodyPr>
-          <a:lstStyle/>
-          <a:p>
-            <a:pPr algn="l"/>
-            <a:r>
-              <a:rPr sz="1100" b="1" i="0">
-                <a:solidFill>
-                  <a:srgbClr val="007CC5"/>
-                </a:solidFill>
-                <a:latin typeface="Montserrat"/>
-              </a:rPr>
-              <a:t>BLS · Balsas</a:t>
-            </a:r>
-          </a:p>
-          <a:p>
-            <a:pPr algn="l"/>
-            <a:r>
-              <a:rPr sz="1100" b="1" i="0">
-                <a:solidFill>
-                  <a:srgbClr val="007CC5"/>
-                </a:solidFill>
-                <a:latin typeface="Montserrat"/>
-              </a:rPr>
-              <a:t>5 correias</a:t>
-            </a:r>
-          </a:p>
-        </p:txBody>
-      </p:sp>
-      <p:sp>
-        <p:nvSpPr>
-          <p:cNvPr id="31" name="Rounded Rectangle 30"/>
-          <p:cNvSpPr/>
-          <p:nvPr/>
-        </p:nvSpPr>
-        <p:spPr>
-          <a:xfrm>
-            <a:off x="2377440" y="4910328"/>
-            <a:ext cx="1137753" cy="384048"/>
-          </a:xfrm>
-          <a:prstGeom prst="roundRect">
-            <a:avLst/>
-          </a:prstGeom>
-          <a:solidFill>
-            <a:srgbClr val="007CC5"/>
-          </a:solidFill>
-          <a:ln>
-            <a:noFill/>
-          </a:ln>
-          <a:effectLst/>
-        </p:spPr>
-        <p:style>
-          <a:lnRef idx="1">
-            <a:schemeClr val="accent1"/>
-          </a:lnRef>
-          <a:fillRef idx="3">
-            <a:schemeClr val="accent1"/>
-          </a:fillRef>
-          <a:effectRef idx="2">
-            <a:schemeClr val="accent1"/>
-          </a:effectRef>
-          <a:fontRef idx="minor">
-            <a:schemeClr val="lt1"/>
-          </a:fontRef>
-        </p:style>
-        <p:txBody>
-          <a:bodyPr rtlCol="0" anchor="ctr"/>
-          <a:lstStyle/>
-          <a:p>
-            <a:pPr algn="ctr"/>
-          </a:p>
-        </p:txBody>
-      </p:sp>
-      <p:sp>
-        <p:nvSpPr>
           <p:cNvPr id="32" name="TextBox 31"/>
           <p:cNvSpPr txBox="1"/>
           <p:nvPr/>
         </p:nvSpPr>
         <p:spPr>
           <a:xfrm>
-            <a:off x="3606633" y="4892040"/>
-            <a:ext cx="1645920" cy="411480"/>
-          </a:xfrm>
-          <a:prstGeom prst="rect">
-            <a:avLst/>
-          </a:prstGeom>
-          <a:noFill/>
-        </p:spPr>
-        <p:txBody>
-          <a:bodyPr wrap="square" anchor="ctr" lIns="25400" rIns="25400">
-            <a:spAutoFit/>
-          </a:bodyPr>
-          <a:lstStyle/>
-          <a:p>
-            <a:pPr algn="l"/>
-            <a:r>
-              <a:rPr sz="1100" b="1" i="0">
-                <a:solidFill>
-                  <a:srgbClr val="20303F"/>
-                </a:solidFill>
-                <a:latin typeface="Montserrat"/>
-              </a:rPr>
-              <a:t>24/07/2026</a:t>
-            </a:r>
-          </a:p>
-        </p:txBody>
-      </p:sp>
-      <p:sp>
-        <p:nvSpPr>
-          <p:cNvPr id="33" name="TextBox 32"/>
-          <p:cNvSpPr txBox="1"/>
-          <p:nvPr/>
-        </p:nvSpPr>
-        <p:spPr>
-          <a:xfrm>
-            <a:off x="502920" y="5943600"/>
-            <a:ext cx="10972800" cy="365760"/>
+            <a:off x="9134856" y="2560320"/>
+            <a:ext cx="2331720" cy="365760"/>
           </a:xfrm>
           <a:prstGeom prst="rect">
             <a:avLst/>
@@ -6181,25 +8952,25 @@
             <a:r>
               <a:rPr sz="1300" b="1" i="0">
                 <a:solidFill>
-                  <a:srgbClr val="124E81"/>
+                  <a:srgbClr val="007CC5"/>
                 </a:solidFill>
                 <a:latin typeface="Montserrat"/>
               </a:rPr>
-              <a:t>Conclusão de todo o programa: 30/12/2026 (última — Sinop, esteiras de cavacos da biomassa).</a:t>
-            </a:r>
-          </a:p>
-        </p:txBody>
-      </p:sp>
-      <p:sp>
-        <p:nvSpPr>
-          <p:cNvPr id="34" name="TextBox 33"/>
+              <a:t>BLS</a:t>
+            </a:r>
+          </a:p>
+        </p:txBody>
+      </p:sp>
+      <p:sp>
+        <p:nvSpPr>
+          <p:cNvPr id="33" name="TextBox 32"/>
           <p:cNvSpPr txBox="1"/>
           <p:nvPr/>
         </p:nvSpPr>
         <p:spPr>
           <a:xfrm>
-            <a:off x="502920" y="6419088"/>
-            <a:ext cx="9144000" cy="320040"/>
+            <a:off x="9134856" y="2871216"/>
+            <a:ext cx="2331720" cy="457200"/>
           </a:xfrm>
           <a:prstGeom prst="rect">
             <a:avLst/>
@@ -6214,6 +8985,150 @@
           <a:p>
             <a:pPr algn="l"/>
             <a:r>
+              <a:rPr sz="1500" b="1" i="0">
+                <a:solidFill>
+                  <a:srgbClr val="20303F"/>
+                </a:solidFill>
+                <a:latin typeface="Montserrat"/>
+              </a:rPr>
+              <a:t>Balsas</a:t>
+            </a:r>
+          </a:p>
+        </p:txBody>
+      </p:sp>
+      <p:sp>
+        <p:nvSpPr>
+          <p:cNvPr id="34" name="TextBox 33"/>
+          <p:cNvSpPr txBox="1"/>
+          <p:nvPr/>
+        </p:nvSpPr>
+        <p:spPr>
+          <a:xfrm>
+            <a:off x="9134856" y="3364992"/>
+            <a:ext cx="2331720" cy="320040"/>
+          </a:xfrm>
+          <a:prstGeom prst="rect">
+            <a:avLst/>
+          </a:prstGeom>
+          <a:noFill/>
+        </p:spPr>
+        <p:txBody>
+          <a:bodyPr wrap="square" anchor="t" lIns="25400" rIns="25400">
+            <a:spAutoFit/>
+          </a:bodyPr>
+          <a:lstStyle/>
+          <a:p>
+            <a:pPr algn="l"/>
+            <a:r>
+              <a:rPr sz="1000" b="1" i="0">
+                <a:solidFill>
+                  <a:srgbClr val="6B7885"/>
+                </a:solidFill>
+                <a:latin typeface="Montserrat"/>
+              </a:rPr>
+              <a:t>CONCLUÍDA EM</a:t>
+            </a:r>
+          </a:p>
+        </p:txBody>
+      </p:sp>
+      <p:sp>
+        <p:nvSpPr>
+          <p:cNvPr id="35" name="TextBox 34"/>
+          <p:cNvSpPr txBox="1"/>
+          <p:nvPr/>
+        </p:nvSpPr>
+        <p:spPr>
+          <a:xfrm>
+            <a:off x="9134856" y="3611880"/>
+            <a:ext cx="2331720" cy="502920"/>
+          </a:xfrm>
+          <a:prstGeom prst="rect">
+            <a:avLst/>
+          </a:prstGeom>
+          <a:noFill/>
+        </p:spPr>
+        <p:txBody>
+          <a:bodyPr wrap="square" anchor="t" lIns="25400" rIns="25400">
+            <a:spAutoFit/>
+          </a:bodyPr>
+          <a:lstStyle/>
+          <a:p>
+            <a:pPr algn="l"/>
+            <a:r>
+              <a:rPr sz="2200" b="1" i="0">
+                <a:solidFill>
+                  <a:srgbClr val="007CC5"/>
+                </a:solidFill>
+                <a:latin typeface="Montserrat"/>
+              </a:rPr>
+              <a:t>24/07/2026</a:t>
+            </a:r>
+          </a:p>
+        </p:txBody>
+      </p:sp>
+      <p:sp>
+        <p:nvSpPr>
+          <p:cNvPr id="36" name="TextBox 35"/>
+          <p:cNvSpPr txBox="1"/>
+          <p:nvPr/>
+        </p:nvSpPr>
+        <p:spPr>
+          <a:xfrm>
+            <a:off x="9134856" y="4206240"/>
+            <a:ext cx="2331720" cy="914400"/>
+          </a:xfrm>
+          <a:prstGeom prst="rect">
+            <a:avLst/>
+          </a:prstGeom>
+          <a:noFill/>
+        </p:spPr>
+        <p:txBody>
+          <a:bodyPr wrap="square" anchor="t" lIns="25400" rIns="25400">
+            <a:spAutoFit/>
+          </a:bodyPr>
+          <a:lstStyle/>
+          <a:p>
+            <a:pPr algn="l">
+              <a:lnSpc>
+                <a:spcPct val="105000"/>
+              </a:lnSpc>
+            </a:pPr>
+            <a:r>
+              <a:rPr sz="1050" b="0" i="0">
+                <a:solidFill>
+                  <a:srgbClr val="20303F"/>
+                </a:solidFill>
+                <a:latin typeface="Montserrat"/>
+              </a:rPr>
+              <a:t>4 esteiras + 1 sobressalente; 1 concluída. Esteiras concluídas até 24/07/2026.</a:t>
+            </a:r>
+          </a:p>
+        </p:txBody>
+      </p:sp>
+      <p:sp>
+        <p:nvSpPr>
+          <p:cNvPr id="37" name="TextBox 36"/>
+          <p:cNvSpPr txBox="1"/>
+          <p:nvPr/>
+        </p:nvSpPr>
+        <p:spPr>
+          <a:xfrm>
+            <a:off x="502920" y="6419088"/>
+            <a:ext cx="9144000" cy="320040"/>
+          </a:xfrm>
+          <a:prstGeom prst="rect">
+            <a:avLst/>
+          </a:prstGeom>
+          <a:noFill/>
+        </p:spPr>
+        <p:txBody>
+          <a:bodyPr wrap="square" anchor="t" lIns="25400" rIns="25400">
+            <a:spAutoFit/>
+          </a:bodyPr>
+          <a:lstStyle/>
+          <a:p>
+            <a:pPr algn="l"/>
+            <a:r>
               <a:rPr sz="900" b="0" i="0">
                 <a:solidFill>
                   <a:srgbClr val="6B7885"/>
@@ -6227,7 +9142,7 @@
       </p:sp>
       <p:sp>
         <p:nvSpPr>
-          <p:cNvPr id="35" name="TextBox 34"/>
+          <p:cNvPr id="38" name="TextBox 37"/>
           <p:cNvSpPr txBox="1"/>
           <p:nvPr/>
         </p:nvSpPr>
@@ -6440,7 +9355,7 @@
                 </a:solidFill>
                 <a:latin typeface="Montserrat"/>
               </a:rPr>
-              <a:t>CONSISTÊNCIA DOS NÚMEROS</a:t>
+              <a:t>LINHA DO TEMPO</a:t>
             </a:r>
           </a:p>
         </p:txBody>
@@ -6475,27 +9390,27 @@
                 </a:solidFill>
                 <a:latin typeface="Montserrat"/>
               </a:rPr>
-              <a:t>Reconciliação: levantamento × execução</a:t>
-            </a:r>
-          </a:p>
-        </p:txBody>
-      </p:sp>
-      <p:sp>
-        <p:nvSpPr>
-          <p:cNvPr id="7" name="Rounded Rectangle 6"/>
-          <p:cNvSpPr/>
-          <p:nvPr/>
-        </p:nvSpPr>
-        <p:spPr>
-          <a:xfrm>
-            <a:off x="502920" y="1417320"/>
-            <a:ext cx="5486400" cy="4343400"/>
-          </a:xfrm>
-          <a:prstGeom prst="roundRect">
+              <a:t>Marcos de conclusão (jul → dez/2026)</a:t>
+            </a:r>
+          </a:p>
+        </p:txBody>
+      </p:sp>
+      <p:sp>
+        <p:nvSpPr>
+          <p:cNvPr id="7" name="Rectangle 6"/>
+          <p:cNvSpPr/>
+          <p:nvPr/>
+        </p:nvSpPr>
+        <p:spPr>
+          <a:xfrm>
+            <a:off x="2377440" y="1600200"/>
+            <a:ext cx="12700" cy="4023360"/>
+          </a:xfrm>
+          <a:prstGeom prst="rect">
             <a:avLst/>
           </a:prstGeom>
           <a:solidFill>
-            <a:srgbClr val="F2F5F8"/>
+            <a:srgbClr val="BDBFC1"/>
           </a:solidFill>
           <a:ln>
             <a:noFill/>
@@ -6532,8 +9447,8 @@
         </p:nvSpPr>
         <p:spPr>
           <a:xfrm>
-            <a:off x="731520" y="1600200"/>
-            <a:ext cx="5029200" cy="365760"/>
+            <a:off x="2377440" y="1581912"/>
+            <a:ext cx="1280160" cy="274320"/>
           </a:xfrm>
           <a:prstGeom prst="rect">
             <a:avLst/>
@@ -6548,208 +9463,33 @@
           <a:p>
             <a:pPr algn="l"/>
             <a:r>
-              <a:rPr sz="1500" b="1" i="0">
+              <a:rPr sz="1200" b="1" i="0">
                 <a:solidFill>
                   <a:srgbClr val="124E81"/>
                 </a:solidFill>
                 <a:latin typeface="Montserrat"/>
               </a:rPr>
-              <a:t>Levantamento FLEXLAB (jun/2026)</a:t>
-            </a:r>
-          </a:p>
-        </p:txBody>
-      </p:sp>
-      <p:sp>
-        <p:nvSpPr>
-          <p:cNvPr id="9" name="TextBox 8"/>
-          <p:cNvSpPr txBox="1"/>
-          <p:nvPr/>
-        </p:nvSpPr>
-        <p:spPr>
-          <a:xfrm>
-            <a:off x="777240" y="2148840"/>
-            <a:ext cx="5029200" cy="603504"/>
-          </a:xfrm>
-          <a:prstGeom prst="rect">
-            <a:avLst/>
-          </a:prstGeom>
-          <a:noFill/>
-        </p:spPr>
-        <p:txBody>
-          <a:bodyPr wrap="square" anchor="t" lIns="25400" rIns="25400">
-            <a:spAutoFit/>
-          </a:bodyPr>
-          <a:lstStyle/>
-          <a:p>
-            <a:pPr algn="l"/>
-            <a:r>
-              <a:rPr sz="1300" b="0" i="0">
-                <a:solidFill>
-                  <a:srgbClr val="20303F"/>
-                </a:solidFill>
-                <a:latin typeface="Montserrat"/>
-              </a:rPr>
-              <a:t>•  148 correias auditadas no grupo</a:t>
-            </a:r>
-          </a:p>
-        </p:txBody>
-      </p:sp>
-      <p:sp>
-        <p:nvSpPr>
-          <p:cNvPr id="10" name="TextBox 9"/>
-          <p:cNvSpPr txBox="1"/>
-          <p:nvPr/>
-        </p:nvSpPr>
-        <p:spPr>
-          <a:xfrm>
-            <a:off x="777240" y="2770632"/>
-            <a:ext cx="5029200" cy="603504"/>
-          </a:xfrm>
-          <a:prstGeom prst="rect">
-            <a:avLst/>
-          </a:prstGeom>
-          <a:noFill/>
-        </p:spPr>
-        <p:txBody>
-          <a:bodyPr wrap="square" anchor="t" lIns="25400" rIns="25400">
-            <a:spAutoFit/>
-          </a:bodyPr>
-          <a:lstStyle/>
-          <a:p>
-            <a:pPr algn="l"/>
-            <a:r>
-              <a:rPr sz="1300" b="0" i="0">
-                <a:solidFill>
-                  <a:srgbClr val="6B7885"/>
-                </a:solidFill>
-                <a:latin typeface="Montserrat"/>
-              </a:rPr>
-              <a:t>102 mantidas em operação</a:t>
-            </a:r>
-          </a:p>
-        </p:txBody>
-      </p:sp>
-      <p:sp>
-        <p:nvSpPr>
-          <p:cNvPr id="11" name="TextBox 10"/>
-          <p:cNvSpPr txBox="1"/>
-          <p:nvPr/>
-        </p:nvSpPr>
-        <p:spPr>
-          <a:xfrm>
-            <a:off x="777240" y="3392424"/>
-            <a:ext cx="5029200" cy="603504"/>
-          </a:xfrm>
-          <a:prstGeom prst="rect">
-            <a:avLst/>
-          </a:prstGeom>
-          <a:noFill/>
-        </p:spPr>
-        <p:txBody>
-          <a:bodyPr wrap="square" anchor="t" lIns="25400" rIns="25400">
-            <a:spAutoFit/>
-          </a:bodyPr>
-          <a:lstStyle/>
-          <a:p>
-            <a:pPr algn="l"/>
-            <a:r>
-              <a:rPr sz="1300" b="1" i="0">
-                <a:solidFill>
-                  <a:srgbClr val="20303F"/>
-                </a:solidFill>
-                <a:latin typeface="Montserrat"/>
-              </a:rPr>
-              <a:t>•  46 a substituir  →  R$ 6,15 mi (só correias)</a:t>
-            </a:r>
-          </a:p>
-        </p:txBody>
-      </p:sp>
-      <p:sp>
-        <p:nvSpPr>
-          <p:cNvPr id="12" name="TextBox 11"/>
-          <p:cNvSpPr txBox="1"/>
-          <p:nvPr/>
-        </p:nvSpPr>
-        <p:spPr>
-          <a:xfrm>
-            <a:off x="777240" y="4014216"/>
-            <a:ext cx="5029200" cy="603504"/>
-          </a:xfrm>
-          <a:prstGeom prst="rect">
-            <a:avLst/>
-          </a:prstGeom>
-          <a:noFill/>
-        </p:spPr>
-        <p:txBody>
-          <a:bodyPr wrap="square" anchor="t" lIns="25400" rIns="25400">
-            <a:spAutoFit/>
-          </a:bodyPr>
-          <a:lstStyle/>
-          <a:p>
-            <a:pPr algn="l"/>
-            <a:r>
-              <a:rPr sz="1300" b="0" i="0">
-                <a:solidFill>
-                  <a:srgbClr val="6B7885"/>
-                </a:solidFill>
-                <a:latin typeface="Montserrat"/>
-              </a:rPr>
-              <a:t>   • 41 reprovadas no ensaio ISO 340</a:t>
-            </a:r>
-          </a:p>
-        </p:txBody>
-      </p:sp>
-      <p:sp>
-        <p:nvSpPr>
-          <p:cNvPr id="13" name="TextBox 12"/>
-          <p:cNvSpPr txBox="1"/>
-          <p:nvPr/>
-        </p:nvSpPr>
-        <p:spPr>
-          <a:xfrm>
-            <a:off x="777240" y="4636008"/>
-            <a:ext cx="5029200" cy="603504"/>
-          </a:xfrm>
-          <a:prstGeom prst="rect">
-            <a:avLst/>
-          </a:prstGeom>
-          <a:noFill/>
-        </p:spPr>
-        <p:txBody>
-          <a:bodyPr wrap="square" anchor="t" lIns="25400" rIns="25400">
-            <a:spAutoFit/>
-          </a:bodyPr>
-          <a:lstStyle/>
-          <a:p>
-            <a:pPr algn="l"/>
-            <a:r>
-              <a:rPr sz="1300" b="0" i="0">
-                <a:solidFill>
-                  <a:srgbClr val="6B7885"/>
-                </a:solidFill>
-                <a:latin typeface="Montserrat"/>
-              </a:rPr>
-              <a:t>   • 5 por degradação física</a:t>
-            </a:r>
-          </a:p>
-        </p:txBody>
-      </p:sp>
-      <p:sp>
-        <p:nvSpPr>
-          <p:cNvPr id="14" name="Rounded Rectangle 13"/>
-          <p:cNvSpPr/>
-          <p:nvPr/>
-        </p:nvSpPr>
-        <p:spPr>
-          <a:xfrm>
-            <a:off x="6217920" y="1417320"/>
-            <a:ext cx="5486400" cy="4343400"/>
-          </a:xfrm>
-          <a:prstGeom prst="roundRect">
+              <a:t>Jul</a:t>
+            </a:r>
+          </a:p>
+        </p:txBody>
+      </p:sp>
+      <p:sp>
+        <p:nvSpPr>
+          <p:cNvPr id="9" name="Rectangle 8"/>
+          <p:cNvSpPr/>
+          <p:nvPr/>
+        </p:nvSpPr>
+        <p:spPr>
+          <a:xfrm>
+            <a:off x="3910933" y="1600200"/>
+            <a:ext cx="12700" cy="4023360"/>
+          </a:xfrm>
+          <a:prstGeom prst="rect">
             <a:avLst/>
           </a:prstGeom>
           <a:solidFill>
-            <a:srgbClr val="F2F5F8"/>
+            <a:srgbClr val="BDBFC1"/>
           </a:solidFill>
           <a:ln>
             <a:noFill/>
@@ -6780,14 +9520,14 @@
       </p:sp>
       <p:sp>
         <p:nvSpPr>
-          <p:cNvPr id="15" name="TextBox 14"/>
+          <p:cNvPr id="10" name="TextBox 9"/>
           <p:cNvSpPr txBox="1"/>
           <p:nvPr/>
         </p:nvSpPr>
         <p:spPr>
           <a:xfrm>
-            <a:off x="6446520" y="1600200"/>
-            <a:ext cx="5029200" cy="365760"/>
+            <a:off x="3910933" y="1581912"/>
+            <a:ext cx="1280160" cy="274320"/>
           </a:xfrm>
           <a:prstGeom prst="rect">
             <a:avLst/>
@@ -6802,27 +9542,71 @@
           <a:p>
             <a:pPr algn="l"/>
             <a:r>
-              <a:rPr sz="1500" b="1" i="0">
-                <a:solidFill>
-                  <a:srgbClr val="609346"/>
+              <a:rPr sz="1200" b="1" i="0">
+                <a:solidFill>
+                  <a:srgbClr val="124E81"/>
                 </a:solidFill>
                 <a:latin typeface="Montserrat"/>
               </a:rPr>
-              <a:t>Plano de execução (dashboard atual)</a:t>
-            </a:r>
-          </a:p>
-        </p:txBody>
-      </p:sp>
-      <p:sp>
-        <p:nvSpPr>
-          <p:cNvPr id="16" name="TextBox 15"/>
+              <a:t>Ago</a:t>
+            </a:r>
+          </a:p>
+        </p:txBody>
+      </p:sp>
+      <p:sp>
+        <p:nvSpPr>
+          <p:cNvPr id="11" name="Rectangle 10"/>
+          <p:cNvSpPr/>
+          <p:nvPr/>
+        </p:nvSpPr>
+        <p:spPr>
+          <a:xfrm>
+            <a:off x="5444427" y="1600200"/>
+            <a:ext cx="12700" cy="4023360"/>
+          </a:xfrm>
+          <a:prstGeom prst="rect">
+            <a:avLst/>
+          </a:prstGeom>
+          <a:solidFill>
+            <a:srgbClr val="BDBFC1"/>
+          </a:solidFill>
+          <a:ln>
+            <a:noFill/>
+          </a:ln>
+          <a:effectLst/>
+        </p:spPr>
+        <p:style>
+          <a:lnRef idx="1">
+            <a:schemeClr val="accent1"/>
+          </a:lnRef>
+          <a:fillRef idx="3">
+            <a:schemeClr val="accent1"/>
+          </a:fillRef>
+          <a:effectRef idx="2">
+            <a:schemeClr val="accent1"/>
+          </a:effectRef>
+          <a:fontRef idx="minor">
+            <a:schemeClr val="lt1"/>
+          </a:fontRef>
+        </p:style>
+        <p:txBody>
+          <a:bodyPr rtlCol="0" anchor="ctr"/>
+          <a:lstStyle/>
+          <a:p>
+            <a:pPr algn="ctr"/>
+          </a:p>
+        </p:txBody>
+      </p:sp>
+      <p:sp>
+        <p:nvSpPr>
+          <p:cNvPr id="12" name="TextBox 11"/>
           <p:cNvSpPr txBox="1"/>
           <p:nvPr/>
         </p:nvSpPr>
         <p:spPr>
           <a:xfrm>
-            <a:off x="6492240" y="2148840"/>
-            <a:ext cx="5029200" cy="603504"/>
+            <a:off x="5444427" y="1581912"/>
+            <a:ext cx="1280160" cy="274320"/>
           </a:xfrm>
           <a:prstGeom prst="rect">
             <a:avLst/>
@@ -6837,27 +9621,71 @@
           <a:p>
             <a:pPr algn="l"/>
             <a:r>
-              <a:rPr sz="1300" b="1" i="0">
-                <a:solidFill>
-                  <a:srgbClr val="20303F"/>
+              <a:rPr sz="1200" b="1" i="0">
+                <a:solidFill>
+                  <a:srgbClr val="124E81"/>
                 </a:solidFill>
                 <a:latin typeface="Montserrat"/>
               </a:rPr>
-              <a:t>•  46 correias no plano  ✓ bate com as 46</a:t>
-            </a:r>
-          </a:p>
-        </p:txBody>
-      </p:sp>
-      <p:sp>
-        <p:nvSpPr>
-          <p:cNvPr id="17" name="TextBox 16"/>
+              <a:t>Set</a:t>
+            </a:r>
+          </a:p>
+        </p:txBody>
+      </p:sp>
+      <p:sp>
+        <p:nvSpPr>
+          <p:cNvPr id="13" name="Rectangle 12"/>
+          <p:cNvSpPr/>
+          <p:nvPr/>
+        </p:nvSpPr>
+        <p:spPr>
+          <a:xfrm>
+            <a:off x="6928453" y="1600200"/>
+            <a:ext cx="12700" cy="4023360"/>
+          </a:xfrm>
+          <a:prstGeom prst="rect">
+            <a:avLst/>
+          </a:prstGeom>
+          <a:solidFill>
+            <a:srgbClr val="BDBFC1"/>
+          </a:solidFill>
+          <a:ln>
+            <a:noFill/>
+          </a:ln>
+          <a:effectLst/>
+        </p:spPr>
+        <p:style>
+          <a:lnRef idx="1">
+            <a:schemeClr val="accent1"/>
+          </a:lnRef>
+          <a:fillRef idx="3">
+            <a:schemeClr val="accent1"/>
+          </a:fillRef>
+          <a:effectRef idx="2">
+            <a:schemeClr val="accent1"/>
+          </a:effectRef>
+          <a:fontRef idx="minor">
+            <a:schemeClr val="lt1"/>
+          </a:fontRef>
+        </p:style>
+        <p:txBody>
+          <a:bodyPr rtlCol="0" anchor="ctr"/>
+          <a:lstStyle/>
+          <a:p>
+            <a:pPr algn="ctr"/>
+          </a:p>
+        </p:txBody>
+      </p:sp>
+      <p:sp>
+        <p:nvSpPr>
+          <p:cNvPr id="14" name="TextBox 13"/>
           <p:cNvSpPr txBox="1"/>
           <p:nvPr/>
         </p:nvSpPr>
         <p:spPr>
           <a:xfrm>
-            <a:off x="6492240" y="2770632"/>
-            <a:ext cx="5029200" cy="603504"/>
+            <a:off x="6928453" y="1581912"/>
+            <a:ext cx="1280160" cy="274320"/>
           </a:xfrm>
           <a:prstGeom prst="rect">
             <a:avLst/>
@@ -6872,27 +9700,71 @@
           <a:p>
             <a:pPr algn="l"/>
             <a:r>
-              <a:rPr sz="1300" b="0" i="0">
-                <a:solidFill>
-                  <a:srgbClr val="6B7885"/>
+              <a:rPr sz="1200" b="1" i="0">
+                <a:solidFill>
+                  <a:srgbClr val="124E81"/>
                 </a:solidFill>
                 <a:latin typeface="Montserrat"/>
               </a:rPr>
-              <a:t>   • 3 já concluídas</a:t>
-            </a:r>
-          </a:p>
-        </p:txBody>
-      </p:sp>
-      <p:sp>
-        <p:nvSpPr>
-          <p:cNvPr id="18" name="TextBox 17"/>
+              <a:t>Out</a:t>
+            </a:r>
+          </a:p>
+        </p:txBody>
+      </p:sp>
+      <p:sp>
+        <p:nvSpPr>
+          <p:cNvPr id="15" name="Rectangle 14"/>
+          <p:cNvSpPr/>
+          <p:nvPr/>
+        </p:nvSpPr>
+        <p:spPr>
+          <a:xfrm>
+            <a:off x="8461947" y="1600200"/>
+            <a:ext cx="12700" cy="4023360"/>
+          </a:xfrm>
+          <a:prstGeom prst="rect">
+            <a:avLst/>
+          </a:prstGeom>
+          <a:solidFill>
+            <a:srgbClr val="BDBFC1"/>
+          </a:solidFill>
+          <a:ln>
+            <a:noFill/>
+          </a:ln>
+          <a:effectLst/>
+        </p:spPr>
+        <p:style>
+          <a:lnRef idx="1">
+            <a:schemeClr val="accent1"/>
+          </a:lnRef>
+          <a:fillRef idx="3">
+            <a:schemeClr val="accent1"/>
+          </a:fillRef>
+          <a:effectRef idx="2">
+            <a:schemeClr val="accent1"/>
+          </a:effectRef>
+          <a:fontRef idx="minor">
+            <a:schemeClr val="lt1"/>
+          </a:fontRef>
+        </p:style>
+        <p:txBody>
+          <a:bodyPr rtlCol="0" anchor="ctr"/>
+          <a:lstStyle/>
+          <a:p>
+            <a:pPr algn="ctr"/>
+          </a:p>
+        </p:txBody>
+      </p:sp>
+      <p:sp>
+        <p:nvSpPr>
+          <p:cNvPr id="16" name="TextBox 15"/>
           <p:cNvSpPr txBox="1"/>
           <p:nvPr/>
         </p:nvSpPr>
         <p:spPr>
           <a:xfrm>
-            <a:off x="6492240" y="3392424"/>
-            <a:ext cx="5029200" cy="603504"/>
+            <a:off x="8461947" y="1581912"/>
+            <a:ext cx="1280160" cy="274320"/>
           </a:xfrm>
           <a:prstGeom prst="rect">
             <a:avLst/>
@@ -6907,27 +9779,71 @@
           <a:p>
             <a:pPr algn="l"/>
             <a:r>
-              <a:rPr sz="1300" b="0" i="0">
-                <a:solidFill>
-                  <a:srgbClr val="6B7885"/>
+              <a:rPr sz="1200" b="1" i="0">
+                <a:solidFill>
+                  <a:srgbClr val="124E81"/>
                 </a:solidFill>
                 <a:latin typeface="Montserrat"/>
               </a:rPr>
-              <a:t>   • 43 em execução</a:t>
-            </a:r>
-          </a:p>
-        </p:txBody>
-      </p:sp>
-      <p:sp>
-        <p:nvSpPr>
-          <p:cNvPr id="19" name="TextBox 18"/>
+              <a:t>Nov</a:t>
+            </a:r>
+          </a:p>
+        </p:txBody>
+      </p:sp>
+      <p:sp>
+        <p:nvSpPr>
+          <p:cNvPr id="17" name="Rectangle 16"/>
+          <p:cNvSpPr/>
+          <p:nvPr/>
+        </p:nvSpPr>
+        <p:spPr>
+          <a:xfrm>
+            <a:off x="9945973" y="1600200"/>
+            <a:ext cx="12700" cy="4023360"/>
+          </a:xfrm>
+          <a:prstGeom prst="rect">
+            <a:avLst/>
+          </a:prstGeom>
+          <a:solidFill>
+            <a:srgbClr val="BDBFC1"/>
+          </a:solidFill>
+          <a:ln>
+            <a:noFill/>
+          </a:ln>
+          <a:effectLst/>
+        </p:spPr>
+        <p:style>
+          <a:lnRef idx="1">
+            <a:schemeClr val="accent1"/>
+          </a:lnRef>
+          <a:fillRef idx="3">
+            <a:schemeClr val="accent1"/>
+          </a:fillRef>
+          <a:effectRef idx="2">
+            <a:schemeClr val="accent1"/>
+          </a:effectRef>
+          <a:fontRef idx="minor">
+            <a:schemeClr val="lt1"/>
+          </a:fontRef>
+        </p:style>
+        <p:txBody>
+          <a:bodyPr rtlCol="0" anchor="ctr"/>
+          <a:lstStyle/>
+          <a:p>
+            <a:pPr algn="ctr"/>
+          </a:p>
+        </p:txBody>
+      </p:sp>
+      <p:sp>
+        <p:nvSpPr>
+          <p:cNvPr id="18" name="TextBox 17"/>
           <p:cNvSpPr txBox="1"/>
           <p:nvPr/>
         </p:nvSpPr>
         <p:spPr>
           <a:xfrm>
-            <a:off x="6492240" y="4014216"/>
-            <a:ext cx="5029200" cy="603504"/>
+            <a:off x="9945973" y="1581912"/>
+            <a:ext cx="1280160" cy="274320"/>
           </a:xfrm>
           <a:prstGeom prst="rect">
             <a:avLst/>
@@ -6942,14 +9858,58 @@
           <a:p>
             <a:pPr algn="l"/>
             <a:r>
-              <a:rPr sz="1300" b="1" i="0">
-                <a:solidFill>
-                  <a:srgbClr val="20303F"/>
+              <a:rPr sz="1200" b="1" i="0">
+                <a:solidFill>
+                  <a:srgbClr val="124E81"/>
                 </a:solidFill>
                 <a:latin typeface="Montserrat"/>
               </a:rPr>
-              <a:t>•  Conclusão: 30/12/2026</a:t>
-            </a:r>
+              <a:t>Dez</a:t>
+            </a:r>
+          </a:p>
+        </p:txBody>
+      </p:sp>
+      <p:sp>
+        <p:nvSpPr>
+          <p:cNvPr id="19" name="Rectangle 18"/>
+          <p:cNvSpPr/>
+          <p:nvPr/>
+        </p:nvSpPr>
+        <p:spPr>
+          <a:xfrm>
+            <a:off x="2426907" y="1874520"/>
+            <a:ext cx="25400" cy="3703320"/>
+          </a:xfrm>
+          <a:prstGeom prst="rect">
+            <a:avLst/>
+          </a:prstGeom>
+          <a:solidFill>
+            <a:srgbClr val="CC5121"/>
+          </a:solidFill>
+          <a:ln>
+            <a:noFill/>
+          </a:ln>
+          <a:effectLst/>
+        </p:spPr>
+        <p:style>
+          <a:lnRef idx="1">
+            <a:schemeClr val="accent1"/>
+          </a:lnRef>
+          <a:fillRef idx="3">
+            <a:schemeClr val="accent1"/>
+          </a:fillRef>
+          <a:effectRef idx="2">
+            <a:schemeClr val="accent1"/>
+          </a:effectRef>
+          <a:fontRef idx="minor">
+            <a:schemeClr val="lt1"/>
+          </a:fontRef>
+        </p:style>
+        <p:txBody>
+          <a:bodyPr rtlCol="0" anchor="ctr"/>
+          <a:lstStyle/>
+          <a:p>
+            <a:pPr algn="ctr"/>
           </a:p>
         </p:txBody>
       </p:sp>
@@ -6961,8 +9921,8 @@
         </p:nvSpPr>
         <p:spPr>
           <a:xfrm>
-            <a:off x="6492240" y="4636008"/>
-            <a:ext cx="5029200" cy="603504"/>
+            <a:off x="2152587" y="1618488"/>
+            <a:ext cx="1097280" cy="256032"/>
           </a:xfrm>
           <a:prstGeom prst="rect">
             <a:avLst/>
@@ -6977,13 +9937,13 @@
           <a:p>
             <a:pPr algn="l"/>
             <a:r>
-              <a:rPr sz="1300" b="0" i="0">
-                <a:solidFill>
-                  <a:srgbClr val="6B7885"/>
+              <a:rPr sz="1000" b="1" i="0">
+                <a:solidFill>
+                  <a:srgbClr val="CC5121"/>
                 </a:solidFill>
                 <a:latin typeface="Montserrat"/>
               </a:rPr>
-              <a:t>0 correias vencidas</a:t>
+              <a:t>HOJE</a:t>
             </a:r>
           </a:p>
         </p:txBody>
@@ -6996,8 +9956,512 @@
         </p:nvSpPr>
         <p:spPr>
           <a:xfrm>
-            <a:off x="502920" y="5806440"/>
-            <a:ext cx="11247120" cy="548640"/>
+            <a:off x="502920" y="2103120"/>
+            <a:ext cx="1783080" cy="868680"/>
+          </a:xfrm>
+          <a:prstGeom prst="rect">
+            <a:avLst/>
+          </a:prstGeom>
+          <a:noFill/>
+        </p:spPr>
+        <p:txBody>
+          <a:bodyPr wrap="square" anchor="ctr" lIns="25400" rIns="25400">
+            <a:spAutoFit/>
+          </a:bodyPr>
+          <a:lstStyle/>
+          <a:p>
+            <a:pPr algn="l"/>
+            <a:r>
+              <a:rPr sz="1100" b="1" i="0">
+                <a:solidFill>
+                  <a:srgbClr val="124E81"/>
+                </a:solidFill>
+                <a:latin typeface="Montserrat"/>
+              </a:rPr>
+              <a:t>NMT · Nova Mutum</a:t>
+            </a:r>
+          </a:p>
+          <a:p>
+            <a:pPr algn="l"/>
+            <a:r>
+              <a:rPr sz="1100" b="1" i="0">
+                <a:solidFill>
+                  <a:srgbClr val="124E81"/>
+                </a:solidFill>
+                <a:latin typeface="Montserrat"/>
+              </a:rPr>
+              <a:t>16 correias</a:t>
+            </a:r>
+          </a:p>
+        </p:txBody>
+      </p:sp>
+      <p:sp>
+        <p:nvSpPr>
+          <p:cNvPr id="22" name="Rounded Rectangle 21"/>
+          <p:cNvSpPr/>
+          <p:nvPr/>
+        </p:nvSpPr>
+        <p:spPr>
+          <a:xfrm>
+            <a:off x="2377440" y="2304288"/>
+            <a:ext cx="5589832" cy="384048"/>
+          </a:xfrm>
+          <a:prstGeom prst="roundRect">
+            <a:avLst/>
+          </a:prstGeom>
+          <a:solidFill>
+            <a:srgbClr val="124E81"/>
+          </a:solidFill>
+          <a:ln>
+            <a:noFill/>
+          </a:ln>
+          <a:effectLst/>
+        </p:spPr>
+        <p:style>
+          <a:lnRef idx="1">
+            <a:schemeClr val="accent1"/>
+          </a:lnRef>
+          <a:fillRef idx="3">
+            <a:schemeClr val="accent1"/>
+          </a:fillRef>
+          <a:effectRef idx="2">
+            <a:schemeClr val="accent1"/>
+          </a:effectRef>
+          <a:fontRef idx="minor">
+            <a:schemeClr val="lt1"/>
+          </a:fontRef>
+        </p:style>
+        <p:txBody>
+          <a:bodyPr rtlCol="0" anchor="ctr"/>
+          <a:lstStyle/>
+          <a:p>
+            <a:pPr algn="ctr"/>
+          </a:p>
+        </p:txBody>
+      </p:sp>
+      <p:sp>
+        <p:nvSpPr>
+          <p:cNvPr id="23" name="TextBox 22"/>
+          <p:cNvSpPr txBox="1"/>
+          <p:nvPr/>
+        </p:nvSpPr>
+        <p:spPr>
+          <a:xfrm>
+            <a:off x="8058712" y="2286000"/>
+            <a:ext cx="1645920" cy="411480"/>
+          </a:xfrm>
+          <a:prstGeom prst="rect">
+            <a:avLst/>
+          </a:prstGeom>
+          <a:noFill/>
+        </p:spPr>
+        <p:txBody>
+          <a:bodyPr wrap="square" anchor="ctr" lIns="25400" rIns="25400">
+            <a:spAutoFit/>
+          </a:bodyPr>
+          <a:lstStyle/>
+          <a:p>
+            <a:pPr algn="l"/>
+            <a:r>
+              <a:rPr sz="1100" b="1" i="0">
+                <a:solidFill>
+                  <a:srgbClr val="20303F"/>
+                </a:solidFill>
+                <a:latin typeface="Montserrat"/>
+              </a:rPr>
+              <a:t>22/10/2026</a:t>
+            </a:r>
+          </a:p>
+        </p:txBody>
+      </p:sp>
+      <p:sp>
+        <p:nvSpPr>
+          <p:cNvPr id="24" name="TextBox 23"/>
+          <p:cNvSpPr txBox="1"/>
+          <p:nvPr/>
+        </p:nvSpPr>
+        <p:spPr>
+          <a:xfrm>
+            <a:off x="502920" y="2971800"/>
+            <a:ext cx="1783080" cy="868680"/>
+          </a:xfrm>
+          <a:prstGeom prst="rect">
+            <a:avLst/>
+          </a:prstGeom>
+          <a:noFill/>
+        </p:spPr>
+        <p:txBody>
+          <a:bodyPr wrap="square" anchor="ctr" lIns="25400" rIns="25400">
+            <a:spAutoFit/>
+          </a:bodyPr>
+          <a:lstStyle/>
+          <a:p>
+            <a:pPr algn="l"/>
+            <a:r>
+              <a:rPr sz="1100" b="1" i="0">
+                <a:solidFill>
+                  <a:srgbClr val="EAA239"/>
+                </a:solidFill>
+                <a:latin typeface="Montserrat"/>
+              </a:rPr>
+              <a:t>SNP · Sinop</a:t>
+            </a:r>
+          </a:p>
+          <a:p>
+            <a:pPr algn="l"/>
+            <a:r>
+              <a:rPr sz="1100" b="1" i="0">
+                <a:solidFill>
+                  <a:srgbClr val="EAA239"/>
+                </a:solidFill>
+                <a:latin typeface="Montserrat"/>
+              </a:rPr>
+              <a:t>23 correias</a:t>
+            </a:r>
+          </a:p>
+        </p:txBody>
+      </p:sp>
+      <p:sp>
+        <p:nvSpPr>
+          <p:cNvPr id="25" name="Rounded Rectangle 24"/>
+          <p:cNvSpPr/>
+          <p:nvPr/>
+        </p:nvSpPr>
+        <p:spPr>
+          <a:xfrm>
+            <a:off x="2377440" y="3172968"/>
+            <a:ext cx="9003092" cy="384048"/>
+          </a:xfrm>
+          <a:prstGeom prst="roundRect">
+            <a:avLst/>
+          </a:prstGeom>
+          <a:solidFill>
+            <a:srgbClr val="EAA239"/>
+          </a:solidFill>
+          <a:ln>
+            <a:noFill/>
+          </a:ln>
+          <a:effectLst/>
+        </p:spPr>
+        <p:style>
+          <a:lnRef idx="1">
+            <a:schemeClr val="accent1"/>
+          </a:lnRef>
+          <a:fillRef idx="3">
+            <a:schemeClr val="accent1"/>
+          </a:fillRef>
+          <a:effectRef idx="2">
+            <a:schemeClr val="accent1"/>
+          </a:effectRef>
+          <a:fontRef idx="minor">
+            <a:schemeClr val="lt1"/>
+          </a:fontRef>
+        </p:style>
+        <p:txBody>
+          <a:bodyPr rtlCol="0" anchor="ctr"/>
+          <a:lstStyle/>
+          <a:p>
+            <a:pPr algn="ctr"/>
+          </a:p>
+        </p:txBody>
+      </p:sp>
+      <p:sp>
+        <p:nvSpPr>
+          <p:cNvPr id="26" name="TextBox 25"/>
+          <p:cNvSpPr txBox="1"/>
+          <p:nvPr/>
+        </p:nvSpPr>
+        <p:spPr>
+          <a:xfrm>
+            <a:off x="11471972" y="3154680"/>
+            <a:ext cx="1645920" cy="411480"/>
+          </a:xfrm>
+          <a:prstGeom prst="rect">
+            <a:avLst/>
+          </a:prstGeom>
+          <a:noFill/>
+        </p:spPr>
+        <p:txBody>
+          <a:bodyPr wrap="square" anchor="ctr" lIns="25400" rIns="25400">
+            <a:spAutoFit/>
+          </a:bodyPr>
+          <a:lstStyle/>
+          <a:p>
+            <a:pPr algn="l"/>
+            <a:r>
+              <a:rPr sz="1100" b="1" i="0">
+                <a:solidFill>
+                  <a:srgbClr val="20303F"/>
+                </a:solidFill>
+                <a:latin typeface="Montserrat"/>
+              </a:rPr>
+              <a:t>30/12/2026</a:t>
+            </a:r>
+          </a:p>
+        </p:txBody>
+      </p:sp>
+      <p:sp>
+        <p:nvSpPr>
+          <p:cNvPr id="27" name="TextBox 26"/>
+          <p:cNvSpPr txBox="1"/>
+          <p:nvPr/>
+        </p:nvSpPr>
+        <p:spPr>
+          <a:xfrm>
+            <a:off x="502920" y="3840480"/>
+            <a:ext cx="1783080" cy="868680"/>
+          </a:xfrm>
+          <a:prstGeom prst="rect">
+            <a:avLst/>
+          </a:prstGeom>
+          <a:noFill/>
+        </p:spPr>
+        <p:txBody>
+          <a:bodyPr wrap="square" anchor="ctr" lIns="25400" rIns="25400">
+            <a:spAutoFit/>
+          </a:bodyPr>
+          <a:lstStyle/>
+          <a:p>
+            <a:pPr algn="l"/>
+            <a:r>
+              <a:rPr sz="1100" b="1" i="0">
+                <a:solidFill>
+                  <a:srgbClr val="007D77"/>
+                </a:solidFill>
+                <a:latin typeface="Montserrat"/>
+              </a:rPr>
+              <a:t>SDR · Sidrolândia</a:t>
+            </a:r>
+          </a:p>
+          <a:p>
+            <a:pPr algn="l"/>
+            <a:r>
+              <a:rPr sz="1100" b="1" i="0">
+                <a:solidFill>
+                  <a:srgbClr val="007D77"/>
+                </a:solidFill>
+                <a:latin typeface="Montserrat"/>
+              </a:rPr>
+              <a:t>2 correias</a:t>
+            </a:r>
+          </a:p>
+        </p:txBody>
+      </p:sp>
+      <p:sp>
+        <p:nvSpPr>
+          <p:cNvPr id="28" name="Rounded Rectangle 27"/>
+          <p:cNvSpPr/>
+          <p:nvPr/>
+        </p:nvSpPr>
+        <p:spPr>
+          <a:xfrm>
+            <a:off x="2377440" y="4041648"/>
+            <a:ext cx="4501546" cy="384048"/>
+          </a:xfrm>
+          <a:prstGeom prst="roundRect">
+            <a:avLst/>
+          </a:prstGeom>
+          <a:solidFill>
+            <a:srgbClr val="007D77"/>
+          </a:solidFill>
+          <a:ln>
+            <a:noFill/>
+          </a:ln>
+          <a:effectLst/>
+        </p:spPr>
+        <p:style>
+          <a:lnRef idx="1">
+            <a:schemeClr val="accent1"/>
+          </a:lnRef>
+          <a:fillRef idx="3">
+            <a:schemeClr val="accent1"/>
+          </a:fillRef>
+          <a:effectRef idx="2">
+            <a:schemeClr val="accent1"/>
+          </a:effectRef>
+          <a:fontRef idx="minor">
+            <a:schemeClr val="lt1"/>
+          </a:fontRef>
+        </p:style>
+        <p:txBody>
+          <a:bodyPr rtlCol="0" anchor="ctr"/>
+          <a:lstStyle/>
+          <a:p>
+            <a:pPr algn="ctr"/>
+          </a:p>
+        </p:txBody>
+      </p:sp>
+      <p:sp>
+        <p:nvSpPr>
+          <p:cNvPr id="29" name="TextBox 28"/>
+          <p:cNvSpPr txBox="1"/>
+          <p:nvPr/>
+        </p:nvSpPr>
+        <p:spPr>
+          <a:xfrm>
+            <a:off x="6970426" y="4023360"/>
+            <a:ext cx="1645920" cy="411480"/>
+          </a:xfrm>
+          <a:prstGeom prst="rect">
+            <a:avLst/>
+          </a:prstGeom>
+          <a:noFill/>
+        </p:spPr>
+        <p:txBody>
+          <a:bodyPr wrap="square" anchor="ctr" lIns="25400" rIns="25400">
+            <a:spAutoFit/>
+          </a:bodyPr>
+          <a:lstStyle/>
+          <a:p>
+            <a:pPr algn="l"/>
+            <a:r>
+              <a:rPr sz="1100" b="1" i="0">
+                <a:solidFill>
+                  <a:srgbClr val="20303F"/>
+                </a:solidFill>
+                <a:latin typeface="Montserrat"/>
+              </a:rPr>
+              <a:t>30/09/2026</a:t>
+            </a:r>
+          </a:p>
+        </p:txBody>
+      </p:sp>
+      <p:sp>
+        <p:nvSpPr>
+          <p:cNvPr id="30" name="TextBox 29"/>
+          <p:cNvSpPr txBox="1"/>
+          <p:nvPr/>
+        </p:nvSpPr>
+        <p:spPr>
+          <a:xfrm>
+            <a:off x="502920" y="4709160"/>
+            <a:ext cx="1783080" cy="868680"/>
+          </a:xfrm>
+          <a:prstGeom prst="rect">
+            <a:avLst/>
+          </a:prstGeom>
+          <a:noFill/>
+        </p:spPr>
+        <p:txBody>
+          <a:bodyPr wrap="square" anchor="ctr" lIns="25400" rIns="25400">
+            <a:spAutoFit/>
+          </a:bodyPr>
+          <a:lstStyle/>
+          <a:p>
+            <a:pPr algn="l"/>
+            <a:r>
+              <a:rPr sz="1100" b="1" i="0">
+                <a:solidFill>
+                  <a:srgbClr val="007CC5"/>
+                </a:solidFill>
+                <a:latin typeface="Montserrat"/>
+              </a:rPr>
+              <a:t>BLS · Balsas</a:t>
+            </a:r>
+          </a:p>
+          <a:p>
+            <a:pPr algn="l"/>
+            <a:r>
+              <a:rPr sz="1100" b="1" i="0">
+                <a:solidFill>
+                  <a:srgbClr val="007CC5"/>
+                </a:solidFill>
+                <a:latin typeface="Montserrat"/>
+              </a:rPr>
+              <a:t>5 correias</a:t>
+            </a:r>
+          </a:p>
+        </p:txBody>
+      </p:sp>
+      <p:sp>
+        <p:nvSpPr>
+          <p:cNvPr id="31" name="Rounded Rectangle 30"/>
+          <p:cNvSpPr/>
+          <p:nvPr/>
+        </p:nvSpPr>
+        <p:spPr>
+          <a:xfrm>
+            <a:off x="2377440" y="4910328"/>
+            <a:ext cx="1137753" cy="384048"/>
+          </a:xfrm>
+          <a:prstGeom prst="roundRect">
+            <a:avLst/>
+          </a:prstGeom>
+          <a:solidFill>
+            <a:srgbClr val="007CC5"/>
+          </a:solidFill>
+          <a:ln>
+            <a:noFill/>
+          </a:ln>
+          <a:effectLst/>
+        </p:spPr>
+        <p:style>
+          <a:lnRef idx="1">
+            <a:schemeClr val="accent1"/>
+          </a:lnRef>
+          <a:fillRef idx="3">
+            <a:schemeClr val="accent1"/>
+          </a:fillRef>
+          <a:effectRef idx="2">
+            <a:schemeClr val="accent1"/>
+          </a:effectRef>
+          <a:fontRef idx="minor">
+            <a:schemeClr val="lt1"/>
+          </a:fontRef>
+        </p:style>
+        <p:txBody>
+          <a:bodyPr rtlCol="0" anchor="ctr"/>
+          <a:lstStyle/>
+          <a:p>
+            <a:pPr algn="ctr"/>
+          </a:p>
+        </p:txBody>
+      </p:sp>
+      <p:sp>
+        <p:nvSpPr>
+          <p:cNvPr id="32" name="TextBox 31"/>
+          <p:cNvSpPr txBox="1"/>
+          <p:nvPr/>
+        </p:nvSpPr>
+        <p:spPr>
+          <a:xfrm>
+            <a:off x="3606633" y="4892040"/>
+            <a:ext cx="1645920" cy="411480"/>
+          </a:xfrm>
+          <a:prstGeom prst="rect">
+            <a:avLst/>
+          </a:prstGeom>
+          <a:noFill/>
+        </p:spPr>
+        <p:txBody>
+          <a:bodyPr wrap="square" anchor="ctr" lIns="25400" rIns="25400">
+            <a:spAutoFit/>
+          </a:bodyPr>
+          <a:lstStyle/>
+          <a:p>
+            <a:pPr algn="l"/>
+            <a:r>
+              <a:rPr sz="1100" b="1" i="0">
+                <a:solidFill>
+                  <a:srgbClr val="20303F"/>
+                </a:solidFill>
+                <a:latin typeface="Montserrat"/>
+              </a:rPr>
+              <a:t>24/07/2026</a:t>
+            </a:r>
+          </a:p>
+        </p:txBody>
+      </p:sp>
+      <p:sp>
+        <p:nvSpPr>
+          <p:cNvPr id="33" name="TextBox 32"/>
+          <p:cNvSpPr txBox="1"/>
+          <p:nvPr/>
+        </p:nvSpPr>
+        <p:spPr>
+          <a:xfrm>
+            <a:off x="502920" y="5943600"/>
+            <a:ext cx="10972800" cy="365760"/>
           </a:xfrm>
           <a:prstGeom prst="rect">
             <a:avLst/>
@@ -7012,20 +10476,20 @@
           <a:p>
             <a:pPr algn="l"/>
             <a:r>
-              <a:rPr sz="1050" b="0" i="0">
-                <a:solidFill>
-                  <a:srgbClr val="CC5121"/>
+              <a:rPr sz="1300" b="1" i="0">
+                <a:solidFill>
+                  <a:srgbClr val="124E81"/>
                 </a:solidFill>
                 <a:latin typeface="Montserrat"/>
               </a:rPr>
-              <a:t>Obs.: R$ 6,15 mi = somente as correias (material) — montagem com mão de obra interna, apenas vulcanização externa · Dourados (DRD) e LEM sem pendências (fora do escopo) · cadastro do dashboard usa NVM/SDL → padronizar p/ NMT/SDR · 1 dos 46 é sobressalente em estoque (45 esteiras físicas).</a:t>
-            </a:r>
-          </a:p>
-        </p:txBody>
-      </p:sp>
-      <p:sp>
-        <p:nvSpPr>
-          <p:cNvPr id="22" name="TextBox 21"/>
+              <a:t>Conclusão de todo o programa: 30/12/2026 (última — Sinop, esteiras de cavacos da biomassa).</a:t>
+            </a:r>
+          </a:p>
+        </p:txBody>
+      </p:sp>
+      <p:sp>
+        <p:nvSpPr>
+          <p:cNvPr id="34" name="TextBox 33"/>
           <p:cNvSpPr txBox="1"/>
           <p:nvPr/>
         </p:nvSpPr>
@@ -7060,7 +10524,7 @@
       </p:sp>
       <p:sp>
         <p:nvSpPr>
-          <p:cNvPr id="23" name="TextBox 22"/>
+          <p:cNvPr id="35" name="TextBox 34"/>
           <p:cNvSpPr txBox="1"/>
           <p:nvPr/>
         </p:nvSpPr>
@@ -7273,7 +10737,7 @@
                 </a:solidFill>
                 <a:latin typeface="Montserrat"/>
               </a:rPr>
-              <a:t>DECISÃO E AÇÃO</a:t>
+              <a:t>CONSISTÊNCIA DOS NÚMEROS</a:t>
             </a:r>
           </a:p>
         </p:txBody>
@@ -7308,7 +10772,7 @@
                 </a:solidFill>
                 <a:latin typeface="Montserrat"/>
               </a:rPr>
-              <a:t>Cuidado especial até concluir a substituição</a:t>
+              <a:t>Reconciliação: levantamento × execução</a:t>
             </a:r>
           </a:p>
         </p:txBody>
@@ -7381,13 +10845,13 @@
           <a:p>
             <a:pPr algn="l"/>
             <a:r>
-              <a:rPr sz="1600" b="1" i="0">
-                <a:solidFill>
-                  <a:srgbClr val="CC5121"/>
+              <a:rPr sz="1500" b="1" i="0">
+                <a:solidFill>
+                  <a:srgbClr val="124E81"/>
                 </a:solidFill>
                 <a:latin typeface="Montserrat"/>
               </a:rPr>
-              <a:t>Pontos de atenção</a:t>
+              <a:t>Levantamento FLEXLAB (jun/2026)</a:t>
             </a:r>
           </a:p>
         </p:txBody>
@@ -7401,7 +10865,7 @@
         <p:spPr>
           <a:xfrm>
             <a:off x="777240" y="2148840"/>
-            <a:ext cx="4937760" cy="868680"/>
+            <a:ext cx="5029200" cy="603504"/>
           </a:xfrm>
           <a:prstGeom prst="rect">
             <a:avLst/>
@@ -7414,11 +10878,7 @@
           </a:bodyPr>
           <a:lstStyle/>
           <a:p>
-            <a:pPr algn="l">
-              <a:lnSpc>
-                <a:spcPct val="105000"/>
-              </a:lnSpc>
-            </a:pPr>
+            <a:pPr algn="l"/>
             <a:r>
               <a:rPr sz="1300" b="0" i="0">
                 <a:solidFill>
@@ -7426,7 +10886,7 @@
                 </a:solidFill>
                 <a:latin typeface="Montserrat"/>
               </a:rPr>
-              <a:t>•  7 correias urgentes (&lt;=30 dias) — biomassa (SNP), DDGS (SDR/BLS), julho.</a:t>
+              <a:t>•  148 correias auditadas no grupo</a:t>
             </a:r>
           </a:p>
         </p:txBody>
@@ -7439,8 +10899,8 @@
         </p:nvSpPr>
         <p:spPr>
           <a:xfrm>
-            <a:off x="777240" y="3017520"/>
-            <a:ext cx="4937760" cy="868680"/>
+            <a:off x="777240" y="2770632"/>
+            <a:ext cx="5029200" cy="603504"/>
           </a:xfrm>
           <a:prstGeom prst="rect">
             <a:avLst/>
@@ -7453,19 +10913,15 @@
           </a:bodyPr>
           <a:lstStyle/>
           <a:p>
-            <a:pPr algn="l">
-              <a:lnSpc>
-                <a:spcPct val="105000"/>
-              </a:lnSpc>
-            </a:pPr>
+            <a:pPr algn="l"/>
             <a:r>
               <a:rPr sz="1300" b="0" i="0">
                 <a:solidFill>
-                  <a:srgbClr val="20303F"/>
+                  <a:srgbClr val="6B7885"/>
                 </a:solidFill>
                 <a:latin typeface="Montserrat"/>
               </a:rPr>
-              <a:t>•  Conclusão do programa depende da SNP (esteiras de cavacos, 30/12/2026).</a:t>
+              <a:t>102 mantidas em operação</a:t>
             </a:r>
           </a:p>
         </p:txBody>
@@ -7478,8 +10934,8 @@
         </p:nvSpPr>
         <p:spPr>
           <a:xfrm>
-            <a:off x="777240" y="3886200"/>
-            <a:ext cx="4937760" cy="868680"/>
+            <a:off x="777240" y="3392424"/>
+            <a:ext cx="5029200" cy="603504"/>
           </a:xfrm>
           <a:prstGeom prst="rect">
             <a:avLst/>
@@ -7492,19 +10948,15 @@
           </a:bodyPr>
           <a:lstStyle/>
           <a:p>
-            <a:pPr algn="l">
-              <a:lnSpc>
-                <a:spcPct val="105000"/>
-              </a:lnSpc>
-            </a:pPr>
-            <a:r>
-              <a:rPr sz="1300" b="0" i="0">
+            <a:pPr algn="l"/>
+            <a:r>
+              <a:rPr sz="1300" b="1" i="0">
                 <a:solidFill>
                   <a:srgbClr val="20303F"/>
                 </a:solidFill>
                 <a:latin typeface="Montserrat"/>
               </a:rPr>
-              <a:t>•  Biomassa e grãos: maior exposição a incêndio por atrito (rolete/correia).</a:t>
+              <a:t>•  46 a substituir  →  R$ 6,15 mi (só correias)</a:t>
             </a:r>
           </a:p>
         </p:txBody>
@@ -7517,8 +10969,8 @@
         </p:nvSpPr>
         <p:spPr>
           <a:xfrm>
-            <a:off x="777240" y="4754880"/>
-            <a:ext cx="4937760" cy="868680"/>
+            <a:off x="777240" y="4014216"/>
+            <a:ext cx="5029200" cy="603504"/>
           </a:xfrm>
           <a:prstGeom prst="rect">
             <a:avLst/>
@@ -7531,26 +10983,57 @@
           </a:bodyPr>
           <a:lstStyle/>
           <a:p>
-            <a:pPr algn="l">
-              <a:lnSpc>
-                <a:spcPct val="105000"/>
-              </a:lnSpc>
-            </a:pPr>
+            <a:pPr algn="l"/>
             <a:r>
               <a:rPr sz="1300" b="0" i="0">
                 <a:solidFill>
-                  <a:srgbClr val="20303F"/>
+                  <a:srgbClr val="6B7885"/>
                 </a:solidFill>
                 <a:latin typeface="Montserrat"/>
               </a:rPr>
-              <a:t>•  Janela de transição: risco elevado até a troca de todas as correias.</a:t>
-            </a:r>
-          </a:p>
-        </p:txBody>
-      </p:sp>
-      <p:sp>
-        <p:nvSpPr>
-          <p:cNvPr id="13" name="Rounded Rectangle 12"/>
+              <a:t>   • 41 reprovadas no ensaio ISO 340</a:t>
+            </a:r>
+          </a:p>
+        </p:txBody>
+      </p:sp>
+      <p:sp>
+        <p:nvSpPr>
+          <p:cNvPr id="13" name="TextBox 12"/>
+          <p:cNvSpPr txBox="1"/>
+          <p:nvPr/>
+        </p:nvSpPr>
+        <p:spPr>
+          <a:xfrm>
+            <a:off x="777240" y="4636008"/>
+            <a:ext cx="5029200" cy="603504"/>
+          </a:xfrm>
+          <a:prstGeom prst="rect">
+            <a:avLst/>
+          </a:prstGeom>
+          <a:noFill/>
+        </p:spPr>
+        <p:txBody>
+          <a:bodyPr wrap="square" anchor="t" lIns="25400" rIns="25400">
+            <a:spAutoFit/>
+          </a:bodyPr>
+          <a:lstStyle/>
+          <a:p>
+            <a:pPr algn="l"/>
+            <a:r>
+              <a:rPr sz="1300" b="0" i="0">
+                <a:solidFill>
+                  <a:srgbClr val="6B7885"/>
+                </a:solidFill>
+                <a:latin typeface="Montserrat"/>
+              </a:rPr>
+              <a:t>   • 5 por degradação física</a:t>
+            </a:r>
+          </a:p>
+        </p:txBody>
+      </p:sp>
+      <p:sp>
+        <p:nvSpPr>
+          <p:cNvPr id="14" name="Rounded Rectangle 13"/>
           <p:cNvSpPr/>
           <p:nvPr/>
         </p:nvSpPr>
@@ -7594,7 +11077,7 @@
       </p:sp>
       <p:sp>
         <p:nvSpPr>
-          <p:cNvPr id="14" name="TextBox 13"/>
+          <p:cNvPr id="15" name="TextBox 14"/>
           <p:cNvSpPr txBox="1"/>
           <p:nvPr/>
         </p:nvSpPr>
@@ -7616,26 +11099,605 @@
           <a:p>
             <a:pPr algn="l"/>
             <a:r>
+              <a:rPr sz="1500" b="1" i="0">
+                <a:solidFill>
+                  <a:srgbClr val="609346"/>
+                </a:solidFill>
+                <a:latin typeface="Montserrat"/>
+              </a:rPr>
+              <a:t>Plano de execução (dashboard atual)</a:t>
+            </a:r>
+          </a:p>
+        </p:txBody>
+      </p:sp>
+      <p:sp>
+        <p:nvSpPr>
+          <p:cNvPr id="16" name="TextBox 15"/>
+          <p:cNvSpPr txBox="1"/>
+          <p:nvPr/>
+        </p:nvSpPr>
+        <p:spPr>
+          <a:xfrm>
+            <a:off x="6492240" y="2148840"/>
+            <a:ext cx="5029200" cy="603504"/>
+          </a:xfrm>
+          <a:prstGeom prst="rect">
+            <a:avLst/>
+          </a:prstGeom>
+          <a:noFill/>
+        </p:spPr>
+        <p:txBody>
+          <a:bodyPr wrap="square" anchor="t" lIns="25400" rIns="25400">
+            <a:spAutoFit/>
+          </a:bodyPr>
+          <a:lstStyle/>
+          <a:p>
+            <a:pPr algn="l"/>
+            <a:r>
+              <a:rPr sz="1300" b="1" i="0">
+                <a:solidFill>
+                  <a:srgbClr val="20303F"/>
+                </a:solidFill>
+                <a:latin typeface="Montserrat"/>
+              </a:rPr>
+              <a:t>•  46 correias no plano  ✓ bate com as 46</a:t>
+            </a:r>
+          </a:p>
+        </p:txBody>
+      </p:sp>
+      <p:sp>
+        <p:nvSpPr>
+          <p:cNvPr id="17" name="TextBox 16"/>
+          <p:cNvSpPr txBox="1"/>
+          <p:nvPr/>
+        </p:nvSpPr>
+        <p:spPr>
+          <a:xfrm>
+            <a:off x="6492240" y="2770632"/>
+            <a:ext cx="5029200" cy="603504"/>
+          </a:xfrm>
+          <a:prstGeom prst="rect">
+            <a:avLst/>
+          </a:prstGeom>
+          <a:noFill/>
+        </p:spPr>
+        <p:txBody>
+          <a:bodyPr wrap="square" anchor="t" lIns="25400" rIns="25400">
+            <a:spAutoFit/>
+          </a:bodyPr>
+          <a:lstStyle/>
+          <a:p>
+            <a:pPr algn="l"/>
+            <a:r>
+              <a:rPr sz="1300" b="0" i="0">
+                <a:solidFill>
+                  <a:srgbClr val="6B7885"/>
+                </a:solidFill>
+                <a:latin typeface="Montserrat"/>
+              </a:rPr>
+              <a:t>   • 3 já concluídas</a:t>
+            </a:r>
+          </a:p>
+        </p:txBody>
+      </p:sp>
+      <p:sp>
+        <p:nvSpPr>
+          <p:cNvPr id="18" name="TextBox 17"/>
+          <p:cNvSpPr txBox="1"/>
+          <p:nvPr/>
+        </p:nvSpPr>
+        <p:spPr>
+          <a:xfrm>
+            <a:off x="6492240" y="3392424"/>
+            <a:ext cx="5029200" cy="603504"/>
+          </a:xfrm>
+          <a:prstGeom prst="rect">
+            <a:avLst/>
+          </a:prstGeom>
+          <a:noFill/>
+        </p:spPr>
+        <p:txBody>
+          <a:bodyPr wrap="square" anchor="t" lIns="25400" rIns="25400">
+            <a:spAutoFit/>
+          </a:bodyPr>
+          <a:lstStyle/>
+          <a:p>
+            <a:pPr algn="l"/>
+            <a:r>
+              <a:rPr sz="1300" b="0" i="0">
+                <a:solidFill>
+                  <a:srgbClr val="6B7885"/>
+                </a:solidFill>
+                <a:latin typeface="Montserrat"/>
+              </a:rPr>
+              <a:t>   • 43 em execução</a:t>
+            </a:r>
+          </a:p>
+        </p:txBody>
+      </p:sp>
+      <p:sp>
+        <p:nvSpPr>
+          <p:cNvPr id="19" name="TextBox 18"/>
+          <p:cNvSpPr txBox="1"/>
+          <p:nvPr/>
+        </p:nvSpPr>
+        <p:spPr>
+          <a:xfrm>
+            <a:off x="6492240" y="4014216"/>
+            <a:ext cx="5029200" cy="603504"/>
+          </a:xfrm>
+          <a:prstGeom prst="rect">
+            <a:avLst/>
+          </a:prstGeom>
+          <a:noFill/>
+        </p:spPr>
+        <p:txBody>
+          <a:bodyPr wrap="square" anchor="t" lIns="25400" rIns="25400">
+            <a:spAutoFit/>
+          </a:bodyPr>
+          <a:lstStyle/>
+          <a:p>
+            <a:pPr algn="l"/>
+            <a:r>
+              <a:rPr sz="1300" b="1" i="0">
+                <a:solidFill>
+                  <a:srgbClr val="20303F"/>
+                </a:solidFill>
+                <a:latin typeface="Montserrat"/>
+              </a:rPr>
+              <a:t>•  Conclusão: 30/12/2026</a:t>
+            </a:r>
+          </a:p>
+        </p:txBody>
+      </p:sp>
+      <p:sp>
+        <p:nvSpPr>
+          <p:cNvPr id="20" name="TextBox 19"/>
+          <p:cNvSpPr txBox="1"/>
+          <p:nvPr/>
+        </p:nvSpPr>
+        <p:spPr>
+          <a:xfrm>
+            <a:off x="6492240" y="4636008"/>
+            <a:ext cx="5029200" cy="603504"/>
+          </a:xfrm>
+          <a:prstGeom prst="rect">
+            <a:avLst/>
+          </a:prstGeom>
+          <a:noFill/>
+        </p:spPr>
+        <p:txBody>
+          <a:bodyPr wrap="square" anchor="t" lIns="25400" rIns="25400">
+            <a:spAutoFit/>
+          </a:bodyPr>
+          <a:lstStyle/>
+          <a:p>
+            <a:pPr algn="l"/>
+            <a:r>
+              <a:rPr sz="1300" b="0" i="0">
+                <a:solidFill>
+                  <a:srgbClr val="6B7885"/>
+                </a:solidFill>
+                <a:latin typeface="Montserrat"/>
+              </a:rPr>
+              <a:t>0 correias vencidas</a:t>
+            </a:r>
+          </a:p>
+        </p:txBody>
+      </p:sp>
+      <p:sp>
+        <p:nvSpPr>
+          <p:cNvPr id="21" name="TextBox 20"/>
+          <p:cNvSpPr txBox="1"/>
+          <p:nvPr/>
+        </p:nvSpPr>
+        <p:spPr>
+          <a:xfrm>
+            <a:off x="502920" y="5806440"/>
+            <a:ext cx="11247120" cy="548640"/>
+          </a:xfrm>
+          <a:prstGeom prst="rect">
+            <a:avLst/>
+          </a:prstGeom>
+          <a:noFill/>
+        </p:spPr>
+        <p:txBody>
+          <a:bodyPr wrap="square" anchor="t" lIns="25400" rIns="25400">
+            <a:spAutoFit/>
+          </a:bodyPr>
+          <a:lstStyle/>
+          <a:p>
+            <a:pPr algn="l"/>
+            <a:r>
+              <a:rPr sz="1050" b="0" i="0">
+                <a:solidFill>
+                  <a:srgbClr val="CC5121"/>
+                </a:solidFill>
+                <a:latin typeface="Montserrat"/>
+              </a:rPr>
+              <a:t>Obs.: R$ 6,15 mi = somente as correias (material) — montagem com mão de obra interna, apenas vulcanização externa · Dourados (DRD) e LEM sem pendências (fora do escopo) · cadastro do dashboard usa NVM/SDL → padronizar p/ NMT/SDR · 1 dos 46 é sobressalente em estoque (45 esteiras físicas).</a:t>
+            </a:r>
+          </a:p>
+        </p:txBody>
+      </p:sp>
+      <p:sp>
+        <p:nvSpPr>
+          <p:cNvPr id="22" name="TextBox 21"/>
+          <p:cNvSpPr txBox="1"/>
+          <p:nvPr/>
+        </p:nvSpPr>
+        <p:spPr>
+          <a:xfrm>
+            <a:off x="502920" y="6419088"/>
+            <a:ext cx="9144000" cy="320040"/>
+          </a:xfrm>
+          <a:prstGeom prst="rect">
+            <a:avLst/>
+          </a:prstGeom>
+          <a:noFill/>
+        </p:spPr>
+        <p:txBody>
+          <a:bodyPr wrap="square" anchor="t" lIns="25400" rIns="25400">
+            <a:spAutoFit/>
+          </a:bodyPr>
+          <a:lstStyle/>
+          <a:p>
+            <a:pPr algn="l"/>
+            <a:r>
+              <a:rPr sz="900" b="0" i="0">
+                <a:solidFill>
+                  <a:srgbClr val="6B7885"/>
+                </a:solidFill>
+                <a:latin typeface="Montserrat"/>
+              </a:rPr>
+              <a:t>INPASA Agroindustrial S/A  ·  Manutenção &amp; Automação  ·  ref. 02/07/2026</a:t>
+            </a:r>
+          </a:p>
+        </p:txBody>
+      </p:sp>
+      <p:sp>
+        <p:nvSpPr>
+          <p:cNvPr id="23" name="TextBox 22"/>
+          <p:cNvSpPr txBox="1"/>
+          <p:nvPr/>
+        </p:nvSpPr>
+        <p:spPr>
+          <a:xfrm>
+            <a:off x="11155680" y="6419088"/>
+            <a:ext cx="822960" cy="320040"/>
+          </a:xfrm>
+          <a:prstGeom prst="rect">
+            <a:avLst/>
+          </a:prstGeom>
+          <a:noFill/>
+        </p:spPr>
+        <p:txBody>
+          <a:bodyPr wrap="square" anchor="t" lIns="25400" rIns="25400">
+            <a:spAutoFit/>
+          </a:bodyPr>
+          <a:lstStyle/>
+          <a:p>
+            <a:pPr algn="r"/>
+            <a:r>
+              <a:rPr sz="900" b="0" i="0">
+                <a:solidFill>
+                  <a:srgbClr val="6B7885"/>
+                </a:solidFill>
+                <a:latin typeface="Montserrat"/>
+              </a:rPr>
+              <a:t>5</a:t>
+            </a:r>
+          </a:p>
+        </p:txBody>
+      </p:sp>
+    </p:spTree>
+  </p:cSld>
+  <p:clrMapOvr>
+    <a:masterClrMapping/>
+  </p:clrMapOvr>
+</p:sld>
+</file>
+
+<file path=ppt/slides/slide6.xml><?xml version="1.0" encoding="utf-8"?>
+<p:sld xmlns:a="http://schemas.openxmlformats.org/drawingml/2006/main" xmlns:p="http://schemas.openxmlformats.org/presentationml/2006/main" xmlns:r="http://schemas.openxmlformats.org/officeDocument/2006/relationships">
+  <p:cSld>
+    <p:spTree>
+      <p:nvGrpSpPr>
+        <p:cNvPr id="1" name=""/>
+        <p:cNvGrpSpPr/>
+        <p:nvPr/>
+      </p:nvGrpSpPr>
+      <p:grpSpPr/>
+      <p:sp>
+        <p:nvSpPr>
+          <p:cNvPr id="2" name="Rectangle 1"/>
+          <p:cNvSpPr/>
+          <p:nvPr/>
+        </p:nvSpPr>
+        <p:spPr>
+          <a:xfrm>
+            <a:off x="0" y="0"/>
+            <a:ext cx="12191695" cy="6858000"/>
+          </a:xfrm>
+          <a:prstGeom prst="rect">
+            <a:avLst/>
+          </a:prstGeom>
+          <a:solidFill>
+            <a:srgbClr val="FFFFFF"/>
+          </a:solidFill>
+          <a:ln>
+            <a:noFill/>
+          </a:ln>
+          <a:effectLst/>
+        </p:spPr>
+        <p:style>
+          <a:lnRef idx="1">
+            <a:schemeClr val="accent1"/>
+          </a:lnRef>
+          <a:fillRef idx="3">
+            <a:schemeClr val="accent1"/>
+          </a:fillRef>
+          <a:effectRef idx="2">
+            <a:schemeClr val="accent1"/>
+          </a:effectRef>
+          <a:fontRef idx="minor">
+            <a:schemeClr val="lt1"/>
+          </a:fontRef>
+        </p:style>
+        <p:txBody>
+          <a:bodyPr rtlCol="0" anchor="ctr"/>
+          <a:lstStyle/>
+          <a:p>
+            <a:pPr algn="ctr"/>
+          </a:p>
+        </p:txBody>
+      </p:sp>
+      <p:sp>
+        <p:nvSpPr>
+          <p:cNvPr id="3" name="Rectangle 2"/>
+          <p:cNvSpPr/>
+          <p:nvPr/>
+        </p:nvSpPr>
+        <p:spPr>
+          <a:xfrm>
+            <a:off x="0" y="0"/>
+            <a:ext cx="12191695" cy="1051560"/>
+          </a:xfrm>
+          <a:prstGeom prst="rect">
+            <a:avLst/>
+          </a:prstGeom>
+          <a:solidFill>
+            <a:srgbClr val="124E81"/>
+          </a:solidFill>
+          <a:ln>
+            <a:noFill/>
+          </a:ln>
+          <a:effectLst/>
+        </p:spPr>
+        <p:style>
+          <a:lnRef idx="1">
+            <a:schemeClr val="accent1"/>
+          </a:lnRef>
+          <a:fillRef idx="3">
+            <a:schemeClr val="accent1"/>
+          </a:fillRef>
+          <a:effectRef idx="2">
+            <a:schemeClr val="accent1"/>
+          </a:effectRef>
+          <a:fontRef idx="minor">
+            <a:schemeClr val="lt1"/>
+          </a:fontRef>
+        </p:style>
+        <p:txBody>
+          <a:bodyPr rtlCol="0" anchor="ctr"/>
+          <a:lstStyle/>
+          <a:p>
+            <a:pPr algn="ctr"/>
+          </a:p>
+        </p:txBody>
+      </p:sp>
+      <p:sp>
+        <p:nvSpPr>
+          <p:cNvPr id="4" name="Rectangle 3"/>
+          <p:cNvSpPr/>
+          <p:nvPr/>
+        </p:nvSpPr>
+        <p:spPr>
+          <a:xfrm>
+            <a:off x="0" y="1051560"/>
+            <a:ext cx="12191695" cy="45720"/>
+          </a:xfrm>
+          <a:prstGeom prst="rect">
+            <a:avLst/>
+          </a:prstGeom>
+          <a:solidFill>
+            <a:srgbClr val="FFA32A"/>
+          </a:solidFill>
+          <a:ln>
+            <a:noFill/>
+          </a:ln>
+          <a:effectLst/>
+        </p:spPr>
+        <p:style>
+          <a:lnRef idx="1">
+            <a:schemeClr val="accent1"/>
+          </a:lnRef>
+          <a:fillRef idx="3">
+            <a:schemeClr val="accent1"/>
+          </a:fillRef>
+          <a:effectRef idx="2">
+            <a:schemeClr val="accent1"/>
+          </a:effectRef>
+          <a:fontRef idx="minor">
+            <a:schemeClr val="lt1"/>
+          </a:fontRef>
+        </p:style>
+        <p:txBody>
+          <a:bodyPr rtlCol="0" anchor="ctr"/>
+          <a:lstStyle/>
+          <a:p>
+            <a:pPr algn="ctr"/>
+          </a:p>
+        </p:txBody>
+      </p:sp>
+      <p:sp>
+        <p:nvSpPr>
+          <p:cNvPr id="5" name="TextBox 4"/>
+          <p:cNvSpPr txBox="1"/>
+          <p:nvPr/>
+        </p:nvSpPr>
+        <p:spPr>
+          <a:xfrm>
+            <a:off x="502920" y="146304"/>
+            <a:ext cx="10972800" cy="274320"/>
+          </a:xfrm>
+          <a:prstGeom prst="rect">
+            <a:avLst/>
+          </a:prstGeom>
+          <a:noFill/>
+        </p:spPr>
+        <p:txBody>
+          <a:bodyPr wrap="square" anchor="t" lIns="25400" rIns="25400">
+            <a:spAutoFit/>
+          </a:bodyPr>
+          <a:lstStyle/>
+          <a:p>
+            <a:pPr algn="l"/>
+            <a:r>
+              <a:rPr sz="1200" b="1" i="0">
+                <a:solidFill>
+                  <a:srgbClr val="EAA239"/>
+                </a:solidFill>
+                <a:latin typeface="Montserrat"/>
+              </a:rPr>
+              <a:t>DECISÃO E AÇÃO</a:t>
+            </a:r>
+          </a:p>
+        </p:txBody>
+      </p:sp>
+      <p:sp>
+        <p:nvSpPr>
+          <p:cNvPr id="6" name="TextBox 5"/>
+          <p:cNvSpPr txBox="1"/>
+          <p:nvPr/>
+        </p:nvSpPr>
+        <p:spPr>
+          <a:xfrm>
+            <a:off x="502920" y="402336"/>
+            <a:ext cx="11155680" cy="566928"/>
+          </a:xfrm>
+          <a:prstGeom prst="rect">
+            <a:avLst/>
+          </a:prstGeom>
+          <a:noFill/>
+        </p:spPr>
+        <p:txBody>
+          <a:bodyPr wrap="square" anchor="ctr" lIns="25400" rIns="25400">
+            <a:spAutoFit/>
+          </a:bodyPr>
+          <a:lstStyle/>
+          <a:p>
+            <a:pPr algn="l"/>
+            <a:r>
+              <a:rPr sz="2500" b="1" i="0">
+                <a:solidFill>
+                  <a:srgbClr val="FFFFFF"/>
+                </a:solidFill>
+                <a:latin typeface="Montserrat"/>
+              </a:rPr>
+              <a:t>Cuidado especial até concluir a substituição</a:t>
+            </a:r>
+          </a:p>
+        </p:txBody>
+      </p:sp>
+      <p:sp>
+        <p:nvSpPr>
+          <p:cNvPr id="7" name="Rounded Rectangle 6"/>
+          <p:cNvSpPr/>
+          <p:nvPr/>
+        </p:nvSpPr>
+        <p:spPr>
+          <a:xfrm>
+            <a:off x="502920" y="1417320"/>
+            <a:ext cx="5486400" cy="4343400"/>
+          </a:xfrm>
+          <a:prstGeom prst="roundRect">
+            <a:avLst/>
+          </a:prstGeom>
+          <a:solidFill>
+            <a:srgbClr val="F2F5F8"/>
+          </a:solidFill>
+          <a:ln>
+            <a:noFill/>
+          </a:ln>
+          <a:effectLst/>
+        </p:spPr>
+        <p:style>
+          <a:lnRef idx="1">
+            <a:schemeClr val="accent1"/>
+          </a:lnRef>
+          <a:fillRef idx="3">
+            <a:schemeClr val="accent1"/>
+          </a:fillRef>
+          <a:effectRef idx="2">
+            <a:schemeClr val="accent1"/>
+          </a:effectRef>
+          <a:fontRef idx="minor">
+            <a:schemeClr val="lt1"/>
+          </a:fontRef>
+        </p:style>
+        <p:txBody>
+          <a:bodyPr rtlCol="0" anchor="ctr"/>
+          <a:lstStyle/>
+          <a:p>
+            <a:pPr algn="ctr"/>
+          </a:p>
+        </p:txBody>
+      </p:sp>
+      <p:sp>
+        <p:nvSpPr>
+          <p:cNvPr id="8" name="TextBox 7"/>
+          <p:cNvSpPr txBox="1"/>
+          <p:nvPr/>
+        </p:nvSpPr>
+        <p:spPr>
+          <a:xfrm>
+            <a:off x="731520" y="1600200"/>
+            <a:ext cx="5029200" cy="365760"/>
+          </a:xfrm>
+          <a:prstGeom prst="rect">
+            <a:avLst/>
+          </a:prstGeom>
+          <a:noFill/>
+        </p:spPr>
+        <p:txBody>
+          <a:bodyPr wrap="square" anchor="t" lIns="25400" rIns="25400">
+            <a:spAutoFit/>
+          </a:bodyPr>
+          <a:lstStyle/>
+          <a:p>
+            <a:pPr algn="l"/>
+            <a:r>
               <a:rPr sz="1600" b="1" i="0">
                 <a:solidFill>
-                  <a:srgbClr val="609346"/>
+                  <a:srgbClr val="CC5121"/>
                 </a:solidFill>
                 <a:latin typeface="Montserrat"/>
               </a:rPr>
-              <a:t>Encaminhamentos</a:t>
-            </a:r>
-          </a:p>
-        </p:txBody>
-      </p:sp>
-      <p:sp>
-        <p:nvSpPr>
-          <p:cNvPr id="15" name="TextBox 14"/>
+              <a:t>Pontos de atenção</a:t>
+            </a:r>
+          </a:p>
+        </p:txBody>
+      </p:sp>
+      <p:sp>
+        <p:nvSpPr>
+          <p:cNvPr id="9" name="TextBox 8"/>
           <p:cNvSpPr txBox="1"/>
           <p:nvPr/>
         </p:nvSpPr>
         <p:spPr>
           <a:xfrm>
-            <a:off x="6492240" y="2148840"/>
+            <a:off x="777240" y="2148840"/>
             <a:ext cx="4937760" cy="868680"/>
           </a:xfrm>
           <a:prstGeom prst="rect">
@@ -7661,20 +11723,20 @@
                 </a:solidFill>
                 <a:latin typeface="Montserrat"/>
               </a:rPr>
-              <a:t>•  PCM acionado para alinhar com TODAS as áreas cuidado reforçado até concluir a substituição das correias.</a:t>
-            </a:r>
-          </a:p>
-        </p:txBody>
-      </p:sp>
-      <p:sp>
-        <p:nvSpPr>
-          <p:cNvPr id="16" name="TextBox 15"/>
+              <a:t>•  7 correias urgentes (&lt;=30 dias) — biomassa (SNP), DDGS (SDR/BLS), julho.</a:t>
+            </a:r>
+          </a:p>
+        </p:txBody>
+      </p:sp>
+      <p:sp>
+        <p:nvSpPr>
+          <p:cNvPr id="10" name="TextBox 9"/>
           <p:cNvSpPr txBox="1"/>
           <p:nvPr/>
         </p:nvSpPr>
         <p:spPr>
           <a:xfrm>
-            <a:off x="6492240" y="3017520"/>
+            <a:off x="777240" y="3017520"/>
             <a:ext cx="4937760" cy="868680"/>
           </a:xfrm>
           <a:prstGeom prst="rect">
@@ -7700,20 +11762,20 @@
                 </a:solidFill>
                 <a:latin typeface="Montserrat"/>
               </a:rPr>
-              <a:t>•  Priorizar as correias urgentes de julho (biomassa/DDGS).</a:t>
-            </a:r>
-          </a:p>
-        </p:txBody>
-      </p:sp>
-      <p:sp>
-        <p:nvSpPr>
-          <p:cNvPr id="17" name="TextBox 16"/>
+              <a:t>•  Conclusão do programa depende da SNP (esteiras de cavacos, 30/12/2026).</a:t>
+            </a:r>
+          </a:p>
+        </p:txBody>
+      </p:sp>
+      <p:sp>
+        <p:nvSpPr>
+          <p:cNvPr id="11" name="TextBox 10"/>
           <p:cNvSpPr txBox="1"/>
           <p:nvPr/>
         </p:nvSpPr>
         <p:spPr>
           <a:xfrm>
-            <a:off x="6492240" y="3886200"/>
+            <a:off x="777240" y="3886200"/>
             <a:ext cx="4937760" cy="868680"/>
           </a:xfrm>
           <a:prstGeom prst="rect">
@@ -7739,20 +11801,20 @@
                 </a:solidFill>
                 <a:latin typeface="Montserrat"/>
               </a:rPr>
-              <a:t>•  Reporte quinzenal de avanço por unidade (concluídas x plano).</a:t>
-            </a:r>
-          </a:p>
-        </p:txBody>
-      </p:sp>
-      <p:sp>
-        <p:nvSpPr>
-          <p:cNvPr id="18" name="TextBox 17"/>
+              <a:t>•  Biomassa e grãos: maior exposição a incêndio por atrito (rolete/correia).</a:t>
+            </a:r>
+          </a:p>
+        </p:txBody>
+      </p:sp>
+      <p:sp>
+        <p:nvSpPr>
+          <p:cNvPr id="12" name="TextBox 11"/>
           <p:cNvSpPr txBox="1"/>
           <p:nvPr/>
         </p:nvSpPr>
         <p:spPr>
           <a:xfrm>
-            <a:off x="6492240" y="4754880"/>
+            <a:off x="777240" y="4754880"/>
             <a:ext cx="4937760" cy="868680"/>
           </a:xfrm>
           <a:prstGeom prst="rect">
@@ -7778,21 +11840,65 @@
                 </a:solidFill>
                 <a:latin typeface="Montserrat"/>
               </a:rPr>
-              <a:t>•  Padronizar cadastro na origem (NVM/SDL → NMT/SDR).</a:t>
-            </a:r>
-          </a:p>
-        </p:txBody>
-      </p:sp>
-      <p:sp>
-        <p:nvSpPr>
-          <p:cNvPr id="19" name="TextBox 18"/>
+              <a:t>•  Janela de transição: risco elevado até a troca de todas as correias.</a:t>
+            </a:r>
+          </a:p>
+        </p:txBody>
+      </p:sp>
+      <p:sp>
+        <p:nvSpPr>
+          <p:cNvPr id="13" name="Rounded Rectangle 12"/>
+          <p:cNvSpPr/>
+          <p:nvPr/>
+        </p:nvSpPr>
+        <p:spPr>
+          <a:xfrm>
+            <a:off x="6217920" y="1417320"/>
+            <a:ext cx="5486400" cy="4343400"/>
+          </a:xfrm>
+          <a:prstGeom prst="roundRect">
+            <a:avLst/>
+          </a:prstGeom>
+          <a:solidFill>
+            <a:srgbClr val="F2F5F8"/>
+          </a:solidFill>
+          <a:ln>
+            <a:noFill/>
+          </a:ln>
+          <a:effectLst/>
+        </p:spPr>
+        <p:style>
+          <a:lnRef idx="1">
+            <a:schemeClr val="accent1"/>
+          </a:lnRef>
+          <a:fillRef idx="3">
+            <a:schemeClr val="accent1"/>
+          </a:fillRef>
+          <a:effectRef idx="2">
+            <a:schemeClr val="accent1"/>
+          </a:effectRef>
+          <a:fontRef idx="minor">
+            <a:schemeClr val="lt1"/>
+          </a:fontRef>
+        </p:style>
+        <p:txBody>
+          <a:bodyPr rtlCol="0" anchor="ctr"/>
+          <a:lstStyle/>
+          <a:p>
+            <a:pPr algn="ctr"/>
+          </a:p>
+        </p:txBody>
+      </p:sp>
+      <p:sp>
+        <p:nvSpPr>
+          <p:cNvPr id="14" name="TextBox 13"/>
           <p:cNvSpPr txBox="1"/>
           <p:nvPr/>
         </p:nvSpPr>
         <p:spPr>
           <a:xfrm>
-            <a:off x="502920" y="6419088"/>
-            <a:ext cx="9144000" cy="320040"/>
+            <a:off x="6446520" y="1600200"/>
+            <a:ext cx="5029200" cy="365760"/>
           </a:xfrm>
           <a:prstGeom prst="rect">
             <a:avLst/>
@@ -7807,27 +11913,27 @@
           <a:p>
             <a:pPr algn="l"/>
             <a:r>
-              <a:rPr sz="900" b="0" i="0">
-                <a:solidFill>
-                  <a:srgbClr val="6B7885"/>
+              <a:rPr sz="1600" b="1" i="0">
+                <a:solidFill>
+                  <a:srgbClr val="609346"/>
                 </a:solidFill>
                 <a:latin typeface="Montserrat"/>
               </a:rPr>
-              <a:t>INPASA Agroindustrial S/A  ·  Manutenção &amp; Automação  ·  ref. 02/07/2026</a:t>
-            </a:r>
-          </a:p>
-        </p:txBody>
-      </p:sp>
-      <p:sp>
-        <p:nvSpPr>
-          <p:cNvPr id="20" name="TextBox 19"/>
+              <a:t>Encaminhamentos</a:t>
+            </a:r>
+          </a:p>
+        </p:txBody>
+      </p:sp>
+      <p:sp>
+        <p:nvSpPr>
+          <p:cNvPr id="15" name="TextBox 14"/>
           <p:cNvSpPr txBox="1"/>
           <p:nvPr/>
         </p:nvSpPr>
         <p:spPr>
           <a:xfrm>
-            <a:off x="11155680" y="6419088"/>
-            <a:ext cx="822960" cy="320040"/>
+            <a:off x="6492240" y="2148840"/>
+            <a:ext cx="4937760" cy="868680"/>
           </a:xfrm>
           <a:prstGeom prst="rect">
             <a:avLst/>
@@ -7840,6 +11946,197 @@
           </a:bodyPr>
           <a:lstStyle/>
           <a:p>
+            <a:pPr algn="l">
+              <a:lnSpc>
+                <a:spcPct val="105000"/>
+              </a:lnSpc>
+            </a:pPr>
+            <a:r>
+              <a:rPr sz="1300" b="0" i="0">
+                <a:solidFill>
+                  <a:srgbClr val="20303F"/>
+                </a:solidFill>
+                <a:latin typeface="Montserrat"/>
+              </a:rPr>
+              <a:t>•  PCM acionado para alinhar com TODAS as áreas cuidado reforçado até concluir a substituição das correias.</a:t>
+            </a:r>
+          </a:p>
+        </p:txBody>
+      </p:sp>
+      <p:sp>
+        <p:nvSpPr>
+          <p:cNvPr id="16" name="TextBox 15"/>
+          <p:cNvSpPr txBox="1"/>
+          <p:nvPr/>
+        </p:nvSpPr>
+        <p:spPr>
+          <a:xfrm>
+            <a:off x="6492240" y="3017520"/>
+            <a:ext cx="4937760" cy="868680"/>
+          </a:xfrm>
+          <a:prstGeom prst="rect">
+            <a:avLst/>
+          </a:prstGeom>
+          <a:noFill/>
+        </p:spPr>
+        <p:txBody>
+          <a:bodyPr wrap="square" anchor="t" lIns="25400" rIns="25400">
+            <a:spAutoFit/>
+          </a:bodyPr>
+          <a:lstStyle/>
+          <a:p>
+            <a:pPr algn="l">
+              <a:lnSpc>
+                <a:spcPct val="105000"/>
+              </a:lnSpc>
+            </a:pPr>
+            <a:r>
+              <a:rPr sz="1300" b="0" i="0">
+                <a:solidFill>
+                  <a:srgbClr val="20303F"/>
+                </a:solidFill>
+                <a:latin typeface="Montserrat"/>
+              </a:rPr>
+              <a:t>•  Priorizar as correias urgentes de julho (biomassa/DDGS).</a:t>
+            </a:r>
+          </a:p>
+        </p:txBody>
+      </p:sp>
+      <p:sp>
+        <p:nvSpPr>
+          <p:cNvPr id="17" name="TextBox 16"/>
+          <p:cNvSpPr txBox="1"/>
+          <p:nvPr/>
+        </p:nvSpPr>
+        <p:spPr>
+          <a:xfrm>
+            <a:off x="6492240" y="3886200"/>
+            <a:ext cx="4937760" cy="868680"/>
+          </a:xfrm>
+          <a:prstGeom prst="rect">
+            <a:avLst/>
+          </a:prstGeom>
+          <a:noFill/>
+        </p:spPr>
+        <p:txBody>
+          <a:bodyPr wrap="square" anchor="t" lIns="25400" rIns="25400">
+            <a:spAutoFit/>
+          </a:bodyPr>
+          <a:lstStyle/>
+          <a:p>
+            <a:pPr algn="l">
+              <a:lnSpc>
+                <a:spcPct val="105000"/>
+              </a:lnSpc>
+            </a:pPr>
+            <a:r>
+              <a:rPr sz="1300" b="0" i="0">
+                <a:solidFill>
+                  <a:srgbClr val="20303F"/>
+                </a:solidFill>
+                <a:latin typeface="Montserrat"/>
+              </a:rPr>
+              <a:t>•  Reporte quinzenal de avanço por unidade (concluídas x plano).</a:t>
+            </a:r>
+          </a:p>
+        </p:txBody>
+      </p:sp>
+      <p:sp>
+        <p:nvSpPr>
+          <p:cNvPr id="18" name="TextBox 17"/>
+          <p:cNvSpPr txBox="1"/>
+          <p:nvPr/>
+        </p:nvSpPr>
+        <p:spPr>
+          <a:xfrm>
+            <a:off x="6492240" y="4754880"/>
+            <a:ext cx="4937760" cy="868680"/>
+          </a:xfrm>
+          <a:prstGeom prst="rect">
+            <a:avLst/>
+          </a:prstGeom>
+          <a:noFill/>
+        </p:spPr>
+        <p:txBody>
+          <a:bodyPr wrap="square" anchor="t" lIns="25400" rIns="25400">
+            <a:spAutoFit/>
+          </a:bodyPr>
+          <a:lstStyle/>
+          <a:p>
+            <a:pPr algn="l">
+              <a:lnSpc>
+                <a:spcPct val="105000"/>
+              </a:lnSpc>
+            </a:pPr>
+            <a:r>
+              <a:rPr sz="1300" b="0" i="0">
+                <a:solidFill>
+                  <a:srgbClr val="20303F"/>
+                </a:solidFill>
+                <a:latin typeface="Montserrat"/>
+              </a:rPr>
+              <a:t>•  Padronizar cadastro na origem (NVM/SDL → NMT/SDR).</a:t>
+            </a:r>
+          </a:p>
+        </p:txBody>
+      </p:sp>
+      <p:sp>
+        <p:nvSpPr>
+          <p:cNvPr id="19" name="TextBox 18"/>
+          <p:cNvSpPr txBox="1"/>
+          <p:nvPr/>
+        </p:nvSpPr>
+        <p:spPr>
+          <a:xfrm>
+            <a:off x="502920" y="6419088"/>
+            <a:ext cx="9144000" cy="320040"/>
+          </a:xfrm>
+          <a:prstGeom prst="rect">
+            <a:avLst/>
+          </a:prstGeom>
+          <a:noFill/>
+        </p:spPr>
+        <p:txBody>
+          <a:bodyPr wrap="square" anchor="t" lIns="25400" rIns="25400">
+            <a:spAutoFit/>
+          </a:bodyPr>
+          <a:lstStyle/>
+          <a:p>
+            <a:pPr algn="l"/>
+            <a:r>
+              <a:rPr sz="900" b="0" i="0">
+                <a:solidFill>
+                  <a:srgbClr val="6B7885"/>
+                </a:solidFill>
+                <a:latin typeface="Montserrat"/>
+              </a:rPr>
+              <a:t>INPASA Agroindustrial S/A  ·  Manutenção &amp; Automação  ·  ref. 02/07/2026</a:t>
+            </a:r>
+          </a:p>
+        </p:txBody>
+      </p:sp>
+      <p:sp>
+        <p:nvSpPr>
+          <p:cNvPr id="20" name="TextBox 19"/>
+          <p:cNvSpPr txBox="1"/>
+          <p:nvPr/>
+        </p:nvSpPr>
+        <p:spPr>
+          <a:xfrm>
+            <a:off x="11155680" y="6419088"/>
+            <a:ext cx="822960" cy="320040"/>
+          </a:xfrm>
+          <a:prstGeom prst="rect">
+            <a:avLst/>
+          </a:prstGeom>
+          <a:noFill/>
+        </p:spPr>
+        <p:txBody>
+          <a:bodyPr wrap="square" anchor="t" lIns="25400" rIns="25400">
+            <a:spAutoFit/>
+          </a:bodyPr>
+          <a:lstStyle/>
+          <a:p>
             <a:pPr algn="r"/>
             <a:r>
               <a:rPr sz="900" b="0" i="0">
@@ -7848,7 +12145,7 @@
                 </a:solidFill>
                 <a:latin typeface="Montserrat"/>
               </a:rPr>
-              <a:t>5</a:t>
+              <a:t>6</a:t>
             </a:r>
           </a:p>
         </p:txBody>

--- a/plano_seguranca/Apresentacao_Estrategica_Correias_INPASA.pptx
+++ b/plano_seguranca/Apresentacao_Estrategica_Correias_INPASA.pptx
@@ -11315,7 +11315,7 @@
                 </a:solidFill>
                 <a:latin typeface="Montserrat"/>
               </a:rPr>
-              <a:t>Obs.: R$ 6,15 mi = somente as correias (material) — montagem com mão de obra interna, apenas vulcanização externa · Dourados (DRD) e LEM sem pendências (fora do escopo) · cadastro do dashboard usa NVM/SDL → padronizar p/ NMT/SDR · 1 dos 46 é sobressalente em estoque (45 esteiras físicas).</a:t>
+              <a:t>Obs.: R$ 6,15 mi = somente as correias (material) — montagem com mão de obra interna, apenas vulcanização externa · Dourados (DRD) e LEM sem itens críticos (reprovados ISO 340) nesta 1ª etapa · cadastro do dashboard usa NVM/SDL → padronizar p/ NMT/SDR · 1 dos 46 é sobressalente em estoque (45 esteiras físicas).</a:t>
             </a:r>
           </a:p>
         </p:txBody>
@@ -11958,7 +11958,7 @@
                 </a:solidFill>
                 <a:latin typeface="Montserrat"/>
               </a:rPr>
-              <a:t>•  PCM acionado para alinhar com TODAS as áreas cuidado reforçado até concluir a substituição das correias.</a:t>
+              <a:t>•  Segurança e PCM acionados para alinhar com TODAS as áreas cuidado reforçado até concluir a substituição das correias.</a:t>
             </a:r>
           </a:p>
         </p:txBody>
